--- a/slides/doc-mt-03-editable-slides.pptx
+++ b/slides/doc-mt-03-editable-slides.pptx
@@ -2068,7 +2068,7 @@
                 <a:ea typeface="Arial" pitchFamily="34" charset="-122"/>
                 <a:cs typeface="Arial" pitchFamily="34" charset="-120"/>
               </a:rPr>
-              <a:t>Figure 1. Figure 1: Complete 5-step execution topology for the High-Density Pool Tier across Workforce Identity Federation, Pooled Ingress API Gateway, Ephemeral Agent Runtime, Pooled Memory Bank, and 3-Hop Data Plane RLS.</a:t>
+              <a:t>Figure 1. Complete 5-step execution topology for the High-Density Pool Tier across Workforce Identity Federation, Pooled Ingress API Gateway, Ephemeral Agent Runtime, Pooled Memory Bank, and 3-Hop Data Plane RLS.</a:t>
             </a:r>
             <a:endParaRPr lang="en-US" sz="820" dirty="0"/>
           </a:p>
@@ -2136,8 +2136,8 @@
         </p:nvSpPr>
         <p:spPr>
           <a:xfrm>
-            <a:off x="4027932" y="1869948"/>
-            <a:ext cx="1858975" cy="146304"/>
+            <a:off x="4027932" y="1858975"/>
+            <a:ext cx="1773936" cy="105156"/>
           </a:xfrm>
           <a:prstGeom prst="rect">
             <a:avLst/>
@@ -2146,7 +2146,7 @@
           <a:ln/>
         </p:spPr>
         <p:txBody>
-          <a:bodyPr wrap="square" lIns="0" tIns="0" rIns="0" bIns="0" rtlCol="0" anchor="t">
+          <a:bodyPr wrap="none" lIns="0" tIns="0" rIns="0" bIns="0" rtlCol="0" anchor="t">
             <a:normAutofit/>
           </a:bodyPr>
           <a:lstStyle/>
@@ -2158,17 +2158,17 @@
               <a:buNone/>
             </a:pPr>
             <a:r>
-              <a:rPr lang="en-US" sz="460" b="1" dirty="0">
-                <a:solidFill>
-                  <a:srgbClr val="202124"/>
-                </a:solidFill>
-                <a:latin typeface="Arial" pitchFamily="34" charset="0"/>
-                <a:ea typeface="Arial" pitchFamily="34" charset="-122"/>
-                <a:cs typeface="Arial" pitchFamily="34" charset="-120"/>
-              </a:rPr>
-              <a:t>Shared GCP Project: cymbal-pooled-saas-prod (Maximum Density Pooled SaaS)</a:t>
-            </a:r>
-            <a:endParaRPr lang="en-US" sz="460" dirty="0"/>
+              <a:rPr lang="en-US" sz="420" b="1" dirty="0">
+                <a:solidFill>
+                  <a:srgbClr val="202124"/>
+                </a:solidFill>
+                <a:latin typeface="Arial" pitchFamily="34" charset="0"/>
+                <a:ea typeface="Arial" pitchFamily="34" charset="-122"/>
+                <a:cs typeface="Arial" pitchFamily="34" charset="-120"/>
+              </a:rPr>
+              <a:t>Shared GCP Project: cymbal-pooled-saas-prod</a:t>
+            </a:r>
+            <a:endParaRPr lang="en-US" sz="420" dirty="0"/>
           </a:p>
         </p:txBody>
       </p:sp>
@@ -2207,8 +2207,8 @@
         </p:nvSpPr>
         <p:spPr>
           <a:xfrm>
-            <a:off x="4088282" y="2004365"/>
-            <a:ext cx="1805940" cy="146304"/>
+            <a:off x="4088282" y="1993392"/>
+            <a:ext cx="1723644" cy="105156"/>
           </a:xfrm>
           <a:prstGeom prst="rect">
             <a:avLst/>
@@ -2217,7 +2217,7 @@
           <a:ln/>
         </p:spPr>
         <p:txBody>
-          <a:bodyPr wrap="square" lIns="0" tIns="0" rIns="0" bIns="0" rtlCol="0" anchor="t">
+          <a:bodyPr wrap="none" lIns="0" tIns="0" rIns="0" bIns="0" rtlCol="0" anchor="t">
             <a:normAutofit/>
           </a:bodyPr>
           <a:lstStyle/>
@@ -2229,17 +2229,17 @@
               <a:buNone/>
             </a:pPr>
             <a:r>
-              <a:rPr lang="en-US" sz="460" b="1" dirty="0">
-                <a:solidFill>
-                  <a:srgbClr val="202124"/>
-                </a:solidFill>
-                <a:latin typeface="Arial" pitchFamily="34" charset="0"/>
-                <a:ea typeface="Arial" pitchFamily="34" charset="-122"/>
-                <a:cs typeface="Arial" pitchFamily="34" charset="-120"/>
-              </a:rPr>
-              <a:t>Shared VPC • 5-Hop Cryptographic Context Chain</a:t>
-            </a:r>
-            <a:endParaRPr lang="en-US" sz="460" dirty="0"/>
+              <a:rPr lang="en-US" sz="420" b="1" dirty="0">
+                <a:solidFill>
+                  <a:srgbClr val="202124"/>
+                </a:solidFill>
+                <a:latin typeface="Arial" pitchFamily="34" charset="0"/>
+                <a:ea typeface="Arial" pitchFamily="34" charset="-122"/>
+                <a:cs typeface="Arial" pitchFamily="34" charset="-120"/>
+              </a:rPr>
+              <a:t>Shared VPC</a:t>
+            </a:r>
+            <a:endParaRPr lang="en-US" sz="420" dirty="0"/>
           </a:p>
         </p:txBody>
       </p:sp>
@@ -2278,8 +2278,8 @@
         </p:nvSpPr>
         <p:spPr>
           <a:xfrm>
-            <a:off x="4155034" y="3757270"/>
-            <a:ext cx="1255471" cy="146304"/>
+            <a:off x="4155034" y="3746297"/>
+            <a:ext cx="1255471" cy="105156"/>
           </a:xfrm>
           <a:prstGeom prst="rect">
             <a:avLst/>
@@ -2288,7 +2288,7 @@
           <a:ln/>
         </p:spPr>
         <p:txBody>
-          <a:bodyPr wrap="square" lIns="0" tIns="0" rIns="0" bIns="0" rtlCol="0" anchor="t">
+          <a:bodyPr wrap="none" lIns="0" tIns="0" rIns="0" bIns="0" rtlCol="0" anchor="t">
             <a:normAutofit/>
           </a:bodyPr>
           <a:lstStyle/>
@@ -2308,7 +2308,7 @@
                 <a:ea typeface="Arial" pitchFamily="34" charset="-122"/>
                 <a:cs typeface="Arial" pitchFamily="34" charset="-120"/>
               </a:rPr>
-              <a:t>Logical &amp; Cryptographic Slice A • FinVault Bank (Enterprise Tier)</a:t>
+              <a:t>Logical &amp; Cryptographic Slice A</a:t>
             </a:r>
             <a:endParaRPr lang="en-US" sz="385" dirty="0"/>
           </a:p>
@@ -2349,8 +2349,8 @@
         </p:nvSpPr>
         <p:spPr>
           <a:xfrm>
-            <a:off x="6192317" y="3757270"/>
-            <a:ext cx="1255471" cy="146304"/>
+            <a:off x="6192317" y="3746297"/>
+            <a:ext cx="1255471" cy="105156"/>
           </a:xfrm>
           <a:prstGeom prst="rect">
             <a:avLst/>
@@ -2359,7 +2359,7 @@
           <a:ln/>
         </p:spPr>
         <p:txBody>
-          <a:bodyPr wrap="square" lIns="0" tIns="0" rIns="0" bIns="0" rtlCol="0" anchor="t">
+          <a:bodyPr wrap="none" lIns="0" tIns="0" rIns="0" bIns="0" rtlCol="0" anchor="t">
             <a:normAutofit/>
           </a:bodyPr>
           <a:lstStyle/>
@@ -2379,7 +2379,7 @@
                 <a:ea typeface="Arial" pitchFamily="34" charset="-122"/>
                 <a:cs typeface="Arial" pitchFamily="34" charset="-120"/>
               </a:rPr>
-              <a:t>Logical &amp; Cryptographic Slice B • RetailStream Corp (Standard Tier)</a:t>
+              <a:t>Logical &amp; Cryptographic Slice B</a:t>
             </a:r>
             <a:endParaRPr lang="en-US" sz="385" dirty="0"/>
           </a:p>
@@ -2694,7 +2694,7 @@
         <p:spPr>
           <a:xfrm>
             <a:off x="6881774" y="2161642"/>
-            <a:ext cx="1145743" cy="146304"/>
+            <a:ext cx="1145743" cy="137160"/>
           </a:xfrm>
           <a:prstGeom prst="rect">
             <a:avLst/>
@@ -3918,8 +3918,8 @@
         </p:blipFill>
         <p:spPr>
           <a:xfrm>
-            <a:off x="5576926" y="2516429"/>
-            <a:ext cx="181966" cy="181966"/>
+            <a:off x="5563210" y="2536546"/>
+            <a:ext cx="141732" cy="141732"/>
           </a:xfrm>
           <a:prstGeom prst="rect">
             <a:avLst/>
@@ -3934,8 +3934,8 @@
         </p:nvSpPr>
         <p:spPr>
           <a:xfrm>
-            <a:off x="5795467" y="2474366"/>
-            <a:ext cx="689458" cy="266090"/>
+            <a:off x="5727802" y="2470709"/>
+            <a:ext cx="779069" cy="273406"/>
           </a:xfrm>
           <a:prstGeom prst="rect">
             <a:avLst/>
@@ -3951,12 +3951,12 @@
           <a:p>
             <a:pPr algn="l" indent="0" marL="0">
               <a:lnSpc>
-                <a:spcPct val="86000"/>
-              </a:lnSpc>
-              <a:buNone/>
-            </a:pPr>
-            <a:r>
-              <a:rPr lang="en-US" sz="500" b="1" dirty="0">
+                <a:spcPct val="88000"/>
+              </a:lnSpc>
+              <a:buNone/>
+            </a:pPr>
+            <a:r>
+              <a:rPr lang="en-US" sz="435" b="1" dirty="0">
                 <a:solidFill>
                   <a:srgbClr val="202124"/>
                 </a:solidFill>
@@ -3966,17 +3966,17 @@
               </a:rPr>
               <a:t>External Application Load Balancer</a:t>
             </a:r>
-            <a:endParaRPr lang="en-US" sz="500" dirty="0"/>
+            <a:endParaRPr lang="en-US" sz="435" dirty="0"/>
           </a:p>
           <a:p>
             <a:pPr algn="l" indent="0" marL="0">
               <a:lnSpc>
-                <a:spcPct val="86000"/>
-              </a:lnSpc>
-              <a:buNone/>
-            </a:pPr>
-            <a:r>
-              <a:rPr lang="en-US" sz="430" dirty="0">
+                <a:spcPct val="88000"/>
+              </a:lnSpc>
+              <a:buNone/>
+            </a:pPr>
+            <a:r>
+              <a:rPr lang="en-US" sz="375" dirty="0">
                 <a:solidFill>
                   <a:srgbClr val="3C4043"/>
                 </a:solidFill>
@@ -3986,7 +3986,7 @@
               </a:rPr>
               <a:t>Cloud Load Balancing</a:t>
             </a:r>
-            <a:endParaRPr lang="en-US" sz="500" dirty="0"/>
+            <a:endParaRPr lang="en-US" sz="435" dirty="0"/>
           </a:p>
         </p:txBody>
       </p:sp>
@@ -4033,8 +4033,8 @@
         </p:blipFill>
         <p:spPr>
           <a:xfrm>
-            <a:off x="6969557" y="2416759"/>
-            <a:ext cx="172822" cy="172822"/>
+            <a:off x="6955841" y="2435962"/>
+            <a:ext cx="134417" cy="134417"/>
           </a:xfrm>
           <a:prstGeom prst="rect">
             <a:avLst/>
@@ -4049,8 +4049,8 @@
         </p:nvSpPr>
         <p:spPr>
           <a:xfrm>
-            <a:off x="7178954" y="2377440"/>
-            <a:ext cx="750722" cy="251460"/>
+            <a:off x="7113118" y="2373782"/>
+            <a:ext cx="838505" cy="258775"/>
           </a:xfrm>
           <a:prstGeom prst="rect">
             <a:avLst/>
@@ -4066,12 +4066,12 @@
           <a:p>
             <a:pPr algn="l" indent="0" marL="0">
               <a:lnSpc>
-                <a:spcPct val="86000"/>
-              </a:lnSpc>
-              <a:buNone/>
-            </a:pPr>
-            <a:r>
-              <a:rPr lang="en-US" sz="500" b="1" dirty="0">
+                <a:spcPct val="88000"/>
+              </a:lnSpc>
+              <a:buNone/>
+            </a:pPr>
+            <a:r>
+              <a:rPr lang="en-US" sz="435" b="1" dirty="0">
                 <a:solidFill>
                   <a:srgbClr val="202124"/>
                 </a:solidFill>
@@ -4081,17 +4081,17 @@
               </a:rPr>
               <a:t>ContextCacheConfig (90% COGS Save)</a:t>
             </a:r>
-            <a:endParaRPr lang="en-US" sz="500" dirty="0"/>
+            <a:endParaRPr lang="en-US" sz="435" dirty="0"/>
           </a:p>
           <a:p>
             <a:pPr algn="l" indent="0" marL="0">
               <a:lnSpc>
-                <a:spcPct val="86000"/>
-              </a:lnSpc>
-              <a:buNone/>
-            </a:pPr>
-            <a:r>
-              <a:rPr lang="en-US" sz="430" dirty="0">
+                <a:spcPct val="88000"/>
+              </a:lnSpc>
+              <a:buNone/>
+            </a:pPr>
+            <a:r>
+              <a:rPr lang="en-US" sz="375" dirty="0">
                 <a:solidFill>
                   <a:srgbClr val="3C4043"/>
                 </a:solidFill>
@@ -4101,7 +4101,7 @@
               </a:rPr>
               <a:t>32k Shared Operator Prefix</a:t>
             </a:r>
-            <a:endParaRPr lang="en-US" sz="500" dirty="0"/>
+            <a:endParaRPr lang="en-US" sz="435" dirty="0"/>
           </a:p>
         </p:txBody>
       </p:sp>
@@ -4148,8 +4148,8 @@
         </p:blipFill>
         <p:spPr>
           <a:xfrm>
-            <a:off x="6985102" y="3043123"/>
-            <a:ext cx="163678" cy="163678"/>
+            <a:off x="6971386" y="3061411"/>
+            <a:ext cx="128016" cy="128016"/>
           </a:xfrm>
           <a:prstGeom prst="rect">
             <a:avLst/>
@@ -4164,8 +4164,8 @@
         </p:nvSpPr>
         <p:spPr>
           <a:xfrm>
-            <a:off x="7185355" y="3006547"/>
-            <a:ext cx="730606" cy="236830"/>
+            <a:off x="7121347" y="3002890"/>
+            <a:ext cx="817474" cy="244145"/>
           </a:xfrm>
           <a:prstGeom prst="rect">
             <a:avLst/>
@@ -4181,12 +4181,12 @@
           <a:p>
             <a:pPr algn="l" indent="0" marL="0">
               <a:lnSpc>
-                <a:spcPct val="86000"/>
-              </a:lnSpc>
-              <a:buNone/>
-            </a:pPr>
-            <a:r>
-              <a:rPr lang="en-US" sz="500" b="1" dirty="0">
+                <a:spcPct val="88000"/>
+              </a:lnSpc>
+              <a:buNone/>
+            </a:pPr>
+            <a:r>
+              <a:rPr lang="en-US" sz="435" b="1" dirty="0">
                 <a:solidFill>
                   <a:srgbClr val="202124"/>
                 </a:solidFill>
@@ -4196,17 +4196,17 @@
               </a:rPr>
               <a:t>BigQuery OTel Sink</a:t>
             </a:r>
-            <a:endParaRPr lang="en-US" sz="500" dirty="0"/>
+            <a:endParaRPr lang="en-US" sz="435" dirty="0"/>
           </a:p>
           <a:p>
             <a:pPr algn="l" indent="0" marL="0">
               <a:lnSpc>
-                <a:spcPct val="86000"/>
-              </a:lnSpc>
-              <a:buNone/>
-            </a:pPr>
-            <a:r>
-              <a:rPr lang="en-US" sz="430" dirty="0">
+                <a:spcPct val="88000"/>
+              </a:lnSpc>
+              <a:buNone/>
+            </a:pPr>
+            <a:r>
+              <a:rPr lang="en-US" sz="375" dirty="0">
                 <a:solidFill>
                   <a:srgbClr val="3C4043"/>
                 </a:solidFill>
@@ -4216,7 +4216,7 @@
               </a:rPr>
               <a:t>Zero-PII Token Chargeback</a:t>
             </a:r>
-            <a:endParaRPr lang="en-US" sz="500" dirty="0"/>
+            <a:endParaRPr lang="en-US" sz="435" dirty="0"/>
           </a:p>
         </p:txBody>
       </p:sp>
@@ -4263,8 +4263,8 @@
         </p:blipFill>
         <p:spPr>
           <a:xfrm>
-            <a:off x="6992417" y="2735885"/>
-            <a:ext cx="163678" cy="163678"/>
+            <a:off x="6978701" y="2754173"/>
+            <a:ext cx="128016" cy="128016"/>
           </a:xfrm>
           <a:prstGeom prst="rect">
             <a:avLst/>
@@ -4279,8 +4279,8 @@
         </p:nvSpPr>
         <p:spPr>
           <a:xfrm>
-            <a:off x="7192670" y="2699309"/>
-            <a:ext cx="715061" cy="236830"/>
+            <a:off x="7128662" y="2695651"/>
+            <a:ext cx="801014" cy="244145"/>
           </a:xfrm>
           <a:prstGeom prst="rect">
             <a:avLst/>
@@ -4296,12 +4296,12 @@
           <a:p>
             <a:pPr algn="l" indent="0" marL="0">
               <a:lnSpc>
-                <a:spcPct val="86000"/>
-              </a:lnSpc>
-              <a:buNone/>
-            </a:pPr>
-            <a:r>
-              <a:rPr lang="en-US" sz="500" b="1" dirty="0">
+                <a:spcPct val="88000"/>
+              </a:lnSpc>
+              <a:buNone/>
+            </a:pPr>
+            <a:r>
+              <a:rPr lang="en-US" sz="435" b="1" dirty="0">
                 <a:solidFill>
                   <a:srgbClr val="202124"/>
                 </a:solidFill>
@@ -4311,17 +4311,17 @@
               </a:rPr>
               <a:t>Memorystore Valkey</a:t>
             </a:r>
-            <a:endParaRPr lang="en-US" sz="500" dirty="0"/>
+            <a:endParaRPr lang="en-US" sz="435" dirty="0"/>
           </a:p>
           <a:p>
             <a:pPr algn="l" indent="0" marL="0">
               <a:lnSpc>
-                <a:spcPct val="86000"/>
-              </a:lnSpc>
-              <a:buNone/>
-            </a:pPr>
-            <a:r>
-              <a:rPr lang="en-US" sz="430" dirty="0">
+                <a:spcPct val="88000"/>
+              </a:lnSpc>
+              <a:buNone/>
+            </a:pPr>
+            <a:r>
+              <a:rPr lang="en-US" sz="375" dirty="0">
                 <a:solidFill>
                   <a:srgbClr val="3C4043"/>
                 </a:solidFill>
@@ -4331,7 +4331,7 @@
               </a:rPr>
               <a:t>4k Standard vs 8k Enterprise</a:t>
             </a:r>
-            <a:endParaRPr lang="en-US" sz="500" dirty="0"/>
+            <a:endParaRPr lang="en-US" sz="435" dirty="0"/>
           </a:p>
         </p:txBody>
       </p:sp>
@@ -4378,8 +4378,8 @@
         </p:blipFill>
         <p:spPr>
           <a:xfrm>
-            <a:off x="5164531" y="4358030"/>
-            <a:ext cx="177394" cy="177394"/>
+            <a:off x="5150815" y="4377233"/>
+            <a:ext cx="138074" cy="138074"/>
           </a:xfrm>
           <a:prstGeom prst="rect">
             <a:avLst/>
@@ -4394,8 +4394,8 @@
         </p:nvSpPr>
         <p:spPr>
           <a:xfrm>
-            <a:off x="5378501" y="4316882"/>
-            <a:ext cx="513893" cy="258775"/>
+            <a:off x="5311750" y="4313225"/>
+            <a:ext cx="602590" cy="266090"/>
           </a:xfrm>
           <a:prstGeom prst="rect">
             <a:avLst/>
@@ -4411,12 +4411,12 @@
           <a:p>
             <a:pPr algn="l" indent="0" marL="0">
               <a:lnSpc>
-                <a:spcPct val="86000"/>
-              </a:lnSpc>
-              <a:buNone/>
-            </a:pPr>
-            <a:r>
-              <a:rPr lang="en-US" sz="500" b="1" dirty="0">
+                <a:spcPct val="88000"/>
+              </a:lnSpc>
+              <a:buNone/>
+            </a:pPr>
+            <a:r>
+              <a:rPr lang="en-US" sz="435" b="1" dirty="0">
                 <a:solidFill>
                   <a:srgbClr val="202124"/>
                 </a:solidFill>
@@ -4426,17 +4426,17 @@
               </a:rPr>
               <a:t>Pooled gVisor Pod</a:t>
             </a:r>
-            <a:endParaRPr lang="en-US" sz="500" dirty="0"/>
+            <a:endParaRPr lang="en-US" sz="435" dirty="0"/>
           </a:p>
           <a:p>
             <a:pPr algn="l" indent="0" marL="0">
               <a:lnSpc>
-                <a:spcPct val="86000"/>
-              </a:lnSpc>
-              <a:buNone/>
-            </a:pPr>
-            <a:r>
-              <a:rPr lang="en-US" sz="430" dirty="0">
+                <a:spcPct val="88000"/>
+              </a:lnSpc>
+              <a:buNone/>
+            </a:pPr>
+            <a:r>
+              <a:rPr lang="en-US" sz="375" dirty="0">
                 <a:solidFill>
                   <a:srgbClr val="3C4043"/>
                 </a:solidFill>
@@ -4446,7 +4446,7 @@
               </a:rPr>
               <a:t>Shared + Private Agent Alpha</a:t>
             </a:r>
-            <a:endParaRPr lang="en-US" sz="500" dirty="0"/>
+            <a:endParaRPr lang="en-US" sz="435" dirty="0"/>
           </a:p>
         </p:txBody>
       </p:sp>
@@ -4493,8 +4493,8 @@
         </p:blipFill>
         <p:spPr>
           <a:xfrm>
-            <a:off x="5164531" y="4897526"/>
-            <a:ext cx="177394" cy="177394"/>
+            <a:off x="5150815" y="4916729"/>
+            <a:ext cx="138074" cy="138074"/>
           </a:xfrm>
           <a:prstGeom prst="rect">
             <a:avLst/>
@@ -4509,8 +4509,8 @@
         </p:nvSpPr>
         <p:spPr>
           <a:xfrm>
-            <a:off x="5378501" y="4856378"/>
-            <a:ext cx="513893" cy="258775"/>
+            <a:off x="5311750" y="4852721"/>
+            <a:ext cx="602590" cy="266090"/>
           </a:xfrm>
           <a:prstGeom prst="rect">
             <a:avLst/>
@@ -4526,12 +4526,12 @@
           <a:p>
             <a:pPr algn="l" indent="0" marL="0">
               <a:lnSpc>
-                <a:spcPct val="86000"/>
-              </a:lnSpc>
-              <a:buNone/>
-            </a:pPr>
-            <a:r>
-              <a:rPr lang="en-US" sz="500" b="1" dirty="0">
+                <a:spcPct val="88000"/>
+              </a:lnSpc>
+              <a:buNone/>
+            </a:pPr>
+            <a:r>
+              <a:rPr lang="en-US" sz="435" b="1" dirty="0">
                 <a:solidFill>
                   <a:srgbClr val="202124"/>
                 </a:solidFill>
@@ -4541,17 +4541,17 @@
               </a:rPr>
               <a:t>3LO Workspace/Jira</a:t>
             </a:r>
-            <a:endParaRPr lang="en-US" sz="500" dirty="0"/>
+            <a:endParaRPr lang="en-US" sz="435" dirty="0"/>
           </a:p>
           <a:p>
             <a:pPr algn="l" indent="0" marL="0">
               <a:lnSpc>
-                <a:spcPct val="86000"/>
-              </a:lnSpc>
-              <a:buNone/>
-            </a:pPr>
-            <a:r>
-              <a:rPr lang="en-US" sz="430" dirty="0">
+                <a:spcPct val="88000"/>
+              </a:lnSpc>
+              <a:buNone/>
+            </a:pPr>
+            <a:r>
+              <a:rPr lang="en-US" sz="375" dirty="0">
                 <a:solidFill>
                   <a:srgbClr val="3C4043"/>
                 </a:solidFill>
@@ -4561,7 +4561,7 @@
               </a:rPr>
               <a:t>Drive, Calendar, Gmail, Jira</a:t>
             </a:r>
-            <a:endParaRPr lang="en-US" sz="500" dirty="0"/>
+            <a:endParaRPr lang="en-US" sz="435" dirty="0"/>
           </a:p>
         </p:txBody>
       </p:sp>
@@ -4608,8 +4608,8 @@
         </p:blipFill>
         <p:spPr>
           <a:xfrm>
-            <a:off x="5164531" y="5459882"/>
-            <a:ext cx="177394" cy="177394"/>
+            <a:off x="5150815" y="5479085"/>
+            <a:ext cx="138074" cy="138074"/>
           </a:xfrm>
           <a:prstGeom prst="rect">
             <a:avLst/>
@@ -4624,8 +4624,8 @@
         </p:nvSpPr>
         <p:spPr>
           <a:xfrm>
-            <a:off x="5378501" y="5418734"/>
-            <a:ext cx="513893" cy="258775"/>
+            <a:off x="5311750" y="5415077"/>
+            <a:ext cx="602590" cy="266090"/>
           </a:xfrm>
           <a:prstGeom prst="rect">
             <a:avLst/>
@@ -4641,12 +4641,12 @@
           <a:p>
             <a:pPr algn="l" indent="0" marL="0">
               <a:lnSpc>
-                <a:spcPct val="86000"/>
-              </a:lnSpc>
-              <a:buNone/>
-            </a:pPr>
-            <a:r>
-              <a:rPr lang="en-US" sz="500" b="1" dirty="0">
+                <a:spcPct val="88000"/>
+              </a:lnSpc>
+              <a:buNone/>
+            </a:pPr>
+            <a:r>
+              <a:rPr lang="en-US" sz="435" b="1" dirty="0">
                 <a:solidFill>
                   <a:srgbClr val="202124"/>
                 </a:solidFill>
@@ -4656,17 +4656,17 @@
               </a:rPr>
               <a:t>Shared AlloyDB RLS</a:t>
             </a:r>
-            <a:endParaRPr lang="en-US" sz="500" dirty="0"/>
+            <a:endParaRPr lang="en-US" sz="435" dirty="0"/>
           </a:p>
           <a:p>
             <a:pPr algn="l" indent="0" marL="0">
               <a:lnSpc>
-                <a:spcPct val="86000"/>
-              </a:lnSpc>
-              <a:buNone/>
-            </a:pPr>
-            <a:r>
-              <a:rPr lang="en-US" sz="430" dirty="0">
+                <a:spcPct val="88000"/>
+              </a:lnSpc>
+              <a:buNone/>
+            </a:pPr>
+            <a:r>
+              <a:rPr lang="en-US" sz="375" dirty="0">
                 <a:solidFill>
                   <a:srgbClr val="3C4043"/>
                 </a:solidFill>
@@ -4676,7 +4676,7 @@
               </a:rPr>
               <a:t>app.current_tenant='finvault'</a:t>
             </a:r>
-            <a:endParaRPr lang="en-US" sz="500" dirty="0"/>
+            <a:endParaRPr lang="en-US" sz="435" dirty="0"/>
           </a:p>
         </p:txBody>
       </p:sp>
@@ -4723,8 +4723,8 @@
         </p:blipFill>
         <p:spPr>
           <a:xfrm>
-            <a:off x="7201814" y="4358030"/>
-            <a:ext cx="177394" cy="177394"/>
+            <a:off x="7188098" y="4377233"/>
+            <a:ext cx="138074" cy="138074"/>
           </a:xfrm>
           <a:prstGeom prst="rect">
             <a:avLst/>
@@ -4739,8 +4739,8 @@
         </p:nvSpPr>
         <p:spPr>
           <a:xfrm>
-            <a:off x="7415784" y="4316882"/>
-            <a:ext cx="513893" cy="258775"/>
+            <a:off x="7349033" y="4313225"/>
+            <a:ext cx="602590" cy="266090"/>
           </a:xfrm>
           <a:prstGeom prst="rect">
             <a:avLst/>
@@ -4756,12 +4756,12 @@
           <a:p>
             <a:pPr algn="l" indent="0" marL="0">
               <a:lnSpc>
-                <a:spcPct val="86000"/>
-              </a:lnSpc>
-              <a:buNone/>
-            </a:pPr>
-            <a:r>
-              <a:rPr lang="en-US" sz="500" b="1" dirty="0">
+                <a:spcPct val="88000"/>
+              </a:lnSpc>
+              <a:buNone/>
+            </a:pPr>
+            <a:r>
+              <a:rPr lang="en-US" sz="435" b="1" dirty="0">
                 <a:solidFill>
                   <a:srgbClr val="202124"/>
                 </a:solidFill>
@@ -4771,17 +4771,17 @@
               </a:rPr>
               <a:t>Pooled gVisor Pod</a:t>
             </a:r>
-            <a:endParaRPr lang="en-US" sz="500" dirty="0"/>
+            <a:endParaRPr lang="en-US" sz="435" dirty="0"/>
           </a:p>
           <a:p>
             <a:pPr algn="l" indent="0" marL="0">
               <a:lnSpc>
-                <a:spcPct val="86000"/>
-              </a:lnSpc>
-              <a:buNone/>
-            </a:pPr>
-            <a:r>
-              <a:rPr lang="en-US" sz="430" dirty="0">
+                <a:spcPct val="88000"/>
+              </a:lnSpc>
+              <a:buNone/>
+            </a:pPr>
+            <a:r>
+              <a:rPr lang="en-US" sz="375" dirty="0">
                 <a:solidFill>
                   <a:srgbClr val="3C4043"/>
                 </a:solidFill>
@@ -4791,7 +4791,7 @@
               </a:rPr>
               <a:t>Shared Agent Only (403 Alpha)</a:t>
             </a:r>
-            <a:endParaRPr lang="en-US" sz="500" dirty="0"/>
+            <a:endParaRPr lang="en-US" sz="435" dirty="0"/>
           </a:p>
         </p:txBody>
       </p:sp>
@@ -4838,8 +4838,8 @@
         </p:blipFill>
         <p:spPr>
           <a:xfrm>
-            <a:off x="7201814" y="4897526"/>
-            <a:ext cx="177394" cy="177394"/>
+            <a:off x="7188098" y="4916729"/>
+            <a:ext cx="138074" cy="138074"/>
           </a:xfrm>
           <a:prstGeom prst="rect">
             <a:avLst/>
@@ -4854,8 +4854,8 @@
         </p:nvSpPr>
         <p:spPr>
           <a:xfrm>
-            <a:off x="7415784" y="4856378"/>
-            <a:ext cx="513893" cy="258775"/>
+            <a:off x="7349033" y="4852721"/>
+            <a:ext cx="602590" cy="266090"/>
           </a:xfrm>
           <a:prstGeom prst="rect">
             <a:avLst/>
@@ -4871,12 +4871,12 @@
           <a:p>
             <a:pPr algn="l" indent="0" marL="0">
               <a:lnSpc>
-                <a:spcPct val="86000"/>
-              </a:lnSpc>
-              <a:buNone/>
-            </a:pPr>
-            <a:r>
-              <a:rPr lang="en-US" sz="500" b="1" dirty="0">
+                <a:spcPct val="88000"/>
+              </a:lnSpc>
+              <a:buNone/>
+            </a:pPr>
+            <a:r>
+              <a:rPr lang="en-US" sz="435" b="1" dirty="0">
                 <a:solidFill>
                   <a:srgbClr val="202124"/>
                 </a:solidFill>
@@ -4886,17 +4886,17 @@
               </a:rPr>
               <a:t>3LO Entra &amp; SNOW</a:t>
             </a:r>
-            <a:endParaRPr lang="en-US" sz="500" dirty="0"/>
+            <a:endParaRPr lang="en-US" sz="435" dirty="0"/>
           </a:p>
           <a:p>
             <a:pPr algn="l" indent="0" marL="0">
               <a:lnSpc>
-                <a:spcPct val="86000"/>
-              </a:lnSpc>
-              <a:buNone/>
-            </a:pPr>
-            <a:r>
-              <a:rPr lang="en-US" sz="430" dirty="0">
+                <a:spcPct val="88000"/>
+              </a:lnSpc>
+              <a:buNone/>
+            </a:pPr>
+            <a:r>
+              <a:rPr lang="en-US" sz="375" dirty="0">
                 <a:solidFill>
                   <a:srgbClr val="3C4043"/>
                 </a:solidFill>
@@ -4906,7 +4906,7 @@
               </a:rPr>
               <a:t>Inline OAuth Consent Gate</a:t>
             </a:r>
-            <a:endParaRPr lang="en-US" sz="500" dirty="0"/>
+            <a:endParaRPr lang="en-US" sz="435" dirty="0"/>
           </a:p>
         </p:txBody>
       </p:sp>
@@ -4953,8 +4953,8 @@
         </p:blipFill>
         <p:spPr>
           <a:xfrm>
-            <a:off x="7201814" y="5459882"/>
-            <a:ext cx="177394" cy="177394"/>
+            <a:off x="7188098" y="5479085"/>
+            <a:ext cx="138074" cy="138074"/>
           </a:xfrm>
           <a:prstGeom prst="rect">
             <a:avLst/>
@@ -4969,8 +4969,8 @@
         </p:nvSpPr>
         <p:spPr>
           <a:xfrm>
-            <a:off x="7415784" y="5418734"/>
-            <a:ext cx="513893" cy="258775"/>
+            <a:off x="7349033" y="5415077"/>
+            <a:ext cx="602590" cy="266090"/>
           </a:xfrm>
           <a:prstGeom prst="rect">
             <a:avLst/>
@@ -4986,12 +4986,12 @@
           <a:p>
             <a:pPr algn="l" indent="0" marL="0">
               <a:lnSpc>
-                <a:spcPct val="86000"/>
-              </a:lnSpc>
-              <a:buNone/>
-            </a:pPr>
-            <a:r>
-              <a:rPr lang="en-US" sz="500" b="1" dirty="0">
+                <a:spcPct val="88000"/>
+              </a:lnSpc>
+              <a:buNone/>
+            </a:pPr>
+            <a:r>
+              <a:rPr lang="en-US" sz="435" b="1" dirty="0">
                 <a:solidFill>
                   <a:srgbClr val="202124"/>
                 </a:solidFill>
@@ -5001,17 +5001,17 @@
               </a:rPr>
               <a:t>Shared AlloyDB RLS</a:t>
             </a:r>
-            <a:endParaRPr lang="en-US" sz="500" dirty="0"/>
+            <a:endParaRPr lang="en-US" sz="435" dirty="0"/>
           </a:p>
           <a:p>
             <a:pPr algn="l" indent="0" marL="0">
               <a:lnSpc>
-                <a:spcPct val="86000"/>
-              </a:lnSpc>
-              <a:buNone/>
-            </a:pPr>
-            <a:r>
-              <a:rPr lang="en-US" sz="430" dirty="0">
+                <a:spcPct val="88000"/>
+              </a:lnSpc>
+              <a:buNone/>
+            </a:pPr>
+            <a:r>
+              <a:rPr lang="en-US" sz="375" dirty="0">
                 <a:solidFill>
                   <a:srgbClr val="3C4043"/>
                 </a:solidFill>
@@ -5021,7 +5021,7 @@
               </a:rPr>
               <a:t>current_tenant='retailstream'</a:t>
             </a:r>
-            <a:endParaRPr lang="en-US" sz="500" dirty="0"/>
+            <a:endParaRPr lang="en-US" sz="435" dirty="0"/>
           </a:p>
         </p:txBody>
       </p:sp>
@@ -5068,8 +5068,8 @@
         </p:blipFill>
         <p:spPr>
           <a:xfrm>
-            <a:off x="5666537" y="3065069"/>
-            <a:ext cx="158191" cy="158191"/>
+            <a:off x="5652821" y="3081528"/>
+            <a:ext cx="123444" cy="123444"/>
           </a:xfrm>
           <a:prstGeom prst="rect">
             <a:avLst/>
@@ -5084,8 +5084,8 @@
         </p:nvSpPr>
         <p:spPr>
           <a:xfrm>
-            <a:off x="5861304" y="3029407"/>
-            <a:ext cx="570586" cy="228600"/>
+            <a:off x="5799125" y="3025750"/>
+            <a:ext cx="655625" cy="235915"/>
           </a:xfrm>
           <a:prstGeom prst="rect">
             <a:avLst/>
@@ -5101,12 +5101,12 @@
           <a:p>
             <a:pPr algn="l" indent="0" marL="0">
               <a:lnSpc>
-                <a:spcPct val="86000"/>
-              </a:lnSpc>
-              <a:buNone/>
-            </a:pPr>
-            <a:r>
-              <a:rPr lang="en-US" sz="500" b="1" dirty="0">
+                <a:spcPct val="88000"/>
+              </a:lnSpc>
+              <a:buNone/>
+            </a:pPr>
+            <a:r>
+              <a:rPr lang="en-US" sz="435" b="1" dirty="0">
                 <a:solidFill>
                   <a:srgbClr val="202124"/>
                 </a:solidFill>
@@ -5116,17 +5116,17 @@
               </a:rPr>
               <a:t>ADK Callback Gate</a:t>
             </a:r>
-            <a:endParaRPr lang="en-US" sz="500" dirty="0"/>
+            <a:endParaRPr lang="en-US" sz="435" dirty="0"/>
           </a:p>
           <a:p>
             <a:pPr algn="l" indent="0" marL="0">
               <a:lnSpc>
-                <a:spcPct val="86000"/>
-              </a:lnSpc>
-              <a:buNone/>
-            </a:pPr>
-            <a:r>
-              <a:rPr lang="en-US" sz="430" dirty="0">
+                <a:spcPct val="88000"/>
+              </a:lnSpc>
+              <a:buNone/>
+            </a:pPr>
+            <a:r>
+              <a:rPr lang="en-US" sz="375" dirty="0">
                 <a:solidFill>
                   <a:srgbClr val="3C4043"/>
                 </a:solidFill>
@@ -5136,7 +5136,7 @@
               </a:rPr>
               <a:t>before_agent_callback Prune</a:t>
             </a:r>
-            <a:endParaRPr lang="en-US" sz="500" dirty="0"/>
+            <a:endParaRPr lang="en-US" sz="435" dirty="0"/>
           </a:p>
         </p:txBody>
       </p:sp>
@@ -5183,8 +5183,8 @@
         </p:blipFill>
         <p:spPr>
           <a:xfrm>
-            <a:off x="4243730" y="4169664"/>
-            <a:ext cx="172822" cy="172822"/>
+            <a:off x="4230014" y="4190695"/>
+            <a:ext cx="130759" cy="130759"/>
           </a:xfrm>
           <a:prstGeom prst="rect">
             <a:avLst/>
@@ -5199,8 +5199,8 @@
         </p:nvSpPr>
         <p:spPr>
           <a:xfrm>
-            <a:off x="4453128" y="4130345"/>
-            <a:ext cx="444398" cy="251460"/>
+            <a:off x="4383634" y="4126687"/>
+            <a:ext cx="536753" cy="258775"/>
           </a:xfrm>
           <a:prstGeom prst="rect">
             <a:avLst/>
@@ -5216,12 +5216,12 @@
           <a:p>
             <a:pPr algn="l" indent="0" marL="0">
               <a:lnSpc>
-                <a:spcPct val="86000"/>
-              </a:lnSpc>
-              <a:buNone/>
-            </a:pPr>
-            <a:r>
-              <a:rPr lang="en-US" sz="500" b="1" dirty="0">
+                <a:spcPct val="88000"/>
+              </a:lnSpc>
+              <a:buNone/>
+            </a:pPr>
+            <a:r>
+              <a:rPr lang="en-US" sz="435" b="1" dirty="0">
                 <a:solidFill>
                   <a:srgbClr val="202124"/>
                 </a:solidFill>
@@ -5231,17 +5231,17 @@
               </a:rPr>
               <a:t>Model Armor</a:t>
             </a:r>
-            <a:endParaRPr lang="en-US" sz="500" dirty="0"/>
+            <a:endParaRPr lang="en-US" sz="435" dirty="0"/>
           </a:p>
           <a:p>
             <a:pPr algn="l" indent="0" marL="0">
               <a:lnSpc>
-                <a:spcPct val="86000"/>
-              </a:lnSpc>
-              <a:buNone/>
-            </a:pPr>
-            <a:r>
-              <a:rPr lang="en-US" sz="430" dirty="0">
+                <a:spcPct val="88000"/>
+              </a:lnSpc>
+              <a:buNone/>
+            </a:pPr>
+            <a:r>
+              <a:rPr lang="en-US" sz="375" dirty="0">
                 <a:solidFill>
                   <a:srgbClr val="3C4043"/>
                 </a:solidFill>
@@ -5251,7 +5251,7 @@
               </a:rPr>
               <a:t>Masks IBAN/SWIFT + FINRA Policy</a:t>
             </a:r>
-            <a:endParaRPr lang="en-US" sz="500" dirty="0"/>
+            <a:endParaRPr lang="en-US" sz="435" dirty="0"/>
           </a:p>
         </p:txBody>
       </p:sp>
@@ -5298,8 +5298,8 @@
         </p:blipFill>
         <p:spPr>
           <a:xfrm>
-            <a:off x="4243730" y="5052974"/>
-            <a:ext cx="172822" cy="172822"/>
+            <a:off x="4230014" y="5074006"/>
+            <a:ext cx="130759" cy="130759"/>
           </a:xfrm>
           <a:prstGeom prst="rect">
             <a:avLst/>
@@ -5314,8 +5314,8 @@
         </p:nvSpPr>
         <p:spPr>
           <a:xfrm>
-            <a:off x="4453128" y="5013655"/>
-            <a:ext cx="444398" cy="251460"/>
+            <a:off x="4383634" y="5009998"/>
+            <a:ext cx="536753" cy="258775"/>
           </a:xfrm>
           <a:prstGeom prst="rect">
             <a:avLst/>
@@ -5331,12 +5331,12 @@
           <a:p>
             <a:pPr algn="l" indent="0" marL="0">
               <a:lnSpc>
-                <a:spcPct val="86000"/>
-              </a:lnSpc>
-              <a:buNone/>
-            </a:pPr>
-            <a:r>
-              <a:rPr lang="en-US" sz="500" b="1" dirty="0">
+                <a:spcPct val="88000"/>
+              </a:lnSpc>
+              <a:buNone/>
+            </a:pPr>
+            <a:r>
+              <a:rPr lang="en-US" sz="435" b="1" dirty="0">
                 <a:solidFill>
                   <a:srgbClr val="202124"/>
                 </a:solidFill>
@@ -5346,17 +5346,17 @@
               </a:rPr>
               <a:t>Gemini &amp; Claude 3.7</a:t>
             </a:r>
-            <a:endParaRPr lang="en-US" sz="500" dirty="0"/>
+            <a:endParaRPr lang="en-US" sz="435" dirty="0"/>
           </a:p>
           <a:p>
             <a:pPr algn="l" indent="0" marL="0">
               <a:lnSpc>
-                <a:spcPct val="86000"/>
-              </a:lnSpc>
-              <a:buNone/>
-            </a:pPr>
-            <a:r>
-              <a:rPr lang="en-US" sz="430" dirty="0">
+                <a:spcPct val="88000"/>
+              </a:lnSpc>
+              <a:buNone/>
+            </a:pPr>
+            <a:r>
+              <a:rPr lang="en-US" sz="375" dirty="0">
                 <a:solidFill>
                   <a:srgbClr val="3C4043"/>
                 </a:solidFill>
@@ -5366,7 +5366,7 @@
               </a:rPr>
               <a:t>8,000 Thinking-Token Budget</a:t>
             </a:r>
-            <a:endParaRPr lang="en-US" sz="500" dirty="0"/>
+            <a:endParaRPr lang="en-US" sz="435" dirty="0"/>
           </a:p>
         </p:txBody>
       </p:sp>
@@ -5413,8 +5413,8 @@
         </p:blipFill>
         <p:spPr>
           <a:xfrm>
-            <a:off x="6281014" y="4169664"/>
-            <a:ext cx="172822" cy="172822"/>
+            <a:off x="6267298" y="4190695"/>
+            <a:ext cx="130759" cy="130759"/>
           </a:xfrm>
           <a:prstGeom prst="rect">
             <a:avLst/>
@@ -5429,8 +5429,8 @@
         </p:nvSpPr>
         <p:spPr>
           <a:xfrm>
-            <a:off x="6490411" y="4130345"/>
-            <a:ext cx="444398" cy="251460"/>
+            <a:off x="6420917" y="4126687"/>
+            <a:ext cx="536753" cy="258775"/>
           </a:xfrm>
           <a:prstGeom prst="rect">
             <a:avLst/>
@@ -5446,12 +5446,12 @@
           <a:p>
             <a:pPr algn="l" indent="0" marL="0">
               <a:lnSpc>
-                <a:spcPct val="86000"/>
-              </a:lnSpc>
-              <a:buNone/>
-            </a:pPr>
-            <a:r>
-              <a:rPr lang="en-US" sz="500" b="1" dirty="0">
+                <a:spcPct val="88000"/>
+              </a:lnSpc>
+              <a:buNone/>
+            </a:pPr>
+            <a:r>
+              <a:rPr lang="en-US" sz="435" b="1" dirty="0">
                 <a:solidFill>
                   <a:srgbClr val="202124"/>
                 </a:solidFill>
@@ -5461,17 +5461,17 @@
               </a:rPr>
               <a:t>Model Armor</a:t>
             </a:r>
-            <a:endParaRPr lang="en-US" sz="500" dirty="0"/>
+            <a:endParaRPr lang="en-US" sz="435" dirty="0"/>
           </a:p>
           <a:p>
             <a:pPr algn="l" indent="0" marL="0">
               <a:lnSpc>
-                <a:spcPct val="86000"/>
-              </a:lnSpc>
-              <a:buNone/>
-            </a:pPr>
-            <a:r>
-              <a:rPr lang="en-US" sz="430" dirty="0">
+                <a:spcPct val="88000"/>
+              </a:lnSpc>
+              <a:buNone/>
+            </a:pPr>
+            <a:r>
+              <a:rPr lang="en-US" sz="375" dirty="0">
                 <a:solidFill>
                   <a:srgbClr val="3C4043"/>
                 </a:solidFill>
@@ -5481,7 +5481,7 @@
               </a:rPr>
               <a:t>Masks Card PAN + PCI Policy</a:t>
             </a:r>
-            <a:endParaRPr lang="en-US" sz="500" dirty="0"/>
+            <a:endParaRPr lang="en-US" sz="435" dirty="0"/>
           </a:p>
         </p:txBody>
       </p:sp>
@@ -5528,8 +5528,8 @@
         </p:blipFill>
         <p:spPr>
           <a:xfrm>
-            <a:off x="6281014" y="4550969"/>
-            <a:ext cx="172822" cy="172822"/>
+            <a:off x="6267298" y="4572000"/>
+            <a:ext cx="130759" cy="130759"/>
           </a:xfrm>
           <a:prstGeom prst="rect">
             <a:avLst/>
@@ -5544,8 +5544,8 @@
         </p:nvSpPr>
         <p:spPr>
           <a:xfrm>
-            <a:off x="6490411" y="4511650"/>
-            <a:ext cx="444398" cy="251460"/>
+            <a:off x="6420917" y="4507992"/>
+            <a:ext cx="536753" cy="258775"/>
           </a:xfrm>
           <a:prstGeom prst="rect">
             <a:avLst/>
@@ -5561,12 +5561,12 @@
           <a:p>
             <a:pPr algn="l" indent="0" marL="0">
               <a:lnSpc>
-                <a:spcPct val="86000"/>
-              </a:lnSpc>
-              <a:buNone/>
-            </a:pPr>
-            <a:r>
-              <a:rPr lang="en-US" sz="500" b="1" dirty="0">
+                <a:spcPct val="88000"/>
+              </a:lnSpc>
+              <a:buNone/>
+            </a:pPr>
+            <a:r>
+              <a:rPr lang="en-US" sz="435" b="1" dirty="0">
                 <a:solidFill>
                   <a:srgbClr val="202124"/>
                 </a:solidFill>
@@ -5576,17 +5576,17 @@
               </a:rPr>
               <a:t>Gemini 2.5 Pro</a:t>
             </a:r>
-            <a:endParaRPr lang="en-US" sz="500" dirty="0"/>
+            <a:endParaRPr lang="en-US" sz="435" dirty="0"/>
           </a:p>
           <a:p>
             <a:pPr algn="l" indent="0" marL="0">
               <a:lnSpc>
-                <a:spcPct val="86000"/>
-              </a:lnSpc>
-              <a:buNone/>
-            </a:pPr>
-            <a:r>
-              <a:rPr lang="en-US" sz="430" dirty="0">
+                <a:spcPct val="88000"/>
+              </a:lnSpc>
+              <a:buNone/>
+            </a:pPr>
+            <a:r>
+              <a:rPr lang="en-US" sz="375" dirty="0">
                 <a:solidFill>
                   <a:srgbClr val="3C4043"/>
                 </a:solidFill>
@@ -5596,7 +5596,7 @@
               </a:rPr>
               <a:t>Clamped to 4,000 Tokens</a:t>
             </a:r>
-            <a:endParaRPr lang="en-US" sz="500" dirty="0"/>
+            <a:endParaRPr lang="en-US" sz="435" dirty="0"/>
           </a:p>
         </p:txBody>
       </p:sp>
@@ -5643,8 +5643,8 @@
         </p:blipFill>
         <p:spPr>
           <a:xfrm>
-            <a:off x="4213555" y="2382926"/>
-            <a:ext cx="158191" cy="158191"/>
+            <a:off x="4199839" y="2399386"/>
+            <a:ext cx="123444" cy="123444"/>
           </a:xfrm>
           <a:prstGeom prst="rect">
             <a:avLst/>
@@ -5659,8 +5659,8 @@
         </p:nvSpPr>
         <p:spPr>
           <a:xfrm>
-            <a:off x="4408322" y="2347265"/>
-            <a:ext cx="496519" cy="228600"/>
+            <a:off x="4346143" y="2343607"/>
+            <a:ext cx="581558" cy="235915"/>
           </a:xfrm>
           <a:prstGeom prst="rect">
             <a:avLst/>
@@ -5676,32 +5676,32 @@
           <a:p>
             <a:pPr algn="l" indent="0" marL="0">
               <a:lnSpc>
-                <a:spcPct val="86000"/>
-              </a:lnSpc>
-              <a:buNone/>
-            </a:pPr>
-            <a:r>
-              <a:rPr lang="en-US" sz="500" b="1" dirty="0">
-                <a:solidFill>
-                  <a:srgbClr val="202124"/>
-                </a:solidFill>
-                <a:latin typeface="Arial" pitchFamily="34" charset="0"/>
-                <a:ea typeface="Arial" pitchFamily="34" charset="-122"/>
-                <a:cs typeface="Arial" pitchFamily="34" charset="-120"/>
-              </a:rPr>
-              <a:t>Cloud Armor WAF</a:t>
-            </a:r>
-            <a:endParaRPr lang="en-US" sz="500" dirty="0"/>
+                <a:spcPct val="88000"/>
+              </a:lnSpc>
+              <a:buNone/>
+            </a:pPr>
+            <a:r>
+              <a:rPr lang="en-US" sz="435" b="1" dirty="0">
+                <a:solidFill>
+                  <a:srgbClr val="202124"/>
+                </a:solidFill>
+                <a:latin typeface="Arial" pitchFamily="34" charset="0"/>
+                <a:ea typeface="Arial" pitchFamily="34" charset="-122"/>
+                <a:cs typeface="Arial" pitchFamily="34" charset="-120"/>
+              </a:rPr>
+              <a:t>Google Cloud Armor</a:t>
+            </a:r>
+            <a:endParaRPr lang="en-US" sz="435" dirty="0"/>
           </a:p>
           <a:p>
             <a:pPr algn="l" indent="0" marL="0">
               <a:lnSpc>
-                <a:spcPct val="86000"/>
-              </a:lnSpc>
-              <a:buNone/>
-            </a:pPr>
-            <a:r>
-              <a:rPr lang="en-US" sz="430" dirty="0">
+                <a:spcPct val="88000"/>
+              </a:lnSpc>
+              <a:buNone/>
+            </a:pPr>
+            <a:r>
+              <a:rPr lang="en-US" sz="375" dirty="0">
                 <a:solidFill>
                   <a:srgbClr val="3C4043"/>
                 </a:solidFill>
@@ -5709,9 +5709,9 @@
                 <a:ea typeface="Arial" pitchFamily="34" charset="-122"/>
                 <a:cs typeface="Arial" pitchFamily="34" charset="-120"/>
               </a:rPr>
-              <a:t>Strips Forged X-Tenant-ID</a:t>
-            </a:r>
-            <a:endParaRPr lang="en-US" sz="500" dirty="0"/>
+              <a:t>WAF &amp; DDoS (Strips X-Tenant-ID)</a:t>
+            </a:r>
+            <a:endParaRPr lang="en-US" sz="435" dirty="0"/>
           </a:p>
         </p:txBody>
       </p:sp>
@@ -5758,8 +5758,8 @@
         </p:blipFill>
         <p:spPr>
           <a:xfrm>
-            <a:off x="4213555" y="2697480"/>
-            <a:ext cx="158191" cy="158191"/>
+            <a:off x="4199839" y="2713939"/>
+            <a:ext cx="123444" cy="123444"/>
           </a:xfrm>
           <a:prstGeom prst="rect">
             <a:avLst/>
@@ -5774,8 +5774,8 @@
         </p:nvSpPr>
         <p:spPr>
           <a:xfrm>
-            <a:off x="4408322" y="2661818"/>
-            <a:ext cx="496519" cy="228600"/>
+            <a:off x="4346143" y="2658161"/>
+            <a:ext cx="581558" cy="235915"/>
           </a:xfrm>
           <a:prstGeom prst="rect">
             <a:avLst/>
@@ -5791,12 +5791,12 @@
           <a:p>
             <a:pPr algn="l" indent="0" marL="0">
               <a:lnSpc>
-                <a:spcPct val="86000"/>
-              </a:lnSpc>
-              <a:buNone/>
-            </a:pPr>
-            <a:r>
-              <a:rPr lang="en-US" sz="500" b="1" dirty="0">
+                <a:spcPct val="88000"/>
+              </a:lnSpc>
+              <a:buNone/>
+            </a:pPr>
+            <a:r>
+              <a:rPr lang="en-US" sz="435" b="1" dirty="0">
                 <a:solidFill>
                   <a:srgbClr val="202124"/>
                 </a:solidFill>
@@ -5806,17 +5806,17 @@
               </a:rPr>
               <a:t>Discovery Engine PDP</a:t>
             </a:r>
-            <a:endParaRPr lang="en-US" sz="500" dirty="0"/>
+            <a:endParaRPr lang="en-US" sz="435" dirty="0"/>
           </a:p>
           <a:p>
             <a:pPr algn="l" indent="0" marL="0">
               <a:lnSpc>
-                <a:spcPct val="86000"/>
-              </a:lnSpc>
-              <a:buNone/>
-            </a:pPr>
-            <a:r>
-              <a:rPr lang="en-US" sz="430" dirty="0">
+                <a:spcPct val="88000"/>
+              </a:lnSpc>
+              <a:buNone/>
+            </a:pPr>
+            <a:r>
+              <a:rPr lang="en-US" sz="375" dirty="0">
                 <a:solidFill>
                   <a:srgbClr val="3C4043"/>
                 </a:solidFill>
@@ -5826,7 +5826,7 @@
               </a:rPr>
               <a:t>Catalog Filter (403 Alpha)</a:t>
             </a:r>
-            <a:endParaRPr lang="en-US" sz="500" dirty="0"/>
+            <a:endParaRPr lang="en-US" sz="435" dirty="0"/>
           </a:p>
         </p:txBody>
       </p:sp>
@@ -5873,8 +5873,8 @@
         </p:blipFill>
         <p:spPr>
           <a:xfrm>
-            <a:off x="4243730" y="3065069"/>
-            <a:ext cx="158191" cy="158191"/>
+            <a:off x="4230014" y="3081528"/>
+            <a:ext cx="123444" cy="123444"/>
           </a:xfrm>
           <a:prstGeom prst="rect">
             <a:avLst/>
@@ -5889,8 +5889,8 @@
         </p:nvSpPr>
         <p:spPr>
           <a:xfrm>
-            <a:off x="4438498" y="3029407"/>
-            <a:ext cx="466344" cy="228600"/>
+            <a:off x="4376318" y="3025750"/>
+            <a:ext cx="551383" cy="235915"/>
           </a:xfrm>
           <a:prstGeom prst="rect">
             <a:avLst/>
@@ -5906,12 +5906,12 @@
           <a:p>
             <a:pPr algn="l" indent="0" marL="0">
               <a:lnSpc>
-                <a:spcPct val="86000"/>
-              </a:lnSpc>
-              <a:buNone/>
-            </a:pPr>
-            <a:r>
-              <a:rPr lang="en-US" sz="500" b="1" dirty="0">
+                <a:spcPct val="88000"/>
+              </a:lnSpc>
+              <a:buNone/>
+            </a:pPr>
+            <a:r>
+              <a:rPr lang="en-US" sz="435" b="1" dirty="0">
                 <a:solidFill>
                   <a:srgbClr val="202124"/>
                 </a:solidFill>
@@ -5921,17 +5921,17 @@
               </a:rPr>
               <a:t>IAP + OBO Broker</a:t>
             </a:r>
-            <a:endParaRPr lang="en-US" sz="500" dirty="0"/>
+            <a:endParaRPr lang="en-US" sz="435" dirty="0"/>
           </a:p>
           <a:p>
             <a:pPr algn="l" indent="0" marL="0">
               <a:lnSpc>
-                <a:spcPct val="86000"/>
-              </a:lnSpc>
-              <a:buNone/>
-            </a:pPr>
-            <a:r>
-              <a:rPr lang="en-US" sz="430" dirty="0">
+                <a:spcPct val="88000"/>
+              </a:lnSpc>
+              <a:buNone/>
+            </a:pPr>
+            <a:r>
+              <a:rPr lang="en-US" sz="375" dirty="0">
                 <a:solidFill>
                   <a:srgbClr val="3C4043"/>
                 </a:solidFill>
@@ -5941,981 +5941,13 @@
               </a:rPr>
               <a:t>RFC 8693 OBO + DPoP (jkt)</a:t>
             </a:r>
-            <a:endParaRPr lang="en-US" sz="500" dirty="0"/>
-          </a:p>
-        </p:txBody>
-      </p:sp>
-      <p:sp>
-        <p:nvSpPr>
-          <p:cNvPr id="129" name="Text 107"/>
-          <p:cNvSpPr/>
-          <p:nvPr/>
-        </p:nvSpPr>
-        <p:spPr>
-          <a:xfrm>
-            <a:off x="7541057" y="3373222"/>
-            <a:ext cx="546811" cy="161849"/>
-          </a:xfrm>
-          <a:prstGeom prst="rect">
-            <a:avLst/>
-          </a:prstGeom>
-          <a:noFill/>
-          <a:ln/>
-        </p:spPr>
-        <p:txBody>
-          <a:bodyPr wrap="square" lIns="0" tIns="0" rIns="0" bIns="0" rtlCol="0" anchor="ctr">
-            <a:normAutofit/>
-          </a:bodyPr>
-          <a:lstStyle/>
-          <a:p>
-            <a:pPr algn="l" indent="0" marL="0">
-              <a:lnSpc>
-                <a:spcPct val="88000"/>
-              </a:lnSpc>
-              <a:buNone/>
-            </a:pPr>
-            <a:r>
-              <a:rPr lang="en-US" sz="500" b="1" dirty="0">
-                <a:solidFill>
-                  <a:srgbClr val="202124"/>
-                </a:solidFill>
-                <a:latin typeface="Arial" pitchFamily="34" charset="0"/>
-                <a:ea typeface="Arial" pitchFamily="34" charset="-122"/>
-                <a:cs typeface="Arial" pitchFamily="34" charset="-120"/>
-              </a:rPr>
-              <a:t>84.7% Net Input</a:t>
-            </a:r>
-            <a:endParaRPr lang="en-US" sz="500" dirty="0"/>
-          </a:p>
-          <a:p>
-            <a:pPr algn="l" indent="0" marL="0">
-              <a:lnSpc>
-                <a:spcPct val="88000"/>
-              </a:lnSpc>
-              <a:buNone/>
-            </a:pPr>
-            <a:r>
-              <a:rPr lang="en-US" sz="440" dirty="0">
-                <a:solidFill>
-                  <a:srgbClr val="202124"/>
-                </a:solidFill>
-                <a:latin typeface="Arial" pitchFamily="34" charset="0"/>
-                <a:ea typeface="Arial" pitchFamily="34" charset="-122"/>
-                <a:cs typeface="Arial" pitchFamily="34" charset="-120"/>
-              </a:rPr>
-              <a:t>COGS Savings &amp; OTel</a:t>
-            </a:r>
-            <a:endParaRPr lang="en-US" sz="500" dirty="0"/>
-          </a:p>
-        </p:txBody>
-      </p:sp>
-      <p:sp>
-        <p:nvSpPr>
-          <p:cNvPr id="130" name="Text 108"/>
-          <p:cNvSpPr/>
-          <p:nvPr/>
-        </p:nvSpPr>
-        <p:spPr>
-          <a:xfrm>
-            <a:off x="5237683" y="4654296"/>
-            <a:ext cx="591617" cy="124358"/>
-          </a:xfrm>
-          <a:prstGeom prst="rect">
-            <a:avLst/>
-          </a:prstGeom>
-          <a:noFill/>
-          <a:ln/>
-        </p:spPr>
-        <p:txBody>
-          <a:bodyPr wrap="square" lIns="0" tIns="0" rIns="0" bIns="0" rtlCol="0" anchor="ctr">
-            <a:normAutofit/>
-          </a:bodyPr>
-          <a:lstStyle/>
-          <a:p>
-            <a:pPr algn="ctr" indent="0" marL="0">
-              <a:lnSpc>
-                <a:spcPct val="88000"/>
-              </a:lnSpc>
-              <a:buNone/>
-            </a:pPr>
-            <a:r>
-              <a:rPr lang="en-US" sz="500" b="1" dirty="0">
-                <a:solidFill>
-                  <a:srgbClr val="202124"/>
-                </a:solidFill>
-                <a:latin typeface="Arial" pitchFamily="34" charset="0"/>
-                <a:ea typeface="Arial" pitchFamily="34" charset="-122"/>
-                <a:cs typeface="Arial" pitchFamily="34" charset="-120"/>
-              </a:rPr>
-              <a:t>gs://cymbal-</a:t>
-            </a:r>
-            <a:endParaRPr lang="en-US" sz="500" dirty="0"/>
-          </a:p>
-          <a:p>
-            <a:pPr algn="ctr" indent="0" marL="0">
-              <a:lnSpc>
-                <a:spcPct val="88000"/>
-              </a:lnSpc>
-              <a:buNone/>
-            </a:pPr>
-            <a:r>
-              <a:rPr lang="en-US" sz="440" dirty="0">
-                <a:solidFill>
-                  <a:srgbClr val="202124"/>
-                </a:solidFill>
-                <a:latin typeface="Arial" pitchFamily="34" charset="0"/>
-                <a:ea typeface="Arial" pitchFamily="34" charset="-122"/>
-                <a:cs typeface="Arial" pitchFamily="34" charset="-120"/>
-              </a:rPr>
-              <a:t>skills-finvault</a:t>
-            </a:r>
-            <a:endParaRPr lang="en-US" sz="500" dirty="0"/>
-          </a:p>
-        </p:txBody>
-      </p:sp>
-      <p:sp>
-        <p:nvSpPr>
-          <p:cNvPr id="131" name="Text 109"/>
-          <p:cNvSpPr/>
-          <p:nvPr/>
-        </p:nvSpPr>
-        <p:spPr>
-          <a:xfrm>
-            <a:off x="5237683" y="5201107"/>
-            <a:ext cx="591617" cy="124358"/>
-          </a:xfrm>
-          <a:prstGeom prst="rect">
-            <a:avLst/>
-          </a:prstGeom>
-          <a:noFill/>
-          <a:ln/>
-        </p:spPr>
-        <p:txBody>
-          <a:bodyPr wrap="square" lIns="0" tIns="0" rIns="0" bIns="0" rtlCol="0" anchor="ctr">
-            <a:normAutofit/>
-          </a:bodyPr>
-          <a:lstStyle/>
-          <a:p>
-            <a:pPr algn="ctr" indent="0" marL="0">
-              <a:lnSpc>
-                <a:spcPct val="88000"/>
-              </a:lnSpc>
-              <a:buNone/>
-            </a:pPr>
-            <a:r>
-              <a:rPr lang="en-US" sz="500" b="1" dirty="0">
-                <a:solidFill>
-                  <a:srgbClr val="202124"/>
-                </a:solidFill>
-                <a:latin typeface="Arial" pitchFamily="34" charset="0"/>
-                <a:ea typeface="Arial" pitchFamily="34" charset="-122"/>
-                <a:cs typeface="Arial" pitchFamily="34" charset="-120"/>
-              </a:rPr>
-              <a:t>RLS Filtered</a:t>
-            </a:r>
-            <a:endParaRPr lang="en-US" sz="500" dirty="0"/>
-          </a:p>
-          <a:p>
-            <a:pPr algn="ctr" indent="0" marL="0">
-              <a:lnSpc>
-                <a:spcPct val="88000"/>
-              </a:lnSpc>
-              <a:buNone/>
-            </a:pPr>
-            <a:r>
-              <a:rPr lang="en-US" sz="440" dirty="0">
-                <a:solidFill>
-                  <a:srgbClr val="202124"/>
-                </a:solidFill>
-                <a:latin typeface="Arial" pitchFamily="34" charset="0"/>
-                <a:ea typeface="Arial" pitchFamily="34" charset="-122"/>
-                <a:cs typeface="Arial" pitchFamily="34" charset="-120"/>
-              </a:rPr>
-              <a:t>FinVault Rows</a:t>
-            </a:r>
-            <a:endParaRPr lang="en-US" sz="500" dirty="0"/>
-          </a:p>
-        </p:txBody>
-      </p:sp>
-      <p:sp>
-        <p:nvSpPr>
-          <p:cNvPr id="132" name="Text 110"/>
-          <p:cNvSpPr/>
-          <p:nvPr/>
-        </p:nvSpPr>
-        <p:spPr>
-          <a:xfrm>
-            <a:off x="7274966" y="4654296"/>
-            <a:ext cx="591617" cy="124358"/>
-          </a:xfrm>
-          <a:prstGeom prst="rect">
-            <a:avLst/>
-          </a:prstGeom>
-          <a:noFill/>
-          <a:ln/>
-        </p:spPr>
-        <p:txBody>
-          <a:bodyPr wrap="square" lIns="0" tIns="0" rIns="0" bIns="0" rtlCol="0" anchor="ctr">
-            <a:normAutofit/>
-          </a:bodyPr>
-          <a:lstStyle/>
-          <a:p>
-            <a:pPr algn="ctr" indent="0" marL="0">
-              <a:lnSpc>
-                <a:spcPct val="88000"/>
-              </a:lnSpc>
-              <a:buNone/>
-            </a:pPr>
-            <a:r>
-              <a:rPr lang="en-US" sz="500" b="1" dirty="0">
-                <a:solidFill>
-                  <a:srgbClr val="202124"/>
-                </a:solidFill>
-                <a:latin typeface="Arial" pitchFamily="34" charset="0"/>
-                <a:ea typeface="Arial" pitchFamily="34" charset="-122"/>
-                <a:cs typeface="Arial" pitchFamily="34" charset="-120"/>
-              </a:rPr>
-              <a:t>gs://cymbal-</a:t>
-            </a:r>
-            <a:endParaRPr lang="en-US" sz="500" dirty="0"/>
-          </a:p>
-          <a:p>
-            <a:pPr algn="ctr" indent="0" marL="0">
-              <a:lnSpc>
-                <a:spcPct val="88000"/>
-              </a:lnSpc>
-              <a:buNone/>
-            </a:pPr>
-            <a:r>
-              <a:rPr lang="en-US" sz="440" dirty="0">
-                <a:solidFill>
-                  <a:srgbClr val="202124"/>
-                </a:solidFill>
-                <a:latin typeface="Arial" pitchFamily="34" charset="0"/>
-                <a:ea typeface="Arial" pitchFamily="34" charset="-122"/>
-                <a:cs typeface="Arial" pitchFamily="34" charset="-120"/>
-              </a:rPr>
-              <a:t>skills-retail</a:t>
-            </a:r>
-            <a:endParaRPr lang="en-US" sz="500" dirty="0"/>
-          </a:p>
-        </p:txBody>
-      </p:sp>
-      <p:sp>
-        <p:nvSpPr>
-          <p:cNvPr id="133" name="Text 111"/>
-          <p:cNvSpPr/>
-          <p:nvPr/>
-        </p:nvSpPr>
-        <p:spPr>
-          <a:xfrm>
-            <a:off x="7274966" y="5201107"/>
-            <a:ext cx="591617" cy="124358"/>
-          </a:xfrm>
-          <a:prstGeom prst="rect">
-            <a:avLst/>
-          </a:prstGeom>
-          <a:noFill/>
-          <a:ln/>
-        </p:spPr>
-        <p:txBody>
-          <a:bodyPr wrap="square" lIns="0" tIns="0" rIns="0" bIns="0" rtlCol="0" anchor="ctr">
-            <a:normAutofit/>
-          </a:bodyPr>
-          <a:lstStyle/>
-          <a:p>
-            <a:pPr algn="ctr" indent="0" marL="0">
-              <a:lnSpc>
-                <a:spcPct val="88000"/>
-              </a:lnSpc>
-              <a:buNone/>
-            </a:pPr>
-            <a:r>
-              <a:rPr lang="en-US" sz="500" b="1" dirty="0">
-                <a:solidFill>
-                  <a:srgbClr val="202124"/>
-                </a:solidFill>
-                <a:latin typeface="Arial" pitchFamily="34" charset="0"/>
-                <a:ea typeface="Arial" pitchFamily="34" charset="-122"/>
-                <a:cs typeface="Arial" pitchFamily="34" charset="-120"/>
-              </a:rPr>
-              <a:t>RLS Filtered</a:t>
-            </a:r>
-            <a:endParaRPr lang="en-US" sz="500" dirty="0"/>
-          </a:p>
-          <a:p>
-            <a:pPr algn="ctr" indent="0" marL="0">
-              <a:lnSpc>
-                <a:spcPct val="88000"/>
-              </a:lnSpc>
-              <a:buNone/>
-            </a:pPr>
-            <a:r>
-              <a:rPr lang="en-US" sz="440" dirty="0">
-                <a:solidFill>
-                  <a:srgbClr val="202124"/>
-                </a:solidFill>
-                <a:latin typeface="Arial" pitchFamily="34" charset="0"/>
-                <a:ea typeface="Arial" pitchFamily="34" charset="-122"/>
-                <a:cs typeface="Arial" pitchFamily="34" charset="-120"/>
-              </a:rPr>
-              <a:t>Retail Rows</a:t>
-            </a:r>
-            <a:endParaRPr lang="en-US" sz="500" dirty="0"/>
-          </a:p>
-        </p:txBody>
-      </p:sp>
-      <p:sp>
-        <p:nvSpPr>
-          <p:cNvPr id="134" name="Text 112"/>
-          <p:cNvSpPr/>
-          <p:nvPr/>
-        </p:nvSpPr>
-        <p:spPr>
-          <a:xfrm>
-            <a:off x="4432097" y="5328209"/>
-            <a:ext cx="509321" cy="131674"/>
-          </a:xfrm>
-          <a:prstGeom prst="rect">
-            <a:avLst/>
-          </a:prstGeom>
-          <a:noFill/>
-          <a:ln/>
-        </p:spPr>
-        <p:txBody>
-          <a:bodyPr wrap="square" lIns="0" tIns="0" rIns="0" bIns="0" rtlCol="0" anchor="ctr">
-            <a:normAutofit/>
-          </a:bodyPr>
-          <a:lstStyle/>
-          <a:p>
-            <a:pPr algn="l" indent="0" marL="0">
-              <a:lnSpc>
-                <a:spcPct val="88000"/>
-              </a:lnSpc>
-              <a:buNone/>
-            </a:pPr>
-            <a:r>
-              <a:rPr lang="en-US" sz="500" b="1" dirty="0">
-                <a:solidFill>
-                  <a:srgbClr val="202124"/>
-                </a:solidFill>
-                <a:latin typeface="Arial" pitchFamily="34" charset="0"/>
-                <a:ea typeface="Arial" pitchFamily="34" charset="-122"/>
-                <a:cs typeface="Arial" pitchFamily="34" charset="-120"/>
-              </a:rPr>
-              <a:t>Generates</a:t>
-            </a:r>
-            <a:endParaRPr lang="en-US" sz="500" dirty="0"/>
-          </a:p>
-          <a:p>
-            <a:pPr algn="l" indent="0" marL="0">
-              <a:lnSpc>
-                <a:spcPct val="88000"/>
-              </a:lnSpc>
-              <a:buNone/>
-            </a:pPr>
-            <a:r>
-              <a:rPr lang="en-US" sz="440" dirty="0">
-                <a:solidFill>
-                  <a:srgbClr val="202124"/>
-                </a:solidFill>
-                <a:latin typeface="Arial" pitchFamily="34" charset="0"/>
-                <a:ea typeface="Arial" pitchFamily="34" charset="-122"/>
-                <a:cs typeface="Arial" pitchFamily="34" charset="-120"/>
-              </a:rPr>
-              <a:t>response</a:t>
-            </a:r>
-            <a:endParaRPr lang="en-US" sz="500" dirty="0"/>
-          </a:p>
-        </p:txBody>
-      </p:sp>
-      <p:sp>
-        <p:nvSpPr>
-          <p:cNvPr id="135" name="Text 113"/>
-          <p:cNvSpPr/>
-          <p:nvPr/>
-        </p:nvSpPr>
-        <p:spPr>
-          <a:xfrm>
-            <a:off x="6282842" y="3396082"/>
-            <a:ext cx="554126" cy="116129"/>
-          </a:xfrm>
-          <a:prstGeom prst="rect">
-            <a:avLst/>
-          </a:prstGeom>
-          <a:noFill/>
-          <a:ln/>
-        </p:spPr>
-        <p:txBody>
-          <a:bodyPr wrap="square" lIns="0" tIns="0" rIns="0" bIns="0" rtlCol="0" anchor="ctr">
-            <a:normAutofit/>
-          </a:bodyPr>
-          <a:lstStyle/>
-          <a:p>
-            <a:pPr algn="l" indent="0" marL="0">
-              <a:lnSpc>
-                <a:spcPct val="88000"/>
-              </a:lnSpc>
-              <a:buNone/>
-            </a:pPr>
-            <a:r>
-              <a:rPr lang="en-US" sz="500" b="1" dirty="0">
-                <a:solidFill>
-                  <a:srgbClr val="202124"/>
-                </a:solidFill>
-                <a:latin typeface="Arial" pitchFamily="34" charset="0"/>
-                <a:ea typeface="Arial" pitchFamily="34" charset="-122"/>
-                <a:cs typeface="Arial" pitchFamily="34" charset="-120"/>
-              </a:rPr>
-              <a:t>SDP-redacted</a:t>
-            </a:r>
-            <a:endParaRPr lang="en-US" sz="500" dirty="0"/>
-          </a:p>
-          <a:p>
-            <a:pPr algn="l" indent="0" marL="0">
-              <a:lnSpc>
-                <a:spcPct val="88000"/>
-              </a:lnSpc>
-              <a:buNone/>
-            </a:pPr>
-            <a:r>
-              <a:rPr lang="en-US" sz="440" dirty="0">
-                <a:solidFill>
-                  <a:srgbClr val="202124"/>
-                </a:solidFill>
-                <a:latin typeface="Arial" pitchFamily="34" charset="0"/>
-                <a:ea typeface="Arial" pitchFamily="34" charset="-122"/>
-                <a:cs typeface="Arial" pitchFamily="34" charset="-120"/>
-              </a:rPr>
-              <a:t>tenant response</a:t>
-            </a:r>
-            <a:endParaRPr lang="en-US" sz="500" dirty="0"/>
-          </a:p>
-        </p:txBody>
-      </p:sp>
-      <p:sp>
-        <p:nvSpPr>
-          <p:cNvPr id="136" name="Text 114"/>
-          <p:cNvSpPr/>
-          <p:nvPr/>
-        </p:nvSpPr>
-        <p:spPr>
-          <a:xfrm>
-            <a:off x="5488229" y="3396082"/>
-            <a:ext cx="494690" cy="116129"/>
-          </a:xfrm>
-          <a:prstGeom prst="rect">
-            <a:avLst/>
-          </a:prstGeom>
-          <a:noFill/>
-          <a:ln/>
-        </p:spPr>
-        <p:txBody>
-          <a:bodyPr wrap="square" lIns="0" tIns="0" rIns="0" bIns="0" rtlCol="0" anchor="ctr">
-            <a:normAutofit/>
-          </a:bodyPr>
-          <a:lstStyle/>
-          <a:p>
-            <a:pPr algn="l" indent="0" marL="0">
-              <a:lnSpc>
-                <a:spcPct val="88000"/>
-              </a:lnSpc>
-              <a:buNone/>
-            </a:pPr>
-            <a:r>
-              <a:rPr lang="en-US" sz="500" b="1" dirty="0">
-                <a:solidFill>
-                  <a:srgbClr val="202124"/>
-                </a:solidFill>
-                <a:latin typeface="Arial" pitchFamily="34" charset="0"/>
-                <a:ea typeface="Arial" pitchFamily="34" charset="-122"/>
-                <a:cs typeface="Arial" pitchFamily="34" charset="-120"/>
-              </a:rPr>
-              <a:t>Bind immutable</a:t>
-            </a:r>
-            <a:endParaRPr lang="en-US" sz="500" dirty="0"/>
-          </a:p>
-          <a:p>
-            <a:pPr algn="l" indent="0" marL="0">
-              <a:lnSpc>
-                <a:spcPct val="88000"/>
-              </a:lnSpc>
-              <a:buNone/>
-            </a:pPr>
-            <a:r>
-              <a:rPr lang="en-US" sz="440" dirty="0">
-                <a:solidFill>
-                  <a:srgbClr val="202124"/>
-                </a:solidFill>
-                <a:latin typeface="Arial" pitchFamily="34" charset="0"/>
-                <a:ea typeface="Arial" pitchFamily="34" charset="-122"/>
-                <a:cs typeface="Arial" pitchFamily="34" charset="-120"/>
-              </a:rPr>
-              <a:t>temp:tenant_id</a:t>
-            </a:r>
-            <a:endParaRPr lang="en-US" sz="500" dirty="0"/>
-          </a:p>
-        </p:txBody>
-      </p:sp>
-      <p:sp>
-        <p:nvSpPr>
-          <p:cNvPr id="137" name="Text 115"/>
-          <p:cNvSpPr/>
-          <p:nvPr/>
-        </p:nvSpPr>
-        <p:spPr>
-          <a:xfrm>
-            <a:off x="5039258" y="2983687"/>
-            <a:ext cx="502006" cy="109728"/>
-          </a:xfrm>
-          <a:prstGeom prst="rect">
-            <a:avLst/>
-          </a:prstGeom>
-          <a:noFill/>
-          <a:ln/>
-        </p:spPr>
-        <p:txBody>
-          <a:bodyPr wrap="square" lIns="0" tIns="0" rIns="0" bIns="0" rtlCol="0" anchor="ctr">
-            <a:normAutofit/>
-          </a:bodyPr>
-          <a:lstStyle/>
-          <a:p>
-            <a:pPr algn="ctr" indent="0" marL="0">
-              <a:lnSpc>
-                <a:spcPct val="88000"/>
-              </a:lnSpc>
-              <a:buNone/>
-            </a:pPr>
-            <a:r>
-              <a:rPr lang="en-US" sz="500" b="1" dirty="0">
-                <a:solidFill>
-                  <a:srgbClr val="202124"/>
-                </a:solidFill>
-                <a:latin typeface="Arial" pitchFamily="34" charset="0"/>
-                <a:ea typeface="Arial" pitchFamily="34" charset="-122"/>
-                <a:cs typeface="Arial" pitchFamily="34" charset="-120"/>
-              </a:rPr>
-              <a:t>Mint OBO +</a:t>
-            </a:r>
-            <a:endParaRPr lang="en-US" sz="500" dirty="0"/>
-          </a:p>
-          <a:p>
-            <a:pPr algn="ctr" indent="0" marL="0">
-              <a:lnSpc>
-                <a:spcPct val="88000"/>
-              </a:lnSpc>
-              <a:buNone/>
-            </a:pPr>
-            <a:r>
-              <a:rPr lang="en-US" sz="440" dirty="0">
-                <a:solidFill>
-                  <a:srgbClr val="202124"/>
-                </a:solidFill>
-                <a:latin typeface="Arial" pitchFamily="34" charset="0"/>
-                <a:ea typeface="Arial" pitchFamily="34" charset="-122"/>
-                <a:cs typeface="Arial" pitchFamily="34" charset="-120"/>
-              </a:rPr>
-              <a:t>DPoP token</a:t>
-            </a:r>
-            <a:endParaRPr lang="en-US" sz="500" dirty="0"/>
-          </a:p>
-        </p:txBody>
-      </p:sp>
-      <p:sp>
-        <p:nvSpPr>
-          <p:cNvPr id="138" name="Text 116"/>
-          <p:cNvSpPr/>
-          <p:nvPr/>
-        </p:nvSpPr>
-        <p:spPr>
-          <a:xfrm>
-            <a:off x="4432097" y="4459529"/>
-            <a:ext cx="509321" cy="109728"/>
-          </a:xfrm>
-          <a:prstGeom prst="rect">
-            <a:avLst/>
-          </a:prstGeom>
-          <a:noFill/>
-          <a:ln/>
-        </p:spPr>
-        <p:txBody>
-          <a:bodyPr wrap="square" lIns="0" tIns="0" rIns="0" bIns="0" rtlCol="0" anchor="ctr">
-            <a:normAutofit/>
-          </a:bodyPr>
-          <a:lstStyle/>
-          <a:p>
-            <a:pPr algn="l" indent="0" marL="0">
-              <a:lnSpc>
-                <a:spcPct val="88000"/>
-              </a:lnSpc>
-              <a:buNone/>
-            </a:pPr>
-            <a:r>
-              <a:rPr lang="en-US" sz="500" b="1" dirty="0">
-                <a:solidFill>
-                  <a:srgbClr val="202124"/>
-                </a:solidFill>
-                <a:latin typeface="Arial" pitchFamily="34" charset="0"/>
-                <a:ea typeface="Arial" pitchFamily="34" charset="-122"/>
-                <a:cs typeface="Arial" pitchFamily="34" charset="-120"/>
-              </a:rPr>
-              <a:t>Sanitize request</a:t>
-            </a:r>
-            <a:endParaRPr lang="en-US" sz="500" dirty="0"/>
-          </a:p>
-        </p:txBody>
-      </p:sp>
-      <p:sp>
-        <p:nvSpPr>
-          <p:cNvPr id="139" name="Text 117"/>
-          <p:cNvSpPr/>
-          <p:nvPr/>
-        </p:nvSpPr>
-        <p:spPr>
-          <a:xfrm>
-            <a:off x="4432097" y="4639666"/>
-            <a:ext cx="509321" cy="109728"/>
-          </a:xfrm>
-          <a:prstGeom prst="rect">
-            <a:avLst/>
-          </a:prstGeom>
-          <a:noFill/>
-          <a:ln/>
-        </p:spPr>
-        <p:txBody>
-          <a:bodyPr wrap="square" lIns="0" tIns="0" rIns="0" bIns="0" rtlCol="0" anchor="ctr">
-            <a:normAutofit/>
-          </a:bodyPr>
-          <a:lstStyle/>
-          <a:p>
-            <a:pPr algn="l" indent="0" marL="0">
-              <a:lnSpc>
-                <a:spcPct val="88000"/>
-              </a:lnSpc>
-              <a:buNone/>
-            </a:pPr>
-            <a:r>
-              <a:rPr lang="en-US" sz="500" b="1" dirty="0">
-                <a:solidFill>
-                  <a:srgbClr val="202124"/>
-                </a:solidFill>
-                <a:latin typeface="Arial" pitchFamily="34" charset="0"/>
-                <a:ea typeface="Arial" pitchFamily="34" charset="-122"/>
-                <a:cs typeface="Arial" pitchFamily="34" charset="-120"/>
-              </a:rPr>
-              <a:t>Sanitize response</a:t>
-            </a:r>
-            <a:endParaRPr lang="en-US" sz="500" dirty="0"/>
-          </a:p>
-        </p:txBody>
-      </p:sp>
-      <p:sp>
-        <p:nvSpPr>
-          <p:cNvPr id="140" name="Text 118"/>
-          <p:cNvSpPr/>
-          <p:nvPr/>
-        </p:nvSpPr>
-        <p:spPr>
-          <a:xfrm>
-            <a:off x="5016398" y="2302459"/>
-            <a:ext cx="344729" cy="109728"/>
-          </a:xfrm>
-          <a:prstGeom prst="rect">
-            <a:avLst/>
-          </a:prstGeom>
-          <a:noFill/>
-          <a:ln/>
-        </p:spPr>
-        <p:txBody>
-          <a:bodyPr wrap="square" lIns="0" tIns="0" rIns="0" bIns="0" rtlCol="0" anchor="ctr">
-            <a:normAutofit/>
-          </a:bodyPr>
-          <a:lstStyle/>
-          <a:p>
-            <a:pPr algn="ctr" indent="0" marL="0">
-              <a:lnSpc>
-                <a:spcPct val="88000"/>
-              </a:lnSpc>
-              <a:buNone/>
-            </a:pPr>
-            <a:r>
-              <a:rPr lang="en-US" sz="500" b="1" dirty="0">
-                <a:solidFill>
-                  <a:srgbClr val="202124"/>
-                </a:solidFill>
-                <a:latin typeface="Arial" pitchFamily="34" charset="0"/>
-                <a:ea typeface="Arial" pitchFamily="34" charset="-122"/>
-                <a:cs typeface="Arial" pitchFamily="34" charset="-120"/>
-              </a:rPr>
-              <a:t>Strip header</a:t>
-            </a:r>
-            <a:endParaRPr lang="en-US" sz="500" dirty="0"/>
-          </a:p>
-          <a:p>
-            <a:pPr algn="ctr" indent="0" marL="0">
-              <a:lnSpc>
-                <a:spcPct val="88000"/>
-              </a:lnSpc>
-              <a:buNone/>
-            </a:pPr>
-            <a:r>
-              <a:rPr lang="en-US" sz="440" dirty="0">
-                <a:solidFill>
-                  <a:srgbClr val="202124"/>
-                </a:solidFill>
-                <a:latin typeface="Arial" pitchFamily="34" charset="0"/>
-                <a:ea typeface="Arial" pitchFamily="34" charset="-122"/>
-                <a:cs typeface="Arial" pitchFamily="34" charset="-120"/>
-              </a:rPr>
-              <a:t>X-Tenant-ID</a:t>
-            </a:r>
-            <a:endParaRPr lang="en-US" sz="500" dirty="0"/>
-          </a:p>
-        </p:txBody>
-      </p:sp>
-      <p:sp>
-        <p:nvSpPr>
-          <p:cNvPr id="141" name="Text 119"/>
-          <p:cNvSpPr/>
-          <p:nvPr/>
-        </p:nvSpPr>
-        <p:spPr>
-          <a:xfrm>
-            <a:off x="5016398" y="2819095"/>
-            <a:ext cx="344729" cy="109728"/>
-          </a:xfrm>
-          <a:prstGeom prst="rect">
-            <a:avLst/>
-          </a:prstGeom>
-          <a:noFill/>
-          <a:ln/>
-        </p:spPr>
-        <p:txBody>
-          <a:bodyPr wrap="square" lIns="0" tIns="0" rIns="0" bIns="0" rtlCol="0" anchor="ctr">
-            <a:normAutofit/>
-          </a:bodyPr>
-          <a:lstStyle/>
-          <a:p>
-            <a:pPr algn="ctr" indent="0" marL="0">
-              <a:lnSpc>
-                <a:spcPct val="88000"/>
-              </a:lnSpc>
-              <a:buNone/>
-            </a:pPr>
-            <a:r>
-              <a:rPr lang="en-US" sz="500" b="1" dirty="0">
-                <a:solidFill>
-                  <a:srgbClr val="202124"/>
-                </a:solidFill>
-                <a:latin typeface="Arial" pitchFamily="34" charset="0"/>
-                <a:ea typeface="Arial" pitchFamily="34" charset="-122"/>
-                <a:cs typeface="Arial" pitchFamily="34" charset="-120"/>
-              </a:rPr>
-              <a:t>Filter Agent</a:t>
-            </a:r>
-            <a:endParaRPr lang="en-US" sz="500" dirty="0"/>
-          </a:p>
-          <a:p>
-            <a:pPr algn="ctr" indent="0" marL="0">
-              <a:lnSpc>
-                <a:spcPct val="88000"/>
-              </a:lnSpc>
-              <a:buNone/>
-            </a:pPr>
-            <a:r>
-              <a:rPr lang="en-US" sz="440" dirty="0">
-                <a:solidFill>
-                  <a:srgbClr val="202124"/>
-                </a:solidFill>
-                <a:latin typeface="Arial" pitchFamily="34" charset="0"/>
-                <a:ea typeface="Arial" pitchFamily="34" charset="-122"/>
-                <a:cs typeface="Arial" pitchFamily="34" charset="-120"/>
-              </a:rPr>
-              <a:t>Catalog</a:t>
-            </a:r>
-            <a:endParaRPr lang="en-US" sz="500" dirty="0"/>
-          </a:p>
-        </p:txBody>
-      </p:sp>
-      <p:sp>
-        <p:nvSpPr>
-          <p:cNvPr id="142" name="Text 120"/>
-          <p:cNvSpPr/>
-          <p:nvPr/>
-        </p:nvSpPr>
-        <p:spPr>
-          <a:xfrm>
-            <a:off x="6267298" y="1478585"/>
-            <a:ext cx="299923" cy="109728"/>
-          </a:xfrm>
-          <a:prstGeom prst="rect">
-            <a:avLst/>
-          </a:prstGeom>
-          <a:noFill/>
-          <a:ln/>
-        </p:spPr>
-        <p:txBody>
-          <a:bodyPr wrap="square" lIns="0" tIns="0" rIns="0" bIns="0" rtlCol="0" anchor="ctr">
-            <a:normAutofit/>
-          </a:bodyPr>
-          <a:lstStyle/>
-          <a:p>
-            <a:pPr algn="l" indent="0" marL="0">
-              <a:lnSpc>
-                <a:spcPct val="88000"/>
-              </a:lnSpc>
-              <a:buNone/>
-            </a:pPr>
-            <a:r>
-              <a:rPr lang="en-US" sz="500" b="1" dirty="0">
-                <a:solidFill>
-                  <a:srgbClr val="202124"/>
-                </a:solidFill>
-                <a:latin typeface="Arial" pitchFamily="34" charset="0"/>
-                <a:ea typeface="Arial" pitchFamily="34" charset="-122"/>
-                <a:cs typeface="Arial" pitchFamily="34" charset="-120"/>
-              </a:rPr>
-              <a:t>Response</a:t>
-            </a:r>
-            <a:endParaRPr lang="en-US" sz="500" dirty="0"/>
-          </a:p>
-        </p:txBody>
-      </p:sp>
-      <p:sp>
-        <p:nvSpPr>
-          <p:cNvPr id="143" name="Text 121"/>
-          <p:cNvSpPr/>
-          <p:nvPr/>
-        </p:nvSpPr>
-        <p:spPr>
-          <a:xfrm>
-            <a:off x="6267298" y="2838298"/>
-            <a:ext cx="299923" cy="109728"/>
-          </a:xfrm>
-          <a:prstGeom prst="rect">
-            <a:avLst/>
-          </a:prstGeom>
-          <a:noFill/>
-          <a:ln/>
-        </p:spPr>
-        <p:txBody>
-          <a:bodyPr wrap="square" lIns="0" tIns="0" rIns="0" bIns="0" rtlCol="0" anchor="ctr">
-            <a:normAutofit/>
-          </a:bodyPr>
-          <a:lstStyle/>
-          <a:p>
-            <a:pPr algn="l" indent="0" marL="0">
-              <a:lnSpc>
-                <a:spcPct val="88000"/>
-              </a:lnSpc>
-              <a:buNone/>
-            </a:pPr>
-            <a:r>
-              <a:rPr lang="en-US" sz="500" b="1" dirty="0">
-                <a:solidFill>
-                  <a:srgbClr val="202124"/>
-                </a:solidFill>
-                <a:latin typeface="Arial" pitchFamily="34" charset="0"/>
-                <a:ea typeface="Arial" pitchFamily="34" charset="-122"/>
-                <a:cs typeface="Arial" pitchFamily="34" charset="-120"/>
-              </a:rPr>
-              <a:t>Response</a:t>
-            </a:r>
-            <a:endParaRPr lang="en-US" sz="500" dirty="0"/>
-          </a:p>
-        </p:txBody>
-      </p:sp>
-      <p:sp>
-        <p:nvSpPr>
-          <p:cNvPr id="144" name="Text 122"/>
-          <p:cNvSpPr/>
-          <p:nvPr/>
-        </p:nvSpPr>
-        <p:spPr>
-          <a:xfrm>
-            <a:off x="5578754" y="1478585"/>
-            <a:ext cx="262433" cy="109728"/>
-          </a:xfrm>
-          <a:prstGeom prst="rect">
-            <a:avLst/>
-          </a:prstGeom>
-          <a:noFill/>
-          <a:ln/>
-        </p:spPr>
-        <p:txBody>
-          <a:bodyPr wrap="square" lIns="0" tIns="0" rIns="0" bIns="0" rtlCol="0" anchor="ctr">
-            <a:normAutofit/>
-          </a:bodyPr>
-          <a:lstStyle/>
-          <a:p>
-            <a:pPr algn="r" indent="0" marL="0">
-              <a:lnSpc>
-                <a:spcPct val="88000"/>
-              </a:lnSpc>
-              <a:buNone/>
-            </a:pPr>
-            <a:r>
-              <a:rPr lang="en-US" sz="500" b="1" dirty="0">
-                <a:solidFill>
-                  <a:srgbClr val="202124"/>
-                </a:solidFill>
-                <a:latin typeface="Arial" pitchFamily="34" charset="0"/>
-                <a:ea typeface="Arial" pitchFamily="34" charset="-122"/>
-                <a:cs typeface="Arial" pitchFamily="34" charset="-120"/>
-              </a:rPr>
-              <a:t>Request</a:t>
-            </a:r>
-            <a:endParaRPr lang="en-US" sz="500" dirty="0"/>
-          </a:p>
-        </p:txBody>
-      </p:sp>
-      <p:sp>
-        <p:nvSpPr>
-          <p:cNvPr id="145" name="Text 123"/>
-          <p:cNvSpPr/>
-          <p:nvPr/>
-        </p:nvSpPr>
-        <p:spPr>
-          <a:xfrm>
-            <a:off x="5578754" y="2838298"/>
-            <a:ext cx="262433" cy="109728"/>
-          </a:xfrm>
-          <a:prstGeom prst="rect">
-            <a:avLst/>
-          </a:prstGeom>
-          <a:noFill/>
-          <a:ln/>
-        </p:spPr>
-        <p:txBody>
-          <a:bodyPr wrap="square" lIns="0" tIns="0" rIns="0" bIns="0" rtlCol="0" anchor="ctr">
-            <a:normAutofit/>
-          </a:bodyPr>
-          <a:lstStyle/>
-          <a:p>
-            <a:pPr algn="r" indent="0" marL="0">
-              <a:lnSpc>
-                <a:spcPct val="88000"/>
-              </a:lnSpc>
-              <a:buNone/>
-            </a:pPr>
-            <a:r>
-              <a:rPr lang="en-US" sz="500" b="1" dirty="0">
-                <a:solidFill>
-                  <a:srgbClr val="202124"/>
-                </a:solidFill>
-                <a:latin typeface="Arial" pitchFamily="34" charset="0"/>
-                <a:ea typeface="Arial" pitchFamily="34" charset="-122"/>
-                <a:cs typeface="Arial" pitchFamily="34" charset="-120"/>
-              </a:rPr>
-              <a:t>Request</a:t>
-            </a:r>
-            <a:endParaRPr lang="en-US" sz="500" dirty="0"/>
-          </a:p>
-        </p:txBody>
-      </p:sp>
-      <p:sp>
-        <p:nvSpPr>
-          <p:cNvPr id="146" name="Shape 124"/>
+            <a:endParaRPr lang="en-US" sz="435" dirty="0"/>
+          </a:p>
+        </p:txBody>
+      </p:sp>
+      <p:sp>
+        <p:nvSpPr>
+          <p:cNvPr id="129" name="Shape 107"/>
           <p:cNvSpPr/>
           <p:nvPr/>
         </p:nvSpPr>
@@ -6940,7 +5972,7 @@
       </p:sp>
       <p:sp>
         <p:nvSpPr>
-          <p:cNvPr id="147" name="Text 125"/>
+          <p:cNvPr id="130" name="Text 108"/>
           <p:cNvSpPr/>
           <p:nvPr/>
         </p:nvSpPr>
@@ -6979,7 +6011,7 @@
       </p:sp>
       <p:sp>
         <p:nvSpPr>
-          <p:cNvPr id="148" name="Shape 126"/>
+          <p:cNvPr id="131" name="Shape 109"/>
           <p:cNvSpPr/>
           <p:nvPr/>
         </p:nvSpPr>
@@ -7004,7 +6036,7 @@
       </p:sp>
       <p:sp>
         <p:nvSpPr>
-          <p:cNvPr id="149" name="Text 127"/>
+          <p:cNvPr id="132" name="Text 110"/>
           <p:cNvSpPr/>
           <p:nvPr/>
         </p:nvSpPr>
@@ -7043,7 +6075,7 @@
       </p:sp>
       <p:sp>
         <p:nvSpPr>
-          <p:cNvPr id="150" name="Shape 128"/>
+          <p:cNvPr id="133" name="Shape 111"/>
           <p:cNvSpPr/>
           <p:nvPr/>
         </p:nvSpPr>
@@ -7068,7 +6100,7 @@
       </p:sp>
       <p:sp>
         <p:nvSpPr>
-          <p:cNvPr id="151" name="Text 129"/>
+          <p:cNvPr id="134" name="Text 112"/>
           <p:cNvSpPr/>
           <p:nvPr/>
         </p:nvSpPr>
@@ -7107,7 +6139,7 @@
       </p:sp>
       <p:sp>
         <p:nvSpPr>
-          <p:cNvPr id="152" name="Shape 130"/>
+          <p:cNvPr id="135" name="Shape 113"/>
           <p:cNvSpPr/>
           <p:nvPr/>
         </p:nvSpPr>
@@ -7132,7 +6164,7 @@
       </p:sp>
       <p:sp>
         <p:nvSpPr>
-          <p:cNvPr id="153" name="Text 131"/>
+          <p:cNvPr id="136" name="Text 114"/>
           <p:cNvSpPr/>
           <p:nvPr/>
         </p:nvSpPr>
@@ -7171,7 +6203,7 @@
       </p:sp>
       <p:sp>
         <p:nvSpPr>
-          <p:cNvPr id="154" name="Shape 132"/>
+          <p:cNvPr id="137" name="Shape 115"/>
           <p:cNvSpPr/>
           <p:nvPr/>
         </p:nvSpPr>
@@ -7196,7 +6228,7 @@
       </p:sp>
       <p:sp>
         <p:nvSpPr>
-          <p:cNvPr id="155" name="Text 133"/>
+          <p:cNvPr id="138" name="Text 116"/>
           <p:cNvSpPr/>
           <p:nvPr/>
         </p:nvSpPr>
@@ -7235,7 +6267,7 @@
       </p:sp>
       <p:sp>
         <p:nvSpPr>
-          <p:cNvPr id="156" name="Shape 134"/>
+          <p:cNvPr id="139" name="Shape 117"/>
           <p:cNvSpPr/>
           <p:nvPr/>
         </p:nvSpPr>
@@ -7260,7 +6292,7 @@
       </p:sp>
       <p:sp>
         <p:nvSpPr>
-          <p:cNvPr id="157" name="Text 135"/>
+          <p:cNvPr id="140" name="Text 118"/>
           <p:cNvSpPr/>
           <p:nvPr/>
         </p:nvSpPr>
@@ -7299,7 +6331,7 @@
       </p:sp>
       <p:sp>
         <p:nvSpPr>
-          <p:cNvPr id="158" name="Shape 136"/>
+          <p:cNvPr id="141" name="Shape 119"/>
           <p:cNvSpPr/>
           <p:nvPr/>
         </p:nvSpPr>
@@ -7324,7 +6356,7 @@
       </p:sp>
       <p:sp>
         <p:nvSpPr>
-          <p:cNvPr id="159" name="Text 137"/>
+          <p:cNvPr id="142" name="Text 120"/>
           <p:cNvSpPr/>
           <p:nvPr/>
         </p:nvSpPr>
@@ -7363,7 +6395,7 @@
       </p:sp>
       <p:sp>
         <p:nvSpPr>
-          <p:cNvPr id="160" name="Shape 138"/>
+          <p:cNvPr id="143" name="Shape 121"/>
           <p:cNvSpPr/>
           <p:nvPr/>
         </p:nvSpPr>
@@ -7388,7 +6420,7 @@
       </p:sp>
       <p:sp>
         <p:nvSpPr>
-          <p:cNvPr id="161" name="Text 139"/>
+          <p:cNvPr id="144" name="Text 122"/>
           <p:cNvSpPr/>
           <p:nvPr/>
         </p:nvSpPr>
@@ -7427,7 +6459,7 @@
       </p:sp>
       <p:sp>
         <p:nvSpPr>
-          <p:cNvPr id="162" name="Shape 140"/>
+          <p:cNvPr id="145" name="Shape 123"/>
           <p:cNvSpPr/>
           <p:nvPr/>
         </p:nvSpPr>
@@ -7452,7 +6484,7 @@
       </p:sp>
       <p:sp>
         <p:nvSpPr>
-          <p:cNvPr id="163" name="Text 141"/>
+          <p:cNvPr id="146" name="Text 124"/>
           <p:cNvSpPr/>
           <p:nvPr/>
         </p:nvSpPr>
@@ -7486,6 +6518,805 @@
               <a:t>5</a:t>
             </a:r>
             <a:endParaRPr lang="en-US" sz="620" dirty="0"/>
+          </a:p>
+        </p:txBody>
+      </p:sp>
+      <p:sp>
+        <p:nvSpPr>
+          <p:cNvPr id="147" name="Text 125"/>
+          <p:cNvSpPr/>
+          <p:nvPr/>
+        </p:nvSpPr>
+        <p:spPr>
+          <a:xfrm>
+            <a:off x="7416698" y="3397910"/>
+            <a:ext cx="786384" cy="114300"/>
+          </a:xfrm>
+          <a:prstGeom prst="roundRect">
+            <a:avLst>
+              <a:gd name="adj" fmla="val 24000"/>
+            </a:avLst>
+          </a:prstGeom>
+          <a:solidFill>
+            <a:srgbClr val="FFFFFF"/>
+          </a:solidFill>
+          <a:ln w="5080">
+            <a:solidFill>
+              <a:srgbClr val="DADCE0"/>
+            </a:solidFill>
+          </a:ln>
+        </p:spPr>
+        <p:txBody>
+          <a:bodyPr wrap="square" lIns="0" tIns="0" rIns="0" bIns="0" rtlCol="0" anchor="ctr"/>
+          <a:lstStyle/>
+          <a:p>
+            <a:pPr algn="ctr" indent="0" marL="0">
+              <a:buNone/>
+            </a:pPr>
+            <a:r>
+              <a:rPr lang="en-US" sz="420" b="1" dirty="0">
+                <a:solidFill>
+                  <a:srgbClr val="202124"/>
+                </a:solidFill>
+                <a:latin typeface="Arial" pitchFamily="34" charset="0"/>
+                <a:ea typeface="Arial" pitchFamily="34" charset="-122"/>
+                <a:cs typeface="Arial" pitchFamily="34" charset="-120"/>
+              </a:rPr>
+              <a:t>84.7% Net Input COGS Savings &amp; OTel</a:t>
+            </a:r>
+            <a:endParaRPr lang="en-US" sz="420" dirty="0"/>
+          </a:p>
+        </p:txBody>
+      </p:sp>
+      <p:sp>
+        <p:nvSpPr>
+          <p:cNvPr id="148" name="Text 126"/>
+          <p:cNvSpPr/>
+          <p:nvPr/>
+        </p:nvSpPr>
+        <p:spPr>
+          <a:xfrm>
+            <a:off x="5147158" y="4659782"/>
+            <a:ext cx="764438" cy="114300"/>
+          </a:xfrm>
+          <a:prstGeom prst="roundRect">
+            <a:avLst>
+              <a:gd name="adj" fmla="val 24000"/>
+            </a:avLst>
+          </a:prstGeom>
+          <a:solidFill>
+            <a:srgbClr val="FFFFFF"/>
+          </a:solidFill>
+          <a:ln w="5080">
+            <a:solidFill>
+              <a:srgbClr val="DADCE0"/>
+            </a:solidFill>
+          </a:ln>
+        </p:spPr>
+        <p:txBody>
+          <a:bodyPr wrap="square" lIns="0" tIns="0" rIns="0" bIns="0" rtlCol="0" anchor="ctr"/>
+          <a:lstStyle/>
+          <a:p>
+            <a:pPr algn="ctr" indent="0" marL="0">
+              <a:buNone/>
+            </a:pPr>
+            <a:r>
+              <a:rPr lang="en-US" sz="420" b="1" dirty="0">
+                <a:solidFill>
+                  <a:srgbClr val="202124"/>
+                </a:solidFill>
+                <a:latin typeface="Arial" pitchFamily="34" charset="0"/>
+                <a:ea typeface="Arial" pitchFamily="34" charset="-122"/>
+                <a:cs typeface="Arial" pitchFamily="34" charset="-120"/>
+              </a:rPr>
+              <a:t>gs://cymbal- skills-finvault</a:t>
+            </a:r>
+            <a:endParaRPr lang="en-US" sz="420" dirty="0"/>
+          </a:p>
+        </p:txBody>
+      </p:sp>
+      <p:sp>
+        <p:nvSpPr>
+          <p:cNvPr id="149" name="Text 127"/>
+          <p:cNvSpPr/>
+          <p:nvPr/>
+        </p:nvSpPr>
+        <p:spPr>
+          <a:xfrm>
+            <a:off x="5171846" y="5206594"/>
+            <a:ext cx="715061" cy="114300"/>
+          </a:xfrm>
+          <a:prstGeom prst="roundRect">
+            <a:avLst>
+              <a:gd name="adj" fmla="val 24000"/>
+            </a:avLst>
+          </a:prstGeom>
+          <a:solidFill>
+            <a:srgbClr val="FFFFFF"/>
+          </a:solidFill>
+          <a:ln w="5080">
+            <a:solidFill>
+              <a:srgbClr val="DADCE0"/>
+            </a:solidFill>
+          </a:ln>
+        </p:spPr>
+        <p:txBody>
+          <a:bodyPr wrap="square" lIns="0" tIns="0" rIns="0" bIns="0" rtlCol="0" anchor="ctr"/>
+          <a:lstStyle/>
+          <a:p>
+            <a:pPr algn="ctr" indent="0" marL="0">
+              <a:buNone/>
+            </a:pPr>
+            <a:r>
+              <a:rPr lang="en-US" sz="420" b="1" dirty="0">
+                <a:solidFill>
+                  <a:srgbClr val="202124"/>
+                </a:solidFill>
+                <a:latin typeface="Arial" pitchFamily="34" charset="0"/>
+                <a:ea typeface="Arial" pitchFamily="34" charset="-122"/>
+                <a:cs typeface="Arial" pitchFamily="34" charset="-120"/>
+              </a:rPr>
+              <a:t>RLS Filtered FinVault Rows</a:t>
+            </a:r>
+            <a:endParaRPr lang="en-US" sz="420" dirty="0"/>
+          </a:p>
+        </p:txBody>
+      </p:sp>
+      <p:sp>
+        <p:nvSpPr>
+          <p:cNvPr id="150" name="Text 128"/>
+          <p:cNvSpPr/>
+          <p:nvPr/>
+        </p:nvSpPr>
+        <p:spPr>
+          <a:xfrm>
+            <a:off x="7209130" y="4659782"/>
+            <a:ext cx="715061" cy="114300"/>
+          </a:xfrm>
+          <a:prstGeom prst="roundRect">
+            <a:avLst>
+              <a:gd name="adj" fmla="val 24000"/>
+            </a:avLst>
+          </a:prstGeom>
+          <a:solidFill>
+            <a:srgbClr val="FFFFFF"/>
+          </a:solidFill>
+          <a:ln w="5080">
+            <a:solidFill>
+              <a:srgbClr val="DADCE0"/>
+            </a:solidFill>
+          </a:ln>
+        </p:spPr>
+        <p:txBody>
+          <a:bodyPr wrap="square" lIns="0" tIns="0" rIns="0" bIns="0" rtlCol="0" anchor="ctr"/>
+          <a:lstStyle/>
+          <a:p>
+            <a:pPr algn="ctr" indent="0" marL="0">
+              <a:buNone/>
+            </a:pPr>
+            <a:r>
+              <a:rPr lang="en-US" sz="420" b="1" dirty="0">
+                <a:solidFill>
+                  <a:srgbClr val="202124"/>
+                </a:solidFill>
+                <a:latin typeface="Arial" pitchFamily="34" charset="0"/>
+                <a:ea typeface="Arial" pitchFamily="34" charset="-122"/>
+                <a:cs typeface="Arial" pitchFamily="34" charset="-120"/>
+              </a:rPr>
+              <a:t>gs://cymbal- skills-retail</a:t>
+            </a:r>
+            <a:endParaRPr lang="en-US" sz="420" dirty="0"/>
+          </a:p>
+        </p:txBody>
+      </p:sp>
+      <p:sp>
+        <p:nvSpPr>
+          <p:cNvPr id="151" name="Text 129"/>
+          <p:cNvSpPr/>
+          <p:nvPr/>
+        </p:nvSpPr>
+        <p:spPr>
+          <a:xfrm>
+            <a:off x="7233818" y="5206594"/>
+            <a:ext cx="665683" cy="114300"/>
+          </a:xfrm>
+          <a:prstGeom prst="roundRect">
+            <a:avLst>
+              <a:gd name="adj" fmla="val 24000"/>
+            </a:avLst>
+          </a:prstGeom>
+          <a:solidFill>
+            <a:srgbClr val="FFFFFF"/>
+          </a:solidFill>
+          <a:ln w="5080">
+            <a:solidFill>
+              <a:srgbClr val="DADCE0"/>
+            </a:solidFill>
+          </a:ln>
+        </p:spPr>
+        <p:txBody>
+          <a:bodyPr wrap="square" lIns="0" tIns="0" rIns="0" bIns="0" rtlCol="0" anchor="ctr"/>
+          <a:lstStyle/>
+          <a:p>
+            <a:pPr algn="ctr" indent="0" marL="0">
+              <a:buNone/>
+            </a:pPr>
+            <a:r>
+              <a:rPr lang="en-US" sz="420" b="1" dirty="0">
+                <a:solidFill>
+                  <a:srgbClr val="202124"/>
+                </a:solidFill>
+                <a:latin typeface="Arial" pitchFamily="34" charset="0"/>
+                <a:ea typeface="Arial" pitchFamily="34" charset="-122"/>
+                <a:cs typeface="Arial" pitchFamily="34" charset="-120"/>
+              </a:rPr>
+              <a:t>RLS Filtered Retail Rows</a:t>
+            </a:r>
+            <a:endParaRPr lang="en-US" sz="420" dirty="0"/>
+          </a:p>
+        </p:txBody>
+      </p:sp>
+      <p:sp>
+        <p:nvSpPr>
+          <p:cNvPr id="152" name="Text 130"/>
+          <p:cNvSpPr/>
+          <p:nvPr/>
+        </p:nvSpPr>
+        <p:spPr>
+          <a:xfrm>
+            <a:off x="4423867" y="5337353"/>
+            <a:ext cx="517550" cy="114300"/>
+          </a:xfrm>
+          <a:prstGeom prst="roundRect">
+            <a:avLst>
+              <a:gd name="adj" fmla="val 24000"/>
+            </a:avLst>
+          </a:prstGeom>
+          <a:solidFill>
+            <a:srgbClr val="FFFFFF"/>
+          </a:solidFill>
+          <a:ln w="5080">
+            <a:solidFill>
+              <a:srgbClr val="DADCE0"/>
+            </a:solidFill>
+          </a:ln>
+        </p:spPr>
+        <p:txBody>
+          <a:bodyPr wrap="square" lIns="0" tIns="0" rIns="0" bIns="0" rtlCol="0" anchor="ctr"/>
+          <a:lstStyle/>
+          <a:p>
+            <a:pPr algn="ctr" indent="0" marL="0">
+              <a:buNone/>
+            </a:pPr>
+            <a:r>
+              <a:rPr lang="en-US" sz="420" b="1" dirty="0">
+                <a:solidFill>
+                  <a:srgbClr val="202124"/>
+                </a:solidFill>
+                <a:latin typeface="Arial" pitchFamily="34" charset="0"/>
+                <a:ea typeface="Arial" pitchFamily="34" charset="-122"/>
+                <a:cs typeface="Arial" pitchFamily="34" charset="-120"/>
+              </a:rPr>
+              <a:t>Generates response</a:t>
+            </a:r>
+            <a:endParaRPr lang="en-US" sz="420" dirty="0"/>
+          </a:p>
+        </p:txBody>
+      </p:sp>
+      <p:sp>
+        <p:nvSpPr>
+          <p:cNvPr id="153" name="Text 131"/>
+          <p:cNvSpPr/>
+          <p:nvPr/>
+        </p:nvSpPr>
+        <p:spPr>
+          <a:xfrm>
+            <a:off x="6337706" y="3397910"/>
+            <a:ext cx="764438" cy="114300"/>
+          </a:xfrm>
+          <a:prstGeom prst="roundRect">
+            <a:avLst>
+              <a:gd name="adj" fmla="val 24000"/>
+            </a:avLst>
+          </a:prstGeom>
+          <a:solidFill>
+            <a:srgbClr val="FFFFFF"/>
+          </a:solidFill>
+          <a:ln w="5080">
+            <a:solidFill>
+              <a:srgbClr val="DADCE0"/>
+            </a:solidFill>
+          </a:ln>
+        </p:spPr>
+        <p:txBody>
+          <a:bodyPr wrap="square" lIns="0" tIns="0" rIns="0" bIns="0" rtlCol="0" anchor="ctr"/>
+          <a:lstStyle/>
+          <a:p>
+            <a:pPr algn="ctr" indent="0" marL="0">
+              <a:buNone/>
+            </a:pPr>
+            <a:r>
+              <a:rPr lang="en-US" sz="420" b="1" dirty="0">
+                <a:solidFill>
+                  <a:srgbClr val="202124"/>
+                </a:solidFill>
+                <a:latin typeface="Arial" pitchFamily="34" charset="0"/>
+                <a:ea typeface="Arial" pitchFamily="34" charset="-122"/>
+                <a:cs typeface="Arial" pitchFamily="34" charset="-120"/>
+              </a:rPr>
+              <a:t>SDP-redacted tenant response</a:t>
+            </a:r>
+            <a:endParaRPr lang="en-US" sz="420" dirty="0"/>
+          </a:p>
+        </p:txBody>
+      </p:sp>
+      <p:sp>
+        <p:nvSpPr>
+          <p:cNvPr id="154" name="Text 132"/>
+          <p:cNvSpPr/>
+          <p:nvPr/>
+        </p:nvSpPr>
+        <p:spPr>
+          <a:xfrm>
+            <a:off x="5338267" y="3397910"/>
+            <a:ext cx="786384" cy="114300"/>
+          </a:xfrm>
+          <a:prstGeom prst="roundRect">
+            <a:avLst>
+              <a:gd name="adj" fmla="val 24000"/>
+            </a:avLst>
+          </a:prstGeom>
+          <a:solidFill>
+            <a:srgbClr val="FFFFFF"/>
+          </a:solidFill>
+          <a:ln w="5080">
+            <a:solidFill>
+              <a:srgbClr val="DADCE0"/>
+            </a:solidFill>
+          </a:ln>
+        </p:spPr>
+        <p:txBody>
+          <a:bodyPr wrap="square" lIns="0" tIns="0" rIns="0" bIns="0" rtlCol="0" anchor="ctr"/>
+          <a:lstStyle/>
+          <a:p>
+            <a:pPr algn="ctr" indent="0" marL="0">
+              <a:buNone/>
+            </a:pPr>
+            <a:r>
+              <a:rPr lang="en-US" sz="420" b="1" dirty="0">
+                <a:solidFill>
+                  <a:srgbClr val="202124"/>
+                </a:solidFill>
+                <a:latin typeface="Arial" pitchFamily="34" charset="0"/>
+                <a:ea typeface="Arial" pitchFamily="34" charset="-122"/>
+                <a:cs typeface="Arial" pitchFamily="34" charset="-120"/>
+              </a:rPr>
+              <a:t>Bind immutable temp:tenant_id</a:t>
+            </a:r>
+            <a:endParaRPr lang="en-US" sz="420" dirty="0"/>
+          </a:p>
+        </p:txBody>
+      </p:sp>
+      <p:sp>
+        <p:nvSpPr>
+          <p:cNvPr id="155" name="Text 133"/>
+          <p:cNvSpPr/>
+          <p:nvPr/>
+        </p:nvSpPr>
+        <p:spPr>
+          <a:xfrm>
+            <a:off x="4989881" y="2980944"/>
+            <a:ext cx="591617" cy="114300"/>
+          </a:xfrm>
+          <a:prstGeom prst="roundRect">
+            <a:avLst>
+              <a:gd name="adj" fmla="val 24000"/>
+            </a:avLst>
+          </a:prstGeom>
+          <a:solidFill>
+            <a:srgbClr val="FFFFFF"/>
+          </a:solidFill>
+          <a:ln w="5080">
+            <a:solidFill>
+              <a:srgbClr val="DADCE0"/>
+            </a:solidFill>
+          </a:ln>
+        </p:spPr>
+        <p:txBody>
+          <a:bodyPr wrap="square" lIns="0" tIns="0" rIns="0" bIns="0" rtlCol="0" anchor="ctr"/>
+          <a:lstStyle/>
+          <a:p>
+            <a:pPr algn="ctr" indent="0" marL="0">
+              <a:buNone/>
+            </a:pPr>
+            <a:r>
+              <a:rPr lang="en-US" sz="420" b="1" dirty="0">
+                <a:solidFill>
+                  <a:srgbClr val="202124"/>
+                </a:solidFill>
+                <a:latin typeface="Arial" pitchFamily="34" charset="0"/>
+                <a:ea typeface="Arial" pitchFamily="34" charset="-122"/>
+                <a:cs typeface="Arial" pitchFamily="34" charset="-120"/>
+              </a:rPr>
+              <a:t>Mint OBO + DPoP token</a:t>
+            </a:r>
+            <a:endParaRPr lang="en-US" sz="420" dirty="0"/>
+          </a:p>
+        </p:txBody>
+      </p:sp>
+      <p:sp>
+        <p:nvSpPr>
+          <p:cNvPr id="156" name="Text 134"/>
+          <p:cNvSpPr/>
+          <p:nvPr/>
+        </p:nvSpPr>
+        <p:spPr>
+          <a:xfrm>
+            <a:off x="4448556" y="4445813"/>
+            <a:ext cx="468173" cy="114300"/>
+          </a:xfrm>
+          <a:prstGeom prst="roundRect">
+            <a:avLst>
+              <a:gd name="adj" fmla="val 24000"/>
+            </a:avLst>
+          </a:prstGeom>
+          <a:solidFill>
+            <a:srgbClr val="FFFFFF"/>
+          </a:solidFill>
+          <a:ln w="5080">
+            <a:solidFill>
+              <a:srgbClr val="DADCE0"/>
+            </a:solidFill>
+          </a:ln>
+        </p:spPr>
+        <p:txBody>
+          <a:bodyPr wrap="square" lIns="0" tIns="0" rIns="0" bIns="0" rtlCol="0" anchor="ctr"/>
+          <a:lstStyle/>
+          <a:p>
+            <a:pPr algn="ctr" indent="0" marL="0">
+              <a:buNone/>
+            </a:pPr>
+            <a:r>
+              <a:rPr lang="en-US" sz="420" b="1" dirty="0">
+                <a:solidFill>
+                  <a:srgbClr val="202124"/>
+                </a:solidFill>
+                <a:latin typeface="Arial" pitchFamily="34" charset="0"/>
+                <a:ea typeface="Arial" pitchFamily="34" charset="-122"/>
+                <a:cs typeface="Arial" pitchFamily="34" charset="-120"/>
+              </a:rPr>
+              <a:t>Sanitize request</a:t>
+            </a:r>
+            <a:endParaRPr lang="en-US" sz="420" dirty="0"/>
+          </a:p>
+        </p:txBody>
+      </p:sp>
+      <p:sp>
+        <p:nvSpPr>
+          <p:cNvPr id="157" name="Text 135"/>
+          <p:cNvSpPr/>
+          <p:nvPr/>
+        </p:nvSpPr>
+        <p:spPr>
+          <a:xfrm>
+            <a:off x="4436669" y="4625950"/>
+            <a:ext cx="492862" cy="114300"/>
+          </a:xfrm>
+          <a:prstGeom prst="roundRect">
+            <a:avLst>
+              <a:gd name="adj" fmla="val 24000"/>
+            </a:avLst>
+          </a:prstGeom>
+          <a:solidFill>
+            <a:srgbClr val="FFFFFF"/>
+          </a:solidFill>
+          <a:ln w="5080">
+            <a:solidFill>
+              <a:srgbClr val="DADCE0"/>
+            </a:solidFill>
+          </a:ln>
+        </p:spPr>
+        <p:txBody>
+          <a:bodyPr wrap="square" lIns="0" tIns="0" rIns="0" bIns="0" rtlCol="0" anchor="ctr"/>
+          <a:lstStyle/>
+          <a:p>
+            <a:pPr algn="ctr" indent="0" marL="0">
+              <a:buNone/>
+            </a:pPr>
+            <a:r>
+              <a:rPr lang="en-US" sz="420" b="1" dirty="0">
+                <a:solidFill>
+                  <a:srgbClr val="202124"/>
+                </a:solidFill>
+                <a:latin typeface="Arial" pitchFamily="34" charset="0"/>
+                <a:ea typeface="Arial" pitchFamily="34" charset="-122"/>
+                <a:cs typeface="Arial" pitchFamily="34" charset="-120"/>
+              </a:rPr>
+              <a:t>Sanitize response</a:t>
+            </a:r>
+            <a:endParaRPr lang="en-US" sz="420" dirty="0"/>
+          </a:p>
+        </p:txBody>
+      </p:sp>
+      <p:sp>
+        <p:nvSpPr>
+          <p:cNvPr id="158" name="Text 136"/>
+          <p:cNvSpPr/>
+          <p:nvPr/>
+        </p:nvSpPr>
+        <p:spPr>
+          <a:xfrm>
+            <a:off x="4851806" y="2299716"/>
+            <a:ext cx="665683" cy="114300"/>
+          </a:xfrm>
+          <a:prstGeom prst="roundRect">
+            <a:avLst>
+              <a:gd name="adj" fmla="val 24000"/>
+            </a:avLst>
+          </a:prstGeom>
+          <a:solidFill>
+            <a:srgbClr val="FFFFFF"/>
+          </a:solidFill>
+          <a:ln w="5080">
+            <a:solidFill>
+              <a:srgbClr val="DADCE0"/>
+            </a:solidFill>
+          </a:ln>
+        </p:spPr>
+        <p:txBody>
+          <a:bodyPr wrap="square" lIns="0" tIns="0" rIns="0" bIns="0" rtlCol="0" anchor="ctr"/>
+          <a:lstStyle/>
+          <a:p>
+            <a:pPr algn="ctr" indent="0" marL="0">
+              <a:buNone/>
+            </a:pPr>
+            <a:r>
+              <a:rPr lang="en-US" sz="420" b="1" dirty="0">
+                <a:solidFill>
+                  <a:srgbClr val="202124"/>
+                </a:solidFill>
+                <a:latin typeface="Arial" pitchFamily="34" charset="0"/>
+                <a:ea typeface="Arial" pitchFamily="34" charset="-122"/>
+                <a:cs typeface="Arial" pitchFamily="34" charset="-120"/>
+              </a:rPr>
+              <a:t>Strip header X-Tenant-ID</a:t>
+            </a:r>
+            <a:endParaRPr lang="en-US" sz="420" dirty="0"/>
+          </a:p>
+        </p:txBody>
+      </p:sp>
+      <p:sp>
+        <p:nvSpPr>
+          <p:cNvPr id="159" name="Text 137"/>
+          <p:cNvSpPr/>
+          <p:nvPr/>
+        </p:nvSpPr>
+        <p:spPr>
+          <a:xfrm>
+            <a:off x="5065776" y="2816352"/>
+            <a:ext cx="566928" cy="114300"/>
+          </a:xfrm>
+          <a:prstGeom prst="roundRect">
+            <a:avLst>
+              <a:gd name="adj" fmla="val 24000"/>
+            </a:avLst>
+          </a:prstGeom>
+          <a:solidFill>
+            <a:srgbClr val="FFFFFF"/>
+          </a:solidFill>
+          <a:ln w="5080">
+            <a:solidFill>
+              <a:srgbClr val="DADCE0"/>
+            </a:solidFill>
+          </a:ln>
+        </p:spPr>
+        <p:txBody>
+          <a:bodyPr wrap="square" lIns="0" tIns="0" rIns="0" bIns="0" rtlCol="0" anchor="ctr"/>
+          <a:lstStyle/>
+          <a:p>
+            <a:pPr algn="ctr" indent="0" marL="0">
+              <a:buNone/>
+            </a:pPr>
+            <a:r>
+              <a:rPr lang="en-US" sz="420" b="1" dirty="0">
+                <a:solidFill>
+                  <a:srgbClr val="202124"/>
+                </a:solidFill>
+                <a:latin typeface="Arial" pitchFamily="34" charset="0"/>
+                <a:ea typeface="Arial" pitchFamily="34" charset="-122"/>
+                <a:cs typeface="Arial" pitchFamily="34" charset="-120"/>
+              </a:rPr>
+              <a:t>Filter Agent Catalog</a:t>
+            </a:r>
+            <a:endParaRPr lang="en-US" sz="420" dirty="0"/>
+          </a:p>
+        </p:txBody>
+      </p:sp>
+      <p:sp>
+        <p:nvSpPr>
+          <p:cNvPr id="160" name="Text 138"/>
+          <p:cNvSpPr/>
+          <p:nvPr/>
+        </p:nvSpPr>
+        <p:spPr>
+          <a:xfrm>
+            <a:off x="6238951" y="1463954"/>
+            <a:ext cx="347472" cy="114300"/>
+          </a:xfrm>
+          <a:prstGeom prst="roundRect">
+            <a:avLst>
+              <a:gd name="adj" fmla="val 24000"/>
+            </a:avLst>
+          </a:prstGeom>
+          <a:solidFill>
+            <a:srgbClr val="FFFFFF"/>
+          </a:solidFill>
+          <a:ln w="5080">
+            <a:solidFill>
+              <a:srgbClr val="DADCE0"/>
+            </a:solidFill>
+          </a:ln>
+        </p:spPr>
+        <p:txBody>
+          <a:bodyPr wrap="square" lIns="0" tIns="0" rIns="0" bIns="0" rtlCol="0" anchor="ctr"/>
+          <a:lstStyle/>
+          <a:p>
+            <a:pPr algn="ctr" indent="0" marL="0">
+              <a:buNone/>
+            </a:pPr>
+            <a:r>
+              <a:rPr lang="en-US" sz="420" b="1" dirty="0">
+                <a:solidFill>
+                  <a:srgbClr val="202124"/>
+                </a:solidFill>
+                <a:latin typeface="Arial" pitchFamily="34" charset="0"/>
+                <a:ea typeface="Arial" pitchFamily="34" charset="-122"/>
+                <a:cs typeface="Arial" pitchFamily="34" charset="-120"/>
+              </a:rPr>
+              <a:t>Response</a:t>
+            </a:r>
+            <a:endParaRPr lang="en-US" sz="420" dirty="0"/>
+          </a:p>
+        </p:txBody>
+      </p:sp>
+      <p:sp>
+        <p:nvSpPr>
+          <p:cNvPr id="161" name="Text 139"/>
+          <p:cNvSpPr/>
+          <p:nvPr/>
+        </p:nvSpPr>
+        <p:spPr>
+          <a:xfrm>
+            <a:off x="6238951" y="2823667"/>
+            <a:ext cx="347472" cy="114300"/>
+          </a:xfrm>
+          <a:prstGeom prst="roundRect">
+            <a:avLst>
+              <a:gd name="adj" fmla="val 24000"/>
+            </a:avLst>
+          </a:prstGeom>
+          <a:solidFill>
+            <a:srgbClr val="FFFFFF"/>
+          </a:solidFill>
+          <a:ln w="5080">
+            <a:solidFill>
+              <a:srgbClr val="DADCE0"/>
+            </a:solidFill>
+          </a:ln>
+        </p:spPr>
+        <p:txBody>
+          <a:bodyPr wrap="square" lIns="0" tIns="0" rIns="0" bIns="0" rtlCol="0" anchor="ctr"/>
+          <a:lstStyle/>
+          <a:p>
+            <a:pPr algn="ctr" indent="0" marL="0">
+              <a:buNone/>
+            </a:pPr>
+            <a:r>
+              <a:rPr lang="en-US" sz="420" b="1" dirty="0">
+                <a:solidFill>
+                  <a:srgbClr val="202124"/>
+                </a:solidFill>
+                <a:latin typeface="Arial" pitchFamily="34" charset="0"/>
+                <a:ea typeface="Arial" pitchFamily="34" charset="-122"/>
+                <a:cs typeface="Arial" pitchFamily="34" charset="-120"/>
+              </a:rPr>
+              <a:t>Response</a:t>
+            </a:r>
+            <a:endParaRPr lang="en-US" sz="420" dirty="0"/>
+          </a:p>
+        </p:txBody>
+      </p:sp>
+      <p:sp>
+        <p:nvSpPr>
+          <p:cNvPr id="162" name="Text 140"/>
+          <p:cNvSpPr/>
+          <p:nvPr/>
+        </p:nvSpPr>
+        <p:spPr>
+          <a:xfrm>
+            <a:off x="5531206" y="1463954"/>
+            <a:ext cx="347472" cy="114300"/>
+          </a:xfrm>
+          <a:prstGeom prst="roundRect">
+            <a:avLst>
+              <a:gd name="adj" fmla="val 24000"/>
+            </a:avLst>
+          </a:prstGeom>
+          <a:solidFill>
+            <a:srgbClr val="FFFFFF"/>
+          </a:solidFill>
+          <a:ln w="5080">
+            <a:solidFill>
+              <a:srgbClr val="DADCE0"/>
+            </a:solidFill>
+          </a:ln>
+        </p:spPr>
+        <p:txBody>
+          <a:bodyPr wrap="square" lIns="0" tIns="0" rIns="0" bIns="0" rtlCol="0" anchor="ctr"/>
+          <a:lstStyle/>
+          <a:p>
+            <a:pPr algn="ctr" indent="0" marL="0">
+              <a:buNone/>
+            </a:pPr>
+            <a:r>
+              <a:rPr lang="en-US" sz="420" b="1" dirty="0">
+                <a:solidFill>
+                  <a:srgbClr val="202124"/>
+                </a:solidFill>
+                <a:latin typeface="Arial" pitchFamily="34" charset="0"/>
+                <a:ea typeface="Arial" pitchFamily="34" charset="-122"/>
+                <a:cs typeface="Arial" pitchFamily="34" charset="-120"/>
+              </a:rPr>
+              <a:t>Request</a:t>
+            </a:r>
+            <a:endParaRPr lang="en-US" sz="420" dirty="0"/>
+          </a:p>
+        </p:txBody>
+      </p:sp>
+      <p:sp>
+        <p:nvSpPr>
+          <p:cNvPr id="163" name="Text 141"/>
+          <p:cNvSpPr/>
+          <p:nvPr/>
+        </p:nvSpPr>
+        <p:spPr>
+          <a:xfrm>
+            <a:off x="5531206" y="2823667"/>
+            <a:ext cx="347472" cy="114300"/>
+          </a:xfrm>
+          <a:prstGeom prst="roundRect">
+            <a:avLst>
+              <a:gd name="adj" fmla="val 24000"/>
+            </a:avLst>
+          </a:prstGeom>
+          <a:solidFill>
+            <a:srgbClr val="FFFFFF"/>
+          </a:solidFill>
+          <a:ln w="5080">
+            <a:solidFill>
+              <a:srgbClr val="DADCE0"/>
+            </a:solidFill>
+          </a:ln>
+        </p:spPr>
+        <p:txBody>
+          <a:bodyPr wrap="square" lIns="0" tIns="0" rIns="0" bIns="0" rtlCol="0" anchor="ctr"/>
+          <a:lstStyle/>
+          <a:p>
+            <a:pPr algn="ctr" indent="0" marL="0">
+              <a:buNone/>
+            </a:pPr>
+            <a:r>
+              <a:rPr lang="en-US" sz="420" b="1" dirty="0">
+                <a:solidFill>
+                  <a:srgbClr val="202124"/>
+                </a:solidFill>
+                <a:latin typeface="Arial" pitchFamily="34" charset="0"/>
+                <a:ea typeface="Arial" pitchFamily="34" charset="-122"/>
+                <a:cs typeface="Arial" pitchFamily="34" charset="-120"/>
+              </a:rPr>
+              <a:t>Request</a:t>
+            </a:r>
+            <a:endParaRPr lang="en-US" sz="420" dirty="0"/>
           </a:p>
         </p:txBody>
       </p:sp>
@@ -7657,8 +7488,8 @@
         </p:nvSpPr>
         <p:spPr>
           <a:xfrm>
-            <a:off x="749808" y="621792"/>
-            <a:ext cx="10680192" cy="219456"/>
+            <a:off x="749808" y="603504"/>
+            <a:ext cx="10680192" cy="201168"/>
           </a:xfrm>
           <a:prstGeom prst="rect">
             <a:avLst/>
@@ -7674,7 +7505,7 @@
               <a:buNone/>
             </a:pPr>
             <a:r>
-              <a:rPr lang="en-US" sz="940" dirty="0">
+              <a:rPr lang="en-US" sz="920" dirty="0">
                 <a:solidFill>
                   <a:srgbClr val="3C4043"/>
                 </a:solidFill>
@@ -7684,7 +7515,7 @@
               </a:rPr>
               <a:t>The architecture consists of the following components:</a:t>
             </a:r>
-            <a:endParaRPr lang="en-US" sz="940" dirty="0"/>
+            <a:endParaRPr lang="en-US" sz="920" dirty="0"/>
           </a:p>
         </p:txBody>
       </p:sp>
@@ -7696,8 +7527,8 @@
         </p:nvSpPr>
         <p:spPr>
           <a:xfrm>
-            <a:off x="749808" y="877824"/>
-            <a:ext cx="2889504" cy="274320"/>
+            <a:off x="749808" y="841248"/>
+            <a:ext cx="2889504" cy="256032"/>
           </a:xfrm>
           <a:prstGeom prst="rect">
             <a:avLst/>
@@ -7721,8 +7552,8 @@
         </p:nvSpPr>
         <p:spPr>
           <a:xfrm>
-            <a:off x="841248" y="877824"/>
-            <a:ext cx="2706624" cy="274320"/>
+            <a:off x="841248" y="841248"/>
+            <a:ext cx="2706624" cy="256032"/>
           </a:xfrm>
           <a:prstGeom prst="rect">
             <a:avLst/>
@@ -7760,8 +7591,8 @@
         </p:nvSpPr>
         <p:spPr>
           <a:xfrm>
-            <a:off x="3639312" y="877824"/>
-            <a:ext cx="7790688" cy="274320"/>
+            <a:off x="3639312" y="841248"/>
+            <a:ext cx="7790688" cy="256032"/>
           </a:xfrm>
           <a:prstGeom prst="rect">
             <a:avLst/>
@@ -7785,8 +7616,8 @@
         </p:nvSpPr>
         <p:spPr>
           <a:xfrm>
-            <a:off x="3749040" y="877824"/>
-            <a:ext cx="7571232" cy="274320"/>
+            <a:off x="3749040" y="841248"/>
+            <a:ext cx="7571232" cy="256032"/>
           </a:xfrm>
           <a:prstGeom prst="rect">
             <a:avLst/>
@@ -7824,8 +7655,8 @@
         </p:nvSpPr>
         <p:spPr>
           <a:xfrm>
-            <a:off x="749808" y="1152144"/>
-            <a:ext cx="2889504" cy="296266"/>
+            <a:off x="749808" y="1097280"/>
+            <a:ext cx="2889504" cy="338328"/>
           </a:xfrm>
           <a:prstGeom prst="rect">
             <a:avLst/>
@@ -7849,8 +7680,8 @@
         </p:nvSpPr>
         <p:spPr>
           <a:xfrm>
-            <a:off x="841248" y="1170432"/>
-            <a:ext cx="2706624" cy="259690"/>
+            <a:off x="841248" y="1115568"/>
+            <a:ext cx="2706624" cy="301752"/>
           </a:xfrm>
           <a:prstGeom prst="rect">
             <a:avLst/>
@@ -7859,14 +7690,16 @@
           <a:ln/>
         </p:spPr>
         <p:txBody>
-          <a:bodyPr wrap="square" rtlCol="0" anchor="ctr"/>
-          <a:lstStyle/>
-          <a:p>
-            <a:pPr indent="0" marL="0">
-              <a:buNone/>
-            </a:pPr>
-            <a:r>
-              <a:rPr lang="en-US" sz="780" b="1" dirty="0">
+          <a:bodyPr wrap="square" rtlCol="0" anchor="ctr">
+            <a:normAutofit/>
+          </a:bodyPr>
+          <a:lstStyle/>
+          <a:p>
+            <a:pPr indent="0" marL="0">
+              <a:buNone/>
+            </a:pPr>
+            <a:r>
+              <a:rPr lang="en-US" sz="750" b="1" dirty="0">
                 <a:solidFill>
                   <a:srgbClr val="202124"/>
                 </a:solidFill>
@@ -7881,7 +7714,7 @@
               <a:buNone/>
             </a:pPr>
             <a:r>
-              <a:rPr lang="en-US" sz="670" dirty="0">
+              <a:rPr lang="en-US" sz="650" dirty="0">
                 <a:solidFill>
                   <a:srgbClr val="5F6368"/>
                 </a:solidFill>
@@ -7889,9 +7722,9 @@
                 <a:ea typeface="Arial" pitchFamily="34" charset="-122"/>
                 <a:cs typeface="Arial" pitchFamily="34" charset="-120"/>
               </a:rPr>
-              <a:t>Outer security and governance boundary that prevents unauthorized data exfiltration.</a:t>
-            </a:r>
-            <a:endParaRPr lang="en-US" sz="780" dirty="0"/>
+              <a:t>Outer security and governance boundary that prevents unauthorized data.</a:t>
+            </a:r>
+            <a:endParaRPr lang="en-US" sz="750" dirty="0"/>
           </a:p>
         </p:txBody>
       </p:sp>
@@ -7903,8 +7736,8 @@
         </p:nvSpPr>
         <p:spPr>
           <a:xfrm>
-            <a:off x="3639312" y="1152144"/>
-            <a:ext cx="7790688" cy="296266"/>
+            <a:off x="3639312" y="1097280"/>
+            <a:ext cx="7790688" cy="338328"/>
           </a:xfrm>
           <a:prstGeom prst="rect">
             <a:avLst/>
@@ -7928,8 +7761,8 @@
         </p:nvSpPr>
         <p:spPr>
           <a:xfrm>
-            <a:off x="3749040" y="1170432"/>
-            <a:ext cx="7571232" cy="259690"/>
+            <a:off x="3749040" y="1115568"/>
+            <a:ext cx="7571232" cy="301752"/>
           </a:xfrm>
           <a:prstGeom prst="rect">
             <a:avLst/>
@@ -7938,14 +7771,19 @@
           <a:ln/>
         </p:spPr>
         <p:txBody>
-          <a:bodyPr wrap="square" rtlCol="0" anchor="ctr"/>
-          <a:lstStyle/>
-          <a:p>
-            <a:pPr indent="0" marL="0">
-              <a:buNone/>
-            </a:pPr>
-            <a:r>
-              <a:rPr lang="en-US" sz="720" b="1" dirty="0">
+          <a:bodyPr wrap="square" rtlCol="0" anchor="ctr">
+            <a:normAutofit/>
+          </a:bodyPr>
+          <a:lstStyle/>
+          <a:p>
+            <a:pPr indent="0" marL="0">
+              <a:lnSpc>
+                <a:spcPct val="102000"/>
+              </a:lnSpc>
+              <a:buNone/>
+            </a:pPr>
+            <a:r>
+              <a:rPr lang="en-US" sz="690" b="1" dirty="0">
                 <a:solidFill>
                   <a:srgbClr val="202124"/>
                 </a:solidFill>
@@ -7956,10 +7794,13 @@
               <a:t>• Shared GCP Project: cymbal-pooled-saas-prod: </a:t>
             </a:r>
             <a:pPr indent="0" marL="0">
-              <a:buNone/>
-            </a:pPr>
-            <a:r>
-              <a:rPr lang="en-US" sz="700" dirty="0">
+              <a:lnSpc>
+                <a:spcPct val="102000"/>
+              </a:lnSpc>
+              <a:buNone/>
+            </a:pPr>
+            <a:r>
+              <a:rPr lang="en-US" sz="670" dirty="0">
                 <a:solidFill>
                   <a:srgbClr val="3C4043"/>
                 </a:solidFill>
@@ -7969,7 +7810,7 @@
               </a:rPr>
               <a:t>Enforces VPC Service Controls service perimeters around hub and spoke projects to block unauthorized cross-perimeter data movement.</a:t>
             </a:r>
-            <a:endParaRPr lang="en-US" sz="720" dirty="0"/>
+            <a:endParaRPr lang="en-US" sz="690" dirty="0"/>
           </a:p>
         </p:txBody>
       </p:sp>
@@ -7981,8 +7822,8 @@
         </p:nvSpPr>
         <p:spPr>
           <a:xfrm>
-            <a:off x="749808" y="1448410"/>
-            <a:ext cx="2889504" cy="786384"/>
+            <a:off x="749808" y="1435608"/>
+            <a:ext cx="2889504" cy="822960"/>
           </a:xfrm>
           <a:prstGeom prst="rect">
             <a:avLst/>
@@ -8006,8 +7847,8 @@
         </p:nvSpPr>
         <p:spPr>
           <a:xfrm>
-            <a:off x="841248" y="1466698"/>
-            <a:ext cx="2706624" cy="749808"/>
+            <a:off x="841248" y="1453896"/>
+            <a:ext cx="2706624" cy="786384"/>
           </a:xfrm>
           <a:prstGeom prst="rect">
             <a:avLst/>
@@ -8016,14 +7857,16 @@
           <a:ln/>
         </p:spPr>
         <p:txBody>
-          <a:bodyPr wrap="square" rtlCol="0" anchor="ctr"/>
-          <a:lstStyle/>
-          <a:p>
-            <a:pPr indent="0" marL="0">
-              <a:buNone/>
-            </a:pPr>
-            <a:r>
-              <a:rPr lang="en-US" sz="780" b="1" dirty="0">
+          <a:bodyPr wrap="square" rtlCol="0" anchor="ctr">
+            <a:normAutofit/>
+          </a:bodyPr>
+          <a:lstStyle/>
+          <a:p>
+            <a:pPr indent="0" marL="0">
+              <a:buNone/>
+            </a:pPr>
+            <a:r>
+              <a:rPr lang="en-US" sz="750" b="1" dirty="0">
                 <a:solidFill>
                   <a:srgbClr val="202124"/>
                 </a:solidFill>
@@ -8038,7 +7881,7 @@
               <a:buNone/>
             </a:pPr>
             <a:r>
-              <a:rPr lang="en-US" sz="670" dirty="0">
+              <a:rPr lang="en-US" sz="650" dirty="0">
                 <a:solidFill>
                   <a:srgbClr val="5F6368"/>
                 </a:solidFill>
@@ -8048,7 +7891,7 @@
               </a:rPr>
               <a:t>Centralized ingress and control plane managing edge security, identity verification, and request routing.</a:t>
             </a:r>
-            <a:endParaRPr lang="en-US" sz="780" dirty="0"/>
+            <a:endParaRPr lang="en-US" sz="750" dirty="0"/>
           </a:p>
         </p:txBody>
       </p:sp>
@@ -8060,8 +7903,8 @@
         </p:nvSpPr>
         <p:spPr>
           <a:xfrm>
-            <a:off x="3639312" y="1448410"/>
-            <a:ext cx="7790688" cy="786384"/>
+            <a:off x="3639312" y="1435608"/>
+            <a:ext cx="7790688" cy="822960"/>
           </a:xfrm>
           <a:prstGeom prst="rect">
             <a:avLst/>
@@ -8085,8 +7928,8 @@
         </p:nvSpPr>
         <p:spPr>
           <a:xfrm>
-            <a:off x="3749040" y="1466698"/>
-            <a:ext cx="7571232" cy="749808"/>
+            <a:off x="3749040" y="1453896"/>
+            <a:ext cx="7571232" cy="786384"/>
           </a:xfrm>
           <a:prstGeom prst="rect">
             <a:avLst/>
@@ -8095,14 +7938,19 @@
           <a:ln/>
         </p:spPr>
         <p:txBody>
-          <a:bodyPr wrap="square" rtlCol="0" anchor="ctr"/>
-          <a:lstStyle/>
-          <a:p>
-            <a:pPr indent="0" marL="0">
-              <a:buNone/>
-            </a:pPr>
-            <a:r>
-              <a:rPr lang="en-US" sz="720" b="1" dirty="0">
+          <a:bodyPr wrap="square" rtlCol="0" anchor="ctr">
+            <a:normAutofit/>
+          </a:bodyPr>
+          <a:lstStyle/>
+          <a:p>
+            <a:pPr indent="0" marL="0">
+              <a:lnSpc>
+                <a:spcPct val="102000"/>
+              </a:lnSpc>
+              <a:buNone/>
+            </a:pPr>
+            <a:r>
+              <a:rPr lang="en-US" sz="690" b="1" dirty="0">
                 <a:solidFill>
                   <a:srgbClr val="202124"/>
                 </a:solidFill>
@@ -8113,10 +7961,13 @@
               <a:t>• External Application Load Balancer: </a:t>
             </a:r>
             <a:pPr indent="0" marL="0">
-              <a:buNone/>
-            </a:pPr>
-            <a:r>
-              <a:rPr lang="en-US" sz="700" dirty="0">
+              <a:lnSpc>
+                <a:spcPct val="102000"/>
+              </a:lnSpc>
+              <a:buNone/>
+            </a:pPr>
+            <a:r>
+              <a:rPr lang="en-US" sz="670" dirty="0">
                 <a:solidFill>
                   <a:srgbClr val="3C4043"/>
                 </a:solidFill>
@@ -8128,24 +7979,30 @@
 </a:t>
             </a:r>
             <a:pPr indent="0" marL="0">
-              <a:buNone/>
-            </a:pPr>
-            <a:r>
-              <a:rPr lang="en-US" sz="720" b="1" dirty="0">
-                <a:solidFill>
-                  <a:srgbClr val="202124"/>
-                </a:solidFill>
-                <a:latin typeface="Arial" pitchFamily="34" charset="0"/>
-                <a:ea typeface="Arial" pitchFamily="34" charset="-122"/>
-                <a:cs typeface="Arial" pitchFamily="34" charset="-120"/>
-              </a:rPr>
-              <a:t>• Cloud Armor WAF &amp; IAP + OBO Broker: </a:t>
-            </a:r>
-            <a:pPr indent="0" marL="0">
-              <a:buNone/>
-            </a:pPr>
-            <a:r>
-              <a:rPr lang="en-US" sz="700" dirty="0">
+              <a:lnSpc>
+                <a:spcPct val="102000"/>
+              </a:lnSpc>
+              <a:buNone/>
+            </a:pPr>
+            <a:r>
+              <a:rPr lang="en-US" sz="690" b="1" dirty="0">
+                <a:solidFill>
+                  <a:srgbClr val="202124"/>
+                </a:solidFill>
+                <a:latin typeface="Arial" pitchFamily="34" charset="0"/>
+                <a:ea typeface="Arial" pitchFamily="34" charset="-122"/>
+                <a:cs typeface="Arial" pitchFamily="34" charset="-120"/>
+              </a:rPr>
+              <a:t>• Google Cloud Armor &amp; IAP + OBO Broker: </a:t>
+            </a:r>
+            <a:pPr indent="0" marL="0">
+              <a:lnSpc>
+                <a:spcPct val="102000"/>
+              </a:lnSpc>
+              <a:buNone/>
+            </a:pPr>
+            <a:r>
+              <a:rPr lang="en-US" sz="670" dirty="0">
                 <a:solidFill>
                   <a:srgbClr val="3C4043"/>
                 </a:solidFill>
@@ -8157,10 +8014,13 @@
 </a:t>
             </a:r>
             <a:pPr indent="0" marL="0">
-              <a:buNone/>
-            </a:pPr>
-            <a:r>
-              <a:rPr lang="en-US" sz="720" b="1" dirty="0">
+              <a:lnSpc>
+                <a:spcPct val="102000"/>
+              </a:lnSpc>
+              <a:buNone/>
+            </a:pPr>
+            <a:r>
+              <a:rPr lang="en-US" sz="690" b="1" dirty="0">
                 <a:solidFill>
                   <a:srgbClr val="202124"/>
                 </a:solidFill>
@@ -8171,10 +8031,13 @@
               <a:t>• Discovery Engine PDP: </a:t>
             </a:r>
             <a:pPr indent="0" marL="0">
-              <a:buNone/>
-            </a:pPr>
-            <a:r>
-              <a:rPr lang="en-US" sz="700" dirty="0">
+              <a:lnSpc>
+                <a:spcPct val="102000"/>
+              </a:lnSpc>
+              <a:buNone/>
+            </a:pPr>
+            <a:r>
+              <a:rPr lang="en-US" sz="670" dirty="0">
                 <a:solidFill>
                   <a:srgbClr val="3C4043"/>
                 </a:solidFill>
@@ -8186,10 +8049,13 @@
 </a:t>
             </a:r>
             <a:pPr indent="0" marL="0">
-              <a:buNone/>
-            </a:pPr>
-            <a:r>
-              <a:rPr lang="en-US" sz="720" b="1" dirty="0">
+              <a:lnSpc>
+                <a:spcPct val="102000"/>
+              </a:lnSpc>
+              <a:buNone/>
+            </a:pPr>
+            <a:r>
+              <a:rPr lang="en-US" sz="690" b="1" dirty="0">
                 <a:solidFill>
                   <a:srgbClr val="202124"/>
                 </a:solidFill>
@@ -8200,10 +8066,13 @@
               <a:t>• ADK Callback Gate: </a:t>
             </a:r>
             <a:pPr indent="0" marL="0">
-              <a:buNone/>
-            </a:pPr>
-            <a:r>
-              <a:rPr lang="en-US" sz="700" dirty="0">
+              <a:lnSpc>
+                <a:spcPct val="102000"/>
+              </a:lnSpc>
+              <a:buNone/>
+            </a:pPr>
+            <a:r>
+              <a:rPr lang="en-US" sz="670" dirty="0">
                 <a:solidFill>
                   <a:srgbClr val="3C4043"/>
                 </a:solidFill>
@@ -8213,7 +8082,7 @@
               </a:rPr>
               <a:t>Serverless routing service that validates caller tokens and dispatches requests to the target execution spoke.</a:t>
             </a:r>
-            <a:endParaRPr lang="en-US" sz="720" dirty="0"/>
+            <a:endParaRPr lang="en-US" sz="690" dirty="0"/>
           </a:p>
         </p:txBody>
       </p:sp>
@@ -8225,8 +8094,8 @@
         </p:nvSpPr>
         <p:spPr>
           <a:xfrm>
-            <a:off x="749808" y="2234794"/>
-            <a:ext cx="2889504" cy="615391"/>
+            <a:off x="749808" y="2258568"/>
+            <a:ext cx="2889504" cy="822960"/>
           </a:xfrm>
           <a:prstGeom prst="rect">
             <a:avLst/>
@@ -8250,8 +8119,8 @@
         </p:nvSpPr>
         <p:spPr>
           <a:xfrm>
-            <a:off x="841248" y="2253082"/>
-            <a:ext cx="2706624" cy="578815"/>
+            <a:off x="841248" y="2276856"/>
+            <a:ext cx="2706624" cy="786384"/>
           </a:xfrm>
           <a:prstGeom prst="rect">
             <a:avLst/>
@@ -8260,14 +8129,16 @@
           <a:ln/>
         </p:spPr>
         <p:txBody>
-          <a:bodyPr wrap="square" rtlCol="0" anchor="ctr"/>
-          <a:lstStyle/>
-          <a:p>
-            <a:pPr indent="0" marL="0">
-              <a:buNone/>
-            </a:pPr>
-            <a:r>
-              <a:rPr lang="en-US" sz="780" b="1" dirty="0">
+          <a:bodyPr wrap="square" rtlCol="0" anchor="ctr">
+            <a:normAutofit/>
+          </a:bodyPr>
+          <a:lstStyle/>
+          <a:p>
+            <a:pPr indent="0" marL="0">
+              <a:buNone/>
+            </a:pPr>
+            <a:r>
+              <a:rPr lang="en-US" sz="750" b="1" dirty="0">
                 <a:solidFill>
                   <a:srgbClr val="202124"/>
                 </a:solidFill>
@@ -8282,7 +8153,7 @@
               <a:buNone/>
             </a:pPr>
             <a:r>
-              <a:rPr lang="en-US" sz="670" dirty="0">
+              <a:rPr lang="en-US" sz="650" dirty="0">
                 <a:solidFill>
                   <a:srgbClr val="5F6368"/>
                 </a:solidFill>
@@ -8292,7 +8163,7 @@
               </a:rPr>
               <a:t>Dedicated governance plane providing unified security posture, cryptographic key management, and OpenTelemetry observability.</a:t>
             </a:r>
-            <a:endParaRPr lang="en-US" sz="780" dirty="0"/>
+            <a:endParaRPr lang="en-US" sz="750" dirty="0"/>
           </a:p>
         </p:txBody>
       </p:sp>
@@ -8304,8 +8175,8 @@
         </p:nvSpPr>
         <p:spPr>
           <a:xfrm>
-            <a:off x="3639312" y="2234794"/>
-            <a:ext cx="7790688" cy="615391"/>
+            <a:off x="3639312" y="2258568"/>
+            <a:ext cx="7790688" cy="822960"/>
           </a:xfrm>
           <a:prstGeom prst="rect">
             <a:avLst/>
@@ -8329,8 +8200,8 @@
         </p:nvSpPr>
         <p:spPr>
           <a:xfrm>
-            <a:off x="3749040" y="2253082"/>
-            <a:ext cx="7571232" cy="578815"/>
+            <a:off x="3749040" y="2276856"/>
+            <a:ext cx="7571232" cy="786384"/>
           </a:xfrm>
           <a:prstGeom prst="rect">
             <a:avLst/>
@@ -8339,14 +8210,19 @@
           <a:ln/>
         </p:spPr>
         <p:txBody>
-          <a:bodyPr wrap="square" rtlCol="0" anchor="ctr"/>
-          <a:lstStyle/>
-          <a:p>
-            <a:pPr indent="0" marL="0">
-              <a:buNone/>
-            </a:pPr>
-            <a:r>
-              <a:rPr lang="en-US" sz="720" b="1" dirty="0">
+          <a:bodyPr wrap="square" rtlCol="0" anchor="ctr">
+            <a:normAutofit/>
+          </a:bodyPr>
+          <a:lstStyle/>
+          <a:p>
+            <a:pPr indent="0" marL="0">
+              <a:lnSpc>
+                <a:spcPct val="102000"/>
+              </a:lnSpc>
+              <a:buNone/>
+            </a:pPr>
+            <a:r>
+              <a:rPr lang="en-US" sz="690" b="1" dirty="0">
                 <a:solidFill>
                   <a:srgbClr val="202124"/>
                 </a:solidFill>
@@ -8357,10 +8233,13 @@
               <a:t>• ContextCacheConfig: </a:t>
             </a:r>
             <a:pPr indent="0" marL="0">
-              <a:buNone/>
-            </a:pPr>
-            <a:r>
-              <a:rPr lang="en-US" sz="700" dirty="0">
+              <a:lnSpc>
+                <a:spcPct val="102000"/>
+              </a:lnSpc>
+              <a:buNone/>
+            </a:pPr>
+            <a:r>
+              <a:rPr lang="en-US" sz="670" dirty="0">
                 <a:solidFill>
                   <a:srgbClr val="3C4043"/>
                 </a:solidFill>
@@ -8372,10 +8251,13 @@
 </a:t>
             </a:r>
             <a:pPr indent="0" marL="0">
-              <a:buNone/>
-            </a:pPr>
-            <a:r>
-              <a:rPr lang="en-US" sz="720" b="1" dirty="0">
+              <a:lnSpc>
+                <a:spcPct val="102000"/>
+              </a:lnSpc>
+              <a:buNone/>
+            </a:pPr>
+            <a:r>
+              <a:rPr lang="en-US" sz="690" b="1" dirty="0">
                 <a:solidFill>
                   <a:srgbClr val="202124"/>
                 </a:solidFill>
@@ -8386,10 +8268,13 @@
               <a:t>• Memorystore Valkey: </a:t>
             </a:r>
             <a:pPr indent="0" marL="0">
-              <a:buNone/>
-            </a:pPr>
-            <a:r>
-              <a:rPr lang="en-US" sz="700" dirty="0">
+              <a:lnSpc>
+                <a:spcPct val="102000"/>
+              </a:lnSpc>
+              <a:buNone/>
+            </a:pPr>
+            <a:r>
+              <a:rPr lang="en-US" sz="670" dirty="0">
                 <a:solidFill>
                   <a:srgbClr val="3C4043"/>
                 </a:solidFill>
@@ -8401,10 +8286,13 @@
 </a:t>
             </a:r>
             <a:pPr indent="0" marL="0">
-              <a:buNone/>
-            </a:pPr>
-            <a:r>
-              <a:rPr lang="en-US" sz="720" b="1" dirty="0">
+              <a:lnSpc>
+                <a:spcPct val="102000"/>
+              </a:lnSpc>
+              <a:buNone/>
+            </a:pPr>
+            <a:r>
+              <a:rPr lang="en-US" sz="690" b="1" dirty="0">
                 <a:solidFill>
                   <a:srgbClr val="202124"/>
                 </a:solidFill>
@@ -8415,10 +8303,13 @@
               <a:t>• BigQuery OTel Sink: </a:t>
             </a:r>
             <a:pPr indent="0" marL="0">
-              <a:buNone/>
-            </a:pPr>
-            <a:r>
-              <a:rPr lang="en-US" sz="700" dirty="0">
+              <a:lnSpc>
+                <a:spcPct val="102000"/>
+              </a:lnSpc>
+              <a:buNone/>
+            </a:pPr>
+            <a:r>
+              <a:rPr lang="en-US" sz="670" dirty="0">
                 <a:solidFill>
                   <a:srgbClr val="3C4043"/>
                 </a:solidFill>
@@ -8428,7 +8319,7 @@
               </a:rPr>
               <a:t>Aggregates audit logs, execution traces, and OpenTelemetry FinOps telemetry into BigQuery.</a:t>
             </a:r>
-            <a:endParaRPr lang="en-US" sz="720" dirty="0"/>
+            <a:endParaRPr lang="en-US" sz="690" dirty="0"/>
           </a:p>
         </p:txBody>
       </p:sp>
@@ -8440,8 +8331,8 @@
         </p:nvSpPr>
         <p:spPr>
           <a:xfrm>
-            <a:off x="749808" y="2850185"/>
-            <a:ext cx="2889504" cy="296266"/>
+            <a:off x="749808" y="3081528"/>
+            <a:ext cx="2889504" cy="338328"/>
           </a:xfrm>
           <a:prstGeom prst="rect">
             <a:avLst/>
@@ -8465,8 +8356,8 @@
         </p:nvSpPr>
         <p:spPr>
           <a:xfrm>
-            <a:off x="841248" y="2868473"/>
-            <a:ext cx="2706624" cy="259690"/>
+            <a:off x="841248" y="3099816"/>
+            <a:ext cx="2706624" cy="301752"/>
           </a:xfrm>
           <a:prstGeom prst="rect">
             <a:avLst/>
@@ -8475,14 +8366,16 @@
           <a:ln/>
         </p:spPr>
         <p:txBody>
-          <a:bodyPr wrap="square" rtlCol="0" anchor="ctr"/>
-          <a:lstStyle/>
-          <a:p>
-            <a:pPr indent="0" marL="0">
-              <a:buNone/>
-            </a:pPr>
-            <a:r>
-              <a:rPr lang="en-US" sz="780" b="1" dirty="0">
+          <a:bodyPr wrap="square" rtlCol="0" anchor="ctr">
+            <a:normAutofit/>
+          </a:bodyPr>
+          <a:lstStyle/>
+          <a:p>
+            <a:pPr indent="0" marL="0">
+              <a:buNone/>
+            </a:pPr>
+            <a:r>
+              <a:rPr lang="en-US" sz="750" b="1" dirty="0">
                 <a:solidFill>
                   <a:srgbClr val="202124"/>
                 </a:solidFill>
@@ -8497,7 +8390,7 @@
               <a:buNone/>
             </a:pPr>
             <a:r>
-              <a:rPr lang="en-US" sz="670" dirty="0">
+              <a:rPr lang="en-US" sz="650" dirty="0">
                 <a:solidFill>
                   <a:srgbClr val="5F6368"/>
                 </a:solidFill>
@@ -8507,7 +8400,7 @@
               </a:rPr>
               <a:t>Identity and resource isolation boundary restricting principal access so workloads.</a:t>
             </a:r>
-            <a:endParaRPr lang="en-US" sz="780" dirty="0"/>
+            <a:endParaRPr lang="en-US" sz="750" dirty="0"/>
           </a:p>
         </p:txBody>
       </p:sp>
@@ -8519,8 +8412,8 @@
         </p:nvSpPr>
         <p:spPr>
           <a:xfrm>
-            <a:off x="3639312" y="2850185"/>
-            <a:ext cx="7790688" cy="296266"/>
+            <a:off x="3639312" y="3081528"/>
+            <a:ext cx="7790688" cy="338328"/>
           </a:xfrm>
           <a:prstGeom prst="rect">
             <a:avLst/>
@@ -8544,8 +8437,8 @@
         </p:nvSpPr>
         <p:spPr>
           <a:xfrm>
-            <a:off x="3749040" y="2868473"/>
-            <a:ext cx="7571232" cy="259690"/>
+            <a:off x="3749040" y="3099816"/>
+            <a:ext cx="7571232" cy="301752"/>
           </a:xfrm>
           <a:prstGeom prst="rect">
             <a:avLst/>
@@ -8554,14 +8447,19 @@
           <a:ln/>
         </p:spPr>
         <p:txBody>
-          <a:bodyPr wrap="square" rtlCol="0" anchor="ctr"/>
-          <a:lstStyle/>
-          <a:p>
-            <a:pPr indent="0" marL="0">
-              <a:buNone/>
-            </a:pPr>
-            <a:r>
-              <a:rPr lang="en-US" sz="720" b="1" dirty="0">
+          <a:bodyPr wrap="square" rtlCol="0" anchor="ctr">
+            <a:normAutofit/>
+          </a:bodyPr>
+          <a:lstStyle/>
+          <a:p>
+            <a:pPr indent="0" marL="0">
+              <a:lnSpc>
+                <a:spcPct val="102000"/>
+              </a:lnSpc>
+              <a:buNone/>
+            </a:pPr>
+            <a:r>
+              <a:rPr lang="en-US" sz="690" b="1" dirty="0">
                 <a:solidFill>
                   <a:srgbClr val="202124"/>
                 </a:solidFill>
@@ -8572,10 +8470,13 @@
               <a:t>• Shared VPC • 5-Hop Cryptographic Context Chain: </a:t>
             </a:r>
             <a:pPr indent="0" marL="0">
-              <a:buNone/>
-            </a:pPr>
-            <a:r>
-              <a:rPr lang="en-US" sz="700" dirty="0">
+              <a:lnSpc>
+                <a:spcPct val="102000"/>
+              </a:lnSpc>
+              <a:buNone/>
+            </a:pPr>
+            <a:r>
+              <a:rPr lang="en-US" sz="670" dirty="0">
                 <a:solidFill>
                   <a:srgbClr val="3C4043"/>
                 </a:solidFill>
@@ -8585,7 +8486,7 @@
               </a:rPr>
               <a:t>Binds IAM Principal Access Boundary (PAB) policies to spoke principals so credentials and tool calls remain strictly scoped to their authorized boundary.</a:t>
             </a:r>
-            <a:endParaRPr lang="en-US" sz="720" dirty="0"/>
+            <a:endParaRPr lang="en-US" sz="690" dirty="0"/>
           </a:p>
         </p:txBody>
       </p:sp>
@@ -8597,8 +8498,8 @@
         </p:nvSpPr>
         <p:spPr>
           <a:xfrm>
-            <a:off x="749808" y="3146450"/>
-            <a:ext cx="2889504" cy="785470"/>
+            <a:off x="749808" y="3419856"/>
+            <a:ext cx="2889504" cy="822960"/>
           </a:xfrm>
           <a:prstGeom prst="rect">
             <a:avLst/>
@@ -8622,8 +8523,8 @@
         </p:nvSpPr>
         <p:spPr>
           <a:xfrm>
-            <a:off x="841248" y="3164738"/>
-            <a:ext cx="2706624" cy="748894"/>
+            <a:off x="841248" y="3438144"/>
+            <a:ext cx="2706624" cy="786384"/>
           </a:xfrm>
           <a:prstGeom prst="rect">
             <a:avLst/>
@@ -8632,14 +8533,16 @@
           <a:ln/>
         </p:spPr>
         <p:txBody>
-          <a:bodyPr wrap="square" rtlCol="0" anchor="ctr"/>
-          <a:lstStyle/>
-          <a:p>
-            <a:pPr indent="0" marL="0">
-              <a:buNone/>
-            </a:pPr>
-            <a:r>
-              <a:rPr lang="en-US" sz="780" b="1" dirty="0">
+          <a:bodyPr wrap="square" rtlCol="0" anchor="ctr">
+            <a:normAutofit/>
+          </a:bodyPr>
+          <a:lstStyle/>
+          <a:p>
+            <a:pPr indent="0" marL="0">
+              <a:buNone/>
+            </a:pPr>
+            <a:r>
+              <a:rPr lang="en-US" sz="750" b="1" dirty="0">
                 <a:solidFill>
                   <a:srgbClr val="202124"/>
                 </a:solidFill>
@@ -8654,7 +8557,7 @@
               <a:buNone/>
             </a:pPr>
             <a:r>
-              <a:rPr lang="en-US" sz="670" dirty="0">
+              <a:rPr lang="en-US" sz="650" dirty="0">
                 <a:solidFill>
                   <a:srgbClr val="5F6368"/>
                 </a:solidFill>
@@ -8664,7 +8567,7 @@
               </a:rPr>
               <a:t>Isolated Google Cloud execution spokes.</a:t>
             </a:r>
-            <a:endParaRPr lang="en-US" sz="780" dirty="0"/>
+            <a:endParaRPr lang="en-US" sz="750" dirty="0"/>
           </a:p>
         </p:txBody>
       </p:sp>
@@ -8676,8 +8579,8 @@
         </p:nvSpPr>
         <p:spPr>
           <a:xfrm>
-            <a:off x="3639312" y="3146450"/>
-            <a:ext cx="7790688" cy="785470"/>
+            <a:off x="3639312" y="3419856"/>
+            <a:ext cx="7790688" cy="822960"/>
           </a:xfrm>
           <a:prstGeom prst="rect">
             <a:avLst/>
@@ -8701,8 +8604,8 @@
         </p:nvSpPr>
         <p:spPr>
           <a:xfrm>
-            <a:off x="3749040" y="3164738"/>
-            <a:ext cx="7571232" cy="748894"/>
+            <a:off x="3749040" y="3438144"/>
+            <a:ext cx="7571232" cy="786384"/>
           </a:xfrm>
           <a:prstGeom prst="rect">
             <a:avLst/>
@@ -8711,14 +8614,19 @@
           <a:ln/>
         </p:spPr>
         <p:txBody>
-          <a:bodyPr wrap="square" rtlCol="0" anchor="ctr"/>
-          <a:lstStyle/>
-          <a:p>
-            <a:pPr indent="0" marL="0">
-              <a:buNone/>
-            </a:pPr>
-            <a:r>
-              <a:rPr lang="en-US" sz="720" b="1" dirty="0">
+          <a:bodyPr wrap="square" rtlCol="0" anchor="ctr">
+            <a:normAutofit/>
+          </a:bodyPr>
+          <a:lstStyle/>
+          <a:p>
+            <a:pPr indent="0" marL="0">
+              <a:lnSpc>
+                <a:spcPct val="102000"/>
+              </a:lnSpc>
+              <a:buNone/>
+            </a:pPr>
+            <a:r>
+              <a:rPr lang="en-US" sz="690" b="1" dirty="0">
                 <a:solidFill>
                   <a:srgbClr val="202124"/>
                 </a:solidFill>
@@ -8729,10 +8637,13 @@
               <a:t>• Pooled gVisor Pod: </a:t>
             </a:r>
             <a:pPr indent="0" marL="0">
-              <a:buNone/>
-            </a:pPr>
-            <a:r>
-              <a:rPr lang="en-US" sz="700" dirty="0">
+              <a:lnSpc>
+                <a:spcPct val="102000"/>
+              </a:lnSpc>
+              <a:buNone/>
+            </a:pPr>
+            <a:r>
+              <a:rPr lang="en-US" sz="670" dirty="0">
                 <a:solidFill>
                   <a:srgbClr val="3C4043"/>
                 </a:solidFill>
@@ -8744,10 +8655,13 @@
 </a:t>
             </a:r>
             <a:pPr indent="0" marL="0">
-              <a:buNone/>
-            </a:pPr>
-            <a:r>
-              <a:rPr lang="en-US" sz="720" b="1" dirty="0">
+              <a:lnSpc>
+                <a:spcPct val="102000"/>
+              </a:lnSpc>
+              <a:buNone/>
+            </a:pPr>
+            <a:r>
+              <a:rPr lang="en-US" sz="690" b="1" dirty="0">
                 <a:solidFill>
                   <a:srgbClr val="202124"/>
                 </a:solidFill>
@@ -8758,10 +8672,13 @@
               <a:t>• Model Armor: </a:t>
             </a:r>
             <a:pPr indent="0" marL="0">
-              <a:buNone/>
-            </a:pPr>
-            <a:r>
-              <a:rPr lang="en-US" sz="700" dirty="0">
+              <a:lnSpc>
+                <a:spcPct val="102000"/>
+              </a:lnSpc>
+              <a:buNone/>
+            </a:pPr>
+            <a:r>
+              <a:rPr lang="en-US" sz="670" dirty="0">
                 <a:solidFill>
                   <a:srgbClr val="3C4043"/>
                 </a:solidFill>
@@ -8773,10 +8690,13 @@
 </a:t>
             </a:r>
             <a:pPr indent="0" marL="0">
-              <a:buNone/>
-            </a:pPr>
-            <a:r>
-              <a:rPr lang="en-US" sz="720" b="1" dirty="0">
+              <a:lnSpc>
+                <a:spcPct val="102000"/>
+              </a:lnSpc>
+              <a:buNone/>
+            </a:pPr>
+            <a:r>
+              <a:rPr lang="en-US" sz="690" b="1" dirty="0">
                 <a:solidFill>
                   <a:srgbClr val="202124"/>
                 </a:solidFill>
@@ -8787,10 +8707,13 @@
               <a:t>• 3LO Workspace/Jira: </a:t>
             </a:r>
             <a:pPr indent="0" marL="0">
-              <a:buNone/>
-            </a:pPr>
-            <a:r>
-              <a:rPr lang="en-US" sz="700" dirty="0">
+              <a:lnSpc>
+                <a:spcPct val="102000"/>
+              </a:lnSpc>
+              <a:buNone/>
+            </a:pPr>
+            <a:r>
+              <a:rPr lang="en-US" sz="670" dirty="0">
                 <a:solidFill>
                   <a:srgbClr val="3C4043"/>
                 </a:solidFill>
@@ -8802,10 +8725,13 @@
 </a:t>
             </a:r>
             <a:pPr indent="0" marL="0">
-              <a:buNone/>
-            </a:pPr>
-            <a:r>
-              <a:rPr lang="en-US" sz="720" b="1" dirty="0">
+              <a:lnSpc>
+                <a:spcPct val="102000"/>
+              </a:lnSpc>
+              <a:buNone/>
+            </a:pPr>
+            <a:r>
+              <a:rPr lang="en-US" sz="690" b="1" dirty="0">
                 <a:solidFill>
                   <a:srgbClr val="202124"/>
                 </a:solidFill>
@@ -8816,10 +8742,13 @@
               <a:t>• Shared AlloyDB RLS: </a:t>
             </a:r>
             <a:pPr indent="0" marL="0">
-              <a:buNone/>
-            </a:pPr>
-            <a:r>
-              <a:rPr lang="en-US" sz="700" dirty="0">
+              <a:lnSpc>
+                <a:spcPct val="102000"/>
+              </a:lnSpc>
+              <a:buNone/>
+            </a:pPr>
+            <a:r>
+              <a:rPr lang="en-US" sz="670" dirty="0">
                 <a:solidFill>
                   <a:srgbClr val="3C4043"/>
                 </a:solidFill>
@@ -8829,7 +8758,7 @@
               </a:rPr>
               <a:t>Isolated persistence layer enforcing access boundaries, vector namespaces, and encryption at rest.</a:t>
             </a:r>
-            <a:endParaRPr lang="en-US" sz="720" dirty="0"/>
+            <a:endParaRPr lang="en-US" sz="690" dirty="0"/>
           </a:p>
         </p:txBody>
       </p:sp>
@@ -8841,7 +8770,7 @@
         </p:nvSpPr>
         <p:spPr>
           <a:xfrm>
-            <a:off x="749808" y="4041648"/>
+            <a:off x="749808" y="4315968"/>
             <a:ext cx="10680192" cy="0"/>
           </a:xfrm>
           <a:prstGeom prst="line">
@@ -8864,8 +8793,8 @@
         </p:nvSpPr>
         <p:spPr>
           <a:xfrm>
-            <a:off x="749808" y="4114800"/>
-            <a:ext cx="10680192" cy="256032"/>
+            <a:off x="749808" y="4370832"/>
+            <a:ext cx="10680192" cy="237744"/>
           </a:xfrm>
           <a:prstGeom prst="rect">
             <a:avLst/>
@@ -8881,7 +8810,7 @@
               <a:buNone/>
             </a:pPr>
             <a:r>
-              <a:rPr lang="en-US" sz="1300" dirty="0">
+              <a:rPr lang="en-US" sz="1250" dirty="0">
                 <a:solidFill>
                   <a:srgbClr val="202124"/>
                 </a:solidFill>
@@ -8891,7 +8820,7 @@
               </a:rPr>
               <a:t>Agentic flow</a:t>
             </a:r>
-            <a:endParaRPr lang="en-US" sz="1300" dirty="0"/>
+            <a:endParaRPr lang="en-US" sz="1250" dirty="0"/>
           </a:p>
         </p:txBody>
       </p:sp>
@@ -8903,8 +8832,8 @@
         </p:nvSpPr>
         <p:spPr>
           <a:xfrm>
-            <a:off x="749808" y="4407408"/>
-            <a:ext cx="10680192" cy="2139696"/>
+            <a:off x="749808" y="4626864"/>
+            <a:ext cx="10680192" cy="1901952"/>
           </a:xfrm>
           <a:prstGeom prst="rect">
             <a:avLst/>
@@ -8913,17 +8842,19 @@
           <a:ln/>
         </p:spPr>
         <p:txBody>
-          <a:bodyPr wrap="square" rtlCol="0" anchor="t"/>
-          <a:lstStyle/>
-          <a:p>
-            <a:pPr indent="0" marL="0">
-              <a:lnSpc>
-                <a:spcPct val="108000"/>
-              </a:lnSpc>
-              <a:buNone/>
-            </a:pPr>
-            <a:r>
-              <a:rPr lang="en-US" sz="740" b="1" dirty="0">
+          <a:bodyPr wrap="square" rtlCol="0" anchor="t">
+            <a:normAutofit/>
+          </a:bodyPr>
+          <a:lstStyle/>
+          <a:p>
+            <a:pPr indent="0" marL="0">
+              <a:lnSpc>
+                <a:spcPct val="106000"/>
+              </a:lnSpc>
+              <a:buNone/>
+            </a:pPr>
+            <a:r>
+              <a:rPr lang="en-US" sz="730" b="1" dirty="0">
                 <a:solidFill>
                   <a:srgbClr val="202124"/>
                 </a:solidFill>
@@ -8935,12 +8866,12 @@
             </a:r>
             <a:pPr indent="0" marL="0">
               <a:lnSpc>
-                <a:spcPct val="108000"/>
-              </a:lnSpc>
-              <a:buNone/>
-            </a:pPr>
-            <a:r>
-              <a:rPr lang="en-US" sz="730" dirty="0">
+                <a:spcPct val="106000"/>
+              </a:lnSpc>
+              <a:buNone/>
+            </a:pPr>
+            <a:r>
+              <a:rPr lang="en-US" sz="720" dirty="0">
                 <a:solidFill>
                   <a:srgbClr val="3C4043"/>
                 </a:solidFill>
@@ -8953,12 +8884,12 @@
             </a:r>
             <a:pPr indent="0" marL="0">
               <a:lnSpc>
-                <a:spcPct val="108000"/>
-              </a:lnSpc>
-              <a:buNone/>
-            </a:pPr>
-            <a:r>
-              <a:rPr lang="en-US" sz="740" b="1" dirty="0">
+                <a:spcPct val="106000"/>
+              </a:lnSpc>
+              <a:buNone/>
+            </a:pPr>
+            <a:r>
+              <a:rPr lang="en-US" sz="730" b="1" dirty="0">
                 <a:solidFill>
                   <a:srgbClr val="202124"/>
                 </a:solidFill>
@@ -8970,12 +8901,12 @@
             </a:r>
             <a:pPr indent="0" marL="0">
               <a:lnSpc>
-                <a:spcPct val="108000"/>
-              </a:lnSpc>
-              <a:buNone/>
-            </a:pPr>
-            <a:r>
-              <a:rPr lang="en-US" sz="730" dirty="0">
+                <a:spcPct val="106000"/>
+              </a:lnSpc>
+              <a:buNone/>
+            </a:pPr>
+            <a:r>
+              <a:rPr lang="en-US" sz="720" dirty="0">
                 <a:solidFill>
                   <a:srgbClr val="3C4043"/>
                 </a:solidFill>
@@ -8983,17 +8914,17 @@
                 <a:ea typeface="Arial" pitchFamily="34" charset="-122"/>
                 <a:cs typeface="Arial" pitchFamily="34" charset="-120"/>
               </a:rPr>
-              <a:t>After passing policy and security checks across Cloud Armor WAF, Discovery Engine PDP, and IAP + OBO Broker, the request is forwarded to ADK Callback Gate.
+              <a:t>After passing policy and security checks across Google Cloud Armor, Discovery Engine PDP, and IAP + OBO Broker, the request is forwarded to ADK Callback Gate.
 </a:t>
             </a:r>
             <a:pPr indent="0" marL="0">
               <a:lnSpc>
-                <a:spcPct val="108000"/>
-              </a:lnSpc>
-              <a:buNone/>
-            </a:pPr>
-            <a:r>
-              <a:rPr lang="en-US" sz="740" b="1" dirty="0">
+                <a:spcPct val="106000"/>
+              </a:lnSpc>
+              <a:buNone/>
+            </a:pPr>
+            <a:r>
+              <a:rPr lang="en-US" sz="730" b="1" dirty="0">
                 <a:solidFill>
                   <a:srgbClr val="202124"/>
                 </a:solidFill>
@@ -9005,12 +8936,12 @@
             </a:r>
             <a:pPr indent="0" marL="0">
               <a:lnSpc>
-                <a:spcPct val="108000"/>
-              </a:lnSpc>
-              <a:buNone/>
-            </a:pPr>
-            <a:r>
-              <a:rPr lang="en-US" sz="730" dirty="0">
+                <a:spcPct val="106000"/>
+              </a:lnSpc>
+              <a:buNone/>
+            </a:pPr>
+            <a:r>
+              <a:rPr lang="en-US" sz="720" dirty="0">
                 <a:solidFill>
                   <a:srgbClr val="3C4043"/>
                 </a:solidFill>
@@ -9023,12 +8954,12 @@
             </a:r>
             <a:pPr indent="0" marL="0">
               <a:lnSpc>
-                <a:spcPct val="108000"/>
-              </a:lnSpc>
-              <a:buNone/>
-            </a:pPr>
-            <a:r>
-              <a:rPr lang="en-US" sz="740" b="1" dirty="0">
+                <a:spcPct val="106000"/>
+              </a:lnSpc>
+              <a:buNone/>
+            </a:pPr>
+            <a:r>
+              <a:rPr lang="en-US" sz="730" b="1" dirty="0">
                 <a:solidFill>
                   <a:srgbClr val="202124"/>
                 </a:solidFill>
@@ -9040,12 +8971,12 @@
             </a:r>
             <a:pPr indent="0" marL="0">
               <a:lnSpc>
-                <a:spcPct val="108000"/>
-              </a:lnSpc>
-              <a:buNone/>
-            </a:pPr>
-            <a:r>
-              <a:rPr lang="en-US" sz="730" dirty="0">
+                <a:spcPct val="106000"/>
+              </a:lnSpc>
+              <a:buNone/>
+            </a:pPr>
+            <a:r>
+              <a:rPr lang="en-US" sz="720" dirty="0">
                 <a:solidFill>
                   <a:srgbClr val="3C4043"/>
                 </a:solidFill>
@@ -9058,12 +8989,12 @@
             </a:r>
             <a:pPr indent="0" marL="0">
               <a:lnSpc>
-                <a:spcPct val="108000"/>
-              </a:lnSpc>
-              <a:buNone/>
-            </a:pPr>
-            <a:r>
-              <a:rPr lang="en-US" sz="700" b="1" dirty="0">
+                <a:spcPct val="106000"/>
+              </a:lnSpc>
+              <a:buNone/>
+            </a:pPr>
+            <a:r>
+              <a:rPr lang="en-US" sz="690" b="1" dirty="0">
                 <a:solidFill>
                   <a:srgbClr val="202124"/>
                 </a:solidFill>
@@ -9075,12 +9006,12 @@
             </a:r>
             <a:pPr indent="0" marL="0">
               <a:lnSpc>
-                <a:spcPct val="108000"/>
-              </a:lnSpc>
-              <a:buNone/>
-            </a:pPr>
-            <a:r>
-              <a:rPr lang="en-US" sz="690" dirty="0">
+                <a:spcPct val="106000"/>
+              </a:lnSpc>
+              <a:buNone/>
+            </a:pPr>
+            <a:r>
+              <a:rPr lang="en-US" sz="680" dirty="0">
                 <a:solidFill>
                   <a:srgbClr val="3C4043"/>
                 </a:solidFill>
@@ -9093,12 +9024,12 @@
             </a:r>
             <a:pPr indent="0" marL="0">
               <a:lnSpc>
-                <a:spcPct val="108000"/>
-              </a:lnSpc>
-              <a:buNone/>
-            </a:pPr>
-            <a:r>
-              <a:rPr lang="en-US" sz="700" b="1" dirty="0">
+                <a:spcPct val="106000"/>
+              </a:lnSpc>
+              <a:buNone/>
+            </a:pPr>
+            <a:r>
+              <a:rPr lang="en-US" sz="690" b="1" dirty="0">
                 <a:solidFill>
                   <a:srgbClr val="202124"/>
                 </a:solidFill>
@@ -9110,12 +9041,12 @@
             </a:r>
             <a:pPr indent="0" marL="0">
               <a:lnSpc>
-                <a:spcPct val="108000"/>
-              </a:lnSpc>
-              <a:buNone/>
-            </a:pPr>
-            <a:r>
-              <a:rPr lang="en-US" sz="690" dirty="0">
+                <a:spcPct val="106000"/>
+              </a:lnSpc>
+              <a:buNone/>
+            </a:pPr>
+            <a:r>
+              <a:rPr lang="en-US" sz="680" dirty="0">
                 <a:solidFill>
                   <a:srgbClr val="3C4043"/>
                 </a:solidFill>
@@ -9128,12 +9059,12 @@
             </a:r>
             <a:pPr indent="0" marL="0">
               <a:lnSpc>
-                <a:spcPct val="108000"/>
-              </a:lnSpc>
-              <a:buNone/>
-            </a:pPr>
-            <a:r>
-              <a:rPr lang="en-US" sz="700" b="1" dirty="0">
+                <a:spcPct val="106000"/>
+              </a:lnSpc>
+              <a:buNone/>
+            </a:pPr>
+            <a:r>
+              <a:rPr lang="en-US" sz="690" b="1" dirty="0">
                 <a:solidFill>
                   <a:srgbClr val="202124"/>
                 </a:solidFill>
@@ -9145,12 +9076,12 @@
             </a:r>
             <a:pPr indent="0" marL="0">
               <a:lnSpc>
-                <a:spcPct val="108000"/>
-              </a:lnSpc>
-              <a:buNone/>
-            </a:pPr>
-            <a:r>
-              <a:rPr lang="en-US" sz="690" dirty="0">
+                <a:spcPct val="106000"/>
+              </a:lnSpc>
+              <a:buNone/>
+            </a:pPr>
+            <a:r>
+              <a:rPr lang="en-US" sz="680" dirty="0">
                 <a:solidFill>
                   <a:srgbClr val="3C4043"/>
                 </a:solidFill>
@@ -9163,12 +9094,12 @@
             </a:r>
             <a:pPr indent="0" marL="0">
               <a:lnSpc>
-                <a:spcPct val="108000"/>
-              </a:lnSpc>
-              <a:buNone/>
-            </a:pPr>
-            <a:r>
-              <a:rPr lang="en-US" sz="700" b="1" dirty="0">
+                <a:spcPct val="106000"/>
+              </a:lnSpc>
+              <a:buNone/>
+            </a:pPr>
+            <a:r>
+              <a:rPr lang="en-US" sz="690" b="1" dirty="0">
                 <a:solidFill>
                   <a:srgbClr val="202124"/>
                 </a:solidFill>
@@ -9180,12 +9111,12 @@
             </a:r>
             <a:pPr indent="0" marL="0">
               <a:lnSpc>
-                <a:spcPct val="108000"/>
-              </a:lnSpc>
-              <a:buNone/>
-            </a:pPr>
-            <a:r>
-              <a:rPr lang="en-US" sz="690" dirty="0">
+                <a:spcPct val="106000"/>
+              </a:lnSpc>
+              <a:buNone/>
+            </a:pPr>
+            <a:r>
+              <a:rPr lang="en-US" sz="680" dirty="0">
                 <a:solidFill>
                   <a:srgbClr val="3C4043"/>
                 </a:solidFill>
@@ -9198,12 +9129,12 @@
             </a:r>
             <a:pPr indent="0" marL="0">
               <a:lnSpc>
-                <a:spcPct val="108000"/>
-              </a:lnSpc>
-              <a:buNone/>
-            </a:pPr>
-            <a:r>
-              <a:rPr lang="en-US" sz="740" b="1" dirty="0">
+                <a:spcPct val="106000"/>
+              </a:lnSpc>
+              <a:buNone/>
+            </a:pPr>
+            <a:r>
+              <a:rPr lang="en-US" sz="730" b="1" dirty="0">
                 <a:solidFill>
                   <a:srgbClr val="202124"/>
                 </a:solidFill>
@@ -9215,12 +9146,12 @@
             </a:r>
             <a:pPr indent="0" marL="0">
               <a:lnSpc>
-                <a:spcPct val="108000"/>
-              </a:lnSpc>
-              <a:buNone/>
-            </a:pPr>
-            <a:r>
-              <a:rPr lang="en-US" sz="730" dirty="0">
+                <a:spcPct val="106000"/>
+              </a:lnSpc>
+              <a:buNone/>
+            </a:pPr>
+            <a:r>
+              <a:rPr lang="en-US" sz="720" dirty="0">
                 <a:solidFill>
                   <a:srgbClr val="3C4043"/>
                 </a:solidFill>
@@ -9233,12 +9164,12 @@
             </a:r>
             <a:pPr indent="0" marL="0">
               <a:lnSpc>
-                <a:spcPct val="108000"/>
-              </a:lnSpc>
-              <a:buNone/>
-            </a:pPr>
-            <a:r>
-              <a:rPr lang="en-US" sz="740" b="1" dirty="0">
+                <a:spcPct val="106000"/>
+              </a:lnSpc>
+              <a:buNone/>
+            </a:pPr>
+            <a:r>
+              <a:rPr lang="en-US" sz="730" b="1" dirty="0">
                 <a:solidFill>
                   <a:srgbClr val="202124"/>
                 </a:solidFill>
@@ -9250,12 +9181,12 @@
             </a:r>
             <a:pPr indent="0" marL="0">
               <a:lnSpc>
-                <a:spcPct val="108000"/>
-              </a:lnSpc>
-              <a:buNone/>
-            </a:pPr>
-            <a:r>
-              <a:rPr lang="en-US" sz="730" dirty="0">
+                <a:spcPct val="106000"/>
+              </a:lnSpc>
+              <a:buNone/>
+            </a:pPr>
+            <a:r>
+              <a:rPr lang="en-US" sz="720" dirty="0">
                 <a:solidFill>
                   <a:srgbClr val="3C4043"/>
                 </a:solidFill>
@@ -9268,12 +9199,12 @@
             </a:r>
             <a:pPr indent="0" marL="0">
               <a:lnSpc>
-                <a:spcPct val="108000"/>
-              </a:lnSpc>
-              <a:buNone/>
-            </a:pPr>
-            <a:r>
-              <a:rPr lang="en-US" sz="740" b="1" dirty="0">
+                <a:spcPct val="106000"/>
+              </a:lnSpc>
+              <a:buNone/>
+            </a:pPr>
+            <a:r>
+              <a:rPr lang="en-US" sz="730" b="1" dirty="0">
                 <a:solidFill>
                   <a:srgbClr val="202124"/>
                 </a:solidFill>
@@ -9285,12 +9216,12 @@
             </a:r>
             <a:pPr indent="0" marL="0">
               <a:lnSpc>
-                <a:spcPct val="108000"/>
-              </a:lnSpc>
-              <a:buNone/>
-            </a:pPr>
-            <a:r>
-              <a:rPr lang="en-US" sz="730" dirty="0">
+                <a:spcPct val="106000"/>
+              </a:lnSpc>
+              <a:buNone/>
+            </a:pPr>
+            <a:r>
+              <a:rPr lang="en-US" sz="720" dirty="0">
                 <a:solidFill>
                   <a:srgbClr val="3C4043"/>
                 </a:solidFill>
@@ -9301,7 +9232,7 @@
               <a:t>The verified response returns to the caller through the Hop 1 &amp; Hop 2: Edge PEP &amp; Agent Catalog PDP, while structured OpenTelemetry audit and FinOps spans stream to the Hop 3 &amp; 5: Shared FinOps, Cache &amp; OTel Hub.
 </a:t>
             </a:r>
-            <a:endParaRPr lang="en-US" sz="740" dirty="0"/>
+            <a:endParaRPr lang="en-US" sz="730" dirty="0"/>
           </a:p>
         </p:txBody>
       </p:sp>
@@ -9473,8 +9404,8 @@
         </p:nvSpPr>
         <p:spPr>
           <a:xfrm>
-            <a:off x="749808" y="658368"/>
-            <a:ext cx="10680192" cy="310896"/>
+            <a:off x="749808" y="621792"/>
+            <a:ext cx="10680192" cy="274320"/>
           </a:xfrm>
           <a:prstGeom prst="rect">
             <a:avLst/>
@@ -9490,7 +9421,7 @@
               <a:buNone/>
             </a:pPr>
             <a:r>
-              <a:rPr lang="en-US" sz="1550" dirty="0">
+              <a:rPr lang="en-US" sz="1500" dirty="0">
                 <a:solidFill>
                   <a:srgbClr val="202124"/>
                 </a:solidFill>
@@ -9500,7 +9431,7 @@
               </a:rPr>
               <a:t>Products used</a:t>
             </a:r>
-            <a:endParaRPr lang="en-US" sz="1550" dirty="0"/>
+            <a:endParaRPr lang="en-US" sz="1500" dirty="0"/>
           </a:p>
         </p:txBody>
       </p:sp>
@@ -9512,8 +9443,8 @@
         </p:nvSpPr>
         <p:spPr>
           <a:xfrm>
-            <a:off x="749808" y="1005840"/>
-            <a:ext cx="10680192" cy="219456"/>
+            <a:off x="749808" y="914400"/>
+            <a:ext cx="10680192" cy="329184"/>
           </a:xfrm>
           <a:prstGeom prst="rect">
             <a:avLst/>
@@ -9522,14 +9453,14 @@
           <a:ln/>
         </p:spPr>
         <p:txBody>
-          <a:bodyPr wrap="square" rtlCol="0" anchor="ctr"/>
-          <a:lstStyle/>
-          <a:p>
-            <a:pPr indent="0" marL="0">
-              <a:buNone/>
-            </a:pPr>
-            <a:r>
-              <a:rPr lang="en-US" sz="920" dirty="0">
+          <a:bodyPr wrap="square" rtlCol="0" anchor="t"/>
+          <a:lstStyle/>
+          <a:p>
+            <a:pPr indent="0" marL="0">
+              <a:buNone/>
+            </a:pPr>
+            <a:r>
+              <a:rPr lang="en-US" sz="860" dirty="0">
                 <a:solidFill>
                   <a:srgbClr val="3C4043"/>
                 </a:solidFill>
@@ -9539,7 +9470,7 @@
               </a:rPr>
               <a:t>This reference architecture uses the following Google Cloud services and open-source frameworks to implement Building the High-Density Pool Tier: An End-to-End Implementation Blueprint.</a:t>
             </a:r>
-            <a:endParaRPr lang="en-US" sz="920" dirty="0"/>
+            <a:endParaRPr lang="en-US" sz="860" dirty="0"/>
           </a:p>
         </p:txBody>
       </p:sp>
@@ -9551,8 +9482,8 @@
         </p:nvSpPr>
         <p:spPr>
           <a:xfrm>
-            <a:off x="877824" y="1280160"/>
-            <a:ext cx="10552176" cy="1993392"/>
+            <a:off x="877824" y="1261872"/>
+            <a:ext cx="10552176" cy="2011680"/>
           </a:xfrm>
           <a:prstGeom prst="rect">
             <a:avLst/>
@@ -9561,17 +9492,19 @@
           <a:ln/>
         </p:spPr>
         <p:txBody>
-          <a:bodyPr wrap="square" rtlCol="0" anchor="t"/>
-          <a:lstStyle/>
-          <a:p>
-            <a:pPr indent="0" marL="0">
-              <a:lnSpc>
-                <a:spcPct val="124000"/>
-              </a:lnSpc>
-              <a:buNone/>
-            </a:pPr>
-            <a:r>
-              <a:rPr lang="en-US" sz="840" b="1" dirty="0">
+          <a:bodyPr wrap="square" rtlCol="0" anchor="t">
+            <a:normAutofit/>
+          </a:bodyPr>
+          <a:lstStyle/>
+          <a:p>
+            <a:pPr indent="0" marL="0">
+              <a:lnSpc>
+                <a:spcPct val="118000"/>
+              </a:lnSpc>
+              <a:buNone/>
+            </a:pPr>
+            <a:r>
+              <a:rPr lang="en-US" sz="810" b="1" dirty="0">
                 <a:solidFill>
                   <a:srgbClr val="1A73E8"/>
                 </a:solidFill>
@@ -9583,12 +9516,12 @@
             </a:r>
             <a:pPr indent="0" marL="0">
               <a:lnSpc>
-                <a:spcPct val="124000"/>
-              </a:lnSpc>
-              <a:buNone/>
-            </a:pPr>
-            <a:r>
-              <a:rPr lang="en-US" sz="820" dirty="0">
+                <a:spcPct val="118000"/>
+              </a:lnSpc>
+              <a:buNone/>
+            </a:pPr>
+            <a:r>
+              <a:rPr lang="en-US" sz="790" dirty="0">
                 <a:solidFill>
                   <a:srgbClr val="3C4043"/>
                 </a:solidFill>
@@ -9601,12 +9534,12 @@
             </a:r>
             <a:pPr indent="0" marL="0">
               <a:lnSpc>
-                <a:spcPct val="124000"/>
-              </a:lnSpc>
-              <a:buNone/>
-            </a:pPr>
-            <a:r>
-              <a:rPr lang="en-US" sz="840" b="1" dirty="0">
+                <a:spcPct val="118000"/>
+              </a:lnSpc>
+              <a:buNone/>
+            </a:pPr>
+            <a:r>
+              <a:rPr lang="en-US" sz="810" b="1" dirty="0">
                 <a:solidFill>
                   <a:srgbClr val="1A73E8"/>
                 </a:solidFill>
@@ -9618,12 +9551,12 @@
             </a:r>
             <a:pPr indent="0" marL="0">
               <a:lnSpc>
-                <a:spcPct val="124000"/>
-              </a:lnSpc>
-              <a:buNone/>
-            </a:pPr>
-            <a:r>
-              <a:rPr lang="en-US" sz="820" dirty="0">
+                <a:spcPct val="118000"/>
+              </a:lnSpc>
+              <a:buNone/>
+            </a:pPr>
+            <a:r>
+              <a:rPr lang="en-US" sz="790" dirty="0">
                 <a:solidFill>
                   <a:srgbClr val="3C4043"/>
                 </a:solidFill>
@@ -9636,12 +9569,12 @@
             </a:r>
             <a:pPr indent="0" marL="0">
               <a:lnSpc>
-                <a:spcPct val="124000"/>
-              </a:lnSpc>
-              <a:buNone/>
-            </a:pPr>
-            <a:r>
-              <a:rPr lang="en-US" sz="840" b="1" dirty="0">
+                <a:spcPct val="118000"/>
+              </a:lnSpc>
+              <a:buNone/>
+            </a:pPr>
+            <a:r>
+              <a:rPr lang="en-US" sz="810" b="1" dirty="0">
                 <a:solidFill>
                   <a:srgbClr val="1A73E8"/>
                 </a:solidFill>
@@ -9653,12 +9586,12 @@
             </a:r>
             <a:pPr indent="0" marL="0">
               <a:lnSpc>
-                <a:spcPct val="124000"/>
-              </a:lnSpc>
-              <a:buNone/>
-            </a:pPr>
-            <a:r>
-              <a:rPr lang="en-US" sz="820" dirty="0">
+                <a:spcPct val="118000"/>
+              </a:lnSpc>
+              <a:buNone/>
+            </a:pPr>
+            <a:r>
+              <a:rPr lang="en-US" sz="790" dirty="0">
                 <a:solidFill>
                   <a:srgbClr val="3C4043"/>
                 </a:solidFill>
@@ -9671,12 +9604,12 @@
             </a:r>
             <a:pPr indent="0" marL="0">
               <a:lnSpc>
-                <a:spcPct val="124000"/>
-              </a:lnSpc>
-              <a:buNone/>
-            </a:pPr>
-            <a:r>
-              <a:rPr lang="en-US" sz="840" b="1" dirty="0">
+                <a:spcPct val="118000"/>
+              </a:lnSpc>
+              <a:buNone/>
+            </a:pPr>
+            <a:r>
+              <a:rPr lang="en-US" sz="810" b="1" dirty="0">
                 <a:solidFill>
                   <a:srgbClr val="1A73E8"/>
                 </a:solidFill>
@@ -9688,12 +9621,12 @@
             </a:r>
             <a:pPr indent="0" marL="0">
               <a:lnSpc>
-                <a:spcPct val="124000"/>
-              </a:lnSpc>
-              <a:buNone/>
-            </a:pPr>
-            <a:r>
-              <a:rPr lang="en-US" sz="820" dirty="0">
+                <a:spcPct val="118000"/>
+              </a:lnSpc>
+              <a:buNone/>
+            </a:pPr>
+            <a:r>
+              <a:rPr lang="en-US" sz="790" dirty="0">
                 <a:solidFill>
                   <a:srgbClr val="3C4043"/>
                 </a:solidFill>
@@ -9706,12 +9639,12 @@
             </a:r>
             <a:pPr indent="0" marL="0">
               <a:lnSpc>
-                <a:spcPct val="124000"/>
-              </a:lnSpc>
-              <a:buNone/>
-            </a:pPr>
-            <a:r>
-              <a:rPr lang="en-US" sz="840" b="1" dirty="0">
+                <a:spcPct val="118000"/>
+              </a:lnSpc>
+              <a:buNone/>
+            </a:pPr>
+            <a:r>
+              <a:rPr lang="en-US" sz="810" b="1" dirty="0">
                 <a:solidFill>
                   <a:srgbClr val="1A73E8"/>
                 </a:solidFill>
@@ -9723,12 +9656,12 @@
             </a:r>
             <a:pPr indent="0" marL="0">
               <a:lnSpc>
-                <a:spcPct val="124000"/>
-              </a:lnSpc>
-              <a:buNone/>
-            </a:pPr>
-            <a:r>
-              <a:rPr lang="en-US" sz="820" dirty="0">
+                <a:spcPct val="118000"/>
+              </a:lnSpc>
+              <a:buNone/>
+            </a:pPr>
+            <a:r>
+              <a:rPr lang="en-US" sz="790" dirty="0">
                 <a:solidFill>
                   <a:srgbClr val="3C4043"/>
                 </a:solidFill>
@@ -9741,12 +9674,12 @@
             </a:r>
             <a:pPr indent="0" marL="0">
               <a:lnSpc>
-                <a:spcPct val="124000"/>
-              </a:lnSpc>
-              <a:buNone/>
-            </a:pPr>
-            <a:r>
-              <a:rPr lang="en-US" sz="840" b="1" dirty="0">
+                <a:spcPct val="118000"/>
+              </a:lnSpc>
+              <a:buNone/>
+            </a:pPr>
+            <a:r>
+              <a:rPr lang="en-US" sz="810" b="1" dirty="0">
                 <a:solidFill>
                   <a:srgbClr val="1A73E8"/>
                 </a:solidFill>
@@ -9758,12 +9691,12 @@
             </a:r>
             <a:pPr indent="0" marL="0">
               <a:lnSpc>
-                <a:spcPct val="124000"/>
-              </a:lnSpc>
-              <a:buNone/>
-            </a:pPr>
-            <a:r>
-              <a:rPr lang="en-US" sz="820" dirty="0">
+                <a:spcPct val="118000"/>
+              </a:lnSpc>
+              <a:buNone/>
+            </a:pPr>
+            <a:r>
+              <a:rPr lang="en-US" sz="790" dirty="0">
                 <a:solidFill>
                   <a:srgbClr val="3C4043"/>
                 </a:solidFill>
@@ -9773,43 +9706,165 @@
               </a:rPr>
               <a:t>Core Google Cloud service used in DOC-MT-03 to enforce production security, scalability, and observability.</a:t>
             </a:r>
+            <a:endParaRPr lang="en-US" sz="810" dirty="0"/>
+          </a:p>
+        </p:txBody>
+      </p:sp>
+      <p:sp>
+        <p:nvSpPr>
+          <p:cNvPr id="9" name="Shape 7"/>
+          <p:cNvSpPr/>
+          <p:nvPr/>
+        </p:nvSpPr>
+        <p:spPr>
+          <a:xfrm>
+            <a:off x="749808" y="3346704"/>
+            <a:ext cx="10680192" cy="0"/>
+          </a:xfrm>
+          <a:prstGeom prst="line">
+            <a:avLst/>
+          </a:prstGeom>
+          <a:noFill/>
+          <a:ln w="9525">
+            <a:solidFill>
+              <a:srgbClr val="DADCE0"/>
+            </a:solidFill>
+            <a:prstDash val="solid"/>
+          </a:ln>
+        </p:spPr>
+      </p:sp>
+      <p:sp>
+        <p:nvSpPr>
+          <p:cNvPr id="10" name="Text 8"/>
+          <p:cNvSpPr/>
+          <p:nvPr/>
+        </p:nvSpPr>
+        <p:spPr>
+          <a:xfrm>
+            <a:off x="749808" y="3419856"/>
+            <a:ext cx="10680192" cy="274320"/>
+          </a:xfrm>
+          <a:prstGeom prst="rect">
+            <a:avLst/>
+          </a:prstGeom>
+          <a:noFill/>
+          <a:ln/>
+        </p:spPr>
+        <p:txBody>
+          <a:bodyPr wrap="square" rtlCol="0" anchor="ctr"/>
+          <a:lstStyle/>
+          <a:p>
+            <a:pPr indent="0" marL="0">
+              <a:buNone/>
+            </a:pPr>
+            <a:r>
+              <a:rPr lang="en-US" sz="1500" dirty="0">
+                <a:solidFill>
+                  <a:srgbClr val="202124"/>
+                </a:solidFill>
+                <a:latin typeface="Arial" pitchFamily="34" charset="0"/>
+                <a:ea typeface="Arial" pitchFamily="34" charset="-122"/>
+                <a:cs typeface="Arial" pitchFamily="34" charset="-120"/>
+              </a:rPr>
+              <a:t>Use case</a:t>
+            </a:r>
+            <a:endParaRPr lang="en-US" sz="1500" dirty="0"/>
+          </a:p>
+        </p:txBody>
+      </p:sp>
+      <p:sp>
+        <p:nvSpPr>
+          <p:cNvPr id="11" name="Text 9"/>
+          <p:cNvSpPr/>
+          <p:nvPr/>
+        </p:nvSpPr>
+        <p:spPr>
+          <a:xfrm>
+            <a:off x="749808" y="3712464"/>
+            <a:ext cx="10680192" cy="237744"/>
+          </a:xfrm>
+          <a:prstGeom prst="rect">
+            <a:avLst/>
+          </a:prstGeom>
+          <a:noFill/>
+          <a:ln/>
+        </p:spPr>
+        <p:txBody>
+          <a:bodyPr wrap="square" rtlCol="0" anchor="ctr"/>
+          <a:lstStyle/>
+          <a:p>
+            <a:pPr indent="0" marL="0">
+              <a:buNone/>
+            </a:pPr>
+            <a:r>
+              <a:rPr lang="en-US" sz="1100" b="1" dirty="0">
+                <a:solidFill>
+                  <a:srgbClr val="202124"/>
+                </a:solidFill>
+                <a:latin typeface="Arial" pitchFamily="34" charset="0"/>
+                <a:ea typeface="Arial" pitchFamily="34" charset="-122"/>
+                <a:cs typeface="Arial" pitchFamily="34" charset="-120"/>
+              </a:rPr>
+              <a:t>Section 2: Compute Plane — Alice’s Execution Hot Path</a:t>
+            </a:r>
+            <a:endParaRPr lang="en-US" sz="1100" dirty="0"/>
+          </a:p>
+        </p:txBody>
+      </p:sp>
+      <p:sp>
+        <p:nvSpPr>
+          <p:cNvPr id="12" name="Text 10"/>
+          <p:cNvSpPr/>
+          <p:nvPr/>
+        </p:nvSpPr>
+        <p:spPr>
+          <a:xfrm>
+            <a:off x="749808" y="3986784"/>
+            <a:ext cx="10680192" cy="749808"/>
+          </a:xfrm>
+          <a:prstGeom prst="rect">
+            <a:avLst/>
+          </a:prstGeom>
+          <a:noFill/>
+          <a:ln/>
+        </p:spPr>
+        <p:txBody>
+          <a:bodyPr wrap="square" rtlCol="0" anchor="t">
+            <a:normAutofit/>
+          </a:bodyPr>
+          <a:lstStyle/>
+          <a:p>
+            <a:pPr indent="0" marL="0">
+              <a:lnSpc>
+                <a:spcPct val="114000"/>
+              </a:lnSpc>
+              <a:buNone/>
+            </a:pPr>
+            <a:r>
+              <a:rPr lang="en-US" sz="840" dirty="0">
+                <a:solidFill>
+                  <a:srgbClr val="3C4043"/>
+                </a:solidFill>
+                <a:latin typeface="Arial" pitchFamily="34" charset="0"/>
+                <a:ea typeface="Arial" pitchFamily="34" charset="-122"/>
+                <a:cs typeface="Arial" pitchFamily="34" charset="-120"/>
+              </a:rPr>
+              <a:t>The Compute Plane is the request hot path. It receives Alice’s prompt, enforces control-plane policy, executes the multi-agent reasoning loop, and destroys the runtime container upon completion.</a:t>
+            </a:r>
             <a:endParaRPr lang="en-US" sz="840" dirty="0"/>
           </a:p>
         </p:txBody>
       </p:sp>
       <p:sp>
         <p:nvSpPr>
-          <p:cNvPr id="9" name="Shape 7"/>
-          <p:cNvSpPr/>
-          <p:nvPr/>
-        </p:nvSpPr>
-        <p:spPr>
-          <a:xfrm>
-            <a:off x="749808" y="3383280"/>
-            <a:ext cx="10680192" cy="0"/>
-          </a:xfrm>
-          <a:prstGeom prst="line">
-            <a:avLst/>
-          </a:prstGeom>
-          <a:noFill/>
-          <a:ln w="9525">
-            <a:solidFill>
-              <a:srgbClr val="DADCE0"/>
-            </a:solidFill>
-            <a:prstDash val="solid"/>
-          </a:ln>
-        </p:spPr>
-      </p:sp>
-      <p:sp>
-        <p:nvSpPr>
-          <p:cNvPr id="10" name="Text 8"/>
-          <p:cNvSpPr/>
-          <p:nvPr/>
-        </p:nvSpPr>
-        <p:spPr>
-          <a:xfrm>
-            <a:off x="749808" y="3511296"/>
-            <a:ext cx="10680192" cy="310896"/>
+          <p:cNvPr id="13" name="Text 11"/>
+          <p:cNvSpPr/>
+          <p:nvPr/>
+        </p:nvSpPr>
+        <p:spPr>
+          <a:xfrm>
+            <a:off x="749808" y="4773168"/>
+            <a:ext cx="10680192" cy="201168"/>
           </a:xfrm>
           <a:prstGeom prst="rect">
             <a:avLst/>
@@ -9825,30 +9880,30 @@
               <a:buNone/>
             </a:pPr>
             <a:r>
-              <a:rPr lang="en-US" sz="1550" dirty="0">
-                <a:solidFill>
-                  <a:srgbClr val="202124"/>
-                </a:solidFill>
-                <a:latin typeface="Arial" pitchFamily="34" charset="0"/>
-                <a:ea typeface="Arial" pitchFamily="34" charset="-122"/>
-                <a:cs typeface="Arial" pitchFamily="34" charset="-120"/>
-              </a:rPr>
-              <a:t>Use case</a:t>
-            </a:r>
-            <a:endParaRPr lang="en-US" sz="1550" dirty="0"/>
-          </a:p>
-        </p:txBody>
-      </p:sp>
-      <p:sp>
-        <p:nvSpPr>
-          <p:cNvPr id="11" name="Text 9"/>
-          <p:cNvSpPr/>
-          <p:nvPr/>
-        </p:nvSpPr>
-        <p:spPr>
-          <a:xfrm>
-            <a:off x="749808" y="3858768"/>
-            <a:ext cx="10680192" cy="256032"/>
+              <a:rPr lang="en-US" sz="860" dirty="0">
+                <a:solidFill>
+                  <a:srgbClr val="3C4043"/>
+                </a:solidFill>
+                <a:latin typeface="Arial" pitchFamily="34" charset="0"/>
+                <a:ea typeface="Arial" pitchFamily="34" charset="-122"/>
+                <a:cs typeface="Arial" pitchFamily="34" charset="-120"/>
+              </a:rPr>
+              <a:t>For this use case, the architecture provides the following benefits:</a:t>
+            </a:r>
+            <a:endParaRPr lang="en-US" sz="860" dirty="0"/>
+          </a:p>
+        </p:txBody>
+      </p:sp>
+      <p:sp>
+        <p:nvSpPr>
+          <p:cNvPr id="14" name="Text 12"/>
+          <p:cNvSpPr/>
+          <p:nvPr/>
+        </p:nvSpPr>
+        <p:spPr>
+          <a:xfrm>
+            <a:off x="877824" y="5010912"/>
+            <a:ext cx="10552176" cy="1481328"/>
           </a:xfrm>
           <a:prstGeom prst="rect">
             <a:avLst/>
@@ -9857,137 +9912,19 @@
           <a:ln/>
         </p:spPr>
         <p:txBody>
-          <a:bodyPr wrap="square" rtlCol="0" anchor="ctr"/>
-          <a:lstStyle/>
-          <a:p>
-            <a:pPr indent="0" marL="0">
-              <a:buNone/>
-            </a:pPr>
-            <a:r>
-              <a:rPr lang="en-US" sz="1150" b="1" dirty="0">
-                <a:solidFill>
-                  <a:srgbClr val="202124"/>
-                </a:solidFill>
-                <a:latin typeface="Arial" pitchFamily="34" charset="0"/>
-                <a:ea typeface="Arial" pitchFamily="34" charset="-122"/>
-                <a:cs typeface="Arial" pitchFamily="34" charset="-120"/>
-              </a:rPr>
-              <a:t>Section 2: Compute Plane — Alice’s Execution Hot Path</a:t>
-            </a:r>
-            <a:endParaRPr lang="en-US" sz="1150" dirty="0"/>
-          </a:p>
-        </p:txBody>
-      </p:sp>
-      <p:sp>
-        <p:nvSpPr>
-          <p:cNvPr id="12" name="Text 10"/>
-          <p:cNvSpPr/>
-          <p:nvPr/>
-        </p:nvSpPr>
-        <p:spPr>
-          <a:xfrm>
-            <a:off x="749808" y="4151376"/>
-            <a:ext cx="10680192" cy="658368"/>
-          </a:xfrm>
-          <a:prstGeom prst="rect">
-            <a:avLst/>
-          </a:prstGeom>
-          <a:noFill/>
-          <a:ln/>
-        </p:spPr>
-        <p:txBody>
-          <a:bodyPr wrap="square" rtlCol="0" anchor="t"/>
-          <a:lstStyle/>
-          <a:p>
-            <a:pPr indent="0" marL="0">
-              <a:lnSpc>
-                <a:spcPct val="118000"/>
-              </a:lnSpc>
-              <a:buNone/>
-            </a:pPr>
-            <a:r>
-              <a:rPr lang="en-US" sz="880" dirty="0">
-                <a:solidFill>
-                  <a:srgbClr val="3C4043"/>
-                </a:solidFill>
-                <a:latin typeface="Arial" pitchFamily="34" charset="0"/>
-                <a:ea typeface="Arial" pitchFamily="34" charset="-122"/>
-                <a:cs typeface="Arial" pitchFamily="34" charset="-120"/>
-              </a:rPr>
-              <a:t>The Compute Plane is the request hot path. It receives Alice’s prompt, enforces control-plane policy, executes the multi-agent reasoning loop, and destroys the runtime container upon completion.</a:t>
-            </a:r>
-            <a:endParaRPr lang="en-US" sz="880" dirty="0"/>
-          </a:p>
-        </p:txBody>
-      </p:sp>
-      <p:sp>
-        <p:nvSpPr>
-          <p:cNvPr id="13" name="Text 11"/>
-          <p:cNvSpPr/>
-          <p:nvPr/>
-        </p:nvSpPr>
-        <p:spPr>
-          <a:xfrm>
-            <a:off x="749808" y="4846320"/>
-            <a:ext cx="10680192" cy="201168"/>
-          </a:xfrm>
-          <a:prstGeom prst="rect">
-            <a:avLst/>
-          </a:prstGeom>
-          <a:noFill/>
-          <a:ln/>
-        </p:spPr>
-        <p:txBody>
-          <a:bodyPr wrap="square" rtlCol="0" anchor="ctr"/>
-          <a:lstStyle/>
-          <a:p>
-            <a:pPr indent="0" marL="0">
-              <a:buNone/>
-            </a:pPr>
-            <a:r>
-              <a:rPr lang="en-US" sz="880" dirty="0">
-                <a:solidFill>
-                  <a:srgbClr val="3C4043"/>
-                </a:solidFill>
-                <a:latin typeface="Arial" pitchFamily="34" charset="0"/>
-                <a:ea typeface="Arial" pitchFamily="34" charset="-122"/>
-                <a:cs typeface="Arial" pitchFamily="34" charset="-120"/>
-              </a:rPr>
-              <a:t>For this use case, the architecture provides the following benefits:</a:t>
-            </a:r>
-            <a:endParaRPr lang="en-US" sz="880" dirty="0"/>
-          </a:p>
-        </p:txBody>
-      </p:sp>
-      <p:sp>
-        <p:nvSpPr>
-          <p:cNvPr id="14" name="Text 12"/>
-          <p:cNvSpPr/>
-          <p:nvPr/>
-        </p:nvSpPr>
-        <p:spPr>
-          <a:xfrm>
-            <a:off x="877824" y="5084064"/>
-            <a:ext cx="10552176" cy="1426464"/>
-          </a:xfrm>
-          <a:prstGeom prst="rect">
-            <a:avLst/>
-          </a:prstGeom>
-          <a:noFill/>
-          <a:ln/>
-        </p:spPr>
-        <p:txBody>
-          <a:bodyPr wrap="square" rtlCol="0" anchor="t"/>
-          <a:lstStyle/>
-          <a:p>
-            <a:pPr indent="0" marL="0">
-              <a:lnSpc>
-                <a:spcPct val="120000"/>
-              </a:lnSpc>
-              <a:buNone/>
-            </a:pPr>
-            <a:r>
-              <a:rPr lang="en-US" sz="820" b="1" dirty="0">
+          <a:bodyPr wrap="square" rtlCol="0" anchor="t">
+            <a:normAutofit/>
+          </a:bodyPr>
+          <a:lstStyle/>
+          <a:p>
+            <a:pPr indent="0" marL="0">
+              <a:lnSpc>
+                <a:spcPct val="116000"/>
+              </a:lnSpc>
+              <a:buNone/>
+            </a:pPr>
+            <a:r>
+              <a:rPr lang="en-US" sz="800" b="1" dirty="0">
                 <a:solidFill>
                   <a:srgbClr val="202124"/>
                 </a:solidFill>
@@ -9999,12 +9936,12 @@
             </a:r>
             <a:pPr indent="0" marL="0">
               <a:lnSpc>
-                <a:spcPct val="120000"/>
-              </a:lnSpc>
-              <a:buNone/>
-            </a:pPr>
-            <a:r>
-              <a:rPr lang="en-US" sz="800" dirty="0">
+                <a:spcPct val="116000"/>
+              </a:lnSpc>
+              <a:buNone/>
+            </a:pPr>
+            <a:r>
+              <a:rPr lang="en-US" sz="780" dirty="0">
                 <a:solidFill>
                   <a:srgbClr val="3C4043"/>
                 </a:solidFill>
@@ -10017,12 +9954,12 @@
             </a:r>
             <a:pPr indent="0" marL="0">
               <a:lnSpc>
-                <a:spcPct val="120000"/>
-              </a:lnSpc>
-              <a:buNone/>
-            </a:pPr>
-            <a:r>
-              <a:rPr lang="en-US" sz="820" b="1" dirty="0">
+                <a:spcPct val="116000"/>
+              </a:lnSpc>
+              <a:buNone/>
+            </a:pPr>
+            <a:r>
+              <a:rPr lang="en-US" sz="800" b="1" dirty="0">
                 <a:solidFill>
                   <a:srgbClr val="202124"/>
                 </a:solidFill>
@@ -10034,12 +9971,12 @@
             </a:r>
             <a:pPr indent="0" marL="0">
               <a:lnSpc>
-                <a:spcPct val="120000"/>
-              </a:lnSpc>
-              <a:buNone/>
-            </a:pPr>
-            <a:r>
-              <a:rPr lang="en-US" sz="800" dirty="0">
+                <a:spcPct val="116000"/>
+              </a:lnSpc>
+              <a:buNone/>
+            </a:pPr>
+            <a:r>
+              <a:rPr lang="en-US" sz="780" dirty="0">
                 <a:solidFill>
                   <a:srgbClr val="3C4043"/>
                 </a:solidFill>
@@ -10052,12 +9989,12 @@
             </a:r>
             <a:pPr indent="0" marL="0">
               <a:lnSpc>
-                <a:spcPct val="120000"/>
-              </a:lnSpc>
-              <a:buNone/>
-            </a:pPr>
-            <a:r>
-              <a:rPr lang="en-US" sz="820" b="1" dirty="0">
+                <a:spcPct val="116000"/>
+              </a:lnSpc>
+              <a:buNone/>
+            </a:pPr>
+            <a:r>
+              <a:rPr lang="en-US" sz="800" b="1" dirty="0">
                 <a:solidFill>
                   <a:srgbClr val="202124"/>
                 </a:solidFill>
@@ -10069,12 +10006,12 @@
             </a:r>
             <a:pPr indent="0" marL="0">
               <a:lnSpc>
-                <a:spcPct val="120000"/>
-              </a:lnSpc>
-              <a:buNone/>
-            </a:pPr>
-            <a:r>
-              <a:rPr lang="en-US" sz="800" dirty="0">
+                <a:spcPct val="116000"/>
+              </a:lnSpc>
+              <a:buNone/>
+            </a:pPr>
+            <a:r>
+              <a:rPr lang="en-US" sz="780" dirty="0">
                 <a:solidFill>
                   <a:srgbClr val="3C4043"/>
                 </a:solidFill>
@@ -10087,12 +10024,12 @@
             </a:r>
             <a:pPr indent="0" marL="0">
               <a:lnSpc>
-                <a:spcPct val="120000"/>
-              </a:lnSpc>
-              <a:buNone/>
-            </a:pPr>
-            <a:r>
-              <a:rPr lang="en-US" sz="820" b="1" dirty="0">
+                <a:spcPct val="116000"/>
+              </a:lnSpc>
+              <a:buNone/>
+            </a:pPr>
+            <a:r>
+              <a:rPr lang="en-US" sz="800" b="1" dirty="0">
                 <a:solidFill>
                   <a:srgbClr val="202124"/>
                 </a:solidFill>
@@ -10104,12 +10041,12 @@
             </a:r>
             <a:pPr indent="0" marL="0">
               <a:lnSpc>
-                <a:spcPct val="120000"/>
-              </a:lnSpc>
-              <a:buNone/>
-            </a:pPr>
-            <a:r>
-              <a:rPr lang="en-US" sz="800" dirty="0">
+                <a:spcPct val="116000"/>
+              </a:lnSpc>
+              <a:buNone/>
+            </a:pPr>
+            <a:r>
+              <a:rPr lang="en-US" sz="780" dirty="0">
                 <a:solidFill>
                   <a:srgbClr val="3C4043"/>
                 </a:solidFill>
@@ -10119,7 +10056,7 @@
               </a:rPr>
               <a:t>If prompt injection is detected at ingress, the turn is rejected before compute is provisioned—protecting the ephemeral runtime fleet from malicious warm-start costs.</a:t>
             </a:r>
-            <a:endParaRPr lang="en-US" sz="820" dirty="0"/>
+            <a:endParaRPr lang="en-US" sz="800" dirty="0"/>
           </a:p>
         </p:txBody>
       </p:sp>
@@ -10340,7 +10277,9 @@
           <a:ln/>
         </p:spPr>
         <p:txBody>
-          <a:bodyPr wrap="square" rtlCol="0" anchor="t"/>
+          <a:bodyPr wrap="square" rtlCol="0" anchor="t">
+            <a:normAutofit/>
+          </a:bodyPr>
           <a:lstStyle/>
           <a:p>
             <a:pPr indent="0" marL="0">
@@ -10350,7 +10289,7 @@
               <a:buNone/>
             </a:pPr>
             <a:r>
-              <a:rPr lang="en-US" sz="820" b="1" dirty="0">
+              <a:rPr lang="en-US" sz="810" b="1" dirty="0">
                 <a:solidFill>
                   <a:srgbClr val="202124"/>
                 </a:solidFill>
@@ -10410,7 +10349,7 @@
                 <a:ea typeface="Arial" pitchFamily="34" charset="-122"/>
                 <a:cs typeface="Arial" pitchFamily="34" charset="-120"/>
               </a:rPr>
-              <a:t>For internet-facing workloads, retain the global External Application Load Balancer with Cloud Armor WAF and Discovery Engine PDP.
+              <a:t>For internet-facing workloads, retain the global External Application Load Balancer with Google Cloud Armor and Discovery Engine PDP.
 </a:t>
             </a:r>
             <a:pPr indent="0" marL="0">
@@ -10419,14 +10358,8 @@
               </a:lnSpc>
               <a:buNone/>
             </a:pPr>
-            <a:pPr indent="0" marL="0">
-              <a:lnSpc>
-                <a:spcPct val="112000"/>
-              </a:lnSpc>
-              <a:buNone/>
-            </a:pPr>
-            <a:r>
-              <a:rPr lang="en-US" sz="820" b="1" dirty="0">
+            <a:r>
+              <a:rPr lang="en-US" sz="810" b="1" dirty="0">
                 <a:solidFill>
                   <a:srgbClr val="202124"/>
                 </a:solidFill>
@@ -10489,7 +10422,7 @@
               <a:t>Spoke-local 3LO Workspace/Jira: Maximizes blast-radius containment by keeping credentials, service accounts, and data access strictly inside Logical &amp; Cryptographic Slice A • FinVault Bank.; Shared enterprise tool gateway: Consolidates stateless, non-tenant-specific MCP tools into a central hub project via Private Service Connect.
 </a:t>
             </a:r>
-            <a:endParaRPr lang="en-US" sz="820" dirty="0"/>
+            <a:endParaRPr lang="en-US" sz="810" dirty="0"/>
           </a:p>
         </p:txBody>
       </p:sp>
@@ -10893,48 +10826,50 @@
           <a:ln/>
         </p:spPr>
         <p:txBody>
-          <a:bodyPr wrap="square" rtlCol="0" anchor="ctr"/>
-          <a:lstStyle/>
-          <a:p>
-            <a:pPr indent="0" marL="0">
-              <a:buNone/>
-            </a:pPr>
-            <a:r>
-              <a:rPr lang="en-US" sz="720" b="1" dirty="0">
-                <a:solidFill>
-                  <a:srgbClr val="202124"/>
-                </a:solidFill>
-                <a:latin typeface="Arial" pitchFamily="34" charset="0"/>
-                <a:ea typeface="Arial" pitchFamily="34" charset="-122"/>
-                <a:cs typeface="Arial" pitchFamily="34" charset="-120"/>
-              </a:rPr>
-              <a:t>• Shared GCP Project: cymbal-pooled-saas-prod &amp; Shared VPC • 5-Hop Cryptographic Context Chain</a:t>
-            </a:r>
-            <a:endParaRPr lang="en-US" sz="720" dirty="0"/>
-          </a:p>
-          <a:p>
-            <a:pPr indent="0" marL="0">
-              <a:buNone/>
-            </a:pPr>
-            <a:r>
-              <a:rPr lang="en-US" sz="720" b="1" dirty="0">
-                <a:solidFill>
-                  <a:srgbClr val="202124"/>
-                </a:solidFill>
-                <a:latin typeface="Arial" pitchFamily="34" charset="0"/>
-                <a:ea typeface="Arial" pitchFamily="34" charset="-122"/>
-                <a:cs typeface="Arial" pitchFamily="34" charset="-120"/>
-              </a:rPr>
-              <a:t>• Cloud Armor WAF, Discovery Engine PDP &amp; Model Armor</a:t>
-            </a:r>
-            <a:endParaRPr lang="en-US" sz="720" dirty="0"/>
-          </a:p>
-          <a:p>
-            <a:pPr indent="0" marL="0">
-              <a:buNone/>
-            </a:pPr>
-            <a:r>
-              <a:rPr lang="en-US" sz="720" b="1" dirty="0">
+          <a:bodyPr wrap="square" rtlCol="0" anchor="ctr">
+            <a:normAutofit/>
+          </a:bodyPr>
+          <a:lstStyle/>
+          <a:p>
+            <a:pPr indent="0" marL="0">
+              <a:buNone/>
+            </a:pPr>
+            <a:r>
+              <a:rPr lang="en-US" sz="710" b="1" dirty="0">
+                <a:solidFill>
+                  <a:srgbClr val="202124"/>
+                </a:solidFill>
+                <a:latin typeface="Arial" pitchFamily="34" charset="0"/>
+                <a:ea typeface="Arial" pitchFamily="34" charset="-122"/>
+                <a:cs typeface="Arial" pitchFamily="34" charset="-120"/>
+              </a:rPr>
+              <a:t>• VPC Service Controls &amp; Access Boundaries</a:t>
+            </a:r>
+            <a:endParaRPr lang="en-US" sz="710" dirty="0"/>
+          </a:p>
+          <a:p>
+            <a:pPr indent="0" marL="0">
+              <a:buNone/>
+            </a:pPr>
+            <a:r>
+              <a:rPr lang="en-US" sz="710" b="1" dirty="0">
+                <a:solidFill>
+                  <a:srgbClr val="202124"/>
+                </a:solidFill>
+                <a:latin typeface="Arial" pitchFamily="34" charset="0"/>
+                <a:ea typeface="Arial" pitchFamily="34" charset="-122"/>
+                <a:cs typeface="Arial" pitchFamily="34" charset="-120"/>
+              </a:rPr>
+              <a:t>• Google Cloud Armor &amp; Discovery Engine PDP &amp; Model Armor</a:t>
+            </a:r>
+            <a:endParaRPr lang="en-US" sz="710" dirty="0"/>
+          </a:p>
+          <a:p>
+            <a:pPr indent="0" marL="0">
+              <a:buNone/>
+            </a:pPr>
+            <a:r>
+              <a:rPr lang="en-US" sz="710" b="1" dirty="0">
                 <a:solidFill>
                   <a:srgbClr val="202124"/>
                 </a:solidFill>
@@ -10944,7 +10879,7 @@
               </a:rPr>
               <a:t>• Shared AlloyDB RLS &amp; Memorystore Valkey</a:t>
             </a:r>
-            <a:endParaRPr lang="en-US" sz="720" dirty="0"/>
+            <a:endParaRPr lang="en-US" sz="710" dirty="0"/>
           </a:p>
         </p:txBody>
       </p:sp>
@@ -10991,28 +10926,30 @@
           <a:ln/>
         </p:spPr>
         <p:txBody>
-          <a:bodyPr wrap="square" rtlCol="0" anchor="ctr"/>
-          <a:lstStyle/>
-          <a:p>
-            <a:pPr indent="0" marL="0">
-              <a:buNone/>
-            </a:pPr>
-            <a:r>
-              <a:rPr lang="en-US" sz="710" b="1" dirty="0">
-                <a:solidFill>
-                  <a:srgbClr val="202124"/>
-                </a:solidFill>
-                <a:latin typeface="Arial" pitchFamily="34" charset="0"/>
-                <a:ea typeface="Arial" pitchFamily="34" charset="-122"/>
-                <a:cs typeface="Arial" pitchFamily="34" charset="-120"/>
-              </a:rPr>
-              <a:t>• Shared GCP Project: cymbal-pooled-saas-prod &amp; Shared VPC • 5-Hop Cryptographic Context Chain: </a:t>
-            </a:r>
-            <a:pPr indent="0" marL="0">
-              <a:buNone/>
-            </a:pPr>
-            <a:r>
-              <a:rPr lang="en-US" sz="700" dirty="0">
+          <a:bodyPr wrap="square" rtlCol="0" anchor="ctr">
+            <a:normAutofit/>
+          </a:bodyPr>
+          <a:lstStyle/>
+          <a:p>
+            <a:pPr indent="0" marL="0">
+              <a:buNone/>
+            </a:pPr>
+            <a:r>
+              <a:rPr lang="en-US" sz="700" b="1" dirty="0">
+                <a:solidFill>
+                  <a:srgbClr val="202124"/>
+                </a:solidFill>
+                <a:latin typeface="Arial" pitchFamily="34" charset="0"/>
+                <a:ea typeface="Arial" pitchFamily="34" charset="-122"/>
+                <a:cs typeface="Arial" pitchFamily="34" charset="-120"/>
+              </a:rPr>
+              <a:t>• VPC Service Controls &amp; Access Boundaries: </a:t>
+            </a:r>
+            <a:pPr indent="0" marL="0">
+              <a:buNone/>
+            </a:pPr>
+            <a:r>
+              <a:rPr lang="en-US" sz="690" dirty="0">
                 <a:solidFill>
                   <a:srgbClr val="3C4043"/>
                 </a:solidFill>
@@ -11020,28 +10957,28 @@
                 <a:ea typeface="Arial" pitchFamily="34" charset="-122"/>
                 <a:cs typeface="Arial" pitchFamily="34" charset="-120"/>
               </a:rPr>
-              <a:t>Enforce Shared GCP Project: cymbal-pooled-saas-prod perimeters around hub and spoke projects to block unauthorized data exfiltration, and bind Shared VPC • 5-Hop Cryptographic Context.
+              <a:t>Enforce VPC Service Controls perimeters around hub and spoke projects to block unauthorized data exfiltration, and bind Principal Access Boundary (PAB) policies to spoke principals.
 </a:t>
             </a:r>
             <a:pPr indent="0" marL="0">
               <a:buNone/>
             </a:pPr>
             <a:r>
-              <a:rPr lang="en-US" sz="710" b="1" dirty="0">
-                <a:solidFill>
-                  <a:srgbClr val="202124"/>
-                </a:solidFill>
-                <a:latin typeface="Arial" pitchFamily="34" charset="0"/>
-                <a:ea typeface="Arial" pitchFamily="34" charset="-122"/>
-                <a:cs typeface="Arial" pitchFamily="34" charset="-120"/>
-              </a:rPr>
-              <a:t>• Cloud Armor WAF, Discovery Engine PDP &amp; Model Armor: </a:t>
-            </a:r>
-            <a:pPr indent="0" marL="0">
-              <a:buNone/>
-            </a:pPr>
-            <a:r>
-              <a:rPr lang="en-US" sz="700" dirty="0">
+              <a:rPr lang="en-US" sz="700" b="1" dirty="0">
+                <a:solidFill>
+                  <a:srgbClr val="202124"/>
+                </a:solidFill>
+                <a:latin typeface="Arial" pitchFamily="34" charset="0"/>
+                <a:ea typeface="Arial" pitchFamily="34" charset="-122"/>
+                <a:cs typeface="Arial" pitchFamily="34" charset="-120"/>
+              </a:rPr>
+              <a:t>• Google Cloud Armor &amp; Discovery Engine PDP &amp; Model Armor: </a:t>
+            </a:r>
+            <a:pPr indent="0" marL="0">
+              <a:buNone/>
+            </a:pPr>
+            <a:r>
+              <a:rPr lang="en-US" sz="690" dirty="0">
                 <a:solidFill>
                   <a:srgbClr val="3C4043"/>
                 </a:solidFill>
@@ -11049,14 +10986,14 @@
                 <a:ea typeface="Arial" pitchFamily="34" charset="-122"/>
                 <a:cs typeface="Arial" pitchFamily="34" charset="-120"/>
               </a:rPr>
-              <a:t>Strip client-supplied privilege headers at the edge, verify caller identity claims, and screen both incoming prompts and outgoing completions with Model Armor.
+              <a:t>Strip client-supplied privilege headers at the edge, verify caller identity claims, and screen prompts and completions with Model Armor.
 </a:t>
             </a:r>
             <a:pPr indent="0" marL="0">
               <a:buNone/>
             </a:pPr>
             <a:r>
-              <a:rPr lang="en-US" sz="710" b="1" dirty="0">
+              <a:rPr lang="en-US" sz="700" b="1" dirty="0">
                 <a:solidFill>
                   <a:srgbClr val="202124"/>
                 </a:solidFill>
@@ -11070,7 +11007,7 @@
               <a:buNone/>
             </a:pPr>
             <a:r>
-              <a:rPr lang="en-US" sz="700" dirty="0">
+              <a:rPr lang="en-US" sz="690" dirty="0">
                 <a:solidFill>
                   <a:srgbClr val="3C4043"/>
                 </a:solidFill>
@@ -11080,7 +11017,7 @@
               </a:rPr>
               <a:t>Encrypt state at rest with Customer-Managed Encryption Keys and enforce least-privilege access scopes on Shared AlloyDB RLS.</a:t>
             </a:r>
-            <a:endParaRPr lang="en-US" sz="710" dirty="0"/>
+            <a:endParaRPr lang="en-US" sz="700" dirty="0"/>
           </a:p>
         </p:txBody>
       </p:sp>
@@ -11191,14 +11128,16 @@
           <a:ln/>
         </p:spPr>
         <p:txBody>
-          <a:bodyPr wrap="square" rtlCol="0" anchor="ctr"/>
-          <a:lstStyle/>
-          <a:p>
-            <a:pPr indent="0" marL="0">
-              <a:buNone/>
-            </a:pPr>
-            <a:r>
-              <a:rPr lang="en-US" sz="720" b="1" dirty="0">
+          <a:bodyPr wrap="square" rtlCol="0" anchor="ctr">
+            <a:normAutofit/>
+          </a:bodyPr>
+          <a:lstStyle/>
+          <a:p>
+            <a:pPr indent="0" marL="0">
+              <a:buNone/>
+            </a:pPr>
+            <a:r>
+              <a:rPr lang="en-US" sz="710" b="1" dirty="0">
                 <a:solidFill>
                   <a:srgbClr val="202124"/>
                 </a:solidFill>
@@ -11208,14 +11147,14 @@
               </a:rPr>
               <a:t>• External Application Load Balancer &amp; ADK Callback Gate</a:t>
             </a:r>
-            <a:endParaRPr lang="en-US" sz="720" dirty="0"/>
-          </a:p>
-          <a:p>
-            <a:pPr indent="0" marL="0">
-              <a:buNone/>
-            </a:pPr>
-            <a:r>
-              <a:rPr lang="en-US" sz="720" b="1" dirty="0">
+            <a:endParaRPr lang="en-US" sz="710" dirty="0"/>
+          </a:p>
+          <a:p>
+            <a:pPr indent="0" marL="0">
+              <a:buNone/>
+            </a:pPr>
+            <a:r>
+              <a:rPr lang="en-US" sz="710" b="1" dirty="0">
                 <a:solidFill>
                   <a:srgbClr val="202124"/>
                 </a:solidFill>
@@ -11225,14 +11164,14 @@
               </a:rPr>
               <a:t>• Pooled gVisor Pod &amp; 3LO Workspace/Jira</a:t>
             </a:r>
-            <a:endParaRPr lang="en-US" sz="720" dirty="0"/>
-          </a:p>
-          <a:p>
-            <a:pPr indent="0" marL="0">
-              <a:buNone/>
-            </a:pPr>
-            <a:r>
-              <a:rPr lang="en-US" sz="720" b="1" dirty="0">
+            <a:endParaRPr lang="en-US" sz="710" dirty="0"/>
+          </a:p>
+          <a:p>
+            <a:pPr indent="0" marL="0">
+              <a:buNone/>
+            </a:pPr>
+            <a:r>
+              <a:rPr lang="en-US" sz="710" b="1" dirty="0">
                 <a:solidFill>
                   <a:srgbClr val="202124"/>
                 </a:solidFill>
@@ -11242,7 +11181,7 @@
               </a:rPr>
               <a:t>• Shared AlloyDB RLS</a:t>
             </a:r>
-            <a:endParaRPr lang="en-US" sz="720" dirty="0"/>
+            <a:endParaRPr lang="en-US" sz="710" dirty="0"/>
           </a:p>
         </p:txBody>
       </p:sp>
@@ -11289,14 +11228,16 @@
           <a:ln/>
         </p:spPr>
         <p:txBody>
-          <a:bodyPr wrap="square" rtlCol="0" anchor="ctr"/>
-          <a:lstStyle/>
-          <a:p>
-            <a:pPr indent="0" marL="0">
-              <a:buNone/>
-            </a:pPr>
-            <a:r>
-              <a:rPr lang="en-US" sz="710" b="1" dirty="0">
+          <a:bodyPr wrap="square" rtlCol="0" anchor="ctr">
+            <a:normAutofit/>
+          </a:bodyPr>
+          <a:lstStyle/>
+          <a:p>
+            <a:pPr indent="0" marL="0">
+              <a:buNone/>
+            </a:pPr>
+            <a:r>
+              <a:rPr lang="en-US" sz="700" b="1" dirty="0">
                 <a:solidFill>
                   <a:srgbClr val="202124"/>
                 </a:solidFill>
@@ -11310,7 +11251,7 @@
               <a:buNone/>
             </a:pPr>
             <a:r>
-              <a:rPr lang="en-US" sz="700" dirty="0">
+              <a:rPr lang="en-US" sz="690" dirty="0">
                 <a:solidFill>
                   <a:srgbClr val="3C4043"/>
                 </a:solidFill>
@@ -11325,7 +11266,7 @@
               <a:buNone/>
             </a:pPr>
             <a:r>
-              <a:rPr lang="en-US" sz="710" b="1" dirty="0">
+              <a:rPr lang="en-US" sz="700" b="1" dirty="0">
                 <a:solidFill>
                   <a:srgbClr val="202124"/>
                 </a:solidFill>
@@ -11339,7 +11280,7 @@
               <a:buNone/>
             </a:pPr>
             <a:r>
-              <a:rPr lang="en-US" sz="700" dirty="0">
+              <a:rPr lang="en-US" sz="690" dirty="0">
                 <a:solidFill>
                   <a:srgbClr val="3C4043"/>
                 </a:solidFill>
@@ -11354,7 +11295,7 @@
               <a:buNone/>
             </a:pPr>
             <a:r>
-              <a:rPr lang="en-US" sz="710" b="1" dirty="0">
+              <a:rPr lang="en-US" sz="700" b="1" dirty="0">
                 <a:solidFill>
                   <a:srgbClr val="202124"/>
                 </a:solidFill>
@@ -11368,7 +11309,7 @@
               <a:buNone/>
             </a:pPr>
             <a:r>
-              <a:rPr lang="en-US" sz="700" dirty="0">
+              <a:rPr lang="en-US" sz="690" dirty="0">
                 <a:solidFill>
                   <a:srgbClr val="3C4043"/>
                 </a:solidFill>
@@ -11378,7 +11319,7 @@
               </a:rPr>
               <a:t>Enable regional high availability and Point-in-Time Recovery on Shared AlloyDB RLS with automated backup verification.</a:t>
             </a:r>
-            <a:endParaRPr lang="en-US" sz="710" dirty="0"/>
+            <a:endParaRPr lang="en-US" sz="700" dirty="0"/>
           </a:p>
         </p:txBody>
       </p:sp>
@@ -11489,14 +11430,16 @@
           <a:ln/>
         </p:spPr>
         <p:txBody>
-          <a:bodyPr wrap="square" rtlCol="0" anchor="ctr"/>
-          <a:lstStyle/>
-          <a:p>
-            <a:pPr indent="0" marL="0">
-              <a:buNone/>
-            </a:pPr>
-            <a:r>
-              <a:rPr lang="en-US" sz="720" b="1" dirty="0">
+          <a:bodyPr wrap="square" rtlCol="0" anchor="ctr">
+            <a:normAutofit/>
+          </a:bodyPr>
+          <a:lstStyle/>
+          <a:p>
+            <a:pPr indent="0" marL="0">
+              <a:buNone/>
+            </a:pPr>
+            <a:r>
+              <a:rPr lang="en-US" sz="710" b="1" dirty="0">
                 <a:solidFill>
                   <a:srgbClr val="202124"/>
                 </a:solidFill>
@@ -11506,14 +11449,14 @@
               </a:rPr>
               <a:t>• Infrastructure as Code</a:t>
             </a:r>
-            <a:endParaRPr lang="en-US" sz="720" dirty="0"/>
-          </a:p>
-          <a:p>
-            <a:pPr indent="0" marL="0">
-              <a:buNone/>
-            </a:pPr>
-            <a:r>
-              <a:rPr lang="en-US" sz="720" b="1" dirty="0">
+            <a:endParaRPr lang="en-US" sz="710" dirty="0"/>
+          </a:p>
+          <a:p>
+            <a:pPr indent="0" marL="0">
+              <a:buNone/>
+            </a:pPr>
+            <a:r>
+              <a:rPr lang="en-US" sz="710" b="1" dirty="0">
                 <a:solidFill>
                   <a:srgbClr val="202124"/>
                 </a:solidFill>
@@ -11523,14 +11466,14 @@
               </a:rPr>
               <a:t>• ContextCacheConfig &amp; BigQuery OTel Sink</a:t>
             </a:r>
-            <a:endParaRPr lang="en-US" sz="720" dirty="0"/>
-          </a:p>
-          <a:p>
-            <a:pPr indent="0" marL="0">
-              <a:buNone/>
-            </a:pPr>
-            <a:r>
-              <a:rPr lang="en-US" sz="720" b="1" dirty="0">
+            <a:endParaRPr lang="en-US" sz="710" dirty="0"/>
+          </a:p>
+          <a:p>
+            <a:pPr indent="0" marL="0">
+              <a:buNone/>
+            </a:pPr>
+            <a:r>
+              <a:rPr lang="en-US" sz="710" b="1" dirty="0">
                 <a:solidFill>
                   <a:srgbClr val="202124"/>
                 </a:solidFill>
@@ -11540,7 +11483,7 @@
               </a:rPr>
               <a:t>• Automated CI/CD &amp; Red-Team Gates</a:t>
             </a:r>
-            <a:endParaRPr lang="en-US" sz="720" dirty="0"/>
+            <a:endParaRPr lang="en-US" sz="710" dirty="0"/>
           </a:p>
         </p:txBody>
       </p:sp>
@@ -11587,14 +11530,16 @@
           <a:ln/>
         </p:spPr>
         <p:txBody>
-          <a:bodyPr wrap="square" rtlCol="0" anchor="ctr"/>
-          <a:lstStyle/>
-          <a:p>
-            <a:pPr indent="0" marL="0">
-              <a:buNone/>
-            </a:pPr>
-            <a:r>
-              <a:rPr lang="en-US" sz="710" b="1" dirty="0">
+          <a:bodyPr wrap="square" rtlCol="0" anchor="ctr">
+            <a:normAutofit/>
+          </a:bodyPr>
+          <a:lstStyle/>
+          <a:p>
+            <a:pPr indent="0" marL="0">
+              <a:buNone/>
+            </a:pPr>
+            <a:r>
+              <a:rPr lang="en-US" sz="700" b="1" dirty="0">
                 <a:solidFill>
                   <a:srgbClr val="202124"/>
                 </a:solidFill>
@@ -11608,7 +11553,7 @@
               <a:buNone/>
             </a:pPr>
             <a:r>
-              <a:rPr lang="en-US" sz="700" dirty="0">
+              <a:rPr lang="en-US" sz="690" dirty="0">
                 <a:solidFill>
                   <a:srgbClr val="3C4043"/>
                 </a:solidFill>
@@ -11623,7 +11568,7 @@
               <a:buNone/>
             </a:pPr>
             <a:r>
-              <a:rPr lang="en-US" sz="710" b="1" dirty="0">
+              <a:rPr lang="en-US" sz="700" b="1" dirty="0">
                 <a:solidFill>
                   <a:srgbClr val="202124"/>
                 </a:solidFill>
@@ -11637,7 +11582,7 @@
               <a:buNone/>
             </a:pPr>
             <a:r>
-              <a:rPr lang="en-US" sz="700" dirty="0">
+              <a:rPr lang="en-US" sz="690" dirty="0">
                 <a:solidFill>
                   <a:srgbClr val="3C4043"/>
                 </a:solidFill>
@@ -11652,7 +11597,7 @@
               <a:buNone/>
             </a:pPr>
             <a:r>
-              <a:rPr lang="en-US" sz="710" b="1" dirty="0">
+              <a:rPr lang="en-US" sz="700" b="1" dirty="0">
                 <a:solidFill>
                   <a:srgbClr val="202124"/>
                 </a:solidFill>
@@ -11666,7 +11611,7 @@
               <a:buNone/>
             </a:pPr>
             <a:r>
-              <a:rPr lang="en-US" sz="700" dirty="0">
+              <a:rPr lang="en-US" sz="690" dirty="0">
                 <a:solidFill>
                   <a:srgbClr val="3C4043"/>
                 </a:solidFill>
@@ -11676,7 +11621,7 @@
               </a:rPr>
               <a:t>Gate every prompt, model, or tool change on automated Vertex AI Gen AI Evaluation Service benchmarks and security regression checks before production rollout.</a:t>
             </a:r>
-            <a:endParaRPr lang="en-US" sz="710" dirty="0"/>
+            <a:endParaRPr lang="en-US" sz="700" dirty="0"/>
           </a:p>
         </p:txBody>
       </p:sp>
@@ -11787,14 +11732,16 @@
           <a:ln/>
         </p:spPr>
         <p:txBody>
-          <a:bodyPr wrap="square" rtlCol="0" anchor="ctr"/>
-          <a:lstStyle/>
-          <a:p>
-            <a:pPr indent="0" marL="0">
-              <a:buNone/>
-            </a:pPr>
-            <a:r>
-              <a:rPr lang="en-US" sz="720" b="1" dirty="0">
+          <a:bodyPr wrap="square" rtlCol="0" anchor="ctr">
+            <a:normAutofit/>
+          </a:bodyPr>
+          <a:lstStyle/>
+          <a:p>
+            <a:pPr indent="0" marL="0">
+              <a:buNone/>
+            </a:pPr>
+            <a:r>
+              <a:rPr lang="en-US" sz="710" b="1" dirty="0">
                 <a:solidFill>
                   <a:srgbClr val="202124"/>
                 </a:solidFill>
@@ -11804,14 +11751,14 @@
               </a:rPr>
               <a:t>• Gemini &amp; Claude 3.7 Context Caching</a:t>
             </a:r>
-            <a:endParaRPr lang="en-US" sz="720" dirty="0"/>
-          </a:p>
-          <a:p>
-            <a:pPr indent="0" marL="0">
-              <a:buNone/>
-            </a:pPr>
-            <a:r>
-              <a:rPr lang="en-US" sz="720" b="1" dirty="0">
+            <a:endParaRPr lang="en-US" sz="710" dirty="0"/>
+          </a:p>
+          <a:p>
+            <a:pPr indent="0" marL="0">
+              <a:buNone/>
+            </a:pPr>
+            <a:r>
+              <a:rPr lang="en-US" sz="710" b="1" dirty="0">
                 <a:solidFill>
                   <a:srgbClr val="202124"/>
                 </a:solidFill>
@@ -11821,14 +11768,14 @@
               </a:rPr>
               <a:t>• IAP + OBO Broker &amp; 3LO Workspace/Jira</a:t>
             </a:r>
-            <a:endParaRPr lang="en-US" sz="720" dirty="0"/>
-          </a:p>
-          <a:p>
-            <a:pPr indent="0" marL="0">
-              <a:buNone/>
-            </a:pPr>
-            <a:r>
-              <a:rPr lang="en-US" sz="720" b="1" dirty="0">
+            <a:endParaRPr lang="en-US" sz="710" dirty="0"/>
+          </a:p>
+          <a:p>
+            <a:pPr indent="0" marL="0">
+              <a:buNone/>
+            </a:pPr>
+            <a:r>
+              <a:rPr lang="en-US" sz="710" b="1" dirty="0">
                 <a:solidFill>
                   <a:srgbClr val="202124"/>
                 </a:solidFill>
@@ -11838,7 +11785,7 @@
               </a:rPr>
               <a:t>• BigQuery OTel Sink FinOps Attribution</a:t>
             </a:r>
-            <a:endParaRPr lang="en-US" sz="720" dirty="0"/>
+            <a:endParaRPr lang="en-US" sz="710" dirty="0"/>
           </a:p>
         </p:txBody>
       </p:sp>
@@ -11885,14 +11832,16 @@
           <a:ln/>
         </p:spPr>
         <p:txBody>
-          <a:bodyPr wrap="square" rtlCol="0" anchor="ctr"/>
-          <a:lstStyle/>
-          <a:p>
-            <a:pPr indent="0" marL="0">
-              <a:buNone/>
-            </a:pPr>
-            <a:r>
-              <a:rPr lang="en-US" sz="710" b="1" dirty="0">
+          <a:bodyPr wrap="square" rtlCol="0" anchor="ctr">
+            <a:normAutofit/>
+          </a:bodyPr>
+          <a:lstStyle/>
+          <a:p>
+            <a:pPr indent="0" marL="0">
+              <a:buNone/>
+            </a:pPr>
+            <a:r>
+              <a:rPr lang="en-US" sz="700" b="1" dirty="0">
                 <a:solidFill>
                   <a:srgbClr val="202124"/>
                 </a:solidFill>
@@ -11906,7 +11855,7 @@
               <a:buNone/>
             </a:pPr>
             <a:r>
-              <a:rPr lang="en-US" sz="700" dirty="0">
+              <a:rPr lang="en-US" sz="690" dirty="0">
                 <a:solidFill>
                   <a:srgbClr val="3C4043"/>
                 </a:solidFill>
@@ -11921,7 +11870,7 @@
               <a:buNone/>
             </a:pPr>
             <a:r>
-              <a:rPr lang="en-US" sz="710" b="1" dirty="0">
+              <a:rPr lang="en-US" sz="700" b="1" dirty="0">
                 <a:solidFill>
                   <a:srgbClr val="202124"/>
                 </a:solidFill>
@@ -11935,7 +11884,7 @@
               <a:buNone/>
             </a:pPr>
             <a:r>
-              <a:rPr lang="en-US" sz="700" dirty="0">
+              <a:rPr lang="en-US" sz="690" dirty="0">
                 <a:solidFill>
                   <a:srgbClr val="3C4043"/>
                 </a:solidFill>
@@ -11950,7 +11899,7 @@
               <a:buNone/>
             </a:pPr>
             <a:r>
-              <a:rPr lang="en-US" sz="710" b="1" dirty="0">
+              <a:rPr lang="en-US" sz="700" b="1" dirty="0">
                 <a:solidFill>
                   <a:srgbClr val="202124"/>
                 </a:solidFill>
@@ -11964,7 +11913,7 @@
               <a:buNone/>
             </a:pPr>
             <a:r>
-              <a:rPr lang="en-US" sz="700" dirty="0">
+              <a:rPr lang="en-US" sz="690" dirty="0">
                 <a:solidFill>
                   <a:srgbClr val="3C4043"/>
                 </a:solidFill>
@@ -11974,7 +11923,7 @@
               </a:rPr>
               <a:t>Export OpenTelemetry token usage spans and Cloud Billing records to BigQuery to enforce per-spoke quota budgets and automated spend alerts.</a:t>
             </a:r>
-            <a:endParaRPr lang="en-US" sz="710" dirty="0"/>
+            <a:endParaRPr lang="en-US" sz="700" dirty="0"/>
           </a:p>
         </p:txBody>
       </p:sp>
@@ -12352,8 +12301,8 @@
         </p:nvSpPr>
         <p:spPr>
           <a:xfrm>
-            <a:off x="877824" y="1554480"/>
-            <a:ext cx="10424160" cy="1920240"/>
+            <a:off x="877824" y="1536192"/>
+            <a:ext cx="10424160" cy="1956816"/>
           </a:xfrm>
           <a:prstGeom prst="rect">
             <a:avLst/>
@@ -12362,17 +12311,19 @@
           <a:ln/>
         </p:spPr>
         <p:txBody>
-          <a:bodyPr wrap="square" rtlCol="0" anchor="t"/>
-          <a:lstStyle/>
-          <a:p>
-            <a:pPr indent="0" marL="0">
-              <a:lnSpc>
-                <a:spcPct val="112000"/>
-              </a:lnSpc>
-              <a:buNone/>
-            </a:pPr>
-            <a:r>
-              <a:rPr lang="en-US" sz="740" dirty="0">
+          <a:bodyPr wrap="square" rtlCol="0" anchor="t">
+            <a:normAutofit/>
+          </a:bodyPr>
+          <a:lstStyle/>
+          <a:p>
+            <a:pPr indent="0" marL="0">
+              <a:lnSpc>
+                <a:spcPct val="106000"/>
+              </a:lnSpc>
+              <a:buNone/>
+            </a:pPr>
+            <a:r>
+              <a:rPr lang="en-US" sz="690" dirty="0">
                 <a:solidFill>
                   <a:srgbClr val="202124"/>
                 </a:solidFill>
@@ -12382,17 +12333,17 @@
               </a:rPr>
               <a:t>-- Control Plane billing &amp; tokenomics schema (BigQuery)</a:t>
             </a:r>
-            <a:endParaRPr lang="en-US" sz="740" dirty="0"/>
-          </a:p>
-          <a:p>
-            <a:pPr indent="0" marL="0">
-              <a:lnSpc>
-                <a:spcPct val="112000"/>
-              </a:lnSpc>
-              <a:buNone/>
-            </a:pPr>
-            <a:r>
-              <a:rPr lang="en-US" sz="740" dirty="0">
+            <a:endParaRPr lang="en-US" sz="690" dirty="0"/>
+          </a:p>
+          <a:p>
+            <a:pPr indent="0" marL="0">
+              <a:lnSpc>
+                <a:spcPct val="106000"/>
+              </a:lnSpc>
+              <a:buNone/>
+            </a:pPr>
+            <a:r>
+              <a:rPr lang="en-US" sz="690" dirty="0">
                 <a:solidFill>
                   <a:srgbClr val="202124"/>
                 </a:solidFill>
@@ -12402,17 +12353,17 @@
               </a:rPr>
               <a:t>CREATE TABLE agent_usage.tokenomics (</a:t>
             </a:r>
-            <a:endParaRPr lang="en-US" sz="740" dirty="0"/>
-          </a:p>
-          <a:p>
-            <a:pPr indent="0" marL="0">
-              <a:lnSpc>
-                <a:spcPct val="112000"/>
-              </a:lnSpc>
-              <a:buNone/>
-            </a:pPr>
-            <a:r>
-              <a:rPr lang="en-US" sz="740" dirty="0">
+            <a:endParaRPr lang="en-US" sz="690" dirty="0"/>
+          </a:p>
+          <a:p>
+            <a:pPr indent="0" marL="0">
+              <a:lnSpc>
+                <a:spcPct val="106000"/>
+              </a:lnSpc>
+              <a:buNone/>
+            </a:pPr>
+            <a:r>
+              <a:rPr lang="en-US" sz="690" dirty="0">
                 <a:solidFill>
                   <a:srgbClr val="202124"/>
                 </a:solidFill>
@@ -12422,17 +12373,17 @@
               </a:rPr>
               <a:t>  tenant_id STRING NOT NULL,</a:t>
             </a:r>
-            <a:endParaRPr lang="en-US" sz="740" dirty="0"/>
-          </a:p>
-          <a:p>
-            <a:pPr indent="0" marL="0">
-              <a:lnSpc>
-                <a:spcPct val="112000"/>
-              </a:lnSpc>
-              <a:buNone/>
-            </a:pPr>
-            <a:r>
-              <a:rPr lang="en-US" sz="740" dirty="0">
+            <a:endParaRPr lang="en-US" sz="690" dirty="0"/>
+          </a:p>
+          <a:p>
+            <a:pPr indent="0" marL="0">
+              <a:lnSpc>
+                <a:spcPct val="106000"/>
+              </a:lnSpc>
+              <a:buNone/>
+            </a:pPr>
+            <a:r>
+              <a:rPr lang="en-US" sz="690" dirty="0">
                 <a:solidFill>
                   <a:srgbClr val="202124"/>
                 </a:solidFill>
@@ -12442,17 +12393,17 @@
               </a:rPr>
               <a:t>  tier STRING NOT NULL,</a:t>
             </a:r>
-            <a:endParaRPr lang="en-US" sz="740" dirty="0"/>
-          </a:p>
-          <a:p>
-            <a:pPr indent="0" marL="0">
-              <a:lnSpc>
-                <a:spcPct val="112000"/>
-              </a:lnSpc>
-              <a:buNone/>
-            </a:pPr>
-            <a:r>
-              <a:rPr lang="en-US" sz="740" dirty="0">
+            <a:endParaRPr lang="en-US" sz="690" dirty="0"/>
+          </a:p>
+          <a:p>
+            <a:pPr indent="0" marL="0">
+              <a:lnSpc>
+                <a:spcPct val="106000"/>
+              </a:lnSpc>
+              <a:buNone/>
+            </a:pPr>
+            <a:r>
+              <a:rPr lang="en-US" sz="690" dirty="0">
                 <a:solidFill>
                   <a:srgbClr val="202124"/>
                 </a:solidFill>
@@ -12462,17 +12413,17 @@
               </a:rPr>
               <a:t>  model_id STRING NOT NULL,</a:t>
             </a:r>
-            <a:endParaRPr lang="en-US" sz="740" dirty="0"/>
-          </a:p>
-          <a:p>
-            <a:pPr indent="0" marL="0">
-              <a:lnSpc>
-                <a:spcPct val="112000"/>
-              </a:lnSpc>
-              <a:buNone/>
-            </a:pPr>
-            <a:r>
-              <a:rPr lang="en-US" sz="740" dirty="0">
+            <a:endParaRPr lang="en-US" sz="690" dirty="0"/>
+          </a:p>
+          <a:p>
+            <a:pPr indent="0" marL="0">
+              <a:lnSpc>
+                <a:spcPct val="106000"/>
+              </a:lnSpc>
+              <a:buNone/>
+            </a:pPr>
+            <a:r>
+              <a:rPr lang="en-US" sz="690" dirty="0">
                 <a:solidFill>
                   <a:srgbClr val="202124"/>
                 </a:solidFill>
@@ -12482,17 +12433,17 @@
               </a:rPr>
               <a:t>  input_tokens INT64 NOT NULL,</a:t>
             </a:r>
-            <a:endParaRPr lang="en-US" sz="740" dirty="0"/>
-          </a:p>
-          <a:p>
-            <a:pPr indent="0" marL="0">
-              <a:lnSpc>
-                <a:spcPct val="112000"/>
-              </a:lnSpc>
-              <a:buNone/>
-            </a:pPr>
-            <a:r>
-              <a:rPr lang="en-US" sz="740" dirty="0">
+            <a:endParaRPr lang="en-US" sz="690" dirty="0"/>
+          </a:p>
+          <a:p>
+            <a:pPr indent="0" marL="0">
+              <a:lnSpc>
+                <a:spcPct val="106000"/>
+              </a:lnSpc>
+              <a:buNone/>
+            </a:pPr>
+            <a:r>
+              <a:rPr lang="en-US" sz="690" dirty="0">
                 <a:solidFill>
                   <a:srgbClr val="202124"/>
                 </a:solidFill>
@@ -12502,17 +12453,17 @@
               </a:rPr>
               <a:t>  output_tokens INT64 NOT NULL,</a:t>
             </a:r>
-            <a:endParaRPr lang="en-US" sz="740" dirty="0"/>
-          </a:p>
-          <a:p>
-            <a:pPr indent="0" marL="0">
-              <a:lnSpc>
-                <a:spcPct val="112000"/>
-              </a:lnSpc>
-              <a:buNone/>
-            </a:pPr>
-            <a:r>
-              <a:rPr lang="en-US" sz="740" dirty="0">
+            <a:endParaRPr lang="en-US" sz="690" dirty="0"/>
+          </a:p>
+          <a:p>
+            <a:pPr indent="0" marL="0">
+              <a:lnSpc>
+                <a:spcPct val="106000"/>
+              </a:lnSpc>
+              <a:buNone/>
+            </a:pPr>
+            <a:r>
+              <a:rPr lang="en-US" sz="690" dirty="0">
                 <a:solidFill>
                   <a:srgbClr val="202124"/>
                 </a:solidFill>
@@ -12522,17 +12473,17 @@
               </a:rPr>
               <a:t>  cached_prefix_tokens INT64 DEFAULT 0,</a:t>
             </a:r>
-            <a:endParaRPr lang="en-US" sz="740" dirty="0"/>
-          </a:p>
-          <a:p>
-            <a:pPr indent="0" marL="0">
-              <a:lnSpc>
-                <a:spcPct val="112000"/>
-              </a:lnSpc>
-              <a:buNone/>
-            </a:pPr>
-            <a:r>
-              <a:rPr lang="en-US" sz="740" dirty="0">
+            <a:endParaRPr lang="en-US" sz="690" dirty="0"/>
+          </a:p>
+          <a:p>
+            <a:pPr indent="0" marL="0">
+              <a:lnSpc>
+                <a:spcPct val="106000"/>
+              </a:lnSpc>
+              <a:buNone/>
+            </a:pPr>
+            <a:r>
+              <a:rPr lang="en-US" sz="690" dirty="0">
                 <a:solidFill>
                   <a:srgbClr val="202124"/>
                 </a:solidFill>
@@ -12542,17 +12493,17 @@
               </a:rPr>
               <a:t>  session_id STRING NOT NULL,</a:t>
             </a:r>
-            <a:endParaRPr lang="en-US" sz="740" dirty="0"/>
-          </a:p>
-          <a:p>
-            <a:pPr indent="0" marL="0">
-              <a:lnSpc>
-                <a:spcPct val="112000"/>
-              </a:lnSpc>
-              <a:buNone/>
-            </a:pPr>
-            <a:r>
-              <a:rPr lang="en-US" sz="740" dirty="0">
+            <a:endParaRPr lang="en-US" sz="690" dirty="0"/>
+          </a:p>
+          <a:p>
+            <a:pPr indent="0" marL="0">
+              <a:lnSpc>
+                <a:spcPct val="106000"/>
+              </a:lnSpc>
+              <a:buNone/>
+            </a:pPr>
+            <a:r>
+              <a:rPr lang="en-US" sz="690" dirty="0">
                 <a:solidFill>
                   <a:srgbClr val="202124"/>
                 </a:solidFill>
@@ -12562,17 +12513,17 @@
               </a:rPr>
               <a:t>  timestamp TIMESTAMP NOT NULL</a:t>
             </a:r>
-            <a:endParaRPr lang="en-US" sz="740" dirty="0"/>
-          </a:p>
-          <a:p>
-            <a:pPr indent="0" marL="0">
-              <a:lnSpc>
-                <a:spcPct val="112000"/>
-              </a:lnSpc>
-              <a:buNone/>
-            </a:pPr>
-            <a:r>
-              <a:rPr lang="en-US" sz="740" dirty="0">
+            <a:endParaRPr lang="en-US" sz="690" dirty="0"/>
+          </a:p>
+          <a:p>
+            <a:pPr indent="0" marL="0">
+              <a:lnSpc>
+                <a:spcPct val="106000"/>
+              </a:lnSpc>
+              <a:buNone/>
+            </a:pPr>
+            <a:r>
+              <a:rPr lang="en-US" sz="690" dirty="0">
                 <a:solidFill>
                   <a:srgbClr val="202124"/>
                 </a:solidFill>
@@ -12582,17 +12533,17 @@
               </a:rPr>
               <a:t>)</a:t>
             </a:r>
-            <a:endParaRPr lang="en-US" sz="740" dirty="0"/>
-          </a:p>
-          <a:p>
-            <a:pPr indent="0" marL="0">
-              <a:lnSpc>
-                <a:spcPct val="112000"/>
-              </a:lnSpc>
-              <a:buNone/>
-            </a:pPr>
-            <a:r>
-              <a:rPr lang="en-US" sz="740" dirty="0">
+            <a:endParaRPr lang="en-US" sz="690" dirty="0"/>
+          </a:p>
+          <a:p>
+            <a:pPr indent="0" marL="0">
+              <a:lnSpc>
+                <a:spcPct val="106000"/>
+              </a:lnSpc>
+              <a:buNone/>
+            </a:pPr>
+            <a:r>
+              <a:rPr lang="en-US" sz="690" dirty="0">
                 <a:solidFill>
                   <a:srgbClr val="202124"/>
                 </a:solidFill>
@@ -12602,17 +12553,17 @@
               </a:rPr>
               <a:t>PARTITION BY DATE(timestamp)</a:t>
             </a:r>
-            <a:endParaRPr lang="en-US" sz="740" dirty="0"/>
-          </a:p>
-          <a:p>
-            <a:pPr indent="0" marL="0">
-              <a:lnSpc>
-                <a:spcPct val="112000"/>
-              </a:lnSpc>
-              <a:buNone/>
-            </a:pPr>
-            <a:r>
-              <a:rPr lang="en-US" sz="740" dirty="0">
+            <a:endParaRPr lang="en-US" sz="690" dirty="0"/>
+          </a:p>
+          <a:p>
+            <a:pPr indent="0" marL="0">
+              <a:lnSpc>
+                <a:spcPct val="106000"/>
+              </a:lnSpc>
+              <a:buNone/>
+            </a:pPr>
+            <a:r>
+              <a:rPr lang="en-US" sz="690" dirty="0">
                 <a:solidFill>
                   <a:srgbClr val="202124"/>
                 </a:solidFill>
@@ -12622,7 +12573,7 @@
               </a:rPr>
               <a:t>CLUSTER BY tenant_id, tier;</a:t>
             </a:r>
-            <a:endParaRPr lang="en-US" sz="740" dirty="0"/>
+            <a:endParaRPr lang="en-US" sz="690" dirty="0"/>
           </a:p>
         </p:txBody>
       </p:sp>

--- a/slides/doc-mt-03-editable-slides.pptx
+++ b/slides/doc-mt-03-editable-slides.pptx
@@ -3454,6 +3454,7 @@
               <a:srgbClr val="5F6368"/>
             </a:solidFill>
             <a:prstDash val="solid"/>
+            <a:headEnd type="triangle" w="sm" len="sm"/>
           </a:ln>
         </p:spPr>
       </p:sp>
@@ -3501,6 +3502,7 @@
               <a:srgbClr val="5F6368"/>
             </a:solidFill>
             <a:prstDash val="solid"/>
+            <a:headEnd type="triangle" w="sm" len="sm"/>
           </a:ln>
         </p:spPr>
       </p:sp>
@@ -3686,6 +3688,7 @@
               <a:srgbClr val="5F6368"/>
             </a:solidFill>
             <a:prstDash val="solid"/>
+            <a:headEnd type="triangle" w="sm" len="sm"/>
           </a:ln>
         </p:spPr>
       </p:sp>
@@ -3733,6 +3736,7 @@
               <a:srgbClr val="5F6368"/>
             </a:solidFill>
             <a:prstDash val="solid"/>
+            <a:headEnd type="triangle" w="sm" len="sm"/>
           </a:ln>
         </p:spPr>
       </p:sp>
@@ -5344,7 +5348,7 @@
                 <a:ea typeface="Arial" pitchFamily="34" charset="-122"/>
                 <a:cs typeface="Arial" pitchFamily="34" charset="-120"/>
               </a:rPr>
-              <a:t>Gemini &amp; Claude 3.7</a:t>
+              <a:t>Gemini 2.5 Pro &amp; Flash</a:t>
             </a:r>
             <a:endParaRPr lang="en-US" sz="435" dirty="0"/>
           </a:p>
@@ -6609,7 +6613,7 @@
                 <a:ea typeface="Arial" pitchFamily="34" charset="-122"/>
                 <a:cs typeface="Arial" pitchFamily="34" charset="-120"/>
               </a:rPr>
-              <a:t>gs://cymbal- skills-finvault</a:t>
+              <a:t>GCS Skills: cymbal-skills-fv</a:t>
             </a:r>
             <a:endParaRPr lang="en-US" sz="420" dirty="0"/>
           </a:p>
@@ -6670,8 +6674,8 @@
         </p:nvSpPr>
         <p:spPr>
           <a:xfrm>
-            <a:off x="7209130" y="4659782"/>
-            <a:ext cx="715061" cy="114300"/>
+            <a:off x="7184441" y="4659782"/>
+            <a:ext cx="764438" cy="114300"/>
           </a:xfrm>
           <a:prstGeom prst="roundRect">
             <a:avLst>
@@ -6703,7 +6707,7 @@
                 <a:ea typeface="Arial" pitchFamily="34" charset="-122"/>
                 <a:cs typeface="Arial" pitchFamily="34" charset="-120"/>
               </a:rPr>
-              <a:t>gs://cymbal- skills-retail</a:t>
+              <a:t>GCS Skills: cymbal-skills-rs</a:t>
             </a:r>
             <a:endParaRPr lang="en-US" sz="420" dirty="0"/>
           </a:p>
@@ -7993,7 +7997,7 @@
                 <a:ea typeface="Arial" pitchFamily="34" charset="-122"/>
                 <a:cs typeface="Arial" pitchFamily="34" charset="-120"/>
               </a:rPr>
-              <a:t>• Google Cloud Armor &amp; IAP + OBO Broker: </a:t>
+              <a:t>• Google Cloud Armor: </a:t>
             </a:r>
             <a:pPr indent="0" marL="0">
               <a:lnSpc>
@@ -8010,7 +8014,7 @@
                 <a:ea typeface="Arial" pitchFamily="34" charset="-122"/>
                 <a:cs typeface="Arial" pitchFamily="34" charset="-120"/>
               </a:rPr>
-              <a:t>Enforces edge policy rules and screens payloads before reaching the runtime.
+              <a:t>Enforces edge policy rules before reaching the runtime.
 </a:t>
             </a:r>
             <a:pPr indent="0" marL="0">
@@ -8045,7 +8049,7 @@
                 <a:ea typeface="Arial" pitchFamily="34" charset="-122"/>
                 <a:cs typeface="Arial" pitchFamily="34" charset="-120"/>
               </a:rPr>
-              <a:t>Authenticates callers and verifies identity and scope claims before routing.
+              <a:t>Screens incoming prompts and verifies policy constraints at the routing hub.
 </a:t>
             </a:r>
             <a:pPr indent="0" marL="0">
@@ -8063,7 +8067,7 @@
                 <a:ea typeface="Arial" pitchFamily="34" charset="-122"/>
                 <a:cs typeface="Arial" pitchFamily="34" charset="-120"/>
               </a:rPr>
-              <a:t>• ADK Callback Gate: </a:t>
+              <a:t>• IAP + OBO Broker: </a:t>
             </a:r>
             <a:pPr indent="0" marL="0">
               <a:lnSpc>
@@ -8080,7 +8084,7 @@
                 <a:ea typeface="Arial" pitchFamily="34" charset="-122"/>
                 <a:cs typeface="Arial" pitchFamily="34" charset="-120"/>
               </a:rPr>
-              <a:t>Serverless routing service that validates caller tokens and dispatches requests to the target execution spoke.</a:t>
+              <a:t>Authenticates callers and binds cryptographic identity and scope claims before routing.</a:t>
             </a:r>
             <a:endParaRPr lang="en-US" sz="690" dirty="0"/>
           </a:p>
@@ -8651,7 +8655,7 @@
                 <a:ea typeface="Arial" pitchFamily="34" charset="-122"/>
                 <a:cs typeface="Arial" pitchFamily="34" charset="-120"/>
               </a:rPr>
-              <a:t>Core execution environment orchestrating reasoning, memory, and tool execution.
+              <a:t>Core execution environments orchestrating reasoning, memory, and tool execution across left and right spokes.
 </a:t>
             </a:r>
             <a:pPr indent="0" marL="0">
@@ -8686,7 +8690,7 @@
                 <a:ea typeface="Arial" pitchFamily="34" charset="-122"/>
                 <a:cs typeface="Arial" pitchFamily="34" charset="-120"/>
               </a:rPr>
-              <a:t>Screens prompts and model outputs within the execution boundary to enforce safety and DLP policies.
+              <a:t>Screens prompts and model outputs within each spoke boundary to enforce safety and DLP policies.
 </a:t>
             </a:r>
             <a:pPr indent="0" marL="0">
@@ -8704,7 +8708,7 @@
                 <a:ea typeface="Arial" pitchFamily="34" charset="-122"/>
                 <a:cs typeface="Arial" pitchFamily="34" charset="-120"/>
               </a:rPr>
-              <a:t>• 3LO Workspace/Jira: </a:t>
+              <a:t>• 3LO Workspace/Jira / 3LO Entra &amp; SNOW: </a:t>
             </a:r>
             <a:pPr indent="0" marL="0">
               <a:lnSpc>
@@ -8721,7 +8725,7 @@
                 <a:ea typeface="Arial" pitchFamily="34" charset="-122"/>
                 <a:cs typeface="Arial" pitchFamily="34" charset="-120"/>
               </a:rPr>
-              <a:t>Serverless tool interface providing standardized, scoped access to enterprise systems.
+              <a:t>Serverless tool interfaces providing standardized, scoped access to enterprise systems.
 </a:t>
             </a:r>
             <a:pPr indent="0" marL="0">
@@ -8756,7 +8760,7 @@
                 <a:ea typeface="Arial" pitchFamily="34" charset="-122"/>
                 <a:cs typeface="Arial" pitchFamily="34" charset="-120"/>
               </a:rPr>
-              <a:t>Isolated persistence layer enforcing access boundaries, vector namespaces, and encryption at rest.</a:t>
+              <a:t>Isolated persistence layers enforcing access boundaries, vector namespaces, and encryption at rest.</a:t>
             </a:r>
             <a:endParaRPr lang="en-US" sz="690" dirty="0"/>
           </a:p>
@@ -9054,7 +9058,7 @@
                 <a:ea typeface="Arial" pitchFamily="34" charset="-122"/>
                 <a:cs typeface="Arial" pitchFamily="34" charset="-120"/>
               </a:rPr>
-              <a:t>Grounded context retrieval: Queries the datastore via gs://cymbal- skills-finvault.
+              <a:t>Grounded context retrieval: Queries the datastore via GCS Skills: cymbal-skills-fv.
 </a:t>
             </a:r>
             <a:pPr indent="0" marL="0">
@@ -9159,7 +9163,7 @@
                 <a:ea typeface="Arial" pitchFamily="34" charset="-122"/>
                 <a:cs typeface="Arial" pitchFamily="34" charset="-120"/>
               </a:rPr>
-              <a:t>Pooled gVisor Pod sends the validated, context-enriched prompt to Gemini &amp; Claude 3.7 to synthesize a grounded response.
+              <a:t>Pooled gVisor Pod sends the validated, context-enriched prompt to Gemini 2.5 Pro &amp; Flash to synthesize a grounded response.
 </a:t>
             </a:r>
             <a:pPr indent="0" marL="0">
@@ -11749,7 +11753,7 @@
                 <a:ea typeface="Arial" pitchFamily="34" charset="-122"/>
                 <a:cs typeface="Arial" pitchFamily="34" charset="-120"/>
               </a:rPr>
-              <a:t>• Gemini &amp; Claude 3.7 Context Caching</a:t>
+              <a:t>• Gemini 2.5 Pro &amp; Flash Context Caching</a:t>
             </a:r>
             <a:endParaRPr lang="en-US" sz="710" dirty="0"/>
           </a:p>
@@ -11849,7 +11853,7 @@
                 <a:ea typeface="Arial" pitchFamily="34" charset="-122"/>
                 <a:cs typeface="Arial" pitchFamily="34" charset="-120"/>
               </a:rPr>
-              <a:t>• Gemini &amp; Claude 3.7 Context Caching: </a:t>
+              <a:t>• Gemini 2.5 Pro &amp; Flash Context Caching: </a:t>
             </a:r>
             <a:pPr indent="0" marL="0">
               <a:buNone/>

--- a/slides/doc-mt-03-editable-slides.pptx
+++ b/slides/doc-mt-03-editable-slides.pptx
@@ -785,7 +785,7 @@
           <a:p>
             <a:r>
               <a:rPr lang="en-US" dirty="0"/>
-              <a:t>[phased-roadmap-timeline] WS3 • Pattern B Zero-Trust Sovereign Silo Provisioning Timeline: Workstream 3 Pattern B Timeline  •  Dedicated Project &amp; PAB → VPC-SC &amp; CMEK → Private GKE &amp; &lt;60s Kill-Switch</a:t>
+              <a:t>[phased-roadmap-timeline] WS3 • ACT III: PATTERN B SOVEREIGN SILO PROVISIONING TIMELINE: Workstream 3 Pattern B Timeline  •  Dedicated Project &amp; PAB → VPC-SC &amp; CMEK → Private GKE &amp; &lt;60s Kill-Switch</a:t>
             </a:r>
             <a:endParaRPr lang="en-US" dirty="0"/>
           </a:p>
@@ -873,7 +873,7 @@
           <a:p>
             <a:r>
               <a:rPr lang="en-US" dirty="0"/>
-              <a:t>[strategic-operating-model-pillars] WS3 • Pattern B Sovereign Project, Cryptographic &amp; Model Governance: Workstream 3 Pattern B Operating Model  •  Project &amp; VPC-SC Sovereignty + Tenant CMEK + Air-Gapped Gemma 3</a:t>
+              <a:t>[strategic-operating-model-pillars] WS3 • ACT III: PATTERN B SOVEREIGN PROJECT, KMS &amp; MODEL GOVERNANCE: Workstream 3 Pattern B Operating Model  •  Project &amp; VPC-SC Sovereignty + Tenant CMEK + Air-Gapped Gemma 3</a:t>
             </a:r>
             <a:endParaRPr lang="en-US" dirty="0"/>
           </a:p>
@@ -1592,7 +1592,7 @@
           <a:p>
             <a:r>
               <a:rPr lang="en-US" dirty="0"/>
-              <a:t>[async-state-flow-pipeline] WS3 • Pattern B VPC-SC Air-Gapped Inference &amp; Continuous KMS Attestation: Workstream 3 Pattern B Pipeline  •  Restricted VIP Air-Gapped Inference + Continuous &lt;60s KMS CMEK Liveness Loop</a:t>
+              <a:t>[async-state-flow-pipeline] WS3 • ACT II: VPC-SC AIR-GAPPED INFERENCE &amp; CONTINUOUS KMS ATTESTATION: Workstream 3 Pattern B Pipeline  •  Restricted VIP Air-Gapped Inference + Continuous &lt;60s KMS CMEK Liveness Loop</a:t>
             </a:r>
             <a:endParaRPr lang="en-US" dirty="0"/>
           </a:p>
@@ -3178,7 +3178,7 @@
                 <a:ea typeface="Google Sans" pitchFamily="34" charset="-122"/>
                 <a:cs typeface="Google Sans" pitchFamily="34" charset="-120"/>
               </a:rPr>
-              <a:t>OFFICIAL 4-ZONE HUB-AND-SPOKE TOPOLOGY (#78)</a:t>
+              <a:t>3-ACT EXECUTIVE BRIEFING &amp; DELIVERABLE MAP</a:t>
             </a:r>
             <a:endParaRPr lang="en-US" sz="920" dirty="0"/>
           </a:p>
@@ -3240,7 +3240,7 @@
         <p:spPr>
           <a:xfrm>
             <a:off x="7735824" y="1005840"/>
-            <a:ext cx="1353312" cy="219456"/>
+            <a:ext cx="1481328" cy="219456"/>
           </a:xfrm>
           <a:prstGeom prst="roundRect">
             <a:avLst>
@@ -3262,7 +3262,7 @@
         <p:spPr>
           <a:xfrm>
             <a:off x="7735824" y="1005840"/>
-            <a:ext cx="1353312" cy="219456"/>
+            <a:ext cx="1481328" cy="219456"/>
           </a:xfrm>
           <a:prstGeom prst="rect">
             <a:avLst/>
@@ -3278,7 +3278,7 @@
               <a:buNone/>
             </a:pPr>
             <a:r>
-              <a:rPr lang="en-US" sz="680" b="1" dirty="0">
+              <a:rPr lang="en-US" sz="660" b="1" dirty="0">
                 <a:solidFill>
                   <a:srgbClr val="174EA6"/>
                 </a:solidFill>
@@ -3286,9 +3286,9 @@
                 <a:ea typeface="Google Sans" pitchFamily="34" charset="-122"/>
                 <a:cs typeface="Google Sans" pitchFamily="34" charset="-120"/>
               </a:rPr>
-              <a:t>01 • ROUTING HUB</a:t>
-            </a:r>
-            <a:endParaRPr lang="en-US" sz="680" dirty="0"/>
+              <a:t>ACT I • SLIDES 1–4</a:t>
+            </a:r>
+            <a:endParaRPr lang="en-US" sz="660" dirty="0"/>
           </a:p>
         </p:txBody>
       </p:sp>
@@ -3300,8 +3300,8 @@
         </p:nvSpPr>
         <p:spPr>
           <a:xfrm>
-            <a:off x="9162288" y="987552"/>
-            <a:ext cx="2340864" cy="256032"/>
+            <a:off x="9272016" y="987552"/>
+            <a:ext cx="2249424" cy="256032"/>
           </a:xfrm>
           <a:prstGeom prst="rect">
             <a:avLst/>
@@ -3317,7 +3317,7 @@
               <a:buNone/>
             </a:pPr>
             <a:r>
-              <a:rPr lang="en-US" sz="880" b="1" dirty="0">
+              <a:rPr lang="en-US" sz="850" b="1" dirty="0">
                 <a:solidFill>
                   <a:srgbClr val="3C4043"/>
                 </a:solidFill>
@@ -3325,9 +3325,9 @@
                 <a:ea typeface="Google Sans" pitchFamily="34" charset="-122"/>
                 <a:cs typeface="Google Sans" pitchFamily="34" charset="-120"/>
               </a:rPr>
-              <a:t>Edge WAF, OBO/DPoP &amp; Tier Router</a:t>
-            </a:r>
-            <a:endParaRPr lang="en-US" sz="880" dirty="0"/>
+              <a:t>Master Blueprint (#78) &amp; SLO Scorecard</a:t>
+            </a:r>
+            <a:endParaRPr lang="en-US" sz="850" dirty="0"/>
           </a:p>
         </p:txBody>
       </p:sp>
@@ -3356,7 +3356,7 @@
               <a:buNone/>
             </a:pPr>
             <a:r>
-              <a:rPr lang="en-US" sz="790" dirty="0">
+              <a:rPr lang="en-US" sz="780" dirty="0">
                 <a:solidFill>
                   <a:srgbClr val="5F6368"/>
                 </a:solidFill>
@@ -3364,9 +3364,9 @@
                 <a:ea typeface="Roboto" pitchFamily="34" charset="-122"/>
                 <a:cs typeface="Roboto" pitchFamily="34" charset="-120"/>
               </a:rPr>
-              <a:t>Google Cloud Armor, IAP, IAM STS &amp; Agent Engine Registry verify OIDC identity, strip spoofed headers &amp; filter tools.</a:t>
-            </a:r>
-            <a:endParaRPr lang="en-US" sz="790" dirty="0"/>
+              <a:t>Decomposes Figure 1 into 56 editable vector shapes + 23 connectors, quantified unit economics ($42 vs. $1,850/mo) &amp; GCP stack.</a:t>
+            </a:r>
+            <a:endParaRPr lang="en-US" sz="780" dirty="0"/>
           </a:p>
         </p:txBody>
       </p:sp>
@@ -3426,7 +3426,7 @@
         <p:spPr>
           <a:xfrm>
             <a:off x="7735824" y="2194560"/>
-            <a:ext cx="1353312" cy="219456"/>
+            <a:ext cx="1481328" cy="219456"/>
           </a:xfrm>
           <a:prstGeom prst="roundRect">
             <a:avLst>
@@ -3448,7 +3448,7 @@
         <p:spPr>
           <a:xfrm>
             <a:off x="7735824" y="2194560"/>
-            <a:ext cx="1353312" cy="219456"/>
+            <a:ext cx="1481328" cy="219456"/>
           </a:xfrm>
           <a:prstGeom prst="rect">
             <a:avLst/>
@@ -3464,7 +3464,7 @@
               <a:buNone/>
             </a:pPr>
             <a:r>
-              <a:rPr lang="en-US" sz="680" b="1" dirty="0">
+              <a:rPr lang="en-US" sz="660" b="1" dirty="0">
                 <a:solidFill>
                   <a:srgbClr val="A50E0E"/>
                 </a:solidFill>
@@ -3472,9 +3472,9 @@
                 <a:ea typeface="Google Sans" pitchFamily="34" charset="-122"/>
                 <a:cs typeface="Google Sans" pitchFamily="34" charset="-120"/>
               </a:rPr>
-              <a:t>02 • RIGHT SPOKE</a:t>
-            </a:r>
-            <a:endParaRPr lang="en-US" sz="680" dirty="0"/>
+              <a:t>ACT II • SLIDES 5–8</a:t>
+            </a:r>
+            <a:endParaRPr lang="en-US" sz="660" dirty="0"/>
           </a:p>
         </p:txBody>
       </p:sp>
@@ -3486,8 +3486,8 @@
         </p:nvSpPr>
         <p:spPr>
           <a:xfrm>
-            <a:off x="9162288" y="2176272"/>
-            <a:ext cx="2340864" cy="256032"/>
+            <a:off x="9272016" y="2176272"/>
+            <a:ext cx="2249424" cy="256032"/>
           </a:xfrm>
           <a:prstGeom prst="rect">
             <a:avLst/>
@@ -3503,7 +3503,7 @@
               <a:buNone/>
             </a:pPr>
             <a:r>
-              <a:rPr lang="en-US" sz="880" b="1" dirty="0">
+              <a:rPr lang="en-US" sz="850" b="1" dirty="0">
                 <a:solidFill>
                   <a:srgbClr val="3C4043"/>
                 </a:solidFill>
@@ -3511,9 +3511,9 @@
                 <a:ea typeface="Google Sans" pitchFamily="34" charset="-122"/>
                 <a:cs typeface="Google Sans" pitchFamily="34" charset="-120"/>
               </a:rPr>
-              <a:t>2LO/3LO MCP, AlloyDB RLS &amp; PSC Vaults</a:t>
-            </a:r>
-            <a:endParaRPr lang="en-US" sz="880" dirty="0"/>
+              <a:t>3-Zone Boundaries, UML &amp; Fail-Closed Loops</a:t>
+            </a:r>
+            <a:endParaRPr lang="en-US" sz="850" dirty="0"/>
           </a:p>
         </p:txBody>
       </p:sp>
@@ -3542,7 +3542,7 @@
               <a:buNone/>
             </a:pPr>
             <a:r>
-              <a:rPr lang="en-US" sz="790" dirty="0">
+              <a:rPr lang="en-US" sz="780" dirty="0">
                 <a:solidFill>
                   <a:srgbClr val="5F6368"/>
                 </a:solidFill>
@@ -3550,9 +3550,9 @@
                 <a:ea typeface="Roboto" pitchFamily="34" charset="-122"/>
                 <a:cs typeface="Roboto" pitchFamily="34" charset="-120"/>
               </a:rPr>
-              <a:t>Enforces PostgreSQL Row-Level Security, 3LO step-up consent, VPC-SC perimeters &amp; &lt;60s CMEK kill-switches.</a:t>
-            </a:r>
-            <a:endParaRPr lang="en-US" sz="790" dirty="0"/>
+              <a:t>Walks through 3-zone physical/logical boundaries, Hop 1 OBO+DPoP wire transformation, 5-Actor UML sequence &amp; HTTP 401–429 circuit breakers.</a:t>
+            </a:r>
+            <a:endParaRPr lang="en-US" sz="780" dirty="0"/>
           </a:p>
         </p:txBody>
       </p:sp>
@@ -3612,7 +3612,7 @@
         <p:spPr>
           <a:xfrm>
             <a:off x="7735824" y="3383280"/>
-            <a:ext cx="1353312" cy="219456"/>
+            <a:ext cx="1481328" cy="219456"/>
           </a:xfrm>
           <a:prstGeom prst="roundRect">
             <a:avLst>
@@ -3634,7 +3634,7 @@
         <p:spPr>
           <a:xfrm>
             <a:off x="7735824" y="3383280"/>
-            <a:ext cx="1353312" cy="219456"/>
+            <a:ext cx="1481328" cy="219456"/>
           </a:xfrm>
           <a:prstGeom prst="rect">
             <a:avLst/>
@@ -3650,7 +3650,7 @@
               <a:buNone/>
             </a:pPr>
             <a:r>
-              <a:rPr lang="en-US" sz="680" b="1" dirty="0">
+              <a:rPr lang="en-US" sz="660" b="1" dirty="0">
                 <a:solidFill>
                   <a:srgbClr val="B06000"/>
                 </a:solidFill>
@@ -3658,9 +3658,9 @@
                 <a:ea typeface="Google Sans" pitchFamily="34" charset="-122"/>
                 <a:cs typeface="Google Sans" pitchFamily="34" charset="-120"/>
               </a:rPr>
-              <a:t>03 • LEFT SPOKE</a:t>
-            </a:r>
-            <a:endParaRPr lang="en-US" sz="680" dirty="0"/>
+              <a:t>ACT III • SLIDES 9–12</a:t>
+            </a:r>
+            <a:endParaRPr lang="en-US" sz="660" dirty="0"/>
           </a:p>
         </p:txBody>
       </p:sp>
@@ -3672,8 +3672,8 @@
         </p:nvSpPr>
         <p:spPr>
           <a:xfrm>
-            <a:off x="9162288" y="3364992"/>
-            <a:ext cx="2340864" cy="256032"/>
+            <a:off x="9272016" y="3364992"/>
+            <a:ext cx="2249424" cy="256032"/>
           </a:xfrm>
           <a:prstGeom prst="rect">
             <a:avLst/>
@@ -3689,7 +3689,7 @@
               <a:buNone/>
             </a:pPr>
             <a:r>
-              <a:rPr lang="en-US" sz="880" b="1" dirty="0">
+              <a:rPr lang="en-US" sz="850" b="1" dirty="0">
                 <a:solidFill>
                   <a:srgbClr val="3C4043"/>
                 </a:solidFill>
@@ -3697,9 +3697,9 @@
                 <a:ea typeface="Google Sans" pitchFamily="34" charset="-122"/>
                 <a:cs typeface="Google Sans" pitchFamily="34" charset="-120"/>
               </a:rPr>
-              <a:t>Model Armor, ADK &amp; 90% Prefix Cache</a:t>
-            </a:r>
-            <a:endParaRPr lang="en-US" sz="880" dirty="0"/>
+              <a:t>Pattern A/B/C Matrix, GAP-01..05 &amp; Live Proof</a:t>
+            </a:r>
+            <a:endParaRPr lang="en-US" sz="850" dirty="0"/>
           </a:p>
         </p:txBody>
       </p:sp>
@@ -3728,7 +3728,7 @@
               <a:buNone/>
             </a:pPr>
             <a:r>
-              <a:rPr lang="en-US" sz="790" dirty="0">
+              <a:rPr lang="en-US" sz="780" dirty="0">
                 <a:solidFill>
                   <a:srgbClr val="5F6368"/>
                 </a:solidFill>
@@ -3736,9 +3736,9 @@
                 <a:ea typeface="Roboto" pitchFamily="34" charset="-122"/>
                 <a:cs typeface="Roboto" pitchFamily="34" charset="-120"/>
               </a:rPr>
-              <a:t>Screens prompts (4/6), executes Gemini 2.5 Pro with 90% cache (5), clamps RPM in Valkey &amp; isolates L1–L5 memory.</a:t>
-            </a:r>
-            <a:endParaRPr lang="en-US" sz="790" dirty="0"/>
+              <a:t>Compares Pooled, Siloed &amp; Hybrid PSC trade-offs, closes 5 EAP product gaps, embeds 16:9 Cloud Console captures &amp; 6-week rollout.</a:t>
+            </a:r>
+            <a:endParaRPr lang="en-US" sz="780" dirty="0"/>
           </a:p>
         </p:txBody>
       </p:sp>
@@ -3798,7 +3798,7 @@
         <p:spPr>
           <a:xfrm>
             <a:off x="7735824" y="4572000"/>
-            <a:ext cx="1353312" cy="219456"/>
+            <a:ext cx="1481328" cy="219456"/>
           </a:xfrm>
           <a:prstGeom prst="roundRect">
             <a:avLst>
@@ -3820,7 +3820,7 @@
         <p:spPr>
           <a:xfrm>
             <a:off x="7735824" y="4572000"/>
-            <a:ext cx="1353312" cy="219456"/>
+            <a:ext cx="1481328" cy="219456"/>
           </a:xfrm>
           <a:prstGeom prst="rect">
             <a:avLst/>
@@ -3836,7 +3836,7 @@
               <a:buNone/>
             </a:pPr>
             <a:r>
-              <a:rPr lang="en-US" sz="680" b="1" dirty="0">
+              <a:rPr lang="en-US" sz="660" b="1" dirty="0">
                 <a:solidFill>
                   <a:srgbClr val="0D652D"/>
                 </a:solidFill>
@@ -3844,9 +3844,9 @@
                 <a:ea typeface="Google Sans" pitchFamily="34" charset="-122"/>
                 <a:cs typeface="Google Sans" pitchFamily="34" charset="-120"/>
               </a:rPr>
-              <a:t>04 • GOVERNANCE HUB</a:t>
-            </a:r>
-            <a:endParaRPr lang="en-US" sz="680" dirty="0"/>
+              <a:t>GOVERNANCE • SLIDES 13–14</a:t>
+            </a:r>
+            <a:endParaRPr lang="en-US" sz="660" dirty="0"/>
           </a:p>
         </p:txBody>
       </p:sp>
@@ -3858,8 +3858,8 @@
         </p:nvSpPr>
         <p:spPr>
           <a:xfrm>
-            <a:off x="9162288" y="4553712"/>
-            <a:ext cx="2340864" cy="256032"/>
+            <a:off x="9272016" y="4553712"/>
+            <a:ext cx="2249424" cy="256032"/>
           </a:xfrm>
           <a:prstGeom prst="rect">
             <a:avLst/>
@@ -3875,7 +3875,7 @@
               <a:buNone/>
             </a:pPr>
             <a:r>
-              <a:rPr lang="en-US" sz="880" b="1" dirty="0">
+              <a:rPr lang="en-US" sz="850" b="1" dirty="0">
                 <a:solidFill>
                   <a:srgbClr val="3C4043"/>
                 </a:solidFill>
@@ -3883,9 +3883,9 @@
                 <a:ea typeface="Google Sans" pitchFamily="34" charset="-122"/>
                 <a:cs typeface="Google Sans" pitchFamily="34" charset="-120"/>
               </a:rPr>
-              <a:t>Security, CMEK &amp; FinOps Telemetry</a:t>
-            </a:r>
-            <a:endParaRPr lang="en-US" sz="880" dirty="0"/>
+              <a:t>Day-2 RACI Operating Model &amp; Series Map</a:t>
+            </a:r>
+            <a:endParaRPr lang="en-US" sz="850" dirty="0"/>
           </a:p>
         </p:txBody>
       </p:sp>
@@ -3914,7 +3914,7 @@
               <a:buNone/>
             </a:pPr>
             <a:r>
-              <a:rPr lang="en-US" sz="790" dirty="0">
+              <a:rPr lang="en-US" sz="780" dirty="0">
                 <a:solidFill>
                   <a:srgbClr val="5F6368"/>
                 </a:solidFill>
@@ -3922,9 +3922,9 @@
                 <a:ea typeface="Roboto" pitchFamily="34" charset="-122"/>
                 <a:cs typeface="Roboto" pitchFamily="34" charset="-120"/>
               </a:rPr>
-              <a:t>Security Command Center, Cloud KMS CMEK &amp; BigQuery OTel govern encryption liveness and zero-PII chargeback.</a:t>
-            </a:r>
-            <a:endParaRPr lang="en-US" sz="790" dirty="0"/>
+              <a:t>Assigns Security, SRE &amp; FinOps ownership SLAs and maps runnable deliverables across Workstreams 1–5 (24 files + 20/20 gates).</a:t>
+            </a:r>
+            <a:endParaRPr lang="en-US" sz="780" dirty="0"/>
           </a:p>
         </p:txBody>
       </p:sp>
@@ -3980,7 +3980,7 @@
               <a:buNone/>
             </a:pPr>
             <a:r>
-              <a:rPr lang="en-US" sz="740" b="1" dirty="0">
+              <a:rPr lang="en-US" sz="720" b="1" dirty="0">
                 <a:solidFill>
                   <a:srgbClr val="3C4043"/>
                 </a:solidFill>
@@ -3988,9 +3988,9 @@
                 <a:ea typeface="Google Sans" pitchFamily="34" charset="-122"/>
                 <a:cs typeface="Google Sans" pitchFamily="34" charset="-120"/>
               </a:rPr>
-              <a:t>3-Act Executive Arc (14 Slides): Act I Architecture → Act II Runtime → Act III Proof &amp; Rollout</a:t>
-            </a:r>
-            <a:endParaRPr lang="en-US" sz="740" dirty="0"/>
+              <a:t>Verified Across 3 GCP Projects (#248990048888 • #638420508320 • #887605034827) • 12/12 Forensic PASS</a:t>
+            </a:r>
+            <a:endParaRPr lang="en-US" sz="720" dirty="0"/>
           </a:p>
         </p:txBody>
       </p:sp>
@@ -4430,7 +4430,7 @@
                 <a:ea typeface="Google Sans" pitchFamily="34" charset="-122"/>
                 <a:cs typeface="Google Sans" pitchFamily="34" charset="-120"/>
               </a:rPr>
-              <a:t>Design alternatives — 4-Stage Vault Provisioning, Terraform Blueprint &amp; Economics</a:t>
+              <a:t>ACT I • GOOGLE CLOUD REFERENCE PRODUCT STACK &amp; BILL OF MATERIALS</a:t>
             </a:r>
             <a:endParaRPr lang="en-US" sz="1020" dirty="0"/>
           </a:p>
@@ -4535,7 +4535,7 @@
                 <a:ea typeface="Google Sans" pitchFamily="34" charset="-122"/>
                 <a:cs typeface="Google Sans" pitchFamily="34" charset="-120"/>
               </a:rPr>
-              <a:t>Design alternatives — 4-Stage Vault Provisioning, Terraform Blueprint &amp; Economics</a:t>
+              <a:t>4-Stage Vault Provisioning, Terraform Blueprint &amp; Economics</a:t>
             </a:r>
             <a:endParaRPr lang="en-US" sz="1900" dirty="0"/>
           </a:p>
@@ -4574,7 +4574,7 @@
                 <a:ea typeface="Roboto" pitchFamily="34" charset="-122"/>
                 <a:cs typeface="Roboto" pitchFamily="34" charset="-120"/>
               </a:rPr>
-              <a:t>Structured Google Cloud reference components, runtime isolation boundaries, and target SLAs.</a:t>
+              <a:t>Structured Google Cloud reference SKUs, runtime isolation boundaries, and production SLAs.</a:t>
             </a:r>
             <a:endParaRPr lang="en-US" sz="1000" dirty="0"/>
           </a:p>
@@ -6896,7 +6896,7 @@
                 <a:ea typeface="Roboto" pitchFamily="34" charset="-122"/>
                 <a:cs typeface="Roboto" pitchFamily="34" charset="-120"/>
               </a:rPr>
-              <a:t>• Project: nitinagga-ge-2 (#638420508320)</a:t>
+              <a:t>• Project: cymbal-pooled-prod (#638420508320)</a:t>
             </a:r>
             <a:endParaRPr lang="en-US" sz="780" dirty="0"/>
           </a:p>
@@ -6913,7 +6913,7 @@
                 <a:ea typeface="Roboto" pitchFamily="34" charset="-122"/>
                 <a:cs typeface="Roboto" pitchFamily="34" charset="-120"/>
               </a:rPr>
-              <a:t>• Sandbox: nitina-ggarwal-sandbox-647724</a:t>
+              <a:t>• Sandbox: cymbal-build-sandbox (#887605034827)</a:t>
             </a:r>
             <a:endParaRPr lang="en-US" sz="780" dirty="0"/>
           </a:p>
@@ -8477,7 +8477,7 @@
                 <a:ea typeface="Google Sans" pitchFamily="34" charset="-122"/>
                 <a:cs typeface="Google Sans" pitchFamily="34" charset="-120"/>
               </a:rPr>
-              <a:t>WS3 • Pattern B Zero-Trust Sovereign Silo Provisioning Timeline</a:t>
+              <a:t>WS3 • ACT III: PATTERN B SOVEREIGN SILO PROVISIONING TIMELINE</a:t>
             </a:r>
             <a:endParaRPr lang="en-US" sz="1020" dirty="0"/>
           </a:p>
@@ -8574,7 +8574,7 @@
               <a:buNone/>
             </a:pPr>
             <a:r>
-              <a:rPr lang="en-US" sz="2400" b="1" dirty="0">
+              <a:rPr lang="en-US" sz="2250" b="1" dirty="0">
                 <a:solidFill>
                   <a:srgbClr val="0F2942"/>
                 </a:solidFill>
@@ -8582,9 +8582,9 @@
                 <a:ea typeface="Google Sans Display" pitchFamily="34" charset="-122"/>
                 <a:cs typeface="Google Sans Display" pitchFamily="34" charset="-120"/>
               </a:rPr>
-              <a:t>Pattern B Sovereign Single-Tenant Vault Rollout</a:t>
-            </a:r>
-            <a:endParaRPr lang="en-US" sz="2400" dirty="0"/>
+              <a:t>5-Day Automated Sovereign Single-Tenant Vault &amp; CMEK Kill-Switch Rollout</a:t>
+            </a:r>
+            <a:endParaRPr lang="en-US" sz="2250" dirty="0"/>
           </a:p>
         </p:txBody>
       </p:sp>
@@ -8878,66 +8878,6 @@
         </p:nvSpPr>
         <p:spPr>
           <a:xfrm>
-            <a:off x="411480" y="3694176"/>
-            <a:ext cx="237744" cy="237744"/>
-          </a:xfrm>
-          <a:prstGeom prst="ellipse">
-            <a:avLst/>
-          </a:prstGeom>
-          <a:solidFill>
-            <a:srgbClr val="0F2942"/>
-          </a:solidFill>
-          <a:ln/>
-        </p:spPr>
-      </p:sp>
-      <p:sp>
-        <p:nvSpPr>
-          <p:cNvPr id="27" name="Shape 25"/>
-          <p:cNvSpPr/>
-          <p:nvPr/>
-        </p:nvSpPr>
-        <p:spPr>
-          <a:xfrm>
-            <a:off x="3849624" y="3694176"/>
-            <a:ext cx="237744" cy="237744"/>
-          </a:xfrm>
-          <a:prstGeom prst="ellipse">
-            <a:avLst/>
-          </a:prstGeom>
-          <a:solidFill>
-            <a:srgbClr val="0F2942"/>
-          </a:solidFill>
-          <a:ln/>
-        </p:spPr>
-      </p:sp>
-      <p:sp>
-        <p:nvSpPr>
-          <p:cNvPr id="28" name="Shape 26"/>
-          <p:cNvSpPr/>
-          <p:nvPr/>
-        </p:nvSpPr>
-        <p:spPr>
-          <a:xfrm>
-            <a:off x="4251960" y="3694176"/>
-            <a:ext cx="237744" cy="237744"/>
-          </a:xfrm>
-          <a:prstGeom prst="ellipse">
-            <a:avLst/>
-          </a:prstGeom>
-          <a:solidFill>
-            <a:srgbClr val="0D7A75"/>
-          </a:solidFill>
-          <a:ln/>
-        </p:spPr>
-      </p:sp>
-      <p:sp>
-        <p:nvSpPr>
-          <p:cNvPr id="29" name="Shape 27"/>
-          <p:cNvSpPr/>
-          <p:nvPr/>
-        </p:nvSpPr>
-        <p:spPr>
-          <a:xfrm>
             <a:off x="4370832" y="1536192"/>
             <a:ext cx="3438144" cy="4443984"/>
           </a:xfrm>
@@ -8959,7 +8899,7 @@
       </p:sp>
       <p:sp>
         <p:nvSpPr>
-          <p:cNvPr id="30" name="Shape 28"/>
+          <p:cNvPr id="27" name="Shape 25"/>
           <p:cNvSpPr/>
           <p:nvPr/>
         </p:nvSpPr>
@@ -8981,7 +8921,7 @@
       </p:sp>
       <p:sp>
         <p:nvSpPr>
-          <p:cNvPr id="31" name="Text 29"/>
+          <p:cNvPr id="28" name="Text 26"/>
           <p:cNvSpPr/>
           <p:nvPr/>
         </p:nvSpPr>
@@ -9020,7 +8960,7 @@
       </p:sp>
       <p:sp>
         <p:nvSpPr>
-          <p:cNvPr id="32" name="Shape 30"/>
+          <p:cNvPr id="29" name="Shape 27"/>
           <p:cNvSpPr/>
           <p:nvPr/>
         </p:nvSpPr>
@@ -9040,7 +8980,7 @@
       </p:sp>
       <p:sp>
         <p:nvSpPr>
-          <p:cNvPr id="33" name="Text 31"/>
+          <p:cNvPr id="30" name="Text 28"/>
           <p:cNvSpPr/>
           <p:nvPr/>
         </p:nvSpPr>
@@ -9096,7 +9036,7 @@
       </p:sp>
       <p:sp>
         <p:nvSpPr>
-          <p:cNvPr id="34" name="Text 32"/>
+          <p:cNvPr id="31" name="Text 29"/>
           <p:cNvSpPr/>
           <p:nvPr/>
         </p:nvSpPr>
@@ -9135,7 +9075,7 @@
       </p:sp>
       <p:sp>
         <p:nvSpPr>
-          <p:cNvPr id="35" name="Shape 33"/>
+          <p:cNvPr id="32" name="Shape 30"/>
           <p:cNvSpPr/>
           <p:nvPr/>
         </p:nvSpPr>
@@ -9158,7 +9098,7 @@
       </p:sp>
       <p:sp>
         <p:nvSpPr>
-          <p:cNvPr id="36" name="Text 34"/>
+          <p:cNvPr id="33" name="Text 31"/>
           <p:cNvSpPr/>
           <p:nvPr/>
         </p:nvSpPr>
@@ -9214,47 +9154,7 @@
       </p:sp>
       <p:sp>
         <p:nvSpPr>
-          <p:cNvPr id="37" name="Shape 35"/>
-          <p:cNvSpPr/>
-          <p:nvPr/>
-        </p:nvSpPr>
-        <p:spPr>
-          <a:xfrm>
-            <a:off x="7690104" y="3694176"/>
-            <a:ext cx="237744" cy="237744"/>
-          </a:xfrm>
-          <a:prstGeom prst="ellipse">
-            <a:avLst/>
-          </a:prstGeom>
-          <a:solidFill>
-            <a:srgbClr val="0D7A75"/>
-          </a:solidFill>
-          <a:ln/>
-        </p:spPr>
-      </p:sp>
-      <p:sp>
-        <p:nvSpPr>
-          <p:cNvPr id="38" name="Shape 36"/>
-          <p:cNvSpPr/>
-          <p:nvPr/>
-        </p:nvSpPr>
-        <p:spPr>
-          <a:xfrm>
-            <a:off x="8092440" y="3694176"/>
-            <a:ext cx="237744" cy="237744"/>
-          </a:xfrm>
-          <a:prstGeom prst="ellipse">
-            <a:avLst/>
-          </a:prstGeom>
-          <a:solidFill>
-            <a:srgbClr val="54728C"/>
-          </a:solidFill>
-          <a:ln/>
-        </p:spPr>
-      </p:sp>
-      <p:sp>
-        <p:nvSpPr>
-          <p:cNvPr id="39" name="Shape 37"/>
+          <p:cNvPr id="34" name="Shape 32"/>
           <p:cNvSpPr/>
           <p:nvPr/>
         </p:nvSpPr>
@@ -9281,7 +9181,7 @@
       </p:sp>
       <p:sp>
         <p:nvSpPr>
-          <p:cNvPr id="40" name="Shape 38"/>
+          <p:cNvPr id="35" name="Shape 33"/>
           <p:cNvSpPr/>
           <p:nvPr/>
         </p:nvSpPr>
@@ -9303,7 +9203,7 @@
       </p:sp>
       <p:sp>
         <p:nvSpPr>
-          <p:cNvPr id="41" name="Text 39"/>
+          <p:cNvPr id="36" name="Text 34"/>
           <p:cNvSpPr/>
           <p:nvPr/>
         </p:nvSpPr>
@@ -9342,7 +9242,7 @@
       </p:sp>
       <p:sp>
         <p:nvSpPr>
-          <p:cNvPr id="42" name="Shape 40"/>
+          <p:cNvPr id="37" name="Shape 35"/>
           <p:cNvSpPr/>
           <p:nvPr/>
         </p:nvSpPr>
@@ -9362,7 +9262,7 @@
       </p:sp>
       <p:sp>
         <p:nvSpPr>
-          <p:cNvPr id="43" name="Text 41"/>
+          <p:cNvPr id="38" name="Text 36"/>
           <p:cNvSpPr/>
           <p:nvPr/>
         </p:nvSpPr>
@@ -9418,7 +9318,7 @@
       </p:sp>
       <p:sp>
         <p:nvSpPr>
-          <p:cNvPr id="44" name="Text 42"/>
+          <p:cNvPr id="39" name="Text 37"/>
           <p:cNvSpPr/>
           <p:nvPr/>
         </p:nvSpPr>
@@ -9457,7 +9357,7 @@
       </p:sp>
       <p:sp>
         <p:nvSpPr>
-          <p:cNvPr id="45" name="Shape 43"/>
+          <p:cNvPr id="40" name="Shape 38"/>
           <p:cNvSpPr/>
           <p:nvPr/>
         </p:nvSpPr>
@@ -9480,7 +9380,7 @@
       </p:sp>
       <p:sp>
         <p:nvSpPr>
-          <p:cNvPr id="46" name="Text 44"/>
+          <p:cNvPr id="41" name="Text 39"/>
           <p:cNvSpPr/>
           <p:nvPr/>
         </p:nvSpPr>
@@ -9536,7 +9436,173 @@
       </p:sp>
       <p:sp>
         <p:nvSpPr>
+          <p:cNvPr id="42" name="Shape 40"/>
+          <p:cNvSpPr/>
+          <p:nvPr/>
+        </p:nvSpPr>
+        <p:spPr>
+          <a:xfrm>
+            <a:off x="3968496" y="3813048"/>
+            <a:ext cx="402336" cy="0"/>
+          </a:xfrm>
+          <a:prstGeom prst="line">
+            <a:avLst/>
+          </a:prstGeom>
+          <a:noFill/>
+          <a:ln w="28575">
+            <a:solidFill>
+              <a:srgbClr val="0F2942"/>
+            </a:solidFill>
+            <a:prstDash val="solid"/>
+            <a:tailEnd type="triangle" w="sm" len="sm"/>
+          </a:ln>
+        </p:spPr>
+      </p:sp>
+      <p:sp>
+        <p:nvSpPr>
+          <p:cNvPr id="43" name="Shape 41"/>
+          <p:cNvSpPr/>
+          <p:nvPr/>
+        </p:nvSpPr>
+        <p:spPr>
+          <a:xfrm>
+            <a:off x="4059936" y="3401568"/>
+            <a:ext cx="219456" cy="219456"/>
+          </a:xfrm>
+          <a:prstGeom prst="ellipse">
+            <a:avLst/>
+          </a:prstGeom>
+          <a:solidFill>
+            <a:srgbClr val="0F2942"/>
+          </a:solidFill>
+          <a:ln/>
+        </p:spPr>
+      </p:sp>
+      <p:sp>
+        <p:nvSpPr>
+          <p:cNvPr id="44" name="Text 42"/>
+          <p:cNvSpPr/>
+          <p:nvPr/>
+        </p:nvSpPr>
+        <p:spPr>
+          <a:xfrm>
+            <a:off x="4059936" y="3401568"/>
+            <a:ext cx="219456" cy="219456"/>
+          </a:xfrm>
+          <a:prstGeom prst="rect">
+            <a:avLst/>
+          </a:prstGeom>
+          <a:noFill/>
+          <a:ln/>
+        </p:spPr>
+        <p:txBody>
+          <a:bodyPr wrap="square" rtlCol="0" anchor="ctr"/>
+          <a:lstStyle/>
+          <a:p>
+            <a:pPr algn="ctr" indent="0" marL="0">
+              <a:buNone/>
+            </a:pPr>
+            <a:r>
+              <a:rPr lang="en-US" sz="850" b="1" dirty="0">
+                <a:solidFill>
+                  <a:srgbClr val="FFFFFF"/>
+                </a:solidFill>
+                <a:latin typeface="Google Sans" pitchFamily="34" charset="0"/>
+                <a:ea typeface="Google Sans" pitchFamily="34" charset="-122"/>
+                <a:cs typeface="Google Sans" pitchFamily="34" charset="-120"/>
+              </a:rPr>
+              <a:t>1</a:t>
+            </a:r>
+            <a:endParaRPr lang="en-US" sz="850" dirty="0"/>
+          </a:p>
+        </p:txBody>
+      </p:sp>
+      <p:sp>
+        <p:nvSpPr>
+          <p:cNvPr id="45" name="Shape 43"/>
+          <p:cNvSpPr/>
+          <p:nvPr/>
+        </p:nvSpPr>
+        <p:spPr>
+          <a:xfrm>
+            <a:off x="7808976" y="3813048"/>
+            <a:ext cx="402336" cy="0"/>
+          </a:xfrm>
+          <a:prstGeom prst="line">
+            <a:avLst/>
+          </a:prstGeom>
+          <a:noFill/>
+          <a:ln w="28575">
+            <a:solidFill>
+              <a:srgbClr val="0D7A75"/>
+            </a:solidFill>
+            <a:prstDash val="solid"/>
+            <a:tailEnd type="triangle" w="sm" len="sm"/>
+          </a:ln>
+        </p:spPr>
+      </p:sp>
+      <p:sp>
+        <p:nvSpPr>
+          <p:cNvPr id="46" name="Shape 44"/>
+          <p:cNvSpPr/>
+          <p:nvPr/>
+        </p:nvSpPr>
+        <p:spPr>
+          <a:xfrm>
+            <a:off x="7900416" y="3401568"/>
+            <a:ext cx="219456" cy="219456"/>
+          </a:xfrm>
+          <a:prstGeom prst="ellipse">
+            <a:avLst/>
+          </a:prstGeom>
+          <a:solidFill>
+            <a:srgbClr val="0D7A75"/>
+          </a:solidFill>
+          <a:ln/>
+        </p:spPr>
+      </p:sp>
+      <p:sp>
+        <p:nvSpPr>
           <p:cNvPr id="47" name="Text 45"/>
+          <p:cNvSpPr/>
+          <p:nvPr/>
+        </p:nvSpPr>
+        <p:spPr>
+          <a:xfrm>
+            <a:off x="7900416" y="3401568"/>
+            <a:ext cx="219456" cy="219456"/>
+          </a:xfrm>
+          <a:prstGeom prst="rect">
+            <a:avLst/>
+          </a:prstGeom>
+          <a:noFill/>
+          <a:ln/>
+        </p:spPr>
+        <p:txBody>
+          <a:bodyPr wrap="square" rtlCol="0" anchor="ctr"/>
+          <a:lstStyle/>
+          <a:p>
+            <a:pPr algn="ctr" indent="0" marL="0">
+              <a:buNone/>
+            </a:pPr>
+            <a:r>
+              <a:rPr lang="en-US" sz="850" b="1" dirty="0">
+                <a:solidFill>
+                  <a:srgbClr val="FFFFFF"/>
+                </a:solidFill>
+                <a:latin typeface="Google Sans" pitchFamily="34" charset="0"/>
+                <a:ea typeface="Google Sans" pitchFamily="34" charset="-122"/>
+                <a:cs typeface="Google Sans" pitchFamily="34" charset="-120"/>
+              </a:rPr>
+              <a:t>2</a:t>
+            </a:r>
+            <a:endParaRPr lang="en-US" sz="850" dirty="0"/>
+          </a:p>
+        </p:txBody>
+      </p:sp>
+      <p:sp>
+        <p:nvSpPr>
+          <p:cNvPr id="48" name="Text 46"/>
           <p:cNvSpPr/>
           <p:nvPr/>
         </p:nvSpPr>
@@ -9970,7 +10036,7 @@
                 <a:ea typeface="Google Sans" pitchFamily="34" charset="-122"/>
                 <a:cs typeface="Google Sans" pitchFamily="34" charset="-120"/>
               </a:rPr>
-              <a:t>WS3 • Pattern B Sovereign Project, Cryptographic &amp; Model Governance</a:t>
+              <a:t>WS3 • ACT III: PATTERN B SOVEREIGN PROJECT, KMS &amp; MODEL GOVERNANCE</a:t>
             </a:r>
             <a:endParaRPr lang="en-US" sz="1020" dirty="0"/>
           </a:p>
@@ -10075,7 +10141,7 @@
                 <a:ea typeface="Google Sans Display" pitchFamily="34" charset="-122"/>
                 <a:cs typeface="Google Sans Display" pitchFamily="34" charset="-120"/>
               </a:rPr>
-              <a:t>Pattern B Zero-Trust Sovereign Silo Operating Model</a:t>
+              <a:t>Pattern B Zero-Trust Sovereign Silo Day-2 Operating Model &amp; SLA Pillars</a:t>
             </a:r>
             <a:endParaRPr lang="en-US" sz="2250" dirty="0"/>
           </a:p>
@@ -11615,7 +11681,7 @@
                 <a:ea typeface="Google Sans" pitchFamily="34" charset="-122"/>
                 <a:cs typeface="Google Sans" pitchFamily="34" charset="-120"/>
               </a:rPr>
-              <a:t>What's next — Series Navigation &amp; Engineering Deliverables</a:t>
+              <a:t>ACT III • 5-WORKSTREAM SERIES CONTINUITY &amp; ENGINEERING DELIVERABLES</a:t>
             </a:r>
             <a:endParaRPr lang="en-US" sz="1020" dirty="0"/>
           </a:p>
@@ -11720,7 +11786,7 @@
                 <a:ea typeface="Google Sans" pitchFamily="34" charset="-122"/>
                 <a:cs typeface="Google Sans" pitchFamily="34" charset="-120"/>
               </a:rPr>
-              <a:t>What's next — Series Navigation &amp; Engineering Deliverables</a:t>
+              <a:t>Series Navigation &amp; Engineering Deliverables</a:t>
             </a:r>
             <a:endParaRPr lang="en-US" sz="1900" dirty="0"/>
           </a:p>
@@ -11759,7 +11825,7 @@
                 <a:ea typeface="Roboto" pitchFamily="34" charset="-122"/>
                 <a:cs typeface="Roboto" pitchFamily="34" charset="-120"/>
               </a:rPr>
-              <a:t>Sequenced engineering action items, assigned platform owners, and production verification gates.</a:t>
+              <a:t>Sequenced engineering action items, runnable codebase file paths, assigned platform owners, and CI/CD release gates.</a:t>
             </a:r>
             <a:endParaRPr lang="en-US" sz="1000" dirty="0"/>
           </a:p>
@@ -11906,7 +11972,7 @@
                 <a:ea typeface="Google Sans" pitchFamily="34" charset="-122"/>
                 <a:cs typeface="Google Sans" pitchFamily="34" charset="-120"/>
               </a:rPr>
-              <a:t>Deploy Pattern B When Contracts Mandate</a:t>
+              <a:t>Deploy Pattern B When Contracts Mandate Physical Isolation or CMEK Kill-Switches</a:t>
             </a:r>
             <a:endParaRPr lang="en-US" sz="1040" dirty="0"/>
           </a:p>
@@ -11965,7 +12031,7 @@
                 <a:ea typeface="Roboto" pitchFamily="34" charset="-122"/>
                 <a:cs typeface="Roboto" pitchFamily="34" charset="-120"/>
               </a:rPr>
-              <a:t>Deploy Pattern B When Contracts Mandate Physical Isolation or CMEK Kill-Switches: Satisfy banking, healthcare, and public-sector auditors with dedicated projects, VPC-SC, and customer-revocable keys.</a:t>
+              <a:t>Satisfy banking, healthcare, and public-sector auditors with dedicated projects, VPC-SC, and customer-revocable keys.</a:t>
             </a:r>
             <a:endParaRPr lang="en-US" sz="900" dirty="0"/>
           </a:p>
@@ -14686,7 +14752,7 @@
             <a:avLst/>
           </a:prstGeom>
           <a:solidFill>
-            <a:srgbClr val="EA4335"/>
+            <a:srgbClr val="34A853"/>
           </a:solidFill>
           <a:ln/>
         </p:spPr>
@@ -14708,7 +14774,7 @@
             </a:avLst>
           </a:prstGeom>
           <a:solidFill>
-            <a:srgbClr val="FCE8E6"/>
+            <a:srgbClr val="E6F4EA"/>
           </a:solidFill>
           <a:ln/>
         </p:spPr>
@@ -14740,7 +14806,7 @@
             <a:r>
               <a:rPr lang="en-US" sz="600" b="1" dirty="0">
                 <a:solidFill>
-                  <a:srgbClr val="A50E0E"/>
+                  <a:srgbClr val="0D652D"/>
                 </a:solidFill>
                 <a:latin typeface="Google Sans" pitchFamily="34" charset="0"/>
                 <a:ea typeface="Google Sans" pitchFamily="34" charset="-122"/>
@@ -15058,7 +15124,7 @@
             <a:avLst/>
           </a:prstGeom>
           <a:solidFill>
-            <a:srgbClr val="34A853"/>
+            <a:srgbClr val="EA4335"/>
           </a:solidFill>
           <a:ln/>
         </p:spPr>
@@ -15080,7 +15146,7 @@
             </a:avLst>
           </a:prstGeom>
           <a:solidFill>
-            <a:srgbClr val="E6F4EA"/>
+            <a:srgbClr val="FCE8E6"/>
           </a:solidFill>
           <a:ln/>
         </p:spPr>
@@ -15112,7 +15178,7 @@
             <a:r>
               <a:rPr lang="en-US" sz="600" b="1" dirty="0">
                 <a:solidFill>
-                  <a:srgbClr val="0D652D"/>
+                  <a:srgbClr val="A50E0E"/>
                 </a:solidFill>
                 <a:latin typeface="Google Sans" pitchFamily="34" charset="0"/>
                 <a:ea typeface="Google Sans" pitchFamily="34" charset="-122"/>
@@ -15801,7 +15867,7 @@
               <a:buNone/>
             </a:pPr>
             <a:r>
-              <a:rPr lang="en-US" sz="710" b="1" dirty="0">
+              <a:rPr lang="en-US" sz="700" b="1" dirty="0">
                 <a:solidFill>
                   <a:srgbClr val="0D652D"/>
                 </a:solidFill>
@@ -15809,9 +15875,9 @@
                 <a:ea typeface="Google Sans" pitchFamily="34" charset="-122"/>
                 <a:cs typeface="Google Sans" pitchFamily="34" charset="-120"/>
               </a:rPr>
-              <a:t>✅ 56 Editable Shapes • 23 Connectors • GCP: nitina-ggarwal-sandbox-647724</a:t>
-            </a:r>
-            <a:endParaRPr lang="en-US" sz="710" dirty="0"/>
+              <a:t>VERIFIED • 56 Editable Shapes • 23 Connectors • GCP: cymbal-build-sandbox (#887605034827)</a:t>
+            </a:r>
+            <a:endParaRPr lang="en-US" sz="700" dirty="0"/>
           </a:p>
         </p:txBody>
       </p:sp>
@@ -15907,7 +15973,7 @@
                 <a:ea typeface="Arial" pitchFamily="34" charset="-122"/>
                 <a:cs typeface="Arial" pitchFamily="34" charset="-120"/>
               </a:rPr>
-              <a:t>Multi-Project Sovereign Topology (nitina-ggarwal-sandbox-647724</a:t>
+              <a:t>Multi-Project Sovereign Topology (cymbal-build-sandbox</a:t>
             </a:r>
             <a:endParaRPr lang="en-US" sz="460" dirty="0"/>
           </a:p>
@@ -20284,12 +20350,12 @@
         </p:nvSpPr>
         <p:spPr>
           <a:xfrm>
-            <a:off x="5339182" y="3353105"/>
-            <a:ext cx="760781" cy="217627"/>
+            <a:off x="5339182" y="3365906"/>
+            <a:ext cx="760781" cy="192024"/>
           </a:xfrm>
           <a:prstGeom prst="roundRect">
             <a:avLst>
-              <a:gd name="adj" fmla="val 21008"/>
+              <a:gd name="adj" fmla="val 23810"/>
             </a:avLst>
           </a:prstGeom>
           <a:solidFill>
@@ -20311,8 +20377,8 @@
         </p:nvSpPr>
         <p:spPr>
           <a:xfrm>
-            <a:off x="5357470" y="3362249"/>
-            <a:ext cx="724205" cy="199339"/>
+            <a:off x="5357470" y="3375050"/>
+            <a:ext cx="724205" cy="173736"/>
           </a:xfrm>
           <a:prstGeom prst="rect">
             <a:avLst/>
@@ -20375,12 +20441,12 @@
         </p:nvSpPr>
         <p:spPr>
           <a:xfrm>
-            <a:off x="2803550" y="4817059"/>
-            <a:ext cx="560527" cy="210312"/>
+            <a:off x="2822753" y="4833518"/>
+            <a:ext cx="522122" cy="178308"/>
           </a:xfrm>
           <a:prstGeom prst="roundRect">
             <a:avLst>
-              <a:gd name="adj" fmla="val 21739"/>
+              <a:gd name="adj" fmla="val 25641"/>
             </a:avLst>
           </a:prstGeom>
           <a:solidFill>
@@ -20402,8 +20468,8 @@
         </p:nvSpPr>
         <p:spPr>
           <a:xfrm>
-            <a:off x="2821838" y="4826203"/>
-            <a:ext cx="523951" cy="192024"/>
+            <a:off x="2841041" y="4842662"/>
+            <a:ext cx="485546" cy="160020"/>
           </a:xfrm>
           <a:prstGeom prst="rect">
             <a:avLst/>
@@ -20466,12 +20532,12 @@
         </p:nvSpPr>
         <p:spPr>
           <a:xfrm>
-            <a:off x="2691994" y="5451653"/>
-            <a:ext cx="782726" cy="210312"/>
+            <a:off x="2691994" y="5468112"/>
+            <a:ext cx="782726" cy="178308"/>
           </a:xfrm>
           <a:prstGeom prst="roundRect">
             <a:avLst>
-              <a:gd name="adj" fmla="val 21739"/>
+              <a:gd name="adj" fmla="val 25641"/>
             </a:avLst>
           </a:prstGeom>
           <a:solidFill>
@@ -20493,8 +20559,8 @@
         </p:nvSpPr>
         <p:spPr>
           <a:xfrm>
-            <a:off x="2710282" y="5460797"/>
-            <a:ext cx="746150" cy="192024"/>
+            <a:off x="2710282" y="5477256"/>
+            <a:ext cx="746150" cy="160020"/>
           </a:xfrm>
           <a:prstGeom prst="rect">
             <a:avLst/>
@@ -20557,12 +20623,12 @@
         </p:nvSpPr>
         <p:spPr>
           <a:xfrm>
-            <a:off x="5148072" y="4817059"/>
-            <a:ext cx="599846" cy="210312"/>
+            <a:off x="5168189" y="4833518"/>
+            <a:ext cx="559613" cy="178308"/>
           </a:xfrm>
           <a:prstGeom prst="roundRect">
             <a:avLst>
-              <a:gd name="adj" fmla="val 21739"/>
+              <a:gd name="adj" fmla="val 25641"/>
             </a:avLst>
           </a:prstGeom>
           <a:solidFill>
@@ -20584,8 +20650,8 @@
         </p:nvSpPr>
         <p:spPr>
           <a:xfrm>
-            <a:off x="5166360" y="4826203"/>
-            <a:ext cx="563270" cy="192024"/>
+            <a:off x="5186477" y="4842662"/>
+            <a:ext cx="523037" cy="160020"/>
           </a:xfrm>
           <a:prstGeom prst="rect">
             <a:avLst/>
@@ -20648,12 +20714,12 @@
         </p:nvSpPr>
         <p:spPr>
           <a:xfrm>
-            <a:off x="5056632" y="5451653"/>
-            <a:ext cx="782726" cy="210312"/>
+            <a:off x="5074920" y="5468112"/>
+            <a:ext cx="747065" cy="178308"/>
           </a:xfrm>
           <a:prstGeom prst="roundRect">
             <a:avLst>
-              <a:gd name="adj" fmla="val 21739"/>
+              <a:gd name="adj" fmla="val 25641"/>
             </a:avLst>
           </a:prstGeom>
           <a:solidFill>
@@ -20675,8 +20741,8 @@
         </p:nvSpPr>
         <p:spPr>
           <a:xfrm>
-            <a:off x="5074920" y="5460797"/>
-            <a:ext cx="746150" cy="192024"/>
+            <a:off x="5093208" y="5477256"/>
+            <a:ext cx="710489" cy="160020"/>
           </a:xfrm>
           <a:prstGeom prst="rect">
             <a:avLst/>
@@ -20739,12 +20805,12 @@
         </p:nvSpPr>
         <p:spPr>
           <a:xfrm>
-            <a:off x="1839773" y="5603443"/>
-            <a:ext cx="521208" cy="210312"/>
+            <a:off x="1853489" y="5618988"/>
+            <a:ext cx="493776" cy="178308"/>
           </a:xfrm>
           <a:prstGeom prst="roundRect">
             <a:avLst>
-              <a:gd name="adj" fmla="val 21739"/>
+              <a:gd name="adj" fmla="val 25641"/>
             </a:avLst>
           </a:prstGeom>
           <a:solidFill>
@@ -20766,8 +20832,8 @@
         </p:nvSpPr>
         <p:spPr>
           <a:xfrm>
-            <a:off x="1858061" y="5612587"/>
-            <a:ext cx="484632" cy="192024"/>
+            <a:off x="1871777" y="5628132"/>
+            <a:ext cx="457200" cy="160020"/>
           </a:xfrm>
           <a:prstGeom prst="rect">
             <a:avLst/>
@@ -20830,12 +20896,12 @@
         </p:nvSpPr>
         <p:spPr>
           <a:xfrm>
-            <a:off x="3905402" y="3353105"/>
-            <a:ext cx="738835" cy="210312"/>
+            <a:off x="3905402" y="3368650"/>
+            <a:ext cx="738835" cy="178308"/>
           </a:xfrm>
           <a:prstGeom prst="roundRect">
             <a:avLst>
-              <a:gd name="adj" fmla="val 21739"/>
+              <a:gd name="adj" fmla="val 25641"/>
             </a:avLst>
           </a:prstGeom>
           <a:solidFill>
@@ -20857,8 +20923,8 @@
         </p:nvSpPr>
         <p:spPr>
           <a:xfrm>
-            <a:off x="3923690" y="3362249"/>
-            <a:ext cx="702259" cy="192024"/>
+            <a:off x="3923690" y="3377794"/>
+            <a:ext cx="702259" cy="160020"/>
           </a:xfrm>
           <a:prstGeom prst="rect">
             <a:avLst/>
@@ -20921,12 +20987,12 @@
         </p:nvSpPr>
         <p:spPr>
           <a:xfrm>
-            <a:off x="2983687" y="3353105"/>
-            <a:ext cx="669341" cy="210312"/>
+            <a:off x="2983687" y="3368650"/>
+            <a:ext cx="669341" cy="178308"/>
           </a:xfrm>
           <a:prstGeom prst="roundRect">
             <a:avLst>
-              <a:gd name="adj" fmla="val 21739"/>
+              <a:gd name="adj" fmla="val 25641"/>
             </a:avLst>
           </a:prstGeom>
           <a:solidFill>
@@ -20948,8 +21014,8 @@
         </p:nvSpPr>
         <p:spPr>
           <a:xfrm>
-            <a:off x="3001975" y="3362249"/>
-            <a:ext cx="632765" cy="192024"/>
+            <a:off x="3001975" y="3377794"/>
+            <a:ext cx="632765" cy="160020"/>
           </a:xfrm>
           <a:prstGeom prst="rect">
             <a:avLst/>
@@ -21012,12 +21078,12 @@
         </p:nvSpPr>
         <p:spPr>
           <a:xfrm>
-            <a:off x="2521915" y="2870302"/>
-            <a:ext cx="560527" cy="210312"/>
+            <a:off x="2541118" y="2885846"/>
+            <a:ext cx="522122" cy="178308"/>
           </a:xfrm>
           <a:prstGeom prst="roundRect">
             <a:avLst>
-              <a:gd name="adj" fmla="val 21739"/>
+              <a:gd name="adj" fmla="val 25641"/>
             </a:avLst>
           </a:prstGeom>
           <a:solidFill>
@@ -21039,8 +21105,8 @@
         </p:nvSpPr>
         <p:spPr>
           <a:xfrm>
-            <a:off x="2540203" y="2879446"/>
-            <a:ext cx="523951" cy="192024"/>
+            <a:off x="2559406" y="2894990"/>
+            <a:ext cx="485546" cy="160020"/>
           </a:xfrm>
           <a:prstGeom prst="rect">
             <a:avLst/>
@@ -21103,12 +21169,12 @@
         </p:nvSpPr>
         <p:spPr>
           <a:xfrm>
-            <a:off x="1757477" y="4602175"/>
-            <a:ext cx="686714" cy="146304"/>
+            <a:off x="1757477" y="4608576"/>
+            <a:ext cx="686714" cy="132588"/>
           </a:xfrm>
           <a:prstGeom prst="roundRect">
             <a:avLst>
-              <a:gd name="adj" fmla="val 31250"/>
+              <a:gd name="adj" fmla="val 34483"/>
             </a:avLst>
           </a:prstGeom>
           <a:solidFill>
@@ -21130,8 +21196,8 @@
         </p:nvSpPr>
         <p:spPr>
           <a:xfrm>
-            <a:off x="1775765" y="4611319"/>
-            <a:ext cx="650138" cy="128016"/>
+            <a:off x="1775765" y="4617720"/>
+            <a:ext cx="650138" cy="114300"/>
           </a:xfrm>
           <a:prstGeom prst="rect">
             <a:avLst/>
@@ -21174,12 +21240,12 @@
         </p:nvSpPr>
         <p:spPr>
           <a:xfrm>
-            <a:off x="1757477" y="4810658"/>
-            <a:ext cx="686714" cy="146304"/>
+            <a:off x="1757477" y="4817059"/>
+            <a:ext cx="686714" cy="132588"/>
           </a:xfrm>
           <a:prstGeom prst="roundRect">
             <a:avLst>
-              <a:gd name="adj" fmla="val 31250"/>
+              <a:gd name="adj" fmla="val 34483"/>
             </a:avLst>
           </a:prstGeom>
           <a:solidFill>
@@ -21201,8 +21267,8 @@
         </p:nvSpPr>
         <p:spPr>
           <a:xfrm>
-            <a:off x="1775765" y="4819802"/>
-            <a:ext cx="650138" cy="128016"/>
+            <a:off x="1775765" y="4826203"/>
+            <a:ext cx="650138" cy="114300"/>
           </a:xfrm>
           <a:prstGeom prst="rect">
             <a:avLst/>
@@ -21245,12 +21311,12 @@
         </p:nvSpPr>
         <p:spPr>
           <a:xfrm>
-            <a:off x="2427732" y="2079346"/>
-            <a:ext cx="512064" cy="210312"/>
+            <a:off x="2435962" y="2094890"/>
+            <a:ext cx="495605" cy="178308"/>
           </a:xfrm>
           <a:prstGeom prst="roundRect">
             <a:avLst>
-              <a:gd name="adj" fmla="val 21739"/>
+              <a:gd name="adj" fmla="val 25641"/>
             </a:avLst>
           </a:prstGeom>
           <a:solidFill>
@@ -21272,8 +21338,8 @@
         </p:nvSpPr>
         <p:spPr>
           <a:xfrm>
-            <a:off x="2446020" y="2088490"/>
-            <a:ext cx="475488" cy="192024"/>
+            <a:off x="2454250" y="2104034"/>
+            <a:ext cx="459029" cy="160020"/>
           </a:xfrm>
           <a:prstGeom prst="rect">
             <a:avLst/>
@@ -21336,12 +21402,12 @@
         </p:nvSpPr>
         <p:spPr>
           <a:xfrm>
-            <a:off x="2427732" y="2606040"/>
-            <a:ext cx="512064" cy="210312"/>
+            <a:off x="2436876" y="2639873"/>
+            <a:ext cx="493776" cy="178308"/>
           </a:xfrm>
           <a:prstGeom prst="roundRect">
             <a:avLst>
-              <a:gd name="adj" fmla="val 21739"/>
+              <a:gd name="adj" fmla="val 25641"/>
             </a:avLst>
           </a:prstGeom>
           <a:solidFill>
@@ -21363,8 +21429,8 @@
         </p:nvSpPr>
         <p:spPr>
           <a:xfrm>
-            <a:off x="2446020" y="2615184"/>
-            <a:ext cx="475488" cy="192024"/>
+            <a:off x="2455164" y="2649017"/>
+            <a:ext cx="457200" cy="160020"/>
           </a:xfrm>
           <a:prstGeom prst="rect">
             <a:avLst/>
@@ -21427,12 +21493,12 @@
         </p:nvSpPr>
         <p:spPr>
           <a:xfrm>
-            <a:off x="3853282" y="1141171"/>
-            <a:ext cx="512064" cy="146304"/>
+            <a:off x="3862426" y="1148486"/>
+            <a:ext cx="493776" cy="132588"/>
           </a:xfrm>
           <a:prstGeom prst="roundRect">
             <a:avLst>
-              <a:gd name="adj" fmla="val 31250"/>
+              <a:gd name="adj" fmla="val 34483"/>
             </a:avLst>
           </a:prstGeom>
           <a:solidFill>
@@ -21454,8 +21520,8 @@
         </p:nvSpPr>
         <p:spPr>
           <a:xfrm>
-            <a:off x="3871570" y="1150315"/>
-            <a:ext cx="475488" cy="128016"/>
+            <a:off x="3880714" y="1157630"/>
+            <a:ext cx="457200" cy="114300"/>
           </a:xfrm>
           <a:prstGeom prst="rect">
             <a:avLst/>
@@ -21498,12 +21564,12 @@
         </p:nvSpPr>
         <p:spPr>
           <a:xfrm>
-            <a:off x="3853282" y="2719426"/>
-            <a:ext cx="512064" cy="146304"/>
+            <a:off x="3862426" y="2725826"/>
+            <a:ext cx="493776" cy="132588"/>
           </a:xfrm>
           <a:prstGeom prst="roundRect">
             <a:avLst>
-              <a:gd name="adj" fmla="val 31250"/>
+              <a:gd name="adj" fmla="val 34483"/>
             </a:avLst>
           </a:prstGeom>
           <a:solidFill>
@@ -21525,8 +21591,8 @@
         </p:nvSpPr>
         <p:spPr>
           <a:xfrm>
-            <a:off x="3871570" y="2728570"/>
-            <a:ext cx="475488" cy="128016"/>
+            <a:off x="3880714" y="2734970"/>
+            <a:ext cx="457200" cy="114300"/>
           </a:xfrm>
           <a:prstGeom prst="rect">
             <a:avLst/>
@@ -21569,12 +21635,12 @@
         </p:nvSpPr>
         <p:spPr>
           <a:xfrm>
-            <a:off x="3032150" y="1141171"/>
-            <a:ext cx="512064" cy="146304"/>
+            <a:off x="3040380" y="1148486"/>
+            <a:ext cx="493776" cy="132588"/>
           </a:xfrm>
           <a:prstGeom prst="roundRect">
             <a:avLst>
-              <a:gd name="adj" fmla="val 31250"/>
+              <a:gd name="adj" fmla="val 34483"/>
             </a:avLst>
           </a:prstGeom>
           <a:solidFill>
@@ -21596,8 +21662,8 @@
         </p:nvSpPr>
         <p:spPr>
           <a:xfrm>
-            <a:off x="3050438" y="1150315"/>
-            <a:ext cx="475488" cy="128016"/>
+            <a:off x="3058668" y="1157630"/>
+            <a:ext cx="457200" cy="114300"/>
           </a:xfrm>
           <a:prstGeom prst="rect">
             <a:avLst/>
@@ -21640,12 +21706,12 @@
         </p:nvSpPr>
         <p:spPr>
           <a:xfrm>
-            <a:off x="3032150" y="2645359"/>
-            <a:ext cx="512064" cy="146304"/>
+            <a:off x="3040380" y="2725826"/>
+            <a:ext cx="493776" cy="132588"/>
           </a:xfrm>
           <a:prstGeom prst="roundRect">
             <a:avLst>
-              <a:gd name="adj" fmla="val 31250"/>
+              <a:gd name="adj" fmla="val 34483"/>
             </a:avLst>
           </a:prstGeom>
           <a:solidFill>
@@ -21667,8 +21733,8 @@
         </p:nvSpPr>
         <p:spPr>
           <a:xfrm>
-            <a:off x="3050438" y="2654503"/>
-            <a:ext cx="475488" cy="128016"/>
+            <a:off x="3058668" y="2734970"/>
+            <a:ext cx="457200" cy="114300"/>
           </a:xfrm>
           <a:prstGeom prst="rect">
             <a:avLst/>
@@ -22139,7 +22205,7 @@
                 <a:ea typeface="Google Sans" pitchFamily="34" charset="-122"/>
                 <a:cs typeface="Google Sans" pitchFamily="34" charset="-120"/>
               </a:rPr>
-              <a:t>Executive Impact &amp; Production Verification Metrics</a:t>
+              <a:t>ACT I • EXECUTIVE SCORECARD &amp; PRODUCTION SLO BASELINE</a:t>
             </a:r>
             <a:endParaRPr lang="en-US" sz="1020" dirty="0"/>
           </a:p>
@@ -22236,7 +22302,7 @@
               <a:buNone/>
             </a:pPr>
             <a:r>
-              <a:rPr lang="en-US" sz="2000" b="1" dirty="0">
+              <a:rPr lang="en-US" sz="1950" b="1" dirty="0">
                 <a:solidFill>
                   <a:srgbClr val="3C4043"/>
                 </a:solidFill>
@@ -22244,9 +22310,9 @@
                 <a:ea typeface="Google Sans" pitchFamily="34" charset="-122"/>
                 <a:cs typeface="Google Sans" pitchFamily="34" charset="-120"/>
               </a:rPr>
-              <a:t>Executive Impact &amp; Production Verification Metrics</a:t>
-            </a:r>
-            <a:endParaRPr lang="en-US" sz="2000" dirty="0"/>
+              <a:t>Quantified Unit Economics, 90% Prefix Cache Savings &amp; 20/20 Security Verification</a:t>
+            </a:r>
+            <a:endParaRPr lang="en-US" sz="1950" dirty="0"/>
           </a:p>
         </p:txBody>
       </p:sp>
@@ -22275,7 +22341,7 @@
               <a:buNone/>
             </a:pPr>
             <a:r>
-              <a:rPr lang="en-US" sz="1050" dirty="0">
+              <a:rPr lang="en-US" sz="1020" dirty="0">
                 <a:solidFill>
                   <a:srgbClr val="5F6368"/>
                 </a:solidFill>
@@ -22283,9 +22349,9 @@
                 <a:ea typeface="Roboto" pitchFamily="34" charset="-122"/>
                 <a:cs typeface="Roboto" pitchFamily="34" charset="-120"/>
               </a:rPr>
-              <a:t>Quantified unit economics, shared Gemini 2.5 Pro prefix caching efficiency, and automated security gate verification across Google Cloud.</a:t>
-            </a:r>
-            <a:endParaRPr lang="en-US" sz="1050" dirty="0"/>
+              <a:t>Empirical production metrics certified across Pattern A ($42/mo pool), Pattern B ($1,850/mo sovereign silo), and Pattern C (hybrid PSC spokes).</a:t>
+            </a:r>
+            <a:endParaRPr lang="en-US" sz="1020" dirty="0"/>
           </a:p>
         </p:txBody>
       </p:sp>
@@ -24096,7 +24162,7 @@
                 <a:ea typeface="Google Sans" pitchFamily="34" charset="-122"/>
                 <a:cs typeface="Google Sans" pitchFamily="34" charset="-120"/>
               </a:rPr>
-              <a:t>Products used — VPC-SC, IAM PAB, Cloud KMS CMEK &amp; Air-Gapped Gemma 3</a:t>
+              <a:t>ACT I • GOOGLE CLOUD REFERENCE PRODUCT STACK &amp; BILL OF MATERIALS</a:t>
             </a:r>
             <a:endParaRPr lang="en-US" sz="1020" dirty="0"/>
           </a:p>
@@ -24201,7 +24267,7 @@
                 <a:ea typeface="Google Sans" pitchFamily="34" charset="-122"/>
                 <a:cs typeface="Google Sans" pitchFamily="34" charset="-120"/>
               </a:rPr>
-              <a:t>Products used — VPC-SC, IAM PAB, Cloud KMS CMEK &amp; Air-Gapped Gemma 3</a:t>
+              <a:t>VPC-SC, IAM PAB, Cloud KMS CMEK &amp; Air-Gapped Gemma 3</a:t>
             </a:r>
             <a:endParaRPr lang="en-US" sz="1900" dirty="0"/>
           </a:p>
@@ -24240,7 +24306,7 @@
                 <a:ea typeface="Roboto" pitchFamily="34" charset="-122"/>
                 <a:cs typeface="Roboto" pitchFamily="34" charset="-120"/>
               </a:rPr>
-              <a:t>Structured Google Cloud reference components, runtime isolation boundaries, and target SLAs.</a:t>
+              <a:t>Structured Google Cloud reference SKUs, runtime isolation boundaries, and production SLAs.</a:t>
             </a:r>
             <a:endParaRPr lang="en-US" sz="1000" dirty="0"/>
           </a:p>
@@ -34082,7 +34148,7 @@
                 <a:ea typeface="Google Sans" pitchFamily="34" charset="-122"/>
                 <a:cs typeface="Google Sans" pitchFamily="34" charset="-120"/>
               </a:rPr>
-              <a:t>WS3 • Pattern B VPC-SC Air-Gapped Inference &amp; Continuous KMS Attestation</a:t>
+              <a:t>WS3 • ACT II: VPC-SC AIR-GAPPED INFERENCE &amp; CONTINUOUS KMS ATTESTATION</a:t>
             </a:r>
             <a:endParaRPr lang="en-US" sz="1020" dirty="0"/>
           </a:p>
@@ -34187,7 +34253,7 @@
                 <a:ea typeface="Google Sans Display" pitchFamily="34" charset="-122"/>
                 <a:cs typeface="Google Sans Display" pitchFamily="34" charset="-120"/>
               </a:rPr>
-              <a:t>Zero-egress sovereign inference and continuous CMEK liveness flow</a:t>
+              <a:t>Zero-Egress Sovereign Inference &amp; Sub-60s Cloud KMS CMEK Liveness Loop</a:t>
             </a:r>
             <a:endParaRPr lang="en-US" sz="2050" dirty="0"/>
           </a:p>
@@ -35590,7 +35656,7 @@
                 <a:ea typeface="Google Sans" pitchFamily="34" charset="-122"/>
                 <a:cs typeface="Google Sans" pitchFamily="34" charset="-120"/>
               </a:rPr>
-              <a:t>Design considerations — 6-Point Silo &amp; CMEK Kill-Switch Verification Matrix (6/6 PASS)</a:t>
+              <a:t>ACT III • ARCHITECTURAL TRADE-OFF &amp; ISOLATION SELECTION MATRIX</a:t>
             </a:r>
             <a:endParaRPr lang="en-US" sz="1020" dirty="0"/>
           </a:p>
@@ -35695,7 +35761,7 @@
                 <a:ea typeface="Google Sans" pitchFamily="34" charset="-122"/>
                 <a:cs typeface="Google Sans" pitchFamily="34" charset="-120"/>
               </a:rPr>
-              <a:t>Design considerations — 6-Point Silo &amp; CMEK Kill-Switch Verification Matrix (6/6 PASS)</a:t>
+              <a:t>6-Point Silo &amp; CMEK Kill-Switch Verification Matrix (6/6 PASS)</a:t>
             </a:r>
             <a:endParaRPr lang="en-US" sz="1800" dirty="0"/>
           </a:p>
@@ -35734,7 +35800,7 @@
                 <a:ea typeface="Roboto" pitchFamily="34" charset="-122"/>
                 <a:cs typeface="Roboto" pitchFamily="34" charset="-120"/>
               </a:rPr>
-              <a:t>Side-by-side Google Cloud Well-Architected trade-off analysis, compensating controls, and target SLAs.</a:t>
+              <a:t>Side-by-side Google Cloud Well-Architected trade-off analysis, isolation boundaries, and unit economics.</a:t>
             </a:r>
             <a:endParaRPr lang="en-US" sz="980" dirty="0"/>
           </a:p>
@@ -37708,7 +37774,7 @@
                 <a:ea typeface="Google Sans" pitchFamily="34" charset="-122"/>
                 <a:cs typeface="Google Sans" pitchFamily="34" charset="-120"/>
               </a:rPr>
-              <a:t>1. Test 1: mTLS Device Identity • Unverified Client Certificate</a:t>
+              <a:t>1. VPC-SC Perimeter &amp; PAB (Tests 1–3)</a:t>
             </a:r>
             <a:endParaRPr lang="en-US" sz="760" dirty="0"/>
           </a:p>
@@ -37749,7 +37815,7 @@
                 <a:ea typeface="Roboto" pitchFamily="34" charset="-122"/>
                 <a:cs typeface="Roboto" pitchFamily="34" charset="-120"/>
               </a:rPr>
-              <a:t>Blocked at Hop 1 with HTTP 401 Unauthorized (mTLS SHA-256 fingerprint mismatch)</a:t>
+              <a:t>Blocks cross-perimeter bucket exfiltration, unapproved internet egress, and cross-project principal impersonation (HTTP 403).</a:t>
             </a:r>
             <a:endParaRPr lang="en-US" sz="740" dirty="0"/>
           </a:p>
@@ -37837,7 +37903,7 @@
                 <a:ea typeface="Google Sans" pitchFamily="34" charset="-122"/>
                 <a:cs typeface="Google Sans" pitchFamily="34" charset="-120"/>
               </a:rPr>
-              <a:t>2. Test 2: Cross-Silo Principal • IAM PAB Boundary Violation</a:t>
+              <a:t>2. &lt;60s CMEK Kill-Switch (Tests 4A–4B)</a:t>
             </a:r>
             <a:endParaRPr lang="en-US" sz="760" dirty="0"/>
           </a:p>
@@ -37878,7 +37944,7 @@
                 <a:ea typeface="Roboto" pitchFamily="34" charset="-122"/>
                 <a:cs typeface="Roboto" pitchFamily="34" charset="-120"/>
               </a:rPr>
-              <a:t>Blocked at Hop 1/2 with HTTP 403 Forbidden (IAM PAB project boundary violation)</a:t>
+              <a:t>Disabling finvault-silo-cmek halts AlloyDB and Memory Bank reads within 18.4s (&lt;60s SLA) with deterministic HTTP 423 Locked.</a:t>
             </a:r>
             <a:endParaRPr lang="en-US" sz="740" dirty="0"/>
           </a:p>
@@ -37958,7 +38024,7 @@
               <a:buNone/>
             </a:pPr>
             <a:r>
-              <a:rPr lang="en-US" sz="760" b="1" dirty="0">
+              <a:rPr lang="en-US" sz="820" b="1" dirty="0">
                 <a:solidFill>
                   <a:srgbClr val="3C4043"/>
                 </a:solidFill>
@@ -37966,9 +38032,9 @@
                 <a:ea typeface="Google Sans" pitchFamily="34" charset="-122"/>
                 <a:cs typeface="Google Sans" pitchFamily="34" charset="-120"/>
               </a:rPr>
-              <a:t>3. Test 3: Data Exfiltration • Cross-Project Bucket Copy</a:t>
-            </a:r>
-            <a:endParaRPr lang="en-US" sz="760" dirty="0"/>
+              <a:t>3. L1 In-Memory Cache Purge (Test 5)</a:t>
+            </a:r>
+            <a:endParaRPr lang="en-US" sz="820" dirty="0"/>
           </a:p>
         </p:txBody>
       </p:sp>
@@ -38007,7 +38073,7 @@
                 <a:ea typeface="Roboto" pitchFamily="34" charset="-122"/>
                 <a:cs typeface="Roboto" pitchFamily="34" charset="-120"/>
               </a:rPr>
-              <a:t>Blocked by VPC-SC with HTTP 403 VPC_SC_EXFILTRATION_BLOCKED (0 bytes egressed)</a:t>
+              <a:t>KMS revocation immediately invalidates active L1 session caches so zero cached tokens are served post-revocation.</a:t>
             </a:r>
             <a:endParaRPr lang="en-US" sz="740" dirty="0"/>
           </a:p>
@@ -38095,7 +38161,7 @@
                 <a:ea typeface="Google Sans" pitchFamily="34" charset="-122"/>
                 <a:cs typeface="Google Sans" pitchFamily="34" charset="-120"/>
               </a:rPr>
-              <a:t>4. Tests 4A &amp; 4B: CMEK Kill-Switch • FinVault Key Revoke &amp; Restore</a:t>
+              <a:t>4. Asymmetric P-256 A2A Signing (Test 6)</a:t>
             </a:r>
             <a:endParaRPr lang="en-US" sz="760" dirty="0"/>
           </a:p>
@@ -38136,7 +38202,7 @@
                 <a:ea typeface="Roboto" pitchFamily="34" charset="-122"/>
                 <a:cs typeface="Roboto" pitchFamily="34" charset="-120"/>
               </a:rPr>
-              <a:t>4A: Immediate HTTP 423 Locked across Memory/DB/GKE (&lt;60s) • 4B: 200 OK cleanly restored</a:t>
+              <a:t>Signs every intra-silo agent-to-agent delegation using Cloud KMS asymmetric ECDSA P-256 keys with immutable SCC audit logs.</a:t>
             </a:r>
             <a:endParaRPr lang="en-US" sz="740" dirty="0"/>
           </a:p>

--- a/slides/doc-mt-03-editable-slides.pptx
+++ b/slides/doc-mt-03-editable-slides.pptx
@@ -782,7 +782,7 @@
           <a:p>
             <a:r>
               <a:rPr lang="en-US" dirty="0"/>
-              <a:t>[phased-roadmap-timeline] WS3 • ACT III: PATTERN B SOVEREIGN SILO PROVISIONING TIMELINE: Workstream 3 Pattern B Timeline  •  Dedicated Project &amp; PAB → VPC-SC &amp; CMEK → Private GKE &amp; &lt;60s Kill-Switch</a:t>
+              <a:t>[phased-roadmap-timeline] WS3 • ACT III: 3-STAGE PATTERN B SOVEREIGN VAULT &amp; CMEK KILL-SWITCH PIPELINE: Workstream 3 Pattern B Lifecycle  •  Stage 1 Dedicated Project &amp; PAB → Stage 2 VPC-SC &amp; Tenant CMEK → Stage 3 &lt;60s HTTP 423 Kill-Switch</a:t>
             </a:r>
             <a:endParaRPr lang="en-US" dirty="0"/>
           </a:p>
@@ -3844,7 +3844,7 @@
                 <a:ea typeface="Google Sans" pitchFamily="34" charset="-122"/>
                 <a:cs typeface="Google Sans" pitchFamily="34" charset="-120"/>
               </a:rPr>
-              <a:t>GOVERNANCE • SLIDES 12–14</a:t>
+              <a:t>SOLUTION • SLIDES 12–14</a:t>
             </a:r>
             <a:endParaRPr lang="en-US" sz="660" dirty="0"/>
           </a:p>
@@ -3883,7 +3883,7 @@
                 <a:ea typeface="Google Sans" pitchFamily="34" charset="-122"/>
                 <a:cs typeface="Google Sans" pitchFamily="34" charset="-120"/>
               </a:rPr>
-              <a:t>Rollout Roadmap, Day-2 RACI &amp; Series Map</a:t>
+              <a:t>Tier Evolution, Well-Architected Pillars &amp; Series Map</a:t>
             </a:r>
             <a:endParaRPr lang="en-US" sz="850" dirty="0"/>
           </a:p>
@@ -3922,7 +3922,7 @@
                 <a:ea typeface="Roboto" pitchFamily="34" charset="-122"/>
                 <a:cs typeface="Roboto" pitchFamily="34" charset="-120"/>
               </a:rPr>
-              <a:t>Charts the 3-phase rollout timeline (Weeks 1–10), assigns Security/SRE/FinOps Day-2 RACI SLAs, and maps runnable deliverables across Workstreams 1–5.</a:t>
+              <a:t>Demonstrates 3-stage tenant tier evolution (Pool -&gt; 0ms PSC Cutover -&gt; Silo), Google Cloud Well-Architected guarantees, and Workstream 1–5 deliverables.</a:t>
             </a:r>
             <a:endParaRPr lang="en-US" sz="780" dirty="0"/>
           </a:p>
@@ -9407,7 +9407,7 @@
                 <a:ea typeface="Google Sans" pitchFamily="34" charset="-122"/>
                 <a:cs typeface="Google Sans" pitchFamily="34" charset="-120"/>
               </a:rPr>
-              <a:t>WS3 • ACT III: PATTERN B SOVEREIGN SILO PROVISIONING TIMELINE</a:t>
+              <a:t>WS3 • ACT III: 3-STAGE PATTERN B SOVEREIGN VAULT &amp; CMEK KILL-SWITCH PIPELINE</a:t>
             </a:r>
             <a:endParaRPr lang="en-US" sz="1020" dirty="0"/>
           </a:p>
@@ -9488,7 +9488,7 @@
         <p:spPr>
           <a:xfrm>
             <a:off x="530352" y="786384"/>
-            <a:ext cx="10972800" cy="585216"/>
+            <a:ext cx="11119104" cy="585216"/>
           </a:xfrm>
           <a:prstGeom prst="rect">
             <a:avLst/>
@@ -9504,7 +9504,7 @@
               <a:buNone/>
             </a:pPr>
             <a:r>
-              <a:rPr lang="en-US" sz="2250" b="1" dirty="0">
+              <a:rPr lang="en-US" sz="2020" b="1" dirty="0">
                 <a:solidFill>
                   <a:srgbClr val="0F2942"/>
                 </a:solidFill>
@@ -9512,9 +9512,9 @@
                 <a:ea typeface="Google Sans Display" pitchFamily="34" charset="-122"/>
                 <a:cs typeface="Google Sans Display" pitchFamily="34" charset="-120"/>
               </a:rPr>
-              <a:t>5-Day Automated Sovereign Single-Tenant Vault &amp; CMEK Kill-Switch Rollout</a:t>
-            </a:r>
-            <a:endParaRPr lang="en-US" sz="2250" dirty="0"/>
+              <a:t>3-Stage Sovereign Silo Lifecycle: Dedicated VPC-SC → Tenant CMEK → &lt;60s Kill-Switch</a:t>
+            </a:r>
+            <a:endParaRPr lang="en-US" sz="2020" dirty="0"/>
           </a:p>
         </p:txBody>
       </p:sp>
@@ -9592,7 +9592,7 @@
               <a:buNone/>
             </a:pPr>
             <a:r>
-              <a:rPr lang="en-US" sz="1700" b="1" dirty="0">
+              <a:rPr lang="en-US" sz="1650" b="1" dirty="0">
                 <a:solidFill>
                   <a:srgbClr val="FFFFFF"/>
                 </a:solidFill>
@@ -9600,9 +9600,9 @@
                 <a:ea typeface="Google Sans" pitchFamily="34" charset="-122"/>
                 <a:cs typeface="Google Sans" pitchFamily="34" charset="-120"/>
               </a:rPr>
-              <a:t>Phase 1: Project Silo</a:t>
-            </a:r>
-            <a:endParaRPr lang="en-US" sz="1700" dirty="0"/>
+              <a:t>Stage 1: Sovereign Vault</a:t>
+            </a:r>
+            <a:endParaRPr lang="en-US" sz="1650" dirty="0"/>
           </a:p>
         </p:txBody>
       </p:sp>
@@ -9651,7 +9651,7 @@
               <a:buNone/>
             </a:pPr>
             <a:r>
-              <a:rPr lang="en-US" sz="2000" b="1" dirty="0">
+              <a:rPr lang="en-US" sz="1850" b="1" dirty="0">
                 <a:solidFill>
                   <a:srgbClr val="3C4043"/>
                 </a:solidFill>
@@ -9659,16 +9659,16 @@
                 <a:ea typeface="Google Sans" pitchFamily="34" charset="-122"/>
                 <a:cs typeface="Google Sans" pitchFamily="34" charset="-120"/>
               </a:rPr>
-              <a:t>Dedicated Project</a:t>
-            </a:r>
-            <a:endParaRPr lang="en-US" sz="2000" dirty="0"/>
+              <a:t>1:1 Dedicated GCP Project</a:t>
+            </a:r>
+            <a:endParaRPr lang="en-US" sz="1850" dirty="0"/>
           </a:p>
           <a:p>
             <a:pPr algn="ctr" indent="0" marL="0">
               <a:buNone/>
             </a:pPr>
             <a:r>
-              <a:rPr lang="en-US" sz="2000" b="1" dirty="0">
+              <a:rPr lang="en-US" sz="1850" b="1" dirty="0">
                 <a:solidFill>
                   <a:srgbClr val="3C4043"/>
                 </a:solidFill>
@@ -9676,9 +9676,9 @@
                 <a:ea typeface="Google Sans" pitchFamily="34" charset="-122"/>
                 <a:cs typeface="Google Sans" pitchFamily="34" charset="-120"/>
               </a:rPr>
-              <a:t>&amp; IAM PAB Boundary</a:t>
-            </a:r>
-            <a:endParaRPr lang="en-US" sz="2000" dirty="0"/>
+              <a:t>(Terraform 3.6 + IAM PAB)</a:t>
+            </a:r>
+            <a:endParaRPr lang="en-US" sz="1850" dirty="0"/>
           </a:p>
         </p:txBody>
       </p:sp>
@@ -9690,8 +9690,8 @@
         </p:nvSpPr>
         <p:spPr>
           <a:xfrm>
-            <a:off x="713232" y="3675888"/>
-            <a:ext cx="3072384" cy="384048"/>
+            <a:off x="676656" y="3675888"/>
+            <a:ext cx="3145536" cy="384048"/>
           </a:xfrm>
           <a:prstGeom prst="rect">
             <a:avLst/>
@@ -9707,17 +9707,17 @@
               <a:buNone/>
             </a:pPr>
             <a:r>
-              <a:rPr lang="en-US" sz="1500" dirty="0">
-                <a:solidFill>
-                  <a:srgbClr val="3C4043"/>
+              <a:rPr lang="en-US" sz="1220" b="1" dirty="0">
+                <a:solidFill>
+                  <a:srgbClr val="0F2942"/>
                 </a:solidFill>
                 <a:latin typeface="Roboto" pitchFamily="34" charset="0"/>
                 <a:ea typeface="Roboto" pitchFamily="34" charset="-122"/>
                 <a:cs typeface="Roboto" pitchFamily="34" charset="-120"/>
               </a:rPr>
-              <a:t>(Day 1 Automated)</a:t>
-            </a:r>
-            <a:endParaRPr lang="en-US" sz="1500" dirty="0"/>
+              <a:t>cymbal-{tenant}-silo-prod • VIP</a:t>
+            </a:r>
+            <a:endParaRPr lang="en-US" sz="1220" dirty="0"/>
           </a:p>
         </p:txBody>
       </p:sp>
@@ -9769,7 +9769,7 @@
               <a:buNone/>
             </a:pPr>
             <a:r>
-              <a:rPr lang="en-US" sz="1380" dirty="0">
+              <a:rPr lang="en-US" sz="1350" dirty="0">
                 <a:solidFill>
                   <a:srgbClr val="3C4043"/>
                 </a:solidFill>
@@ -9777,16 +9777,16 @@
                 <a:ea typeface="Roboto" pitchFamily="34" charset="-122"/>
                 <a:cs typeface="Roboto" pitchFamily="34" charset="-120"/>
               </a:rPr>
-              <a:t>cymbal-{tenant}-silo-prod +</a:t>
-            </a:r>
-            <a:endParaRPr lang="en-US" sz="1380" dirty="0"/>
+              <a:t>Isolates Compute, Storage &amp; IAM Inside</a:t>
+            </a:r>
+            <a:endParaRPr lang="en-US" sz="1350" dirty="0"/>
           </a:p>
           <a:p>
             <a:pPr algn="ctr" indent="0" marL="0">
               <a:buNone/>
             </a:pPr>
             <a:r>
-              <a:rPr lang="en-US" sz="1380" dirty="0">
+              <a:rPr lang="en-US" sz="1350" dirty="0">
                 <a:solidFill>
                   <a:srgbClr val="3C4043"/>
                 </a:solidFill>
@@ -9794,9 +9794,9 @@
                 <a:ea typeface="Roboto" pitchFamily="34" charset="-122"/>
                 <a:cs typeface="Roboto" pitchFamily="34" charset="-120"/>
               </a:rPr>
-              <a:t>Principal Access Boundary</a:t>
-            </a:r>
-            <a:endParaRPr lang="en-US" sz="1380" dirty="0"/>
+              <a:t>VPC-SC Perimeter (199.36.153.4/30)</a:t>
+            </a:r>
+            <a:endParaRPr lang="en-US" sz="1350" dirty="0"/>
           </a:p>
         </p:txBody>
       </p:sp>
@@ -9874,7 +9874,7 @@
               <a:buNone/>
             </a:pPr>
             <a:r>
-              <a:rPr lang="en-US" sz="1700" b="1" dirty="0">
+              <a:rPr lang="en-US" sz="1650" b="1" dirty="0">
                 <a:solidFill>
                   <a:srgbClr val="FFFFFF"/>
                 </a:solidFill>
@@ -9882,9 +9882,9 @@
                 <a:ea typeface="Google Sans" pitchFamily="34" charset="-122"/>
                 <a:cs typeface="Google Sans" pitchFamily="34" charset="-120"/>
               </a:rPr>
-              <a:t>Phase 2: Crypto &amp; Network</a:t>
-            </a:r>
-            <a:endParaRPr lang="en-US" sz="1700" dirty="0"/>
+              <a:t>Stage 2: Crypto &amp; Model</a:t>
+            </a:r>
+            <a:endParaRPr lang="en-US" sz="1650" dirty="0"/>
           </a:p>
         </p:txBody>
       </p:sp>
@@ -9933,7 +9933,7 @@
               <a:buNone/>
             </a:pPr>
             <a:r>
-              <a:rPr lang="en-US" sz="2000" b="1" dirty="0">
+              <a:rPr lang="en-US" sz="1850" b="1" dirty="0">
                 <a:solidFill>
                   <a:srgbClr val="3C4043"/>
                 </a:solidFill>
@@ -9941,16 +9941,16 @@
                 <a:ea typeface="Google Sans" pitchFamily="34" charset="-122"/>
                 <a:cs typeface="Google Sans" pitchFamily="34" charset="-120"/>
               </a:rPr>
-              <a:t>VPC-SC Perimeter</a:t>
-            </a:r>
-            <a:endParaRPr lang="en-US" sz="2000" dirty="0"/>
+              <a:t>Tenant KMS CMEK &amp; Private</a:t>
+            </a:r>
+            <a:endParaRPr lang="en-US" sz="1850" dirty="0"/>
           </a:p>
           <a:p>
             <a:pPr algn="ctr" indent="0" marL="0">
               <a:buNone/>
             </a:pPr>
             <a:r>
-              <a:rPr lang="en-US" sz="2000" b="1" dirty="0">
+              <a:rPr lang="en-US" sz="1850" b="1" dirty="0">
                 <a:solidFill>
                   <a:srgbClr val="3C4043"/>
                 </a:solidFill>
@@ -9958,9 +9958,9 @@
                 <a:ea typeface="Google Sans" pitchFamily="34" charset="-122"/>
                 <a:cs typeface="Google Sans" pitchFamily="34" charset="-120"/>
               </a:rPr>
-              <a:t>&amp; Cloud KMS CMEK</a:t>
-            </a:r>
-            <a:endParaRPr lang="en-US" sz="2000" dirty="0"/>
+              <a:t>GKE Gemma 3 / Dedicated PT</a:t>
+            </a:r>
+            <a:endParaRPr lang="en-US" sz="1850" dirty="0"/>
           </a:p>
         </p:txBody>
       </p:sp>
@@ -9972,8 +9972,8 @@
         </p:nvSpPr>
         <p:spPr>
           <a:xfrm>
-            <a:off x="4553712" y="3675888"/>
-            <a:ext cx="3072384" cy="384048"/>
+            <a:off x="4517136" y="3675888"/>
+            <a:ext cx="3145536" cy="384048"/>
           </a:xfrm>
           <a:prstGeom prst="rect">
             <a:avLst/>
@@ -9989,17 +9989,17 @@
               <a:buNone/>
             </a:pPr>
             <a:r>
-              <a:rPr lang="en-US" sz="1500" dirty="0">
-                <a:solidFill>
-                  <a:srgbClr val="3C4043"/>
+              <a:rPr lang="en-US" sz="1220" b="1" dirty="0">
+                <a:solidFill>
+                  <a:srgbClr val="0D7A75"/>
                 </a:solidFill>
                 <a:latin typeface="Roboto" pitchFamily="34" charset="0"/>
                 <a:ea typeface="Roboto" pitchFamily="34" charset="-122"/>
                 <a:cs typeface="Roboto" pitchFamily="34" charset="-120"/>
               </a:rPr>
-              <a:t>(Days 2–3)</a:t>
-            </a:r>
-            <a:endParaRPr lang="en-US" sz="1500" dirty="0"/>
+              <a:t>ECDSA P-256 Sign • 0 Internet Egress</a:t>
+            </a:r>
+            <a:endParaRPr lang="en-US" sz="1220" dirty="0"/>
           </a:p>
         </p:txBody>
       </p:sp>
@@ -10051,7 +10051,7 @@
               <a:buNone/>
             </a:pPr>
             <a:r>
-              <a:rPr lang="en-US" sz="1380" dirty="0">
+              <a:rPr lang="en-US" sz="1350" dirty="0">
                 <a:solidFill>
                   <a:srgbClr val="3C4043"/>
                 </a:solidFill>
@@ -10059,16 +10059,16 @@
                 <a:ea typeface="Roboto" pitchFamily="34" charset="-122"/>
                 <a:cs typeface="Roboto" pitchFamily="34" charset="-120"/>
               </a:rPr>
-              <a:t>Restricted VIP 199.36.153.4/30</a:t>
-            </a:r>
-            <a:endParaRPr lang="en-US" sz="1380" dirty="0"/>
+              <a:t>Binds AlloyDB, Memory Bank &amp; GCS to</a:t>
+            </a:r>
+            <a:endParaRPr lang="en-US" sz="1350" dirty="0"/>
           </a:p>
           <a:p>
             <a:pPr algn="ctr" indent="0" marL="0">
               <a:buNone/>
             </a:pPr>
             <a:r>
-              <a:rPr lang="en-US" sz="1380" dirty="0">
+              <a:rPr lang="en-US" sz="1350" dirty="0">
                 <a:solidFill>
                   <a:srgbClr val="3C4043"/>
                 </a:solidFill>
@@ -10076,9 +10076,9 @@
                 <a:ea typeface="Roboto" pitchFamily="34" charset="-122"/>
                 <a:cs typeface="Roboto" pitchFamily="34" charset="-120"/>
               </a:rPr>
-              <a:t>&amp; Tenant-Controlled CMEK</a:t>
-            </a:r>
-            <a:endParaRPr lang="en-US" sz="1380" dirty="0"/>
+              <a:t>Customer-Controlled Cloud KMS Key</a:t>
+            </a:r>
+            <a:endParaRPr lang="en-US" sz="1350" dirty="0"/>
           </a:p>
         </p:txBody>
       </p:sp>
@@ -10156,7 +10156,7 @@
               <a:buNone/>
             </a:pPr>
             <a:r>
-              <a:rPr lang="en-US" sz="1700" b="1" dirty="0">
+              <a:rPr lang="en-US" sz="1650" b="1" dirty="0">
                 <a:solidFill>
                   <a:srgbClr val="FFFFFF"/>
                 </a:solidFill>
@@ -10164,9 +10164,9 @@
                 <a:ea typeface="Google Sans" pitchFamily="34" charset="-122"/>
                 <a:cs typeface="Google Sans" pitchFamily="34" charset="-120"/>
               </a:rPr>
-              <a:t>Phase 3: Kill-Switch Gate</a:t>
-            </a:r>
-            <a:endParaRPr lang="en-US" sz="1700" dirty="0"/>
+              <a:t>Stage 3: CMEK Kill-Switch</a:t>
+            </a:r>
+            <a:endParaRPr lang="en-US" sz="1650" dirty="0"/>
           </a:p>
         </p:txBody>
       </p:sp>
@@ -10215,7 +10215,7 @@
               <a:buNone/>
             </a:pPr>
             <a:r>
-              <a:rPr lang="en-US" sz="2000" b="1" dirty="0">
+              <a:rPr lang="en-US" sz="1850" b="1" dirty="0">
                 <a:solidFill>
                   <a:srgbClr val="3C4043"/>
                 </a:solidFill>
@@ -10223,16 +10223,16 @@
                 <a:ea typeface="Google Sans" pitchFamily="34" charset="-122"/>
                 <a:cs typeface="Google Sans" pitchFamily="34" charset="-120"/>
               </a:rPr>
-              <a:t>Private GKE Gemma 3</a:t>
-            </a:r>
-            <a:endParaRPr lang="en-US" sz="2000" dirty="0"/>
+              <a:t>Autonomous Key Revocation</a:t>
+            </a:r>
+            <a:endParaRPr lang="en-US" sz="1850" dirty="0"/>
           </a:p>
           <a:p>
             <a:pPr algn="ctr" indent="0" marL="0">
               <a:buNone/>
             </a:pPr>
             <a:r>
-              <a:rPr lang="en-US" sz="2000" b="1" dirty="0">
+              <a:rPr lang="en-US" sz="1850" b="1" dirty="0">
                 <a:solidFill>
                   <a:srgbClr val="3C4043"/>
                 </a:solidFill>
@@ -10240,9 +10240,9 @@
                 <a:ea typeface="Google Sans" pitchFamily="34" charset="-122"/>
                 <a:cs typeface="Google Sans" pitchFamily="34" charset="-120"/>
               </a:rPr>
-              <a:t>&amp; &lt;60s Revocation</a:t>
-            </a:r>
-            <a:endParaRPr lang="en-US" sz="2000" dirty="0"/>
+              <a:t>&amp; L1 Memory Cache Purge</a:t>
+            </a:r>
+            <a:endParaRPr lang="en-US" sz="1850" dirty="0"/>
           </a:p>
         </p:txBody>
       </p:sp>
@@ -10254,8 +10254,8 @@
         </p:nvSpPr>
         <p:spPr>
           <a:xfrm>
-            <a:off x="8394192" y="3675888"/>
-            <a:ext cx="3072384" cy="384048"/>
+            <a:off x="8357616" y="3675888"/>
+            <a:ext cx="3145536" cy="384048"/>
           </a:xfrm>
           <a:prstGeom prst="rect">
             <a:avLst/>
@@ -10271,17 +10271,17 @@
               <a:buNone/>
             </a:pPr>
             <a:r>
-              <a:rPr lang="en-US" sz="1500" dirty="0">
-                <a:solidFill>
-                  <a:srgbClr val="3C4043"/>
+              <a:rPr lang="en-US" sz="1220" b="1" dirty="0">
+                <a:solidFill>
+                  <a:srgbClr val="54728C"/>
                 </a:solidFill>
                 <a:latin typeface="Roboto" pitchFamily="34" charset="0"/>
                 <a:ea typeface="Roboto" pitchFamily="34" charset="-122"/>
                 <a:cs typeface="Roboto" pitchFamily="34" charset="-120"/>
               </a:rPr>
-              <a:t>(Days 4–5)</a:t>
-            </a:r>
-            <a:endParaRPr lang="en-US" sz="1500" dirty="0"/>
+              <a:t>Disable KeyVersion → &lt;60s HTTP 423</a:t>
+            </a:r>
+            <a:endParaRPr lang="en-US" sz="1220" dirty="0"/>
           </a:p>
         </p:txBody>
       </p:sp>
@@ -10333,7 +10333,7 @@
               <a:buNone/>
             </a:pPr>
             <a:r>
-              <a:rPr lang="en-US" sz="1380" dirty="0">
+              <a:rPr lang="en-US" sz="1350" dirty="0">
                 <a:solidFill>
                   <a:srgbClr val="3C4043"/>
                 </a:solidFill>
@@ -10341,16 +10341,16 @@
                 <a:ea typeface="Roboto" pitchFamily="34" charset="-122"/>
                 <a:cs typeface="Roboto" pitchFamily="34" charset="-120"/>
               </a:rPr>
-              <a:t>6/6 Sovereign Silo &amp; &lt;60s</a:t>
-            </a:r>
-            <a:endParaRPr lang="en-US" sz="1380" dirty="0"/>
+              <a:t>Propagates KMS Revocation Signal to</a:t>
+            </a:r>
+            <a:endParaRPr lang="en-US" sz="1350" dirty="0"/>
           </a:p>
           <a:p>
             <a:pPr algn="ctr" indent="0" marL="0">
               <a:buNone/>
             </a:pPr>
             <a:r>
-              <a:rPr lang="en-US" sz="1380" dirty="0">
+              <a:rPr lang="en-US" sz="1350" dirty="0">
                 <a:solidFill>
                   <a:srgbClr val="3C4043"/>
                 </a:solidFill>
@@ -10358,9 +10358,9 @@
                 <a:ea typeface="Roboto" pitchFamily="34" charset="-122"/>
                 <a:cs typeface="Roboto" pitchFamily="34" charset="-120"/>
               </a:rPr>
-              <a:t>HTTP 423 Kill-Switch PASS</a:t>
-            </a:r>
-            <a:endParaRPr lang="en-US" sz="1380" dirty="0"/>
+              <a:t>Evict In-Memory Context &amp; Lock Silo</a:t>
+            </a:r>
+            <a:endParaRPr lang="en-US" sz="1350" dirty="0"/>
           </a:p>
         </p:txBody>
       </p:sp>
@@ -10577,7 +10577,7 @@
                 <a:ea typeface="Roboto" pitchFamily="34" charset="-122"/>
                 <a:cs typeface="Roboto" pitchFamily="34" charset="-120"/>
               </a:rPr>
-              <a:t>Workstream 3 Pattern B Timeline  •  Dedicated Project &amp; PAB → VPC-SC &amp; CMEK → Private GKE &amp; &lt;60s Kill-Switch  •  </a:t>
+              <a:t>Workstream 3 Pattern B Lifecycle  •  Stage 1 Dedicated Project &amp; PAB → Stage 2 VPC-SC &amp; Tenant CMEK → Stage 3 &lt;60s HTTP 423 Kill-Switch  •  </a:t>
             </a:r>
             <a:pPr algn="l" indent="0" marL="0">
               <a:buNone/>

--- a/slides/doc-mt-03-editable-slides.pptx
+++ b/slides/doc-mt-03-editable-slides.pptx
@@ -1139,11 +1139,11 @@
           <a:p>
             <a:r>
               <a:rPr lang="en-US" dirty="0"/>
-              <a:t>Use cases — Regulated Banking, Healthcare &amp; Sovereign Cloud Workloads
-• The Regulated CISO Threat Model: Tier-1 banks and healthcare systems must prove that even an application-layer software bug cannot expose their memory or database rows to another tenant.
-• Four Non-Negotiable Sovereign Requirements: Zero physical blast radius, cryptographically enforced network non-exfiltration (VPC-SC), customer-controlled KMS kill-switches, and optional air-gapped open-weight models.
-• Dual Sovereign Vault Verification: Pattern B provisions physically separate Google Cloud projects (`cymbal-finvault-silo-prod` and `cymbal-retailstream-silo-prod`) with zero shared databases or encryption keys.
-• Preserve Pattern A for Commercial Tiers: Keep standard commercial customers on Pattern A ($42/mo) for 90% shared caching efficiency, and reserve Pattern B ($1,850/mo) for regulated enterprise contracts.</a:t>
+              <a:t>Use cases — Regulated Banking, Healthcare &amp; Defense on Sovereign Google Cloud Stack
+• The Regulated CISO Threat Model (Zero Physical Blast Radius): Tier-1 banks (OCC/FFIEC, EU DORA) and healthcare systems (HIPAA) mandate physically separate GCP projects (`cymbal-{tenant}-silo-prod`) with zero shared compute or databases.
+• FinVault Bank Sovereign Vault (`cymbal-finvault-silo-prod`): Runs air-gapped Gemma 3 (27B IT) on private GKE GPU nodes (`172.16.0.2/28`, 0 public IPs) alongside private Agent Alpha (Gemini 2.5 Pro Dedicated PT) and CMEK AlloyDB.
+• RetailStream Sovereign Vault (`cymbal-retailstream-silo-prod`): Demonstrates dual-silo parity with its own VPC Service Controls perimeter, IAM Principal Access Boundary (PAB), Entra ID 3LO connectors, and independent Cloud KMS CMEK key ring.
+• 3-Wall Hardware Perimeter &amp; &lt;60s CMEK Kill-Switch Stack: BeyondCorp mTLS, IAM PAB, VPC-SC, Cloud KMS CMEK (`HTTP 423 Locked`), Model Armor, Cloud DLP, AlloyDB, and BigQuery wrap the unchanged 80% reusable ADK 2.0 core.</a:t>
             </a:r>
             <a:endParaRPr lang="en-US" dirty="0"/>
           </a:p>
@@ -1231,11 +1231,8 @@
           <a:p>
             <a:r>
               <a:rPr lang="en-US" dirty="0"/>
-              <a:t>Products used — VPC-SC, IAM PAB, Cloud KMS CMEK &amp; Air-Gapped Gemma 3
-• Wall 1 — mTLS &amp; IAM Principal Access Boundaries (PAB): Every request must present a pinned BeyondCorp client certificate (`cert_sha256`) and pass an IAM PAB rule binding the caller strictly to that tenant’s project.
-• Wall 2 — VPC Service Controls (VPC-SC) Data Perimeter: Wraps Vertex AI, AlloyDB, Cloud Storage, GKE, and BigQuery inside a service perimeter that blocks unauthorized egress or cross-project copies (HTTP 403).
-• Wall 3 — Ubiquitous Cloud KMS CMEK Binding: A single tenant-managed Cloud KMS key encrypts AlloyDB tables, Vertex AI Memory Bank state, GKE persistent disks, and BigQuery audit datasets.
-• Flexible Sovereign Model Hosting: Tenants can run Gemini 2.5 Pro on Provisioned Throughput inside VPC-SC or deploy air-gapped Gemma 3 (27B) on a private GKE GPU node pool (`172.16.0.2/28`, zero public IPs).</a:t>
+              <a:t>Design alternatives — Sovereign Silo Architecture &amp; Model Hosting Comparison (Pattern B Options)
+</a:t>
             </a:r>
             <a:endParaRPr lang="en-US" dirty="0"/>
           </a:p>
@@ -17226,7 +17223,7 @@
                 <a:ea typeface="Google Sans" pitchFamily="34" charset="-122"/>
                 <a:cs typeface="Google Sans" pitchFamily="34" charset="-120"/>
               </a:rPr>
-              <a:t>Regulated Banking, Healthcare &amp; Sovereign Cloud Workloads</a:t>
+              <a:t>Regulated Banking, Healthcare &amp; Defense on Sovereign Google Cloud Stack</a:t>
             </a:r>
             <a:endParaRPr lang="en-US" sz="1900" dirty="0"/>
           </a:p>
@@ -17412,7 +17409,7 @@
                 <a:ea typeface="Google Sans" pitchFamily="34" charset="-122"/>
                 <a:cs typeface="Google Sans" pitchFamily="34" charset="-120"/>
               </a:rPr>
-              <a:t>The Regulated CISO Threat Model</a:t>
+              <a:t>The Regulated CISO Threat Model (Zero Physical Blast Radius)</a:t>
             </a:r>
             <a:endParaRPr lang="en-US" sz="1140" dirty="0"/>
           </a:p>
@@ -17471,7 +17468,7 @@
                 <a:ea typeface="Roboto" pitchFamily="34" charset="-122"/>
                 <a:cs typeface="Roboto" pitchFamily="34" charset="-120"/>
               </a:rPr>
-              <a:t>Tier-1 banks and healthcare systems must prove that even an application-layer software bug cannot expose their memory or database rows to another tenant.</a:t>
+              <a:t>Tier-1 banks (OCC/FFIEC, EU DORA) and healthcare systems (HIPAA) mandate physically separate GCP projects (cymbal-{tenant}-silo-prod) with zero shared compute or databases.</a:t>
             </a:r>
             <a:endParaRPr lang="en-US" sz="980" dirty="0"/>
           </a:p>
@@ -17557,7 +17554,7 @@
                 <a:ea typeface="Google Sans" pitchFamily="34" charset="-122"/>
                 <a:cs typeface="Google Sans" pitchFamily="34" charset="-120"/>
               </a:rPr>
-              <a:t>Cloud Stack: Physical Project Isolation • Dedicated VPC • Dedicated AlloyDB &amp; Memory Bank
+              <a:t>Cloud Stack: Dedicated Per-Tenant GCP Project • Dedicated VPC (10.30.0.0/20) • Dedicated AlloyDB &amp; Memory Bank
 </a:t>
             </a:r>
             <a:pPr indent="0" marL="0">
@@ -17572,7 +17569,7 @@
                 <a:ea typeface="Roboto" pitchFamily="34" charset="-122"/>
                 <a:cs typeface="Roboto" pitchFamily="34" charset="-120"/>
               </a:rPr>
-              <a:t>Target &amp; SLA: Reduces Cross-Tenant Blast Radius to Absolute Zero at the Hypervisor/Project Layer</a:t>
+              <a:t>Target &amp; SLA: Reduces Cross-Tenant Blast Radius to Absolute Zero at the GCP Project &amp; Hypervisor Layer</a:t>
             </a:r>
             <a:endParaRPr lang="en-US" sz="750" dirty="0"/>
           </a:p>
@@ -17633,7 +17630,7 @@
                 <a:ea typeface="Google Sans" pitchFamily="34" charset="-122"/>
                 <a:cs typeface="Google Sans" pitchFamily="34" charset="-120"/>
               </a:rPr>
-              <a:t>Zero Physical Blast Radius</a:t>
+              <a:t>1. Regulated CISO Sovereignty Mandate</a:t>
             </a:r>
             <a:endParaRPr lang="en-US" sz="750" dirty="0"/>
           </a:p>
@@ -17780,7 +17777,7 @@
                 <a:ea typeface="Google Sans" pitchFamily="34" charset="-122"/>
                 <a:cs typeface="Google Sans" pitchFamily="34" charset="-120"/>
               </a:rPr>
-              <a:t>Four Non-Negotiable Sovereign Requirements</a:t>
+              <a:t>FinVault Bank Sovereign Vault (cymbal-finvault-silo-prod)</a:t>
             </a:r>
             <a:endParaRPr lang="en-US" sz="1140" dirty="0"/>
           </a:p>
@@ -17839,7 +17836,7 @@
                 <a:ea typeface="Roboto" pitchFamily="34" charset="-122"/>
                 <a:cs typeface="Roboto" pitchFamily="34" charset="-120"/>
               </a:rPr>
-              <a:t>Zero physical blast radius, cryptographically enforced network non-exfiltration (VPC-SC), customer-controlled KMS kill-switches, and optional air-gapped open-weight models.</a:t>
+              <a:t>Runs air-gapped Gemma 3 (27B IT) on private GKE GPU nodes (172.16.0.2/28, 0 public IPs) alongside private Agent Alpha (Gemini 2.5 Pro Dedicated PT) and CMEK AlloyDB.</a:t>
             </a:r>
             <a:endParaRPr lang="en-US" sz="980" dirty="0"/>
           </a:p>
@@ -17925,7 +17922,7 @@
                 <a:ea typeface="Google Sans" pitchFamily="34" charset="-122"/>
                 <a:cs typeface="Google Sans" pitchFamily="34" charset="-120"/>
               </a:rPr>
-              <a:t>Cloud Stack: VPC Service Controls (VPC-SC) • IAM PAB • Cloud KMS CMEK • Air-Gapped GKE
+              <a:t>Cloud Stack: cymbal-finvault-silo-prod • Air-Gapped GKE Gemma 3 (27B) • Gemini 2.5 Pro PT • finvault-silo-cmek
 </a:t>
             </a:r>
             <a:pPr indent="0" marL="0">
@@ -17940,7 +17937,7 @@
                 <a:ea typeface="Roboto" pitchFamily="34" charset="-122"/>
                 <a:cs typeface="Roboto" pitchFamily="34" charset="-120"/>
               </a:rPr>
-              <a:t>Target &amp; SLA: Hardware &amp; Control-Plane Enforcement Independent of Application Code</a:t>
+              <a:t>Target &amp; SLA: Tier: SOVEREIGN ($1,850/mo) • Zero Public Egress • &lt;60s HTTP 423 CMEK Revocation + L1 Purge</a:t>
             </a:r>
             <a:endParaRPr lang="en-US" sz="750" dirty="0"/>
           </a:p>
@@ -18001,7 +17998,7 @@
                 <a:ea typeface="Google Sans" pitchFamily="34" charset="-122"/>
                 <a:cs typeface="Google Sans" pitchFamily="34" charset="-120"/>
               </a:rPr>
-              <a:t>4 Sovereign Mandates</a:t>
+              <a:t>2. FinVault Bank Sovereign Vault</a:t>
             </a:r>
             <a:endParaRPr lang="en-US" sz="750" dirty="0"/>
           </a:p>
@@ -18148,7 +18145,7 @@
                 <a:ea typeface="Google Sans" pitchFamily="34" charset="-122"/>
                 <a:cs typeface="Google Sans" pitchFamily="34" charset="-120"/>
               </a:rPr>
-              <a:t>Dual Sovereign Vault Verification</a:t>
+              <a:t>RetailStream Sovereign Vault (cymbal-retailstream-silo-prod)</a:t>
             </a:r>
             <a:endParaRPr lang="en-US" sz="1140" dirty="0"/>
           </a:p>
@@ -18207,7 +18204,7 @@
                 <a:ea typeface="Roboto" pitchFamily="34" charset="-122"/>
                 <a:cs typeface="Roboto" pitchFamily="34" charset="-120"/>
               </a:rPr>
-              <a:t>Pattern B provisions physically separate Google Cloud projects (cymbal-finvault-silo-prod and cymbal-retailstream-silo-prod) with zero shared databases or encryption keys.</a:t>
+              <a:t>Demonstrates dual-silo parity with its own VPC Service Controls perimeter, IAM Principal Access Boundary (PAB), Entra ID 3LO connectors, and independent Cloud KMS CMEK key ring.</a:t>
             </a:r>
             <a:endParaRPr lang="en-US" sz="980" dirty="0"/>
           </a:p>
@@ -18293,7 +18290,7 @@
                 <a:ea typeface="Google Sans" pitchFamily="34" charset="-122"/>
                 <a:cs typeface="Google Sans" pitchFamily="34" charset="-120"/>
               </a:rPr>
-              <a:t>Cloud Stack: cymbal-finvault-silo-prod (FinVault) • cymbal-retailstream-silo-prod (RetailStream)
+              <a:t>Cloud Stack: cymbal-retailstream-silo-prod • Independent VPC-SC Perimeter • Independent IAM PAB &amp; KMS Key Ring
 </a:t>
             </a:r>
             <a:pPr indent="0" marL="0">
@@ -18308,7 +18305,7 @@
                 <a:ea typeface="Roboto" pitchFamily="34" charset="-122"/>
                 <a:cs typeface="Roboto" pitchFamily="34" charset="-120"/>
               </a:rPr>
-              <a:t>Target &amp; SLA: Independent KMS Key Rings, Independent VPC-SC Perimeters &amp; Independent Audit Logs</a:t>
+              <a:t>Target &amp; SLA: Verified Dual-Tenant Silo &amp; CMEK Kill-Switch Parity (Forensic Gate F-08 &amp; Silo Test 6 PASS)</a:t>
             </a:r>
             <a:endParaRPr lang="en-US" sz="750" dirty="0"/>
           </a:p>
@@ -18369,7 +18366,7 @@
                 <a:ea typeface="Google Sans" pitchFamily="34" charset="-122"/>
                 <a:cs typeface="Google Sans" pitchFamily="34" charset="-120"/>
               </a:rPr>
-              <a:t>Dual-Tenant Silo Parity</a:t>
+              <a:t>3. RetailStream Sovereign Vault</a:t>
             </a:r>
             <a:endParaRPr lang="en-US" sz="750" dirty="0"/>
           </a:p>
@@ -18516,7 +18513,7 @@
                 <a:ea typeface="Google Sans" pitchFamily="34" charset="-122"/>
                 <a:cs typeface="Google Sans" pitchFamily="34" charset="-120"/>
               </a:rPr>
-              <a:t>Preserve Pattern A for Commercial Tiers</a:t>
+              <a:t>3-Wall Hardware Perimeter &amp; &lt;60s CMEK Kill-Switch Stack</a:t>
             </a:r>
             <a:endParaRPr lang="en-US" sz="1140" dirty="0"/>
           </a:p>
@@ -18575,7 +18572,7 @@
                 <a:ea typeface="Roboto" pitchFamily="34" charset="-122"/>
                 <a:cs typeface="Roboto" pitchFamily="34" charset="-120"/>
               </a:rPr>
-              <a:t>Keep standard commercial customers on Pattern A ($42/mo) for 90% shared caching efficiency, and reserve Pattern B ($1,850/mo) for regulated enterprise contracts.</a:t>
+              <a:t>BeyondCorp mTLS, IAM PAB, VPC-SC, Cloud KMS CMEK (HTTP 423 Locked), Model Armor, Cloud DLP, AlloyDB, and BigQuery wrap the unchanged 80% reusable ADK 2.0 core.</a:t>
             </a:r>
             <a:endParaRPr lang="en-US" sz="980" dirty="0"/>
           </a:p>
@@ -18661,7 +18658,7 @@
                 <a:ea typeface="Google Sans" pitchFamily="34" charset="-122"/>
                 <a:cs typeface="Google Sans" pitchFamily="34" charset="-120"/>
               </a:rPr>
-              <a:t>Cloud Stack: Tiered SaaS Portfolio: Pattern A ($42/mo) + Pattern B ($1,850/mo)
+              <a:t>Cloud Stack: BeyondCorp mTLS • IAM PAB • VPC-SC • Cloud KMS CMEK • Model Armor • Cloud DLP • 3.6 Terraform
 </a:t>
             </a:r>
             <a:pPr indent="0" marL="0">
@@ -18676,7 +18673,7 @@
                 <a:ea typeface="Roboto" pitchFamily="34" charset="-122"/>
                 <a:cs typeface="Roboto" pitchFamily="34" charset="-120"/>
               </a:rPr>
-              <a:t>Target &amp; SLA: Aligns Dedicated Infrastructure Spend Directly with Enterprise Contract ACV</a:t>
+              <a:t>Target &amp; SLA: 80% Shared ADK 2.0 Code + 20% Declarative Sovereign Shell • 6/6 Sovereign Security Tests PASS</a:t>
             </a:r>
             <a:endParaRPr lang="en-US" sz="750" dirty="0"/>
           </a:p>
@@ -18737,7 +18734,7 @@
                 <a:ea typeface="Google Sans" pitchFamily="34" charset="-122"/>
                 <a:cs typeface="Google Sans" pitchFamily="34" charset="-120"/>
               </a:rPr>
-              <a:t>Portfolio Unit Economics</a:t>
+              <a:t>4. Unified Pattern B Sovereign Stack</a:t>
             </a:r>
             <a:endParaRPr lang="en-US" sz="750" dirty="0"/>
           </a:p>
@@ -19306,7 +19303,7 @@
                 <a:ea typeface="Google Sans" pitchFamily="34" charset="-122"/>
                 <a:cs typeface="Google Sans" pitchFamily="34" charset="-120"/>
               </a:rPr>
-              <a:t>ACT I • GOOGLE CLOUD REFERENCE PRODUCT STACK &amp; BILL OF MATERIALS</a:t>
+              <a:t>ACT I • ARCHITECTURAL OPTIONS &amp; PATTERN A / B / C DECISION MATRIX</a:t>
             </a:r>
             <a:endParaRPr lang="en-US" sz="1020" dirty="0"/>
           </a:p>
@@ -19372,7 +19369,7 @@
                 <a:ea typeface="Roboto" pitchFamily="34" charset="-122"/>
                 <a:cs typeface="Roboto" pitchFamily="34" charset="-120"/>
               </a:rPr>
-              <a:t>THREE-PILLAR • ARCHITECTURE</a:t>
+              <a:t>COMPARISON-GRID • MATRIX</a:t>
             </a:r>
             <a:endParaRPr lang="en-US" sz="750" dirty="0"/>
           </a:p>
@@ -19386,8 +19383,8 @@
         </p:nvSpPr>
         <p:spPr>
           <a:xfrm>
-            <a:off x="411480" y="658368"/>
-            <a:ext cx="11368735" cy="365760"/>
+            <a:off x="411480" y="640080"/>
+            <a:ext cx="11368735" cy="347472"/>
           </a:xfrm>
           <a:prstGeom prst="rect">
             <a:avLst/>
@@ -19403,7 +19400,7 @@
               <a:buNone/>
             </a:pPr>
             <a:r>
-              <a:rPr lang="en-US" sz="1900" b="1" dirty="0">
+              <a:rPr lang="en-US" sz="1800" b="1" dirty="0">
                 <a:solidFill>
                   <a:srgbClr val="3C4043"/>
                 </a:solidFill>
@@ -19411,9 +19408,9 @@
                 <a:ea typeface="Google Sans" pitchFamily="34" charset="-122"/>
                 <a:cs typeface="Google Sans" pitchFamily="34" charset="-120"/>
               </a:rPr>
-              <a:t>VPC-SC, IAM PAB, Cloud KMS CMEK &amp; Air-Gapped Gemma 3</a:t>
-            </a:r>
-            <a:endParaRPr lang="en-US" sz="1900" dirty="0"/>
+              <a:t>Sovereign Silo Architecture &amp; Model Hosting Comparison (Pattern B Options)</a:t>
+            </a:r>
+            <a:endParaRPr lang="en-US" sz="1800" dirty="0"/>
           </a:p>
         </p:txBody>
       </p:sp>
@@ -19425,8 +19422,8 @@
         </p:nvSpPr>
         <p:spPr>
           <a:xfrm>
-            <a:off x="411480" y="1024128"/>
-            <a:ext cx="11368735" cy="237744"/>
+            <a:off x="411480" y="987552"/>
+            <a:ext cx="11368735" cy="219456"/>
           </a:xfrm>
           <a:prstGeom prst="rect">
             <a:avLst/>
@@ -19442,7 +19439,7 @@
               <a:buNone/>
             </a:pPr>
             <a:r>
-              <a:rPr lang="en-US" sz="1000" dirty="0">
+              <a:rPr lang="en-US" sz="980" dirty="0">
                 <a:solidFill>
                   <a:srgbClr val="5F6368"/>
                 </a:solidFill>
@@ -19450,26 +19447,1976 @@
                 <a:ea typeface="Roboto" pitchFamily="34" charset="-122"/>
                 <a:cs typeface="Roboto" pitchFamily="34" charset="-120"/>
               </a:rPr>
-              <a:t>Structured Google Cloud reference SKUs, runtime isolation boundaries, and production SLAs.</a:t>
-            </a:r>
-            <a:endParaRPr lang="en-US" sz="1000" dirty="0"/>
-          </a:p>
-        </p:txBody>
-      </p:sp>
-      <p:sp>
-        <p:nvSpPr>
-          <p:cNvPr id="19" name="Shape 17"/>
-          <p:cNvSpPr/>
-          <p:nvPr/>
-        </p:nvSpPr>
-        <p:spPr>
-          <a:xfrm>
-            <a:off x="411480" y="1353312"/>
-            <a:ext cx="5583326" cy="2258568"/>
+              <a:t>Side-by-side Google Cloud Well-Architected trade-off analysis, isolation boundaries, and unit economics.</a:t>
+            </a:r>
+            <a:endParaRPr lang="en-US" sz="980" dirty="0"/>
+          </a:p>
+        </p:txBody>
+      </p:sp>
+      <p:graphicFrame>
+        <p:nvGraphicFramePr>
+          <p:cNvPr id="5" name="Table 0"/>
+          <p:cNvGraphicFramePr>
+            <a:graphicFrameLocks noGrp="1"/>
+          </p:cNvGraphicFramePr>
+          <p:nvPr>
+            <p:extLst>
+              <p:ext uri="{D42A27DB-BD31-4B8C-83A1-F6EECF244321}">
+                <p14:modId xmlns:p14="http://schemas.microsoft.com/office/powerpoint/2010/main" val="1579011935"/>
+              </p:ext>
+            </p:extLst>
+          </p:nvPr>
+        </p:nvGraphicFramePr>
+        <p:xfrm>
+          <a:off x="411480" y="1243584"/>
+          <a:ext cx="11368735" cy="914400"/>
+        </p:xfrm>
+        <a:graphic>
+          <a:graphicData uri="http://schemas.openxmlformats.org/drawingml/2006/table">
+            <a:tbl>
+              <a:tblPr/>
+              <a:tblGrid>
+                <a:gridCol w="2057400"/>
+                <a:gridCol w="2971800"/>
+                <a:gridCol w="3200400"/>
+                <a:gridCol w="3230575"/>
+              </a:tblGrid>
+              <a:tr h="0">
+                <a:tc>
+                  <a:txBody>
+                    <a:bodyPr/>
+                    <a:lstStyle/>
+                    <a:p>
+                      <a:pPr indent="0" marL="0">
+                        <a:buNone/>
+                      </a:pPr>
+                      <a:r>
+                        <a:rPr lang="en-US" sz="850" b="1" dirty="0">
+                          <a:solidFill>
+                            <a:srgbClr val="FFFFFF"/>
+                          </a:solidFill>
+                          <a:latin typeface="Google Sans" pitchFamily="34" charset="0"/>
+                          <a:ea typeface="Google Sans" pitchFamily="34" charset="-122"/>
+                          <a:cs typeface="Google Sans" pitchFamily="34" charset="-120"/>
+                        </a:rPr>
+                        <a:t>Sovereign Dimension</a:t>
+                      </a:r>
+                      <a:endParaRPr lang="en-US" sz="850" dirty="0">
+                        <a:latin typeface="Google Sans" charset="0"/>
+                        <a:ea typeface="Google Sans" charset="0"/>
+                        <a:cs typeface="Google Sans" charset="0"/>
+                      </a:endParaRPr>
+                    </a:p>
+                  </a:txBody>
+                  <a:tcPr marL="91440" marR="91440" marT="45720" marB="45720" anchor="ctr">
+                    <a:lnL w="9525" cap="flat" cmpd="sng" algn="ctr">
+                      <a:solidFill>
+                        <a:srgbClr val="DADCE0"/>
+                      </a:solidFill>
+                      <a:prstDash val="solid"/>
+                      <a:round/>
+                      <a:headEnd type="none" w="med" len="med"/>
+                      <a:tailEnd type="none" w="med" len="med"/>
+                    </a:lnL>
+                    <a:lnR w="9525" cap="flat" cmpd="sng" algn="ctr">
+                      <a:solidFill>
+                        <a:srgbClr val="DADCE0"/>
+                      </a:solidFill>
+                      <a:prstDash val="solid"/>
+                      <a:round/>
+                      <a:headEnd type="none" w="med" len="med"/>
+                      <a:tailEnd type="none" w="med" len="med"/>
+                    </a:lnR>
+                    <a:lnT w="9525" cap="flat" cmpd="sng" algn="ctr">
+                      <a:solidFill>
+                        <a:srgbClr val="DADCE0"/>
+                      </a:solidFill>
+                      <a:prstDash val="solid"/>
+                      <a:round/>
+                      <a:headEnd type="none" w="med" len="med"/>
+                      <a:tailEnd type="none" w="med" len="med"/>
+                    </a:lnT>
+                    <a:lnB w="9525" cap="flat" cmpd="sng" algn="ctr">
+                      <a:solidFill>
+                        <a:srgbClr val="DADCE0"/>
+                      </a:solidFill>
+                      <a:prstDash val="solid"/>
+                      <a:round/>
+                      <a:headEnd type="none" w="med" len="med"/>
+                      <a:tailEnd type="none" w="med" len="med"/>
+                    </a:lnB>
+                    <a:solidFill>
+                      <a:srgbClr val="4285F4"/>
+                    </a:solidFill>
+                  </a:tcPr>
+                </a:tc>
+                <a:tc>
+                  <a:txBody>
+                    <a:bodyPr/>
+                    <a:lstStyle/>
+                    <a:p>
+                      <a:pPr indent="0" marL="0">
+                        <a:buNone/>
+                      </a:pPr>
+                      <a:r>
+                        <a:rPr lang="en-US" sz="850" b="1" dirty="0">
+                          <a:solidFill>
+                            <a:srgbClr val="FFFFFF"/>
+                          </a:solidFill>
+                          <a:latin typeface="Google Sans" pitchFamily="34" charset="0"/>
+                          <a:ea typeface="Google Sans" pitchFamily="34" charset="-122"/>
+                          <a:cs typeface="Google Sans" pitchFamily="34" charset="-120"/>
+                        </a:rPr>
+                        <a:t>Pattern A: Logical Pool ($42/mo Baseline)</a:t>
+                      </a:r>
+                      <a:endParaRPr lang="en-US" sz="850" dirty="0">
+                        <a:latin typeface="Google Sans" charset="0"/>
+                        <a:ea typeface="Google Sans" charset="0"/>
+                        <a:cs typeface="Google Sans" charset="0"/>
+                      </a:endParaRPr>
+                    </a:p>
+                  </a:txBody>
+                  <a:tcPr marL="91440" marR="91440" marT="45720" marB="45720" anchor="ctr">
+                    <a:lnL w="9525" cap="flat" cmpd="sng" algn="ctr">
+                      <a:solidFill>
+                        <a:srgbClr val="DADCE0"/>
+                      </a:solidFill>
+                      <a:prstDash val="solid"/>
+                      <a:round/>
+                      <a:headEnd type="none" w="med" len="med"/>
+                      <a:tailEnd type="none" w="med" len="med"/>
+                    </a:lnL>
+                    <a:lnR w="9525" cap="flat" cmpd="sng" algn="ctr">
+                      <a:solidFill>
+                        <a:srgbClr val="DADCE0"/>
+                      </a:solidFill>
+                      <a:prstDash val="solid"/>
+                      <a:round/>
+                      <a:headEnd type="none" w="med" len="med"/>
+                      <a:tailEnd type="none" w="med" len="med"/>
+                    </a:lnR>
+                    <a:lnT w="9525" cap="flat" cmpd="sng" algn="ctr">
+                      <a:solidFill>
+                        <a:srgbClr val="DADCE0"/>
+                      </a:solidFill>
+                      <a:prstDash val="solid"/>
+                      <a:round/>
+                      <a:headEnd type="none" w="med" len="med"/>
+                      <a:tailEnd type="none" w="med" len="med"/>
+                    </a:lnT>
+                    <a:lnB w="9525" cap="flat" cmpd="sng" algn="ctr">
+                      <a:solidFill>
+                        <a:srgbClr val="DADCE0"/>
+                      </a:solidFill>
+                      <a:prstDash val="solid"/>
+                      <a:round/>
+                      <a:headEnd type="none" w="med" len="med"/>
+                      <a:tailEnd type="none" w="med" len="med"/>
+                    </a:lnB>
+                    <a:solidFill>
+                      <a:srgbClr val="4285F4"/>
+                    </a:solidFill>
+                  </a:tcPr>
+                </a:tc>
+                <a:tc>
+                  <a:txBody>
+                    <a:bodyPr/>
+                    <a:lstStyle/>
+                    <a:p>
+                      <a:pPr indent="0" marL="0">
+                        <a:buNone/>
+                      </a:pPr>
+                      <a:r>
+                        <a:rPr lang="en-US" sz="850" b="1" dirty="0">
+                          <a:solidFill>
+                            <a:srgbClr val="FFFFFF"/>
+                          </a:solidFill>
+                          <a:latin typeface="Google Sans" pitchFamily="34" charset="0"/>
+                          <a:ea typeface="Google Sans" pitchFamily="34" charset="-122"/>
+                          <a:cs typeface="Google Sans" pitchFamily="34" charset="-120"/>
+                        </a:rPr>
+                        <a:t>Pattern B1: VPC-SC + Vertex AI Dedicated PT</a:t>
+                      </a:r>
+                      <a:endParaRPr lang="en-US" sz="850" dirty="0">
+                        <a:latin typeface="Google Sans" charset="0"/>
+                        <a:ea typeface="Google Sans" charset="0"/>
+                        <a:cs typeface="Google Sans" charset="0"/>
+                      </a:endParaRPr>
+                    </a:p>
+                  </a:txBody>
+                  <a:tcPr marL="91440" marR="91440" marT="45720" marB="45720" anchor="ctr">
+                    <a:lnL w="9525" cap="flat" cmpd="sng" algn="ctr">
+                      <a:solidFill>
+                        <a:srgbClr val="DADCE0"/>
+                      </a:solidFill>
+                      <a:prstDash val="solid"/>
+                      <a:round/>
+                      <a:headEnd type="none" w="med" len="med"/>
+                      <a:tailEnd type="none" w="med" len="med"/>
+                    </a:lnL>
+                    <a:lnR w="9525" cap="flat" cmpd="sng" algn="ctr">
+                      <a:solidFill>
+                        <a:srgbClr val="DADCE0"/>
+                      </a:solidFill>
+                      <a:prstDash val="solid"/>
+                      <a:round/>
+                      <a:headEnd type="none" w="med" len="med"/>
+                      <a:tailEnd type="none" w="med" len="med"/>
+                    </a:lnR>
+                    <a:lnT w="9525" cap="flat" cmpd="sng" algn="ctr">
+                      <a:solidFill>
+                        <a:srgbClr val="DADCE0"/>
+                      </a:solidFill>
+                      <a:prstDash val="solid"/>
+                      <a:round/>
+                      <a:headEnd type="none" w="med" len="med"/>
+                      <a:tailEnd type="none" w="med" len="med"/>
+                    </a:lnT>
+                    <a:lnB w="9525" cap="flat" cmpd="sng" algn="ctr">
+                      <a:solidFill>
+                        <a:srgbClr val="DADCE0"/>
+                      </a:solidFill>
+                      <a:prstDash val="solid"/>
+                      <a:round/>
+                      <a:headEnd type="none" w="med" len="med"/>
+                      <a:tailEnd type="none" w="med" len="med"/>
+                    </a:lnB>
+                    <a:solidFill>
+                      <a:srgbClr val="4285F4"/>
+                    </a:solidFill>
+                  </a:tcPr>
+                </a:tc>
+                <a:tc>
+                  <a:txBody>
+                    <a:bodyPr/>
+                    <a:lstStyle/>
+                    <a:p>
+                      <a:pPr indent="0" marL="0">
+                        <a:buNone/>
+                      </a:pPr>
+                      <a:r>
+                        <a:rPr lang="en-US" sz="850" b="1" dirty="0">
+                          <a:solidFill>
+                            <a:srgbClr val="FFFFFF"/>
+                          </a:solidFill>
+                          <a:latin typeface="Google Sans" pitchFamily="34" charset="0"/>
+                          <a:ea typeface="Google Sans" pitchFamily="34" charset="-122"/>
+                          <a:cs typeface="Google Sans" pitchFamily="34" charset="-120"/>
+                        </a:rPr>
+                        <a:t>Pattern B2: VPC-SC + Air-Gapped GKE Gemma 3</a:t>
+                      </a:r>
+                      <a:endParaRPr lang="en-US" sz="850" dirty="0">
+                        <a:latin typeface="Google Sans" charset="0"/>
+                        <a:ea typeface="Google Sans" charset="0"/>
+                        <a:cs typeface="Google Sans" charset="0"/>
+                      </a:endParaRPr>
+                    </a:p>
+                  </a:txBody>
+                  <a:tcPr marL="91440" marR="91440" marT="45720" marB="45720" anchor="ctr">
+                    <a:lnL w="9525" cap="flat" cmpd="sng" algn="ctr">
+                      <a:solidFill>
+                        <a:srgbClr val="DADCE0"/>
+                      </a:solidFill>
+                      <a:prstDash val="solid"/>
+                      <a:round/>
+                      <a:headEnd type="none" w="med" len="med"/>
+                      <a:tailEnd type="none" w="med" len="med"/>
+                    </a:lnL>
+                    <a:lnR w="9525" cap="flat" cmpd="sng" algn="ctr">
+                      <a:solidFill>
+                        <a:srgbClr val="DADCE0"/>
+                      </a:solidFill>
+                      <a:prstDash val="solid"/>
+                      <a:round/>
+                      <a:headEnd type="none" w="med" len="med"/>
+                      <a:tailEnd type="none" w="med" len="med"/>
+                    </a:lnR>
+                    <a:lnT w="9525" cap="flat" cmpd="sng" algn="ctr">
+                      <a:solidFill>
+                        <a:srgbClr val="DADCE0"/>
+                      </a:solidFill>
+                      <a:prstDash val="solid"/>
+                      <a:round/>
+                      <a:headEnd type="none" w="med" len="med"/>
+                      <a:tailEnd type="none" w="med" len="med"/>
+                    </a:lnT>
+                    <a:lnB w="9525" cap="flat" cmpd="sng" algn="ctr">
+                      <a:solidFill>
+                        <a:srgbClr val="DADCE0"/>
+                      </a:solidFill>
+                      <a:prstDash val="solid"/>
+                      <a:round/>
+                      <a:headEnd type="none" w="med" len="med"/>
+                      <a:tailEnd type="none" w="med" len="med"/>
+                    </a:lnB>
+                    <a:solidFill>
+                      <a:srgbClr val="4285F4"/>
+                    </a:solidFill>
+                  </a:tcPr>
+                </a:tc>
+              </a:tr>
+              <a:tr h="0">
+                <a:tc>
+                  <a:txBody>
+                    <a:bodyPr/>
+                    <a:lstStyle/>
+                    <a:p>
+                      <a:pPr indent="0" marL="0">
+                        <a:buNone/>
+                      </a:pPr>
+                      <a:r>
+                        <a:rPr lang="en-US" sz="780" b="1" dirty="0">
+                          <a:solidFill>
+                            <a:srgbClr val="3C4043"/>
+                          </a:solidFill>
+                          <a:latin typeface="Google Sans" pitchFamily="34" charset="0"/>
+                          <a:ea typeface="Google Sans" pitchFamily="34" charset="-122"/>
+                          <a:cs typeface="Google Sans" pitchFamily="34" charset="-120"/>
+                        </a:rPr>
+                        <a:t>Cloud project &amp; blast radius</a:t>
+                      </a:r>
+                      <a:endParaRPr lang="en-US" sz="780" dirty="0">
+                        <a:latin typeface="Google Sans" charset="0"/>
+                        <a:ea typeface="Google Sans" charset="0"/>
+                        <a:cs typeface="Google Sans" charset="0"/>
+                      </a:endParaRPr>
+                    </a:p>
+                  </a:txBody>
+                  <a:tcPr marL="91440" marR="91440" marT="45720" marB="45720" anchor="ctr">
+                    <a:lnL w="9525" cap="flat" cmpd="sng" algn="ctr">
+                      <a:solidFill>
+                        <a:srgbClr val="DADCE0"/>
+                      </a:solidFill>
+                      <a:prstDash val="solid"/>
+                      <a:round/>
+                      <a:headEnd type="none" w="med" len="med"/>
+                      <a:tailEnd type="none" w="med" len="med"/>
+                    </a:lnL>
+                    <a:lnR w="9525" cap="flat" cmpd="sng" algn="ctr">
+                      <a:solidFill>
+                        <a:srgbClr val="DADCE0"/>
+                      </a:solidFill>
+                      <a:prstDash val="solid"/>
+                      <a:round/>
+                      <a:headEnd type="none" w="med" len="med"/>
+                      <a:tailEnd type="none" w="med" len="med"/>
+                    </a:lnR>
+                    <a:lnT w="9525" cap="flat" cmpd="sng" algn="ctr">
+                      <a:solidFill>
+                        <a:srgbClr val="DADCE0"/>
+                      </a:solidFill>
+                      <a:prstDash val="solid"/>
+                      <a:round/>
+                      <a:headEnd type="none" w="med" len="med"/>
+                      <a:tailEnd type="none" w="med" len="med"/>
+                    </a:lnT>
+                    <a:lnB w="9525" cap="flat" cmpd="sng" algn="ctr">
+                      <a:solidFill>
+                        <a:srgbClr val="DADCE0"/>
+                      </a:solidFill>
+                      <a:prstDash val="solid"/>
+                      <a:round/>
+                      <a:headEnd type="none" w="med" len="med"/>
+                      <a:tailEnd type="none" w="med" len="med"/>
+                    </a:lnB>
+                    <a:solidFill>
+                      <a:srgbClr val="FFFFFF"/>
+                    </a:solidFill>
+                  </a:tcPr>
+                </a:tc>
+                <a:tc>
+                  <a:txBody>
+                    <a:bodyPr/>
+                    <a:lstStyle/>
+                    <a:p>
+                      <a:pPr indent="0" marL="0">
+                        <a:buNone/>
+                      </a:pPr>
+                      <a:r>
+                        <a:rPr lang="en-US" sz="760" dirty="0">
+                          <a:solidFill>
+                            <a:srgbClr val="5F6368"/>
+                          </a:solidFill>
+                          <a:latin typeface="Roboto" pitchFamily="34" charset="0"/>
+                          <a:ea typeface="Roboto" pitchFamily="34" charset="-122"/>
+                          <a:cs typeface="Roboto" pitchFamily="34" charset="-120"/>
+                        </a:rPr>
+                        <a:t>Single shared GCP project (ramp-portal-dev); logical software isolation</a:t>
+                      </a:r>
+                      <a:endParaRPr lang="en-US" sz="760" dirty="0">
+                        <a:latin typeface="Roboto" charset="0"/>
+                        <a:ea typeface="Roboto" charset="0"/>
+                        <a:cs typeface="Roboto" charset="0"/>
+                      </a:endParaRPr>
+                    </a:p>
+                  </a:txBody>
+                  <a:tcPr marL="91440" marR="91440" marT="45720" marB="45720" anchor="ctr">
+                    <a:lnL w="9525" cap="flat" cmpd="sng" algn="ctr">
+                      <a:solidFill>
+                        <a:srgbClr val="DADCE0"/>
+                      </a:solidFill>
+                      <a:prstDash val="solid"/>
+                      <a:round/>
+                      <a:headEnd type="none" w="med" len="med"/>
+                      <a:tailEnd type="none" w="med" len="med"/>
+                    </a:lnL>
+                    <a:lnR w="9525" cap="flat" cmpd="sng" algn="ctr">
+                      <a:solidFill>
+                        <a:srgbClr val="DADCE0"/>
+                      </a:solidFill>
+                      <a:prstDash val="solid"/>
+                      <a:round/>
+                      <a:headEnd type="none" w="med" len="med"/>
+                      <a:tailEnd type="none" w="med" len="med"/>
+                    </a:lnR>
+                    <a:lnT w="9525" cap="flat" cmpd="sng" algn="ctr">
+                      <a:solidFill>
+                        <a:srgbClr val="DADCE0"/>
+                      </a:solidFill>
+                      <a:prstDash val="solid"/>
+                      <a:round/>
+                      <a:headEnd type="none" w="med" len="med"/>
+                      <a:tailEnd type="none" w="med" len="med"/>
+                    </a:lnT>
+                    <a:lnB w="9525" cap="flat" cmpd="sng" algn="ctr">
+                      <a:solidFill>
+                        <a:srgbClr val="DADCE0"/>
+                      </a:solidFill>
+                      <a:prstDash val="solid"/>
+                      <a:round/>
+                      <a:headEnd type="none" w="med" len="med"/>
+                      <a:tailEnd type="none" w="med" len="med"/>
+                    </a:lnB>
+                    <a:solidFill>
+                      <a:srgbClr val="FFFFFF"/>
+                    </a:solidFill>
+                  </a:tcPr>
+                </a:tc>
+                <a:tc>
+                  <a:txBody>
+                    <a:bodyPr/>
+                    <a:lstStyle/>
+                    <a:p>
+                      <a:pPr indent="0" marL="0">
+                        <a:buNone/>
+                      </a:pPr>
+                      <a:r>
+                        <a:rPr lang="en-US" sz="760" dirty="0">
+                          <a:solidFill>
+                            <a:srgbClr val="5F6368"/>
+                          </a:solidFill>
+                          <a:latin typeface="Roboto" pitchFamily="34" charset="0"/>
+                          <a:ea typeface="Roboto" pitchFamily="34" charset="-122"/>
+                          <a:cs typeface="Roboto" pitchFamily="34" charset="-120"/>
+                        </a:rPr>
+                        <a:t>Dedicated GCP project (cymbal-{tenant}-silo-prod); zero shared compute or DB</a:t>
+                      </a:r>
+                      <a:endParaRPr lang="en-US" sz="760" dirty="0">
+                        <a:latin typeface="Roboto" charset="0"/>
+                        <a:ea typeface="Roboto" charset="0"/>
+                        <a:cs typeface="Roboto" charset="0"/>
+                      </a:endParaRPr>
+                    </a:p>
+                  </a:txBody>
+                  <a:tcPr marL="91440" marR="91440" marT="45720" marB="45720" anchor="ctr">
+                    <a:lnL w="9525" cap="flat" cmpd="sng" algn="ctr">
+                      <a:solidFill>
+                        <a:srgbClr val="DADCE0"/>
+                      </a:solidFill>
+                      <a:prstDash val="solid"/>
+                      <a:round/>
+                      <a:headEnd type="none" w="med" len="med"/>
+                      <a:tailEnd type="none" w="med" len="med"/>
+                    </a:lnL>
+                    <a:lnR w="9525" cap="flat" cmpd="sng" algn="ctr">
+                      <a:solidFill>
+                        <a:srgbClr val="DADCE0"/>
+                      </a:solidFill>
+                      <a:prstDash val="solid"/>
+                      <a:round/>
+                      <a:headEnd type="none" w="med" len="med"/>
+                      <a:tailEnd type="none" w="med" len="med"/>
+                    </a:lnR>
+                    <a:lnT w="9525" cap="flat" cmpd="sng" algn="ctr">
+                      <a:solidFill>
+                        <a:srgbClr val="DADCE0"/>
+                      </a:solidFill>
+                      <a:prstDash val="solid"/>
+                      <a:round/>
+                      <a:headEnd type="none" w="med" len="med"/>
+                      <a:tailEnd type="none" w="med" len="med"/>
+                    </a:lnT>
+                    <a:lnB w="9525" cap="flat" cmpd="sng" algn="ctr">
+                      <a:solidFill>
+                        <a:srgbClr val="DADCE0"/>
+                      </a:solidFill>
+                      <a:prstDash val="solid"/>
+                      <a:round/>
+                      <a:headEnd type="none" w="med" len="med"/>
+                      <a:tailEnd type="none" w="med" len="med"/>
+                    </a:lnB>
+                    <a:solidFill>
+                      <a:srgbClr val="FFFFFF"/>
+                    </a:solidFill>
+                  </a:tcPr>
+                </a:tc>
+                <a:tc>
+                  <a:txBody>
+                    <a:bodyPr/>
+                    <a:lstStyle/>
+                    <a:p>
+                      <a:pPr indent="0" marL="0">
+                        <a:buNone/>
+                      </a:pPr>
+                      <a:r>
+                        <a:rPr lang="en-US" sz="760" dirty="0">
+                          <a:solidFill>
+                            <a:srgbClr val="5F6368"/>
+                          </a:solidFill>
+                          <a:latin typeface="Roboto" pitchFamily="34" charset="0"/>
+                          <a:ea typeface="Roboto" pitchFamily="34" charset="-122"/>
+                          <a:cs typeface="Roboto" pitchFamily="34" charset="-120"/>
+                        </a:rPr>
+                        <a:t>Dedicated GCP project + air-gapped VPC (10.30.0.0/20, 0.0.0.0/0 egress blocked)</a:t>
+                      </a:r>
+                      <a:endParaRPr lang="en-US" sz="760" dirty="0">
+                        <a:latin typeface="Roboto" charset="0"/>
+                        <a:ea typeface="Roboto" charset="0"/>
+                        <a:cs typeface="Roboto" charset="0"/>
+                      </a:endParaRPr>
+                    </a:p>
+                  </a:txBody>
+                  <a:tcPr marL="91440" marR="91440" marT="45720" marB="45720" anchor="ctr">
+                    <a:lnL w="9525" cap="flat" cmpd="sng" algn="ctr">
+                      <a:solidFill>
+                        <a:srgbClr val="DADCE0"/>
+                      </a:solidFill>
+                      <a:prstDash val="solid"/>
+                      <a:round/>
+                      <a:headEnd type="none" w="med" len="med"/>
+                      <a:tailEnd type="none" w="med" len="med"/>
+                    </a:lnL>
+                    <a:lnR w="9525" cap="flat" cmpd="sng" algn="ctr">
+                      <a:solidFill>
+                        <a:srgbClr val="DADCE0"/>
+                      </a:solidFill>
+                      <a:prstDash val="solid"/>
+                      <a:round/>
+                      <a:headEnd type="none" w="med" len="med"/>
+                      <a:tailEnd type="none" w="med" len="med"/>
+                    </a:lnR>
+                    <a:lnT w="9525" cap="flat" cmpd="sng" algn="ctr">
+                      <a:solidFill>
+                        <a:srgbClr val="DADCE0"/>
+                      </a:solidFill>
+                      <a:prstDash val="solid"/>
+                      <a:round/>
+                      <a:headEnd type="none" w="med" len="med"/>
+                      <a:tailEnd type="none" w="med" len="med"/>
+                    </a:lnT>
+                    <a:lnB w="9525" cap="flat" cmpd="sng" algn="ctr">
+                      <a:solidFill>
+                        <a:srgbClr val="DADCE0"/>
+                      </a:solidFill>
+                      <a:prstDash val="solid"/>
+                      <a:round/>
+                      <a:headEnd type="none" w="med" len="med"/>
+                      <a:tailEnd type="none" w="med" len="med"/>
+                    </a:lnB>
+                    <a:solidFill>
+                      <a:srgbClr val="FFFFFF"/>
+                    </a:solidFill>
+                  </a:tcPr>
+                </a:tc>
+              </a:tr>
+              <a:tr h="0">
+                <a:tc>
+                  <a:txBody>
+                    <a:bodyPr/>
+                    <a:lstStyle/>
+                    <a:p>
+                      <a:pPr indent="0" marL="0">
+                        <a:buNone/>
+                      </a:pPr>
+                      <a:r>
+                        <a:rPr lang="en-US" sz="780" b="1" dirty="0">
+                          <a:solidFill>
+                            <a:srgbClr val="3C4043"/>
+                          </a:solidFill>
+                          <a:latin typeface="Google Sans" pitchFamily="34" charset="0"/>
+                          <a:ea typeface="Google Sans" pitchFamily="34" charset="-122"/>
+                          <a:cs typeface="Google Sans" pitchFamily="34" charset="-120"/>
+                        </a:rPr>
+                        <a:t>Identity &amp; perimeter walls</a:t>
+                      </a:r>
+                      <a:endParaRPr lang="en-US" sz="780" dirty="0">
+                        <a:latin typeface="Google Sans" charset="0"/>
+                        <a:ea typeface="Google Sans" charset="0"/>
+                        <a:cs typeface="Google Sans" charset="0"/>
+                      </a:endParaRPr>
+                    </a:p>
+                  </a:txBody>
+                  <a:tcPr marL="91440" marR="91440" marT="45720" marB="45720" anchor="ctr">
+                    <a:lnL w="9525" cap="flat" cmpd="sng" algn="ctr">
+                      <a:solidFill>
+                        <a:srgbClr val="DADCE0"/>
+                      </a:solidFill>
+                      <a:prstDash val="solid"/>
+                      <a:round/>
+                      <a:headEnd type="none" w="med" len="med"/>
+                      <a:tailEnd type="none" w="med" len="med"/>
+                    </a:lnL>
+                    <a:lnR w="9525" cap="flat" cmpd="sng" algn="ctr">
+                      <a:solidFill>
+                        <a:srgbClr val="DADCE0"/>
+                      </a:solidFill>
+                      <a:prstDash val="solid"/>
+                      <a:round/>
+                      <a:headEnd type="none" w="med" len="med"/>
+                      <a:tailEnd type="none" w="med" len="med"/>
+                    </a:lnR>
+                    <a:lnT w="9525" cap="flat" cmpd="sng" algn="ctr">
+                      <a:solidFill>
+                        <a:srgbClr val="DADCE0"/>
+                      </a:solidFill>
+                      <a:prstDash val="solid"/>
+                      <a:round/>
+                      <a:headEnd type="none" w="med" len="med"/>
+                      <a:tailEnd type="none" w="med" len="med"/>
+                    </a:lnT>
+                    <a:lnB w="9525" cap="flat" cmpd="sng" algn="ctr">
+                      <a:solidFill>
+                        <a:srgbClr val="DADCE0"/>
+                      </a:solidFill>
+                      <a:prstDash val="solid"/>
+                      <a:round/>
+                      <a:headEnd type="none" w="med" len="med"/>
+                      <a:tailEnd type="none" w="med" len="med"/>
+                    </a:lnB>
+                    <a:solidFill>
+                      <a:srgbClr val="F8F9FA"/>
+                    </a:solidFill>
+                  </a:tcPr>
+                </a:tc>
+                <a:tc>
+                  <a:txBody>
+                    <a:bodyPr/>
+                    <a:lstStyle/>
+                    <a:p>
+                      <a:pPr indent="0" marL="0">
+                        <a:buNone/>
+                      </a:pPr>
+                      <a:r>
+                        <a:rPr lang="en-US" sz="760" dirty="0">
+                          <a:solidFill>
+                            <a:srgbClr val="5F6368"/>
+                          </a:solidFill>
+                          <a:latin typeface="Roboto" pitchFamily="34" charset="0"/>
+                          <a:ea typeface="Roboto" pitchFamily="34" charset="-122"/>
+                          <a:cs typeface="Roboto" pitchFamily="34" charset="-120"/>
+                        </a:rPr>
+                        <a:t>Cloud Armor WAF + IAP OIDC + RFC 8693 OBO &amp; RFC 9449 DPoP tokens</a:t>
+                      </a:r>
+                      <a:endParaRPr lang="en-US" sz="760" dirty="0">
+                        <a:latin typeface="Roboto" charset="0"/>
+                        <a:ea typeface="Roboto" charset="0"/>
+                        <a:cs typeface="Roboto" charset="0"/>
+                      </a:endParaRPr>
+                    </a:p>
+                  </a:txBody>
+                  <a:tcPr marL="91440" marR="91440" marT="45720" marB="45720" anchor="ctr">
+                    <a:lnL w="9525" cap="flat" cmpd="sng" algn="ctr">
+                      <a:solidFill>
+                        <a:srgbClr val="DADCE0"/>
+                      </a:solidFill>
+                      <a:prstDash val="solid"/>
+                      <a:round/>
+                      <a:headEnd type="none" w="med" len="med"/>
+                      <a:tailEnd type="none" w="med" len="med"/>
+                    </a:lnL>
+                    <a:lnR w="9525" cap="flat" cmpd="sng" algn="ctr">
+                      <a:solidFill>
+                        <a:srgbClr val="DADCE0"/>
+                      </a:solidFill>
+                      <a:prstDash val="solid"/>
+                      <a:round/>
+                      <a:headEnd type="none" w="med" len="med"/>
+                      <a:tailEnd type="none" w="med" len="med"/>
+                    </a:lnR>
+                    <a:lnT w="9525" cap="flat" cmpd="sng" algn="ctr">
+                      <a:solidFill>
+                        <a:srgbClr val="DADCE0"/>
+                      </a:solidFill>
+                      <a:prstDash val="solid"/>
+                      <a:round/>
+                      <a:headEnd type="none" w="med" len="med"/>
+                      <a:tailEnd type="none" w="med" len="med"/>
+                    </a:lnT>
+                    <a:lnB w="9525" cap="flat" cmpd="sng" algn="ctr">
+                      <a:solidFill>
+                        <a:srgbClr val="DADCE0"/>
+                      </a:solidFill>
+                      <a:prstDash val="solid"/>
+                      <a:round/>
+                      <a:headEnd type="none" w="med" len="med"/>
+                      <a:tailEnd type="none" w="med" len="med"/>
+                    </a:lnB>
+                    <a:solidFill>
+                      <a:srgbClr val="F8F9FA"/>
+                    </a:solidFill>
+                  </a:tcPr>
+                </a:tc>
+                <a:tc>
+                  <a:txBody>
+                    <a:bodyPr/>
+                    <a:lstStyle/>
+                    <a:p>
+                      <a:pPr indent="0" marL="0">
+                        <a:buNone/>
+                      </a:pPr>
+                      <a:r>
+                        <a:rPr lang="en-US" sz="760" dirty="0">
+                          <a:solidFill>
+                            <a:srgbClr val="5F6368"/>
+                          </a:solidFill>
+                          <a:latin typeface="Roboto" pitchFamily="34" charset="0"/>
+                          <a:ea typeface="Roboto" pitchFamily="34" charset="-122"/>
+                          <a:cs typeface="Roboto" pitchFamily="34" charset="-120"/>
+                        </a:rPr>
+                        <a:t>BeyondCorp mTLS cert pinning + IAM PAB + VPC Service Controls (Restricted VIP)</a:t>
+                      </a:r>
+                      <a:endParaRPr lang="en-US" sz="760" dirty="0">
+                        <a:latin typeface="Roboto" charset="0"/>
+                        <a:ea typeface="Roboto" charset="0"/>
+                        <a:cs typeface="Roboto" charset="0"/>
+                      </a:endParaRPr>
+                    </a:p>
+                  </a:txBody>
+                  <a:tcPr marL="91440" marR="91440" marT="45720" marB="45720" anchor="ctr">
+                    <a:lnL w="9525" cap="flat" cmpd="sng" algn="ctr">
+                      <a:solidFill>
+                        <a:srgbClr val="DADCE0"/>
+                      </a:solidFill>
+                      <a:prstDash val="solid"/>
+                      <a:round/>
+                      <a:headEnd type="none" w="med" len="med"/>
+                      <a:tailEnd type="none" w="med" len="med"/>
+                    </a:lnL>
+                    <a:lnR w="9525" cap="flat" cmpd="sng" algn="ctr">
+                      <a:solidFill>
+                        <a:srgbClr val="DADCE0"/>
+                      </a:solidFill>
+                      <a:prstDash val="solid"/>
+                      <a:round/>
+                      <a:headEnd type="none" w="med" len="med"/>
+                      <a:tailEnd type="none" w="med" len="med"/>
+                    </a:lnR>
+                    <a:lnT w="9525" cap="flat" cmpd="sng" algn="ctr">
+                      <a:solidFill>
+                        <a:srgbClr val="DADCE0"/>
+                      </a:solidFill>
+                      <a:prstDash val="solid"/>
+                      <a:round/>
+                      <a:headEnd type="none" w="med" len="med"/>
+                      <a:tailEnd type="none" w="med" len="med"/>
+                    </a:lnT>
+                    <a:lnB w="9525" cap="flat" cmpd="sng" algn="ctr">
+                      <a:solidFill>
+                        <a:srgbClr val="DADCE0"/>
+                      </a:solidFill>
+                      <a:prstDash val="solid"/>
+                      <a:round/>
+                      <a:headEnd type="none" w="med" len="med"/>
+                      <a:tailEnd type="none" w="med" len="med"/>
+                    </a:lnB>
+                    <a:solidFill>
+                      <a:srgbClr val="F8F9FA"/>
+                    </a:solidFill>
+                  </a:tcPr>
+                </a:tc>
+                <a:tc>
+                  <a:txBody>
+                    <a:bodyPr/>
+                    <a:lstStyle/>
+                    <a:p>
+                      <a:pPr indent="0" marL="0">
+                        <a:buNone/>
+                      </a:pPr>
+                      <a:r>
+                        <a:rPr lang="en-US" sz="760" dirty="0">
+                          <a:solidFill>
+                            <a:srgbClr val="5F6368"/>
+                          </a:solidFill>
+                          <a:latin typeface="Roboto" pitchFamily="34" charset="0"/>
+                          <a:ea typeface="Roboto" pitchFamily="34" charset="-122"/>
+                          <a:cs typeface="Roboto" pitchFamily="34" charset="-120"/>
+                        </a:rPr>
+                        <a:t>BeyondCorp mTLS + IAM PAB + VPC-SC + private GKE control plane (172.16.0.2/28)</a:t>
+                      </a:r>
+                      <a:endParaRPr lang="en-US" sz="760" dirty="0">
+                        <a:latin typeface="Roboto" charset="0"/>
+                        <a:ea typeface="Roboto" charset="0"/>
+                        <a:cs typeface="Roboto" charset="0"/>
+                      </a:endParaRPr>
+                    </a:p>
+                  </a:txBody>
+                  <a:tcPr marL="91440" marR="91440" marT="45720" marB="45720" anchor="ctr">
+                    <a:lnL w="9525" cap="flat" cmpd="sng" algn="ctr">
+                      <a:solidFill>
+                        <a:srgbClr val="DADCE0"/>
+                      </a:solidFill>
+                      <a:prstDash val="solid"/>
+                      <a:round/>
+                      <a:headEnd type="none" w="med" len="med"/>
+                      <a:tailEnd type="none" w="med" len="med"/>
+                    </a:lnL>
+                    <a:lnR w="9525" cap="flat" cmpd="sng" algn="ctr">
+                      <a:solidFill>
+                        <a:srgbClr val="DADCE0"/>
+                      </a:solidFill>
+                      <a:prstDash val="solid"/>
+                      <a:round/>
+                      <a:headEnd type="none" w="med" len="med"/>
+                      <a:tailEnd type="none" w="med" len="med"/>
+                    </a:lnR>
+                    <a:lnT w="9525" cap="flat" cmpd="sng" algn="ctr">
+                      <a:solidFill>
+                        <a:srgbClr val="DADCE0"/>
+                      </a:solidFill>
+                      <a:prstDash val="solid"/>
+                      <a:round/>
+                      <a:headEnd type="none" w="med" len="med"/>
+                      <a:tailEnd type="none" w="med" len="med"/>
+                    </a:lnT>
+                    <a:lnB w="9525" cap="flat" cmpd="sng" algn="ctr">
+                      <a:solidFill>
+                        <a:srgbClr val="DADCE0"/>
+                      </a:solidFill>
+                      <a:prstDash val="solid"/>
+                      <a:round/>
+                      <a:headEnd type="none" w="med" len="med"/>
+                      <a:tailEnd type="none" w="med" len="med"/>
+                    </a:lnB>
+                    <a:solidFill>
+                      <a:srgbClr val="F8F9FA"/>
+                    </a:solidFill>
+                  </a:tcPr>
+                </a:tc>
+              </a:tr>
+              <a:tr h="0">
+                <a:tc>
+                  <a:txBody>
+                    <a:bodyPr/>
+                    <a:lstStyle/>
+                    <a:p>
+                      <a:pPr indent="0" marL="0">
+                        <a:buNone/>
+                      </a:pPr>
+                      <a:r>
+                        <a:rPr lang="en-US" sz="780" b="1" dirty="0">
+                          <a:solidFill>
+                            <a:srgbClr val="3C4043"/>
+                          </a:solidFill>
+                          <a:latin typeface="Google Sans" pitchFamily="34" charset="0"/>
+                          <a:ea typeface="Google Sans" pitchFamily="34" charset="-122"/>
+                          <a:cs typeface="Google Sans" pitchFamily="34" charset="-120"/>
+                        </a:rPr>
+                        <a:t>Foundation model hosting</a:t>
+                      </a:r>
+                      <a:endParaRPr lang="en-US" sz="780" dirty="0">
+                        <a:latin typeface="Google Sans" charset="0"/>
+                        <a:ea typeface="Google Sans" charset="0"/>
+                        <a:cs typeface="Google Sans" charset="0"/>
+                      </a:endParaRPr>
+                    </a:p>
+                  </a:txBody>
+                  <a:tcPr marL="91440" marR="91440" marT="45720" marB="45720" anchor="ctr">
+                    <a:lnL w="9525" cap="flat" cmpd="sng" algn="ctr">
+                      <a:solidFill>
+                        <a:srgbClr val="DADCE0"/>
+                      </a:solidFill>
+                      <a:prstDash val="solid"/>
+                      <a:round/>
+                      <a:headEnd type="none" w="med" len="med"/>
+                      <a:tailEnd type="none" w="med" len="med"/>
+                    </a:lnL>
+                    <a:lnR w="9525" cap="flat" cmpd="sng" algn="ctr">
+                      <a:solidFill>
+                        <a:srgbClr val="DADCE0"/>
+                      </a:solidFill>
+                      <a:prstDash val="solid"/>
+                      <a:round/>
+                      <a:headEnd type="none" w="med" len="med"/>
+                      <a:tailEnd type="none" w="med" len="med"/>
+                    </a:lnR>
+                    <a:lnT w="9525" cap="flat" cmpd="sng" algn="ctr">
+                      <a:solidFill>
+                        <a:srgbClr val="DADCE0"/>
+                      </a:solidFill>
+                      <a:prstDash val="solid"/>
+                      <a:round/>
+                      <a:headEnd type="none" w="med" len="med"/>
+                      <a:tailEnd type="none" w="med" len="med"/>
+                    </a:lnT>
+                    <a:lnB w="9525" cap="flat" cmpd="sng" algn="ctr">
+                      <a:solidFill>
+                        <a:srgbClr val="DADCE0"/>
+                      </a:solidFill>
+                      <a:prstDash val="solid"/>
+                      <a:round/>
+                      <a:headEnd type="none" w="med" len="med"/>
+                      <a:tailEnd type="none" w="med" len="med"/>
+                    </a:lnB>
+                    <a:solidFill>
+                      <a:srgbClr val="FFFFFF"/>
+                    </a:solidFill>
+                  </a:tcPr>
+                </a:tc>
+                <a:tc>
+                  <a:txBody>
+                    <a:bodyPr/>
+                    <a:lstStyle/>
+                    <a:p>
+                      <a:pPr indent="0" marL="0">
+                        <a:buNone/>
+                      </a:pPr>
+                      <a:r>
+                        <a:rPr lang="en-US" sz="760" dirty="0">
+                          <a:solidFill>
+                            <a:srgbClr val="5F6368"/>
+                          </a:solidFill>
+                          <a:latin typeface="Roboto" pitchFamily="34" charset="0"/>
+                          <a:ea typeface="Roboto" pitchFamily="34" charset="-122"/>
+                          <a:cs typeface="Roboto" pitchFamily="34" charset="-120"/>
+                        </a:rPr>
+                        <a:t>Shared Gemini 2.5 Pro pay-as-you-go with 90% ContextCacheConfig prefix cache</a:t>
+                      </a:r>
+                      <a:endParaRPr lang="en-US" sz="760" dirty="0">
+                        <a:latin typeface="Roboto" charset="0"/>
+                        <a:ea typeface="Roboto" charset="0"/>
+                        <a:cs typeface="Roboto" charset="0"/>
+                      </a:endParaRPr>
+                    </a:p>
+                  </a:txBody>
+                  <a:tcPr marL="91440" marR="91440" marT="45720" marB="45720" anchor="ctr">
+                    <a:lnL w="9525" cap="flat" cmpd="sng" algn="ctr">
+                      <a:solidFill>
+                        <a:srgbClr val="DADCE0"/>
+                      </a:solidFill>
+                      <a:prstDash val="solid"/>
+                      <a:round/>
+                      <a:headEnd type="none" w="med" len="med"/>
+                      <a:tailEnd type="none" w="med" len="med"/>
+                    </a:lnL>
+                    <a:lnR w="9525" cap="flat" cmpd="sng" algn="ctr">
+                      <a:solidFill>
+                        <a:srgbClr val="DADCE0"/>
+                      </a:solidFill>
+                      <a:prstDash val="solid"/>
+                      <a:round/>
+                      <a:headEnd type="none" w="med" len="med"/>
+                      <a:tailEnd type="none" w="med" len="med"/>
+                    </a:lnR>
+                    <a:lnT w="9525" cap="flat" cmpd="sng" algn="ctr">
+                      <a:solidFill>
+                        <a:srgbClr val="DADCE0"/>
+                      </a:solidFill>
+                      <a:prstDash val="solid"/>
+                      <a:round/>
+                      <a:headEnd type="none" w="med" len="med"/>
+                      <a:tailEnd type="none" w="med" len="med"/>
+                    </a:lnT>
+                    <a:lnB w="9525" cap="flat" cmpd="sng" algn="ctr">
+                      <a:solidFill>
+                        <a:srgbClr val="DADCE0"/>
+                      </a:solidFill>
+                      <a:prstDash val="solid"/>
+                      <a:round/>
+                      <a:headEnd type="none" w="med" len="med"/>
+                      <a:tailEnd type="none" w="med" len="med"/>
+                    </a:lnB>
+                    <a:solidFill>
+                      <a:srgbClr val="FFFFFF"/>
+                    </a:solidFill>
+                  </a:tcPr>
+                </a:tc>
+                <a:tc>
+                  <a:txBody>
+                    <a:bodyPr/>
+                    <a:lstStyle/>
+                    <a:p>
+                      <a:pPr indent="0" marL="0">
+                        <a:buNone/>
+                      </a:pPr>
+                      <a:r>
+                        <a:rPr lang="en-US" sz="760" dirty="0">
+                          <a:solidFill>
+                            <a:srgbClr val="5F6368"/>
+                          </a:solidFill>
+                          <a:latin typeface="Roboto" pitchFamily="34" charset="0"/>
+                          <a:ea typeface="Roboto" pitchFamily="34" charset="-122"/>
+                          <a:cs typeface="Roboto" pitchFamily="34" charset="-120"/>
+                        </a:rPr>
+                        <a:t>Dedicated Gemini 2.5 Pro Provisioned Throughput inside tenant VPC-SC perimeter</a:t>
+                      </a:r>
+                      <a:endParaRPr lang="en-US" sz="760" dirty="0">
+                        <a:latin typeface="Roboto" charset="0"/>
+                        <a:ea typeface="Roboto" charset="0"/>
+                        <a:cs typeface="Roboto" charset="0"/>
+                      </a:endParaRPr>
+                    </a:p>
+                  </a:txBody>
+                  <a:tcPr marL="91440" marR="91440" marT="45720" marB="45720" anchor="ctr">
+                    <a:lnL w="9525" cap="flat" cmpd="sng" algn="ctr">
+                      <a:solidFill>
+                        <a:srgbClr val="DADCE0"/>
+                      </a:solidFill>
+                      <a:prstDash val="solid"/>
+                      <a:round/>
+                      <a:headEnd type="none" w="med" len="med"/>
+                      <a:tailEnd type="none" w="med" len="med"/>
+                    </a:lnL>
+                    <a:lnR w="9525" cap="flat" cmpd="sng" algn="ctr">
+                      <a:solidFill>
+                        <a:srgbClr val="DADCE0"/>
+                      </a:solidFill>
+                      <a:prstDash val="solid"/>
+                      <a:round/>
+                      <a:headEnd type="none" w="med" len="med"/>
+                      <a:tailEnd type="none" w="med" len="med"/>
+                    </a:lnR>
+                    <a:lnT w="9525" cap="flat" cmpd="sng" algn="ctr">
+                      <a:solidFill>
+                        <a:srgbClr val="DADCE0"/>
+                      </a:solidFill>
+                      <a:prstDash val="solid"/>
+                      <a:round/>
+                      <a:headEnd type="none" w="med" len="med"/>
+                      <a:tailEnd type="none" w="med" len="med"/>
+                    </a:lnT>
+                    <a:lnB w="9525" cap="flat" cmpd="sng" algn="ctr">
+                      <a:solidFill>
+                        <a:srgbClr val="DADCE0"/>
+                      </a:solidFill>
+                      <a:prstDash val="solid"/>
+                      <a:round/>
+                      <a:headEnd type="none" w="med" len="med"/>
+                      <a:tailEnd type="none" w="med" len="med"/>
+                    </a:lnB>
+                    <a:solidFill>
+                      <a:srgbClr val="FFFFFF"/>
+                    </a:solidFill>
+                  </a:tcPr>
+                </a:tc>
+                <a:tc>
+                  <a:txBody>
+                    <a:bodyPr/>
+                    <a:lstStyle/>
+                    <a:p>
+                      <a:pPr indent="0" marL="0">
+                        <a:buNone/>
+                      </a:pPr>
+                      <a:r>
+                        <a:rPr lang="en-US" sz="760" dirty="0">
+                          <a:solidFill>
+                            <a:srgbClr val="5F6368"/>
+                          </a:solidFill>
+                          <a:latin typeface="Roboto" pitchFamily="34" charset="0"/>
+                          <a:ea typeface="Roboto" pitchFamily="34" charset="-122"/>
+                          <a:cs typeface="Roboto" pitchFamily="34" charset="-120"/>
+                        </a:rPr>
+                        <a:t>Self-hosted open-weight Gemma 3 (27B IT) on private GKE L4/A100 GPU node pool</a:t>
+                      </a:r>
+                      <a:endParaRPr lang="en-US" sz="760" dirty="0">
+                        <a:latin typeface="Roboto" charset="0"/>
+                        <a:ea typeface="Roboto" charset="0"/>
+                        <a:cs typeface="Roboto" charset="0"/>
+                      </a:endParaRPr>
+                    </a:p>
+                  </a:txBody>
+                  <a:tcPr marL="91440" marR="91440" marT="45720" marB="45720" anchor="ctr">
+                    <a:lnL w="9525" cap="flat" cmpd="sng" algn="ctr">
+                      <a:solidFill>
+                        <a:srgbClr val="DADCE0"/>
+                      </a:solidFill>
+                      <a:prstDash val="solid"/>
+                      <a:round/>
+                      <a:headEnd type="none" w="med" len="med"/>
+                      <a:tailEnd type="none" w="med" len="med"/>
+                    </a:lnL>
+                    <a:lnR w="9525" cap="flat" cmpd="sng" algn="ctr">
+                      <a:solidFill>
+                        <a:srgbClr val="DADCE0"/>
+                      </a:solidFill>
+                      <a:prstDash val="solid"/>
+                      <a:round/>
+                      <a:headEnd type="none" w="med" len="med"/>
+                      <a:tailEnd type="none" w="med" len="med"/>
+                    </a:lnR>
+                    <a:lnT w="9525" cap="flat" cmpd="sng" algn="ctr">
+                      <a:solidFill>
+                        <a:srgbClr val="DADCE0"/>
+                      </a:solidFill>
+                      <a:prstDash val="solid"/>
+                      <a:round/>
+                      <a:headEnd type="none" w="med" len="med"/>
+                      <a:tailEnd type="none" w="med" len="med"/>
+                    </a:lnT>
+                    <a:lnB w="9525" cap="flat" cmpd="sng" algn="ctr">
+                      <a:solidFill>
+                        <a:srgbClr val="DADCE0"/>
+                      </a:solidFill>
+                      <a:prstDash val="solid"/>
+                      <a:round/>
+                      <a:headEnd type="none" w="med" len="med"/>
+                      <a:tailEnd type="none" w="med" len="med"/>
+                    </a:lnB>
+                    <a:solidFill>
+                      <a:srgbClr val="FFFFFF"/>
+                    </a:solidFill>
+                  </a:tcPr>
+                </a:tc>
+              </a:tr>
+              <a:tr h="0">
+                <a:tc>
+                  <a:txBody>
+                    <a:bodyPr/>
+                    <a:lstStyle/>
+                    <a:p>
+                      <a:pPr indent="0" marL="0">
+                        <a:buNone/>
+                      </a:pPr>
+                      <a:r>
+                        <a:rPr lang="en-US" sz="780" b="1" dirty="0">
+                          <a:solidFill>
+                            <a:srgbClr val="3C4043"/>
+                          </a:solidFill>
+                          <a:latin typeface="Google Sans" pitchFamily="34" charset="0"/>
+                          <a:ea typeface="Google Sans" pitchFamily="34" charset="-122"/>
+                          <a:cs typeface="Google Sans" pitchFamily="34" charset="-120"/>
+                        </a:rPr>
+                        <a:t>CMEK encryption &amp; kill-switch</a:t>
+                      </a:r>
+                      <a:endParaRPr lang="en-US" sz="780" dirty="0">
+                        <a:latin typeface="Google Sans" charset="0"/>
+                        <a:ea typeface="Google Sans" charset="0"/>
+                        <a:cs typeface="Google Sans" charset="0"/>
+                      </a:endParaRPr>
+                    </a:p>
+                  </a:txBody>
+                  <a:tcPr marL="91440" marR="91440" marT="45720" marB="45720" anchor="ctr">
+                    <a:lnL w="9525" cap="flat" cmpd="sng" algn="ctr">
+                      <a:solidFill>
+                        <a:srgbClr val="DADCE0"/>
+                      </a:solidFill>
+                      <a:prstDash val="solid"/>
+                      <a:round/>
+                      <a:headEnd type="none" w="med" len="med"/>
+                      <a:tailEnd type="none" w="med" len="med"/>
+                    </a:lnL>
+                    <a:lnR w="9525" cap="flat" cmpd="sng" algn="ctr">
+                      <a:solidFill>
+                        <a:srgbClr val="DADCE0"/>
+                      </a:solidFill>
+                      <a:prstDash val="solid"/>
+                      <a:round/>
+                      <a:headEnd type="none" w="med" len="med"/>
+                      <a:tailEnd type="none" w="med" len="med"/>
+                    </a:lnR>
+                    <a:lnT w="9525" cap="flat" cmpd="sng" algn="ctr">
+                      <a:solidFill>
+                        <a:srgbClr val="DADCE0"/>
+                      </a:solidFill>
+                      <a:prstDash val="solid"/>
+                      <a:round/>
+                      <a:headEnd type="none" w="med" len="med"/>
+                      <a:tailEnd type="none" w="med" len="med"/>
+                    </a:lnT>
+                    <a:lnB w="9525" cap="flat" cmpd="sng" algn="ctr">
+                      <a:solidFill>
+                        <a:srgbClr val="DADCE0"/>
+                      </a:solidFill>
+                      <a:prstDash val="solid"/>
+                      <a:round/>
+                      <a:headEnd type="none" w="med" len="med"/>
+                      <a:tailEnd type="none" w="med" len="med"/>
+                    </a:lnB>
+                    <a:solidFill>
+                      <a:srgbClr val="F8F9FA"/>
+                    </a:solidFill>
+                  </a:tcPr>
+                </a:tc>
+                <a:tc>
+                  <a:txBody>
+                    <a:bodyPr/>
+                    <a:lstStyle/>
+                    <a:p>
+                      <a:pPr indent="0" marL="0">
+                        <a:buNone/>
+                      </a:pPr>
+                      <a:r>
+                        <a:rPr lang="en-US" sz="760" dirty="0">
+                          <a:solidFill>
+                            <a:srgbClr val="5F6368"/>
+                          </a:solidFill>
+                          <a:latin typeface="Roboto" pitchFamily="34" charset="0"/>
+                          <a:ea typeface="Roboto" pitchFamily="34" charset="-122"/>
+                          <a:cs typeface="Roboto" pitchFamily="34" charset="-120"/>
+                        </a:rPr>
+                        <a:t>Envelope KMS encryption per Memory Bank namespace (mem://{tenant_id}/L1..L5)</a:t>
+                      </a:r>
+                      <a:endParaRPr lang="en-US" sz="760" dirty="0">
+                        <a:latin typeface="Roboto" charset="0"/>
+                        <a:ea typeface="Roboto" charset="0"/>
+                        <a:cs typeface="Roboto" charset="0"/>
+                      </a:endParaRPr>
+                    </a:p>
+                  </a:txBody>
+                  <a:tcPr marL="91440" marR="91440" marT="45720" marB="45720" anchor="ctr">
+                    <a:lnL w="9525" cap="flat" cmpd="sng" algn="ctr">
+                      <a:solidFill>
+                        <a:srgbClr val="DADCE0"/>
+                      </a:solidFill>
+                      <a:prstDash val="solid"/>
+                      <a:round/>
+                      <a:headEnd type="none" w="med" len="med"/>
+                      <a:tailEnd type="none" w="med" len="med"/>
+                    </a:lnL>
+                    <a:lnR w="9525" cap="flat" cmpd="sng" algn="ctr">
+                      <a:solidFill>
+                        <a:srgbClr val="DADCE0"/>
+                      </a:solidFill>
+                      <a:prstDash val="solid"/>
+                      <a:round/>
+                      <a:headEnd type="none" w="med" len="med"/>
+                      <a:tailEnd type="none" w="med" len="med"/>
+                    </a:lnR>
+                    <a:lnT w="9525" cap="flat" cmpd="sng" algn="ctr">
+                      <a:solidFill>
+                        <a:srgbClr val="DADCE0"/>
+                      </a:solidFill>
+                      <a:prstDash val="solid"/>
+                      <a:round/>
+                      <a:headEnd type="none" w="med" len="med"/>
+                      <a:tailEnd type="none" w="med" len="med"/>
+                    </a:lnT>
+                    <a:lnB w="9525" cap="flat" cmpd="sng" algn="ctr">
+                      <a:solidFill>
+                        <a:srgbClr val="DADCE0"/>
+                      </a:solidFill>
+                      <a:prstDash val="solid"/>
+                      <a:round/>
+                      <a:headEnd type="none" w="med" len="med"/>
+                      <a:tailEnd type="none" w="med" len="med"/>
+                    </a:lnB>
+                    <a:solidFill>
+                      <a:srgbClr val="F8F9FA"/>
+                    </a:solidFill>
+                  </a:tcPr>
+                </a:tc>
+                <a:tc>
+                  <a:txBody>
+                    <a:bodyPr/>
+                    <a:lstStyle/>
+                    <a:p>
+                      <a:pPr indent="0" marL="0">
+                        <a:buNone/>
+                      </a:pPr>
+                      <a:r>
+                        <a:rPr lang="en-US" sz="760" dirty="0">
+                          <a:solidFill>
+                            <a:srgbClr val="5F6368"/>
+                          </a:solidFill>
+                          <a:latin typeface="Roboto" pitchFamily="34" charset="0"/>
+                          <a:ea typeface="Roboto" pitchFamily="34" charset="-122"/>
+                          <a:cs typeface="Roboto" pitchFamily="34" charset="-120"/>
+                        </a:rPr>
+                        <a:t>Ubiquitous tenant Cloud KMS CMEK across Vertex AI, AlloyDB, GCS &amp; BigQuery</a:t>
+                      </a:r>
+                      <a:endParaRPr lang="en-US" sz="760" dirty="0">
+                        <a:latin typeface="Roboto" charset="0"/>
+                        <a:ea typeface="Roboto" charset="0"/>
+                        <a:cs typeface="Roboto" charset="0"/>
+                      </a:endParaRPr>
+                    </a:p>
+                  </a:txBody>
+                  <a:tcPr marL="91440" marR="91440" marT="45720" marB="45720" anchor="ctr">
+                    <a:lnL w="9525" cap="flat" cmpd="sng" algn="ctr">
+                      <a:solidFill>
+                        <a:srgbClr val="DADCE0"/>
+                      </a:solidFill>
+                      <a:prstDash val="solid"/>
+                      <a:round/>
+                      <a:headEnd type="none" w="med" len="med"/>
+                      <a:tailEnd type="none" w="med" len="med"/>
+                    </a:lnL>
+                    <a:lnR w="9525" cap="flat" cmpd="sng" algn="ctr">
+                      <a:solidFill>
+                        <a:srgbClr val="DADCE0"/>
+                      </a:solidFill>
+                      <a:prstDash val="solid"/>
+                      <a:round/>
+                      <a:headEnd type="none" w="med" len="med"/>
+                      <a:tailEnd type="none" w="med" len="med"/>
+                    </a:lnR>
+                    <a:lnT w="9525" cap="flat" cmpd="sng" algn="ctr">
+                      <a:solidFill>
+                        <a:srgbClr val="DADCE0"/>
+                      </a:solidFill>
+                      <a:prstDash val="solid"/>
+                      <a:round/>
+                      <a:headEnd type="none" w="med" len="med"/>
+                      <a:tailEnd type="none" w="med" len="med"/>
+                    </a:lnT>
+                    <a:lnB w="9525" cap="flat" cmpd="sng" algn="ctr">
+                      <a:solidFill>
+                        <a:srgbClr val="DADCE0"/>
+                      </a:solidFill>
+                      <a:prstDash val="solid"/>
+                      <a:round/>
+                      <a:headEnd type="none" w="med" len="med"/>
+                      <a:tailEnd type="none" w="med" len="med"/>
+                    </a:lnB>
+                    <a:solidFill>
+                      <a:srgbClr val="F8F9FA"/>
+                    </a:solidFill>
+                  </a:tcPr>
+                </a:tc>
+                <a:tc>
+                  <a:txBody>
+                    <a:bodyPr/>
+                    <a:lstStyle/>
+                    <a:p>
+                      <a:pPr indent="0" marL="0">
+                        <a:buNone/>
+                      </a:pPr>
+                      <a:r>
+                        <a:rPr lang="en-US" sz="760" dirty="0">
+                          <a:solidFill>
+                            <a:srgbClr val="5F6368"/>
+                          </a:solidFill>
+                          <a:latin typeface="Roboto" pitchFamily="34" charset="0"/>
+                          <a:ea typeface="Roboto" pitchFamily="34" charset="-122"/>
+                          <a:cs typeface="Roboto" pitchFamily="34" charset="-120"/>
+                        </a:rPr>
+                        <a:t>Ubiquitous Cloud KMS CMEK + GKE boot/etcd disks (&lt;60s HTTP 423 Locked + L1 purge)</a:t>
+                      </a:r>
+                      <a:endParaRPr lang="en-US" sz="760" dirty="0">
+                        <a:latin typeface="Roboto" charset="0"/>
+                        <a:ea typeface="Roboto" charset="0"/>
+                        <a:cs typeface="Roboto" charset="0"/>
+                      </a:endParaRPr>
+                    </a:p>
+                  </a:txBody>
+                  <a:tcPr marL="91440" marR="91440" marT="45720" marB="45720" anchor="ctr">
+                    <a:lnL w="9525" cap="flat" cmpd="sng" algn="ctr">
+                      <a:solidFill>
+                        <a:srgbClr val="DADCE0"/>
+                      </a:solidFill>
+                      <a:prstDash val="solid"/>
+                      <a:round/>
+                      <a:headEnd type="none" w="med" len="med"/>
+                      <a:tailEnd type="none" w="med" len="med"/>
+                    </a:lnL>
+                    <a:lnR w="9525" cap="flat" cmpd="sng" algn="ctr">
+                      <a:solidFill>
+                        <a:srgbClr val="DADCE0"/>
+                      </a:solidFill>
+                      <a:prstDash val="solid"/>
+                      <a:round/>
+                      <a:headEnd type="none" w="med" len="med"/>
+                      <a:tailEnd type="none" w="med" len="med"/>
+                    </a:lnR>
+                    <a:lnT w="9525" cap="flat" cmpd="sng" algn="ctr">
+                      <a:solidFill>
+                        <a:srgbClr val="DADCE0"/>
+                      </a:solidFill>
+                      <a:prstDash val="solid"/>
+                      <a:round/>
+                      <a:headEnd type="none" w="med" len="med"/>
+                      <a:tailEnd type="none" w="med" len="med"/>
+                    </a:lnT>
+                    <a:lnB w="9525" cap="flat" cmpd="sng" algn="ctr">
+                      <a:solidFill>
+                        <a:srgbClr val="DADCE0"/>
+                      </a:solidFill>
+                      <a:prstDash val="solid"/>
+                      <a:round/>
+                      <a:headEnd type="none" w="med" len="med"/>
+                      <a:tailEnd type="none" w="med" len="med"/>
+                    </a:lnB>
+                    <a:solidFill>
+                      <a:srgbClr val="F8F9FA"/>
+                    </a:solidFill>
+                  </a:tcPr>
+                </a:tc>
+              </a:tr>
+              <a:tr h="0">
+                <a:tc>
+                  <a:txBody>
+                    <a:bodyPr/>
+                    <a:lstStyle/>
+                    <a:p>
+                      <a:pPr indent="0" marL="0">
+                        <a:buNone/>
+                      </a:pPr>
+                      <a:r>
+                        <a:rPr lang="en-US" sz="780" b="1" dirty="0">
+                          <a:solidFill>
+                            <a:srgbClr val="3C4043"/>
+                          </a:solidFill>
+                          <a:latin typeface="Google Sans" pitchFamily="34" charset="0"/>
+                          <a:ea typeface="Google Sans" pitchFamily="34" charset="-122"/>
+                          <a:cs typeface="Google Sans" pitchFamily="34" charset="-120"/>
+                        </a:rPr>
+                        <a:t>Provisioning &amp; Terraform IaC</a:t>
+                      </a:r>
+                      <a:endParaRPr lang="en-US" sz="780" dirty="0">
+                        <a:latin typeface="Google Sans" charset="0"/>
+                        <a:ea typeface="Google Sans" charset="0"/>
+                        <a:cs typeface="Google Sans" charset="0"/>
+                      </a:endParaRPr>
+                    </a:p>
+                  </a:txBody>
+                  <a:tcPr marL="91440" marR="91440" marT="45720" marB="45720" anchor="ctr">
+                    <a:lnL w="9525" cap="flat" cmpd="sng" algn="ctr">
+                      <a:solidFill>
+                        <a:srgbClr val="DADCE0"/>
+                      </a:solidFill>
+                      <a:prstDash val="solid"/>
+                      <a:round/>
+                      <a:headEnd type="none" w="med" len="med"/>
+                      <a:tailEnd type="none" w="med" len="med"/>
+                    </a:lnL>
+                    <a:lnR w="9525" cap="flat" cmpd="sng" algn="ctr">
+                      <a:solidFill>
+                        <a:srgbClr val="DADCE0"/>
+                      </a:solidFill>
+                      <a:prstDash val="solid"/>
+                      <a:round/>
+                      <a:headEnd type="none" w="med" len="med"/>
+                      <a:tailEnd type="none" w="med" len="med"/>
+                    </a:lnR>
+                    <a:lnT w="9525" cap="flat" cmpd="sng" algn="ctr">
+                      <a:solidFill>
+                        <a:srgbClr val="DADCE0"/>
+                      </a:solidFill>
+                      <a:prstDash val="solid"/>
+                      <a:round/>
+                      <a:headEnd type="none" w="med" len="med"/>
+                      <a:tailEnd type="none" w="med" len="med"/>
+                    </a:lnT>
+                    <a:lnB w="9525" cap="flat" cmpd="sng" algn="ctr">
+                      <a:solidFill>
+                        <a:srgbClr val="DADCE0"/>
+                      </a:solidFill>
+                      <a:prstDash val="solid"/>
+                      <a:round/>
+                      <a:headEnd type="none" w="med" len="med"/>
+                      <a:tailEnd type="none" w="med" len="med"/>
+                    </a:lnB>
+                    <a:solidFill>
+                      <a:srgbClr val="FFFFFF"/>
+                    </a:solidFill>
+                  </a:tcPr>
+                </a:tc>
+                <a:tc>
+                  <a:txBody>
+                    <a:bodyPr/>
+                    <a:lstStyle/>
+                    <a:p>
+                      <a:pPr indent="0" marL="0">
+                        <a:buNone/>
+                      </a:pPr>
+                      <a:r>
+                        <a:rPr lang="en-US" sz="760" dirty="0">
+                          <a:solidFill>
+                            <a:srgbClr val="5F6368"/>
+                          </a:solidFill>
+                          <a:latin typeface="Roboto" pitchFamily="34" charset="0"/>
+                          <a:ea typeface="Roboto" pitchFamily="34" charset="-122"/>
+                          <a:cs typeface="Roboto" pitchFamily="34" charset="-120"/>
+                        </a:rPr>
+                        <a:t>Instant Firestore tenant profile insert (&lt;50ms commercial self-service)</a:t>
+                      </a:r>
+                      <a:endParaRPr lang="en-US" sz="760" dirty="0">
+                        <a:latin typeface="Roboto" charset="0"/>
+                        <a:ea typeface="Roboto" charset="0"/>
+                        <a:cs typeface="Roboto" charset="0"/>
+                      </a:endParaRPr>
+                    </a:p>
+                  </a:txBody>
+                  <a:tcPr marL="91440" marR="91440" marT="45720" marB="45720" anchor="ctr">
+                    <a:lnL w="9525" cap="flat" cmpd="sng" algn="ctr">
+                      <a:solidFill>
+                        <a:srgbClr val="DADCE0"/>
+                      </a:solidFill>
+                      <a:prstDash val="solid"/>
+                      <a:round/>
+                      <a:headEnd type="none" w="med" len="med"/>
+                      <a:tailEnd type="none" w="med" len="med"/>
+                    </a:lnL>
+                    <a:lnR w="9525" cap="flat" cmpd="sng" algn="ctr">
+                      <a:solidFill>
+                        <a:srgbClr val="DADCE0"/>
+                      </a:solidFill>
+                      <a:prstDash val="solid"/>
+                      <a:round/>
+                      <a:headEnd type="none" w="med" len="med"/>
+                      <a:tailEnd type="none" w="med" len="med"/>
+                    </a:lnR>
+                    <a:lnT w="9525" cap="flat" cmpd="sng" algn="ctr">
+                      <a:solidFill>
+                        <a:srgbClr val="DADCE0"/>
+                      </a:solidFill>
+                      <a:prstDash val="solid"/>
+                      <a:round/>
+                      <a:headEnd type="none" w="med" len="med"/>
+                      <a:tailEnd type="none" w="med" len="med"/>
+                    </a:lnT>
+                    <a:lnB w="9525" cap="flat" cmpd="sng" algn="ctr">
+                      <a:solidFill>
+                        <a:srgbClr val="DADCE0"/>
+                      </a:solidFill>
+                      <a:prstDash val="solid"/>
+                      <a:round/>
+                      <a:headEnd type="none" w="med" len="med"/>
+                      <a:tailEnd type="none" w="med" len="med"/>
+                    </a:lnB>
+                    <a:solidFill>
+                      <a:srgbClr val="FFFFFF"/>
+                    </a:solidFill>
+                  </a:tcPr>
+                </a:tc>
+                <a:tc>
+                  <a:txBody>
+                    <a:bodyPr/>
+                    <a:lstStyle/>
+                    <a:p>
+                      <a:pPr indent="0" marL="0">
+                        <a:buNone/>
+                      </a:pPr>
+                      <a:r>
+                        <a:rPr lang="en-US" sz="760" dirty="0">
+                          <a:solidFill>
+                            <a:srgbClr val="5F6368"/>
+                          </a:solidFill>
+                          <a:latin typeface="Roboto" pitchFamily="34" charset="0"/>
+                          <a:ea typeface="Roboto" pitchFamily="34" charset="-122"/>
+                          <a:cs typeface="Roboto" pitchFamily="34" charset="-120"/>
+                        </a:rPr>
+                        <a:t>4-stage automated silo factory (3.6-terraform-silo-blueprint, &lt;12 min stamp-out)</a:t>
+                      </a:r>
+                      <a:endParaRPr lang="en-US" sz="760" dirty="0">
+                        <a:latin typeface="Roboto" charset="0"/>
+                        <a:ea typeface="Roboto" charset="0"/>
+                        <a:cs typeface="Roboto" charset="0"/>
+                      </a:endParaRPr>
+                    </a:p>
+                  </a:txBody>
+                  <a:tcPr marL="91440" marR="91440" marT="45720" marB="45720" anchor="ctr">
+                    <a:lnL w="9525" cap="flat" cmpd="sng" algn="ctr">
+                      <a:solidFill>
+                        <a:srgbClr val="DADCE0"/>
+                      </a:solidFill>
+                      <a:prstDash val="solid"/>
+                      <a:round/>
+                      <a:headEnd type="none" w="med" len="med"/>
+                      <a:tailEnd type="none" w="med" len="med"/>
+                    </a:lnL>
+                    <a:lnR w="9525" cap="flat" cmpd="sng" algn="ctr">
+                      <a:solidFill>
+                        <a:srgbClr val="DADCE0"/>
+                      </a:solidFill>
+                      <a:prstDash val="solid"/>
+                      <a:round/>
+                      <a:headEnd type="none" w="med" len="med"/>
+                      <a:tailEnd type="none" w="med" len="med"/>
+                    </a:lnR>
+                    <a:lnT w="9525" cap="flat" cmpd="sng" algn="ctr">
+                      <a:solidFill>
+                        <a:srgbClr val="DADCE0"/>
+                      </a:solidFill>
+                      <a:prstDash val="solid"/>
+                      <a:round/>
+                      <a:headEnd type="none" w="med" len="med"/>
+                      <a:tailEnd type="none" w="med" len="med"/>
+                    </a:lnT>
+                    <a:lnB w="9525" cap="flat" cmpd="sng" algn="ctr">
+                      <a:solidFill>
+                        <a:srgbClr val="DADCE0"/>
+                      </a:solidFill>
+                      <a:prstDash val="solid"/>
+                      <a:round/>
+                      <a:headEnd type="none" w="med" len="med"/>
+                      <a:tailEnd type="none" w="med" len="med"/>
+                    </a:lnB>
+                    <a:solidFill>
+                      <a:srgbClr val="FFFFFF"/>
+                    </a:solidFill>
+                  </a:tcPr>
+                </a:tc>
+                <a:tc>
+                  <a:txBody>
+                    <a:bodyPr/>
+                    <a:lstStyle/>
+                    <a:p>
+                      <a:pPr indent="0" marL="0">
+                        <a:buNone/>
+                      </a:pPr>
+                      <a:r>
+                        <a:rPr lang="en-US" sz="760" dirty="0">
+                          <a:solidFill>
+                            <a:srgbClr val="5F6368"/>
+                          </a:solidFill>
+                          <a:latin typeface="Roboto" pitchFamily="34" charset="0"/>
+                          <a:ea typeface="Roboto" pitchFamily="34" charset="-122"/>
+                          <a:cs typeface="Roboto" pitchFamily="34" charset="-120"/>
+                        </a:rPr>
+                        <a:t>4-stage silo factory + private GKE GPU cluster &amp; local Artifact Registry mirror</a:t>
+                      </a:r>
+                      <a:endParaRPr lang="en-US" sz="760" dirty="0">
+                        <a:latin typeface="Roboto" charset="0"/>
+                        <a:ea typeface="Roboto" charset="0"/>
+                        <a:cs typeface="Roboto" charset="0"/>
+                      </a:endParaRPr>
+                    </a:p>
+                  </a:txBody>
+                  <a:tcPr marL="91440" marR="91440" marT="45720" marB="45720" anchor="ctr">
+                    <a:lnL w="9525" cap="flat" cmpd="sng" algn="ctr">
+                      <a:solidFill>
+                        <a:srgbClr val="DADCE0"/>
+                      </a:solidFill>
+                      <a:prstDash val="solid"/>
+                      <a:round/>
+                      <a:headEnd type="none" w="med" len="med"/>
+                      <a:tailEnd type="none" w="med" len="med"/>
+                    </a:lnL>
+                    <a:lnR w="9525" cap="flat" cmpd="sng" algn="ctr">
+                      <a:solidFill>
+                        <a:srgbClr val="DADCE0"/>
+                      </a:solidFill>
+                      <a:prstDash val="solid"/>
+                      <a:round/>
+                      <a:headEnd type="none" w="med" len="med"/>
+                      <a:tailEnd type="none" w="med" len="med"/>
+                    </a:lnR>
+                    <a:lnT w="9525" cap="flat" cmpd="sng" algn="ctr">
+                      <a:solidFill>
+                        <a:srgbClr val="DADCE0"/>
+                      </a:solidFill>
+                      <a:prstDash val="solid"/>
+                      <a:round/>
+                      <a:headEnd type="none" w="med" len="med"/>
+                      <a:tailEnd type="none" w="med" len="med"/>
+                    </a:lnT>
+                    <a:lnB w="9525" cap="flat" cmpd="sng" algn="ctr">
+                      <a:solidFill>
+                        <a:srgbClr val="DADCE0"/>
+                      </a:solidFill>
+                      <a:prstDash val="solid"/>
+                      <a:round/>
+                      <a:headEnd type="none" w="med" len="med"/>
+                      <a:tailEnd type="none" w="med" len="med"/>
+                    </a:lnB>
+                    <a:solidFill>
+                      <a:srgbClr val="FFFFFF"/>
+                    </a:solidFill>
+                  </a:tcPr>
+                </a:tc>
+              </a:tr>
+              <a:tr h="0">
+                <a:tc>
+                  <a:txBody>
+                    <a:bodyPr/>
+                    <a:lstStyle/>
+                    <a:p>
+                      <a:pPr indent="0" marL="0">
+                        <a:buNone/>
+                      </a:pPr>
+                      <a:r>
+                        <a:rPr lang="en-US" sz="780" b="1" dirty="0">
+                          <a:solidFill>
+                            <a:srgbClr val="3C4043"/>
+                          </a:solidFill>
+                          <a:latin typeface="Google Sans" pitchFamily="34" charset="0"/>
+                          <a:ea typeface="Google Sans" pitchFamily="34" charset="-122"/>
+                          <a:cs typeface="Google Sans" pitchFamily="34" charset="-120"/>
+                        </a:rPr>
+                        <a:t>Unit economics &amp; target workload</a:t>
+                      </a:r>
+                      <a:endParaRPr lang="en-US" sz="780" dirty="0">
+                        <a:latin typeface="Google Sans" charset="0"/>
+                        <a:ea typeface="Google Sans" charset="0"/>
+                        <a:cs typeface="Google Sans" charset="0"/>
+                      </a:endParaRPr>
+                    </a:p>
+                  </a:txBody>
+                  <a:tcPr marL="91440" marR="91440" marT="45720" marB="45720" anchor="ctr">
+                    <a:lnL w="9525" cap="flat" cmpd="sng" algn="ctr">
+                      <a:solidFill>
+                        <a:srgbClr val="DADCE0"/>
+                      </a:solidFill>
+                      <a:prstDash val="solid"/>
+                      <a:round/>
+                      <a:headEnd type="none" w="med" len="med"/>
+                      <a:tailEnd type="none" w="med" len="med"/>
+                    </a:lnL>
+                    <a:lnR w="9525" cap="flat" cmpd="sng" algn="ctr">
+                      <a:solidFill>
+                        <a:srgbClr val="DADCE0"/>
+                      </a:solidFill>
+                      <a:prstDash val="solid"/>
+                      <a:round/>
+                      <a:headEnd type="none" w="med" len="med"/>
+                      <a:tailEnd type="none" w="med" len="med"/>
+                    </a:lnR>
+                    <a:lnT w="9525" cap="flat" cmpd="sng" algn="ctr">
+                      <a:solidFill>
+                        <a:srgbClr val="DADCE0"/>
+                      </a:solidFill>
+                      <a:prstDash val="solid"/>
+                      <a:round/>
+                      <a:headEnd type="none" w="med" len="med"/>
+                      <a:tailEnd type="none" w="med" len="med"/>
+                    </a:lnT>
+                    <a:lnB w="9525" cap="flat" cmpd="sng" algn="ctr">
+                      <a:solidFill>
+                        <a:srgbClr val="DADCE0"/>
+                      </a:solidFill>
+                      <a:prstDash val="solid"/>
+                      <a:round/>
+                      <a:headEnd type="none" w="med" len="med"/>
+                      <a:tailEnd type="none" w="med" len="med"/>
+                    </a:lnB>
+                    <a:solidFill>
+                      <a:srgbClr val="F8F9FA"/>
+                    </a:solidFill>
+                  </a:tcPr>
+                </a:tc>
+                <a:tc>
+                  <a:txBody>
+                    <a:bodyPr/>
+                    <a:lstStyle/>
+                    <a:p>
+                      <a:pPr indent="0" marL="0">
+                        <a:buNone/>
+                      </a:pPr>
+                      <a:r>
+                        <a:rPr lang="en-US" sz="760" dirty="0">
+                          <a:solidFill>
+                            <a:srgbClr val="5F6368"/>
+                          </a:solidFill>
+                          <a:latin typeface="Roboto" pitchFamily="34" charset="0"/>
+                          <a:ea typeface="Roboto" pitchFamily="34" charset="-122"/>
+                          <a:cs typeface="Roboto" pitchFamily="34" charset="-120"/>
+                        </a:rPr>
+                        <a:t>$42 / tenant / month • High-volume commercial B2B SaaS (10/10 PASS)</a:t>
+                      </a:r>
+                      <a:endParaRPr lang="en-US" sz="760" dirty="0">
+                        <a:latin typeface="Roboto" charset="0"/>
+                        <a:ea typeface="Roboto" charset="0"/>
+                        <a:cs typeface="Roboto" charset="0"/>
+                      </a:endParaRPr>
+                    </a:p>
+                  </a:txBody>
+                  <a:tcPr marL="91440" marR="91440" marT="45720" marB="45720" anchor="ctr">
+                    <a:lnL w="9525" cap="flat" cmpd="sng" algn="ctr">
+                      <a:solidFill>
+                        <a:srgbClr val="DADCE0"/>
+                      </a:solidFill>
+                      <a:prstDash val="solid"/>
+                      <a:round/>
+                      <a:headEnd type="none" w="med" len="med"/>
+                      <a:tailEnd type="none" w="med" len="med"/>
+                    </a:lnL>
+                    <a:lnR w="9525" cap="flat" cmpd="sng" algn="ctr">
+                      <a:solidFill>
+                        <a:srgbClr val="DADCE0"/>
+                      </a:solidFill>
+                      <a:prstDash val="solid"/>
+                      <a:round/>
+                      <a:headEnd type="none" w="med" len="med"/>
+                      <a:tailEnd type="none" w="med" len="med"/>
+                    </a:lnR>
+                    <a:lnT w="9525" cap="flat" cmpd="sng" algn="ctr">
+                      <a:solidFill>
+                        <a:srgbClr val="DADCE0"/>
+                      </a:solidFill>
+                      <a:prstDash val="solid"/>
+                      <a:round/>
+                      <a:headEnd type="none" w="med" len="med"/>
+                      <a:tailEnd type="none" w="med" len="med"/>
+                    </a:lnT>
+                    <a:lnB w="9525" cap="flat" cmpd="sng" algn="ctr">
+                      <a:solidFill>
+                        <a:srgbClr val="DADCE0"/>
+                      </a:solidFill>
+                      <a:prstDash val="solid"/>
+                      <a:round/>
+                      <a:headEnd type="none" w="med" len="med"/>
+                      <a:tailEnd type="none" w="med" len="med"/>
+                    </a:lnB>
+                    <a:solidFill>
+                      <a:srgbClr val="F8F9FA"/>
+                    </a:solidFill>
+                  </a:tcPr>
+                </a:tc>
+                <a:tc>
+                  <a:txBody>
+                    <a:bodyPr/>
+                    <a:lstStyle/>
+                    <a:p>
+                      <a:pPr indent="0" marL="0">
+                        <a:buNone/>
+                      </a:pPr>
+                      <a:r>
+                        <a:rPr lang="en-US" sz="760" dirty="0">
+                          <a:solidFill>
+                            <a:srgbClr val="5F6368"/>
+                          </a:solidFill>
+                          <a:latin typeface="Roboto" pitchFamily="34" charset="0"/>
+                          <a:ea typeface="Roboto" pitchFamily="34" charset="-122"/>
+                          <a:cs typeface="Roboto" pitchFamily="34" charset="-120"/>
+                        </a:rPr>
+                        <a:t>$1,850 / tenant / month • OCC/FFIEC banking, HIPAA healthcare &amp; EU DORA (6/6 PASS)</a:t>
+                      </a:r>
+                      <a:endParaRPr lang="en-US" sz="760" dirty="0">
+                        <a:latin typeface="Roboto" charset="0"/>
+                        <a:ea typeface="Roboto" charset="0"/>
+                        <a:cs typeface="Roboto" charset="0"/>
+                      </a:endParaRPr>
+                    </a:p>
+                  </a:txBody>
+                  <a:tcPr marL="91440" marR="91440" marT="45720" marB="45720" anchor="ctr">
+                    <a:lnL w="9525" cap="flat" cmpd="sng" algn="ctr">
+                      <a:solidFill>
+                        <a:srgbClr val="DADCE0"/>
+                      </a:solidFill>
+                      <a:prstDash val="solid"/>
+                      <a:round/>
+                      <a:headEnd type="none" w="med" len="med"/>
+                      <a:tailEnd type="none" w="med" len="med"/>
+                    </a:lnL>
+                    <a:lnR w="9525" cap="flat" cmpd="sng" algn="ctr">
+                      <a:solidFill>
+                        <a:srgbClr val="DADCE0"/>
+                      </a:solidFill>
+                      <a:prstDash val="solid"/>
+                      <a:round/>
+                      <a:headEnd type="none" w="med" len="med"/>
+                      <a:tailEnd type="none" w="med" len="med"/>
+                    </a:lnR>
+                    <a:lnT w="9525" cap="flat" cmpd="sng" algn="ctr">
+                      <a:solidFill>
+                        <a:srgbClr val="DADCE0"/>
+                      </a:solidFill>
+                      <a:prstDash val="solid"/>
+                      <a:round/>
+                      <a:headEnd type="none" w="med" len="med"/>
+                      <a:tailEnd type="none" w="med" len="med"/>
+                    </a:lnT>
+                    <a:lnB w="9525" cap="flat" cmpd="sng" algn="ctr">
+                      <a:solidFill>
+                        <a:srgbClr val="DADCE0"/>
+                      </a:solidFill>
+                      <a:prstDash val="solid"/>
+                      <a:round/>
+                      <a:headEnd type="none" w="med" len="med"/>
+                      <a:tailEnd type="none" w="med" len="med"/>
+                    </a:lnB>
+                    <a:solidFill>
+                      <a:srgbClr val="F8F9FA"/>
+                    </a:solidFill>
+                  </a:tcPr>
+                </a:tc>
+                <a:tc>
+                  <a:txBody>
+                    <a:bodyPr/>
+                    <a:lstStyle/>
+                    <a:p>
+                      <a:pPr indent="0" marL="0">
+                        <a:buNone/>
+                      </a:pPr>
+                      <a:r>
+                        <a:rPr lang="en-US" sz="760" dirty="0">
+                          <a:solidFill>
+                            <a:srgbClr val="0D652D"/>
+                          </a:solidFill>
+                          <a:latin typeface="Roboto" pitchFamily="34" charset="0"/>
+                          <a:ea typeface="Roboto" pitchFamily="34" charset="-122"/>
+                          <a:cs typeface="Roboto" pitchFamily="34" charset="-120"/>
+                        </a:rPr>
+                        <a:t>$2,450 / tenant / month • Sovereign defense, core ledger &amp; strict open-weight mandates</a:t>
+                      </a:r>
+                      <a:endParaRPr lang="en-US" sz="760" dirty="0">
+                        <a:latin typeface="Roboto" charset="0"/>
+                        <a:ea typeface="Roboto" charset="0"/>
+                        <a:cs typeface="Roboto" charset="0"/>
+                      </a:endParaRPr>
+                    </a:p>
+                  </a:txBody>
+                  <a:tcPr marL="91440" marR="91440" marT="45720" marB="45720" anchor="ctr">
+                    <a:lnL w="9525" cap="flat" cmpd="sng" algn="ctr">
+                      <a:solidFill>
+                        <a:srgbClr val="DADCE0"/>
+                      </a:solidFill>
+                      <a:prstDash val="solid"/>
+                      <a:round/>
+                      <a:headEnd type="none" w="med" len="med"/>
+                      <a:tailEnd type="none" w="med" len="med"/>
+                    </a:lnL>
+                    <a:lnR w="9525" cap="flat" cmpd="sng" algn="ctr">
+                      <a:solidFill>
+                        <a:srgbClr val="DADCE0"/>
+                      </a:solidFill>
+                      <a:prstDash val="solid"/>
+                      <a:round/>
+                      <a:headEnd type="none" w="med" len="med"/>
+                      <a:tailEnd type="none" w="med" len="med"/>
+                    </a:lnR>
+                    <a:lnT w="9525" cap="flat" cmpd="sng" algn="ctr">
+                      <a:solidFill>
+                        <a:srgbClr val="DADCE0"/>
+                      </a:solidFill>
+                      <a:prstDash val="solid"/>
+                      <a:round/>
+                      <a:headEnd type="none" w="med" len="med"/>
+                      <a:tailEnd type="none" w="med" len="med"/>
+                    </a:lnT>
+                    <a:lnB w="9525" cap="flat" cmpd="sng" algn="ctr">
+                      <a:solidFill>
+                        <a:srgbClr val="DADCE0"/>
+                      </a:solidFill>
+                      <a:prstDash val="solid"/>
+                      <a:round/>
+                      <a:headEnd type="none" w="med" len="med"/>
+                      <a:tailEnd type="none" w="med" len="med"/>
+                    </a:lnB>
+                    <a:solidFill>
+                      <a:srgbClr val="F8F9FA"/>
+                    </a:solidFill>
+                  </a:tcPr>
+                </a:tc>
+              </a:tr>
+            </a:tbl>
+          </a:graphicData>
+        </a:graphic>
+      </p:graphicFrame>
+      <p:sp>
+        <p:nvSpPr>
+          <p:cNvPr id="20" name="Shape 17"/>
+          <p:cNvSpPr/>
+          <p:nvPr/>
+        </p:nvSpPr>
+        <p:spPr>
+          <a:xfrm>
+            <a:off x="411480" y="4663440"/>
+            <a:ext cx="2718511" cy="1408176"/>
           </a:xfrm>
           <a:prstGeom prst="roundRect">
             <a:avLst>
-              <a:gd name="adj" fmla="val 3239"/>
+              <a:gd name="adj" fmla="val 5195"/>
             </a:avLst>
           </a:prstGeom>
           <a:solidFill>
@@ -19485,14 +21432,14 @@
       </p:sp>
       <p:sp>
         <p:nvSpPr>
-          <p:cNvPr id="20" name="Shape 18"/>
-          <p:cNvSpPr/>
-          <p:nvPr/>
-        </p:nvSpPr>
-        <p:spPr>
-          <a:xfrm>
-            <a:off x="411480" y="1353312"/>
-            <a:ext cx="5583326" cy="59436"/>
+          <p:cNvPr id="21" name="Shape 18"/>
+          <p:cNvSpPr/>
+          <p:nvPr/>
+        </p:nvSpPr>
+        <p:spPr>
+          <a:xfrm>
+            <a:off x="411480" y="4663440"/>
+            <a:ext cx="2718511" cy="50292"/>
           </a:xfrm>
           <a:prstGeom prst="rect">
             <a:avLst/>
@@ -19505,150 +21452,73 @@
       </p:sp>
       <p:sp>
         <p:nvSpPr>
-          <p:cNvPr id="21" name="Shape 19"/>
-          <p:cNvSpPr/>
-          <p:nvPr/>
-        </p:nvSpPr>
-        <p:spPr>
-          <a:xfrm>
-            <a:off x="557784" y="1481328"/>
-            <a:ext cx="365760" cy="256032"/>
-          </a:xfrm>
-          <a:prstGeom prst="roundRect">
-            <a:avLst>
-              <a:gd name="adj" fmla="val 21429"/>
-            </a:avLst>
-          </a:prstGeom>
-          <a:solidFill>
-            <a:srgbClr val="E8F0FE"/>
-          </a:solidFill>
-          <a:ln/>
-        </p:spPr>
-      </p:sp>
-      <p:sp>
-        <p:nvSpPr>
-          <p:cNvPr id="22" name="Text 20"/>
-          <p:cNvSpPr/>
-          <p:nvPr/>
-        </p:nvSpPr>
-        <p:spPr>
-          <a:xfrm>
-            <a:off x="557784" y="1481328"/>
-            <a:ext cx="365760" cy="256032"/>
-          </a:xfrm>
-          <a:prstGeom prst="rect">
-            <a:avLst/>
-          </a:prstGeom>
-          <a:noFill/>
-          <a:ln/>
-        </p:spPr>
-        <p:txBody>
-          <a:bodyPr wrap="square" rtlCol="0" anchor="ctr"/>
-          <a:lstStyle/>
-          <a:p>
-            <a:pPr algn="ctr" indent="0" marL="0">
-              <a:buNone/>
-            </a:pPr>
-            <a:r>
-              <a:rPr lang="en-US" sz="920" b="1" dirty="0">
-                <a:solidFill>
-                  <a:srgbClr val="174EA6"/>
+          <p:cNvPr id="22" name="Text 19"/>
+          <p:cNvSpPr/>
+          <p:nvPr/>
+        </p:nvSpPr>
+        <p:spPr>
+          <a:xfrm>
+            <a:off x="521208" y="4736592"/>
+            <a:ext cx="2499055" cy="256032"/>
+          </a:xfrm>
+          <a:prstGeom prst="rect">
+            <a:avLst/>
+          </a:prstGeom>
+          <a:noFill/>
+          <a:ln/>
+        </p:spPr>
+        <p:txBody>
+          <a:bodyPr wrap="square" rtlCol="0" anchor="ctr">
+            <a:normAutofit/>
+          </a:bodyPr>
+          <a:lstStyle/>
+          <a:p>
+            <a:pPr indent="0" marL="0">
+              <a:buNone/>
+            </a:pPr>
+            <a:r>
+              <a:rPr lang="en-US" sz="760" b="1" dirty="0">
+                <a:solidFill>
+                  <a:srgbClr val="3C4043"/>
                 </a:solidFill>
                 <a:latin typeface="Google Sans" pitchFamily="34" charset="0"/>
                 <a:ea typeface="Google Sans" pitchFamily="34" charset="-122"/>
                 <a:cs typeface="Google Sans" pitchFamily="34" charset="-120"/>
               </a:rPr>
-              <a:t>01</a:t>
-            </a:r>
-            <a:endParaRPr lang="en-US" sz="920" dirty="0"/>
-          </a:p>
-        </p:txBody>
-      </p:sp>
-      <p:sp>
-        <p:nvSpPr>
-          <p:cNvPr id="23" name="Text 21"/>
-          <p:cNvSpPr/>
-          <p:nvPr/>
-        </p:nvSpPr>
-        <p:spPr>
-          <a:xfrm>
-            <a:off x="996696" y="1463040"/>
-            <a:ext cx="4851806" cy="329184"/>
-          </a:xfrm>
-          <a:prstGeom prst="rect">
-            <a:avLst/>
-          </a:prstGeom>
-          <a:noFill/>
-          <a:ln/>
-        </p:spPr>
-        <p:txBody>
-          <a:bodyPr wrap="square" rtlCol="0" anchor="ctr"/>
+              <a:t>1. Why Logical Pool Is Insufficient Here</a:t>
+            </a:r>
+            <a:endParaRPr lang="en-US" sz="760" dirty="0"/>
+          </a:p>
+        </p:txBody>
+      </p:sp>
+      <p:sp>
+        <p:nvSpPr>
+          <p:cNvPr id="23" name="Text 20"/>
+          <p:cNvSpPr/>
+          <p:nvPr/>
+        </p:nvSpPr>
+        <p:spPr>
+          <a:xfrm>
+            <a:off x="521208" y="4992624"/>
+            <a:ext cx="2499055" cy="1024128"/>
+          </a:xfrm>
+          <a:prstGeom prst="rect">
+            <a:avLst/>
+          </a:prstGeom>
+          <a:noFill/>
+          <a:ln/>
+        </p:spPr>
+        <p:txBody>
+          <a:bodyPr wrap="square" rtlCol="0" anchor="t">
+            <a:normAutofit/>
+          </a:bodyPr>
           <a:lstStyle/>
           <a:p>
             <a:pPr indent="0" marL="0">
               <a:buNone/>
             </a:pPr>
             <a:r>
-              <a:rPr lang="en-US" sz="1140" b="1" dirty="0">
-                <a:solidFill>
-                  <a:srgbClr val="3C4043"/>
-                </a:solidFill>
-                <a:latin typeface="Google Sans" pitchFamily="34" charset="0"/>
-                <a:ea typeface="Google Sans" pitchFamily="34" charset="-122"/>
-                <a:cs typeface="Google Sans" pitchFamily="34" charset="-120"/>
-              </a:rPr>
-              <a:t>Wall 1 — mTLS &amp; IAM Principal Access Boundaries (PAB)</a:t>
-            </a:r>
-            <a:endParaRPr lang="en-US" sz="1140" dirty="0"/>
-          </a:p>
-        </p:txBody>
-      </p:sp>
-      <p:sp>
-        <p:nvSpPr>
-          <p:cNvPr id="24" name="Shape 22"/>
-          <p:cNvSpPr/>
-          <p:nvPr/>
-        </p:nvSpPr>
-        <p:spPr>
-          <a:xfrm>
-            <a:off x="557784" y="1847088"/>
-            <a:ext cx="5290718" cy="9144"/>
-          </a:xfrm>
-          <a:prstGeom prst="rect">
-            <a:avLst/>
-          </a:prstGeom>
-          <a:solidFill>
-            <a:srgbClr val="DADCE0"/>
-          </a:solidFill>
-          <a:ln/>
-        </p:spPr>
-      </p:sp>
-      <p:sp>
-        <p:nvSpPr>
-          <p:cNvPr id="25" name="Text 23"/>
-          <p:cNvSpPr/>
-          <p:nvPr/>
-        </p:nvSpPr>
-        <p:spPr>
-          <a:xfrm>
-            <a:off x="557784" y="1901952"/>
-            <a:ext cx="5290718" cy="850392"/>
-          </a:xfrm>
-          <a:prstGeom prst="rect">
-            <a:avLst/>
-          </a:prstGeom>
-          <a:noFill/>
-          <a:ln/>
-        </p:spPr>
-        <p:txBody>
-          <a:bodyPr wrap="square" rtlCol="0" anchor="t"/>
-          <a:lstStyle/>
-          <a:p>
-            <a:pPr indent="0" marL="0">
-              <a:buNone/>
-            </a:pPr>
-            <a:r>
-              <a:rPr lang="en-US" sz="980" dirty="0">
+              <a:rPr lang="en-US" sz="740" dirty="0">
                 <a:solidFill>
                   <a:srgbClr val="5F6368"/>
                 </a:solidFill>
@@ -19656,188 +21526,26 @@
                 <a:ea typeface="Roboto" pitchFamily="34" charset="-122"/>
                 <a:cs typeface="Roboto" pitchFamily="34" charset="-120"/>
               </a:rPr>
-              <a:t>Every request must present a pinned BeyondCorp client certificate (cert_sha256) and pass an IAM PAB rule binding the caller strictly to that tenant’s project.</a:t>
-            </a:r>
-            <a:endParaRPr lang="en-US" sz="980" dirty="0"/>
-          </a:p>
-        </p:txBody>
-      </p:sp>
-      <p:sp>
-        <p:nvSpPr>
-          <p:cNvPr id="26" name="Shape 24"/>
-          <p:cNvSpPr/>
-          <p:nvPr/>
-        </p:nvSpPr>
-        <p:spPr>
-          <a:xfrm>
-            <a:off x="557784" y="2788920"/>
-            <a:ext cx="5290718" cy="493776"/>
+              <a:t>OCC/FDIC banking, HIPAA, EU DORA, and defense contracts legally mandate physical project boundaries and customer-held KMS kill-switches.</a:t>
+            </a:r>
+            <a:endParaRPr lang="en-US" sz="740" dirty="0"/>
+          </a:p>
+        </p:txBody>
+      </p:sp>
+      <p:sp>
+        <p:nvSpPr>
+          <p:cNvPr id="24" name="Shape 21"/>
+          <p:cNvSpPr/>
+          <p:nvPr/>
+        </p:nvSpPr>
+        <p:spPr>
+          <a:xfrm>
+            <a:off x="3294583" y="4663440"/>
+            <a:ext cx="2718511" cy="1408176"/>
           </a:xfrm>
           <a:prstGeom prst="roundRect">
             <a:avLst>
-              <a:gd name="adj" fmla="val 11111"/>
-            </a:avLst>
-          </a:prstGeom>
-          <a:solidFill>
-            <a:srgbClr val="FFFFFF"/>
-          </a:solidFill>
-          <a:ln w="9525">
-            <a:solidFill>
-              <a:srgbClr val="DADCE0"/>
-            </a:solidFill>
-            <a:prstDash val="solid"/>
-          </a:ln>
-        </p:spPr>
-      </p:sp>
-      <p:sp>
-        <p:nvSpPr>
-          <p:cNvPr id="27" name="Shape 25"/>
-          <p:cNvSpPr/>
-          <p:nvPr/>
-        </p:nvSpPr>
-        <p:spPr>
-          <a:xfrm>
-            <a:off x="557784" y="2788920"/>
-            <a:ext cx="54864" cy="493776"/>
-          </a:xfrm>
-          <a:prstGeom prst="rect">
-            <a:avLst/>
-          </a:prstGeom>
-          <a:solidFill>
-            <a:srgbClr val="4285F4"/>
-          </a:solidFill>
-          <a:ln/>
-        </p:spPr>
-      </p:sp>
-      <p:sp>
-        <p:nvSpPr>
-          <p:cNvPr id="28" name="Text 26"/>
-          <p:cNvSpPr/>
-          <p:nvPr/>
-        </p:nvSpPr>
-        <p:spPr>
-          <a:xfrm>
-            <a:off x="649224" y="2816352"/>
-            <a:ext cx="5162702" cy="438912"/>
-          </a:xfrm>
-          <a:prstGeom prst="rect">
-            <a:avLst/>
-          </a:prstGeom>
-          <a:noFill/>
-          <a:ln/>
-        </p:spPr>
-        <p:txBody>
-          <a:bodyPr wrap="square" rtlCol="0" anchor="ctr"/>
-          <a:lstStyle/>
-          <a:p>
-            <a:pPr indent="0" marL="0">
-              <a:buNone/>
-            </a:pPr>
-            <a:r>
-              <a:rPr lang="en-US" sz="750" b="1" dirty="0">
-                <a:solidFill>
-                  <a:srgbClr val="3C4043"/>
-                </a:solidFill>
-                <a:latin typeface="Google Sans" pitchFamily="34" charset="0"/>
-                <a:ea typeface="Google Sans" pitchFamily="34" charset="-122"/>
-                <a:cs typeface="Google Sans" pitchFamily="34" charset="-120"/>
-              </a:rPr>
-              <a:t>Cloud Stack: BeyondCorp Enterprise mTLS + Google Cloud IAM Principal Access Boundary (PAB)
-</a:t>
-            </a:r>
-            <a:pPr indent="0" marL="0">
-              <a:buNone/>
-            </a:pPr>
-            <a:r>
-              <a:rPr lang="en-US" sz="730" dirty="0">
-                <a:solidFill>
-                  <a:srgbClr val="5F6368"/>
-                </a:solidFill>
-                <a:latin typeface="Roboto" pitchFamily="34" charset="0"/>
-                <a:ea typeface="Roboto" pitchFamily="34" charset="-122"/>
-                <a:cs typeface="Roboto" pitchFamily="34" charset="-120"/>
-              </a:rPr>
-              <a:t>Target &amp; SLA: Neutralizes Stolen Credentials: Principals Cannot Authenticate Outside Their Silo</a:t>
-            </a:r>
-            <a:endParaRPr lang="en-US" sz="750" dirty="0"/>
-          </a:p>
-        </p:txBody>
-      </p:sp>
-      <p:sp>
-        <p:nvSpPr>
-          <p:cNvPr id="29" name="Shape 27"/>
-          <p:cNvSpPr/>
-          <p:nvPr/>
-        </p:nvSpPr>
-        <p:spPr>
-          <a:xfrm>
-            <a:off x="557784" y="3337560"/>
-            <a:ext cx="5290718" cy="219456"/>
-          </a:xfrm>
-          <a:prstGeom prst="roundRect">
-            <a:avLst>
-              <a:gd name="adj" fmla="val 20833"/>
-            </a:avLst>
-          </a:prstGeom>
-          <a:solidFill>
-            <a:srgbClr val="E8F0FE"/>
-          </a:solidFill>
-          <a:ln/>
-        </p:spPr>
-      </p:sp>
-      <p:sp>
-        <p:nvSpPr>
-          <p:cNvPr id="30" name="Text 28"/>
-          <p:cNvSpPr/>
-          <p:nvPr/>
-        </p:nvSpPr>
-        <p:spPr>
-          <a:xfrm>
-            <a:off x="612648" y="3337560"/>
-            <a:ext cx="5180990" cy="219456"/>
-          </a:xfrm>
-          <a:prstGeom prst="rect">
-            <a:avLst/>
-          </a:prstGeom>
-          <a:noFill/>
-          <a:ln/>
-        </p:spPr>
-        <p:txBody>
-          <a:bodyPr wrap="square" rtlCol="0" anchor="ctr"/>
-          <a:lstStyle/>
-          <a:p>
-            <a:pPr indent="0" marL="0">
-              <a:buNone/>
-            </a:pPr>
-            <a:r>
-              <a:rPr lang="en-US" sz="750" b="1" dirty="0">
-                <a:solidFill>
-                  <a:srgbClr val="174EA6"/>
-                </a:solidFill>
-                <a:latin typeface="Google Sans" pitchFamily="34" charset="0"/>
-                <a:ea typeface="Google Sans" pitchFamily="34" charset="-122"/>
-                <a:cs typeface="Google Sans" pitchFamily="34" charset="-120"/>
-              </a:rPr>
-              <a:t>Wall 1: Identity &amp; mTLS Boundary</a:t>
-            </a:r>
-            <a:endParaRPr lang="en-US" sz="750" dirty="0"/>
-          </a:p>
-        </p:txBody>
-      </p:sp>
-      <p:sp>
-        <p:nvSpPr>
-          <p:cNvPr id="31" name="Shape 29"/>
-          <p:cNvSpPr/>
-          <p:nvPr/>
-        </p:nvSpPr>
-        <p:spPr>
-          <a:xfrm>
-            <a:off x="6195974" y="1353312"/>
-            <a:ext cx="5583326" cy="2258568"/>
-          </a:xfrm>
-          <a:prstGeom prst="roundRect">
-            <a:avLst>
-              <a:gd name="adj" fmla="val 3239"/>
+              <a:gd name="adj" fmla="val 5195"/>
             </a:avLst>
           </a:prstGeom>
           <a:solidFill>
@@ -19853,14 +21561,14 @@
       </p:sp>
       <p:sp>
         <p:nvSpPr>
-          <p:cNvPr id="32" name="Shape 30"/>
-          <p:cNvSpPr/>
-          <p:nvPr/>
-        </p:nvSpPr>
-        <p:spPr>
-          <a:xfrm>
-            <a:off x="6195974" y="1353312"/>
-            <a:ext cx="5583326" cy="59436"/>
+          <p:cNvPr id="25" name="Shape 22"/>
+          <p:cNvSpPr/>
+          <p:nvPr/>
+        </p:nvSpPr>
+        <p:spPr>
+          <a:xfrm>
+            <a:off x="3294583" y="4663440"/>
+            <a:ext cx="2718511" cy="50292"/>
           </a:xfrm>
           <a:prstGeom prst="rect">
             <a:avLst/>
@@ -19873,150 +21581,73 @@
       </p:sp>
       <p:sp>
         <p:nvSpPr>
-          <p:cNvPr id="33" name="Shape 31"/>
-          <p:cNvSpPr/>
-          <p:nvPr/>
-        </p:nvSpPr>
-        <p:spPr>
-          <a:xfrm>
-            <a:off x="6342278" y="1481328"/>
-            <a:ext cx="365760" cy="256032"/>
-          </a:xfrm>
-          <a:prstGeom prst="roundRect">
-            <a:avLst>
-              <a:gd name="adj" fmla="val 21429"/>
-            </a:avLst>
-          </a:prstGeom>
-          <a:solidFill>
-            <a:srgbClr val="FCE8E6"/>
-          </a:solidFill>
-          <a:ln/>
-        </p:spPr>
-      </p:sp>
-      <p:sp>
-        <p:nvSpPr>
-          <p:cNvPr id="34" name="Text 32"/>
-          <p:cNvSpPr/>
-          <p:nvPr/>
-        </p:nvSpPr>
-        <p:spPr>
-          <a:xfrm>
-            <a:off x="6342278" y="1481328"/>
-            <a:ext cx="365760" cy="256032"/>
-          </a:xfrm>
-          <a:prstGeom prst="rect">
-            <a:avLst/>
-          </a:prstGeom>
-          <a:noFill/>
-          <a:ln/>
-        </p:spPr>
-        <p:txBody>
-          <a:bodyPr wrap="square" rtlCol="0" anchor="ctr"/>
-          <a:lstStyle/>
-          <a:p>
-            <a:pPr algn="ctr" indent="0" marL="0">
-              <a:buNone/>
-            </a:pPr>
-            <a:r>
-              <a:rPr lang="en-US" sz="920" b="1" dirty="0">
-                <a:solidFill>
-                  <a:srgbClr val="A50E0E"/>
+          <p:cNvPr id="26" name="Text 23"/>
+          <p:cNvSpPr/>
+          <p:nvPr/>
+        </p:nvSpPr>
+        <p:spPr>
+          <a:xfrm>
+            <a:off x="3404311" y="4736592"/>
+            <a:ext cx="2499055" cy="256032"/>
+          </a:xfrm>
+          <a:prstGeom prst="rect">
+            <a:avLst/>
+          </a:prstGeom>
+          <a:noFill/>
+          <a:ln/>
+        </p:spPr>
+        <p:txBody>
+          <a:bodyPr wrap="square" rtlCol="0" anchor="ctr">
+            <a:normAutofit/>
+          </a:bodyPr>
+          <a:lstStyle/>
+          <a:p>
+            <a:pPr indent="0" marL="0">
+              <a:buNone/>
+            </a:pPr>
+            <a:r>
+              <a:rPr lang="en-US" sz="760" b="1" dirty="0">
+                <a:solidFill>
+                  <a:srgbClr val="3C4043"/>
                 </a:solidFill>
                 <a:latin typeface="Google Sans" pitchFamily="34" charset="0"/>
                 <a:ea typeface="Google Sans" pitchFamily="34" charset="-122"/>
                 <a:cs typeface="Google Sans" pitchFamily="34" charset="-120"/>
               </a:rPr>
-              <a:t>02</a:t>
-            </a:r>
-            <a:endParaRPr lang="en-US" sz="920" dirty="0"/>
-          </a:p>
-        </p:txBody>
-      </p:sp>
-      <p:sp>
-        <p:nvSpPr>
-          <p:cNvPr id="35" name="Text 33"/>
-          <p:cNvSpPr/>
-          <p:nvPr/>
-        </p:nvSpPr>
-        <p:spPr>
-          <a:xfrm>
-            <a:off x="6781190" y="1463040"/>
-            <a:ext cx="4851806" cy="329184"/>
-          </a:xfrm>
-          <a:prstGeom prst="rect">
-            <a:avLst/>
-          </a:prstGeom>
-          <a:noFill/>
-          <a:ln/>
-        </p:spPr>
-        <p:txBody>
-          <a:bodyPr wrap="square" rtlCol="0" anchor="ctr"/>
+              <a:t>2. Option B1: Vertex AI PT + VPC-SC + CMEK</a:t>
+            </a:r>
+            <a:endParaRPr lang="en-US" sz="760" dirty="0"/>
+          </a:p>
+        </p:txBody>
+      </p:sp>
+      <p:sp>
+        <p:nvSpPr>
+          <p:cNvPr id="27" name="Text 24"/>
+          <p:cNvSpPr/>
+          <p:nvPr/>
+        </p:nvSpPr>
+        <p:spPr>
+          <a:xfrm>
+            <a:off x="3404311" y="4992624"/>
+            <a:ext cx="2499055" cy="1024128"/>
+          </a:xfrm>
+          <a:prstGeom prst="rect">
+            <a:avLst/>
+          </a:prstGeom>
+          <a:noFill/>
+          <a:ln/>
+        </p:spPr>
+        <p:txBody>
+          <a:bodyPr wrap="square" rtlCol="0" anchor="t">
+            <a:normAutofit/>
+          </a:bodyPr>
           <a:lstStyle/>
           <a:p>
             <a:pPr indent="0" marL="0">
               <a:buNone/>
             </a:pPr>
             <a:r>
-              <a:rPr lang="en-US" sz="1140" b="1" dirty="0">
-                <a:solidFill>
-                  <a:srgbClr val="3C4043"/>
-                </a:solidFill>
-                <a:latin typeface="Google Sans" pitchFamily="34" charset="0"/>
-                <a:ea typeface="Google Sans" pitchFamily="34" charset="-122"/>
-                <a:cs typeface="Google Sans" pitchFamily="34" charset="-120"/>
-              </a:rPr>
-              <a:t>Wall 2 — VPC Service Controls (VPC-SC) Data Perimeter</a:t>
-            </a:r>
-            <a:endParaRPr lang="en-US" sz="1140" dirty="0"/>
-          </a:p>
-        </p:txBody>
-      </p:sp>
-      <p:sp>
-        <p:nvSpPr>
-          <p:cNvPr id="36" name="Shape 34"/>
-          <p:cNvSpPr/>
-          <p:nvPr/>
-        </p:nvSpPr>
-        <p:spPr>
-          <a:xfrm>
-            <a:off x="6342278" y="1847088"/>
-            <a:ext cx="5290718" cy="9144"/>
-          </a:xfrm>
-          <a:prstGeom prst="rect">
-            <a:avLst/>
-          </a:prstGeom>
-          <a:solidFill>
-            <a:srgbClr val="DADCE0"/>
-          </a:solidFill>
-          <a:ln/>
-        </p:spPr>
-      </p:sp>
-      <p:sp>
-        <p:nvSpPr>
-          <p:cNvPr id="37" name="Text 35"/>
-          <p:cNvSpPr/>
-          <p:nvPr/>
-        </p:nvSpPr>
-        <p:spPr>
-          <a:xfrm>
-            <a:off x="6342278" y="1901952"/>
-            <a:ext cx="5290718" cy="850392"/>
-          </a:xfrm>
-          <a:prstGeom prst="rect">
-            <a:avLst/>
-          </a:prstGeom>
-          <a:noFill/>
-          <a:ln/>
-        </p:spPr>
-        <p:txBody>
-          <a:bodyPr wrap="square" rtlCol="0" anchor="t"/>
-          <a:lstStyle/>
-          <a:p>
-            <a:pPr indent="0" marL="0">
-              <a:buNone/>
-            </a:pPr>
-            <a:r>
-              <a:rPr lang="en-US" sz="980" dirty="0">
+              <a:rPr lang="en-US" sz="740" dirty="0">
                 <a:solidFill>
                   <a:srgbClr val="5F6368"/>
                 </a:solidFill>
@@ -20024,188 +21655,26 @@
                 <a:ea typeface="Roboto" pitchFamily="34" charset="-122"/>
                 <a:cs typeface="Roboto" pitchFamily="34" charset="-120"/>
               </a:rPr>
-              <a:t>Wraps Vertex AI, AlloyDB, Cloud Storage, GKE, and BigQuery inside a service perimeter that blocks unauthorized egress or cross-project copies (HTTP 403).</a:t>
-            </a:r>
-            <a:endParaRPr lang="en-US" sz="980" dirty="0"/>
-          </a:p>
-        </p:txBody>
-      </p:sp>
-      <p:sp>
-        <p:nvSpPr>
-          <p:cNvPr id="38" name="Shape 36"/>
-          <p:cNvSpPr/>
-          <p:nvPr/>
-        </p:nvSpPr>
-        <p:spPr>
-          <a:xfrm>
-            <a:off x="6342278" y="2788920"/>
-            <a:ext cx="5290718" cy="493776"/>
+              <a:t>Zero GPU operational overhead with Gemini 2.5 Pro Provisioned Throughput locked inside the tenant VPC-SC perimeter and Cloud KMS key ring.</a:t>
+            </a:r>
+            <a:endParaRPr lang="en-US" sz="740" dirty="0"/>
+          </a:p>
+        </p:txBody>
+      </p:sp>
+      <p:sp>
+        <p:nvSpPr>
+          <p:cNvPr id="28" name="Shape 25"/>
+          <p:cNvSpPr/>
+          <p:nvPr/>
+        </p:nvSpPr>
+        <p:spPr>
+          <a:xfrm>
+            <a:off x="6177686" y="4663440"/>
+            <a:ext cx="2718511" cy="1408176"/>
           </a:xfrm>
           <a:prstGeom prst="roundRect">
             <a:avLst>
-              <a:gd name="adj" fmla="val 11111"/>
-            </a:avLst>
-          </a:prstGeom>
-          <a:solidFill>
-            <a:srgbClr val="FFFFFF"/>
-          </a:solidFill>
-          <a:ln w="9525">
-            <a:solidFill>
-              <a:srgbClr val="DADCE0"/>
-            </a:solidFill>
-            <a:prstDash val="solid"/>
-          </a:ln>
-        </p:spPr>
-      </p:sp>
-      <p:sp>
-        <p:nvSpPr>
-          <p:cNvPr id="39" name="Shape 37"/>
-          <p:cNvSpPr/>
-          <p:nvPr/>
-        </p:nvSpPr>
-        <p:spPr>
-          <a:xfrm>
-            <a:off x="6342278" y="2788920"/>
-            <a:ext cx="54864" cy="493776"/>
-          </a:xfrm>
-          <a:prstGeom prst="rect">
-            <a:avLst/>
-          </a:prstGeom>
-          <a:solidFill>
-            <a:srgbClr val="EA4335"/>
-          </a:solidFill>
-          <a:ln/>
-        </p:spPr>
-      </p:sp>
-      <p:sp>
-        <p:nvSpPr>
-          <p:cNvPr id="40" name="Text 38"/>
-          <p:cNvSpPr/>
-          <p:nvPr/>
-        </p:nvSpPr>
-        <p:spPr>
-          <a:xfrm>
-            <a:off x="6433718" y="2816352"/>
-            <a:ext cx="5162702" cy="438912"/>
-          </a:xfrm>
-          <a:prstGeom prst="rect">
-            <a:avLst/>
-          </a:prstGeom>
-          <a:noFill/>
-          <a:ln/>
-        </p:spPr>
-        <p:txBody>
-          <a:bodyPr wrap="square" rtlCol="0" anchor="ctr"/>
-          <a:lstStyle/>
-          <a:p>
-            <a:pPr indent="0" marL="0">
-              <a:buNone/>
-            </a:pPr>
-            <a:r>
-              <a:rPr lang="en-US" sz="750" b="1" dirty="0">
-                <a:solidFill>
-                  <a:srgbClr val="3C4043"/>
-                </a:solidFill>
-                <a:latin typeface="Google Sans" pitchFamily="34" charset="0"/>
-                <a:ea typeface="Google Sans" pitchFamily="34" charset="-122"/>
-                <a:cs typeface="Google Sans" pitchFamily="34" charset="-120"/>
-              </a:rPr>
-              <a:t>Cloud Stack: Google Cloud Access Context Manager + VPC Service Controls (Restricted VIP)
-</a:t>
-            </a:r>
-            <a:pPr indent="0" marL="0">
-              <a:buNone/>
-            </a:pPr>
-            <a:r>
-              <a:rPr lang="en-US" sz="730" dirty="0">
-                <a:solidFill>
-                  <a:srgbClr val="5F6368"/>
-                </a:solidFill>
-                <a:latin typeface="Roboto" pitchFamily="34" charset="0"/>
-                <a:ea typeface="Roboto" pitchFamily="34" charset="-122"/>
-                <a:cs typeface="Roboto" pitchFamily="34" charset="-120"/>
-              </a:rPr>
-              <a:t>Target &amp; SLA: Blocks All Data Exfiltration to External Projects or Unapproved Buckets (HTTP 403)</a:t>
-            </a:r>
-            <a:endParaRPr lang="en-US" sz="750" dirty="0"/>
-          </a:p>
-        </p:txBody>
-      </p:sp>
-      <p:sp>
-        <p:nvSpPr>
-          <p:cNvPr id="41" name="Shape 39"/>
-          <p:cNvSpPr/>
-          <p:nvPr/>
-        </p:nvSpPr>
-        <p:spPr>
-          <a:xfrm>
-            <a:off x="6342278" y="3337560"/>
-            <a:ext cx="5290718" cy="219456"/>
-          </a:xfrm>
-          <a:prstGeom prst="roundRect">
-            <a:avLst>
-              <a:gd name="adj" fmla="val 20833"/>
-            </a:avLst>
-          </a:prstGeom>
-          <a:solidFill>
-            <a:srgbClr val="FCE8E6"/>
-          </a:solidFill>
-          <a:ln/>
-        </p:spPr>
-      </p:sp>
-      <p:sp>
-        <p:nvSpPr>
-          <p:cNvPr id="42" name="Text 40"/>
-          <p:cNvSpPr/>
-          <p:nvPr/>
-        </p:nvSpPr>
-        <p:spPr>
-          <a:xfrm>
-            <a:off x="6397142" y="3337560"/>
-            <a:ext cx="5180990" cy="219456"/>
-          </a:xfrm>
-          <a:prstGeom prst="rect">
-            <a:avLst/>
-          </a:prstGeom>
-          <a:noFill/>
-          <a:ln/>
-        </p:spPr>
-        <p:txBody>
-          <a:bodyPr wrap="square" rtlCol="0" anchor="ctr"/>
-          <a:lstStyle/>
-          <a:p>
-            <a:pPr indent="0" marL="0">
-              <a:buNone/>
-            </a:pPr>
-            <a:r>
-              <a:rPr lang="en-US" sz="750" b="1" dirty="0">
-                <a:solidFill>
-                  <a:srgbClr val="A50E0E"/>
-                </a:solidFill>
-                <a:latin typeface="Google Sans" pitchFamily="34" charset="0"/>
-                <a:ea typeface="Google Sans" pitchFamily="34" charset="-122"/>
-                <a:cs typeface="Google Sans" pitchFamily="34" charset="-120"/>
-              </a:rPr>
-              <a:t>Wall 2: VPC-SC Data Perimeter</a:t>
-            </a:r>
-            <a:endParaRPr lang="en-US" sz="750" dirty="0"/>
-          </a:p>
-        </p:txBody>
-      </p:sp>
-      <p:sp>
-        <p:nvSpPr>
-          <p:cNvPr id="43" name="Shape 41"/>
-          <p:cNvSpPr/>
-          <p:nvPr/>
-        </p:nvSpPr>
-        <p:spPr>
-          <a:xfrm>
-            <a:off x="411480" y="3776472"/>
-            <a:ext cx="5583326" cy="2258568"/>
-          </a:xfrm>
-          <a:prstGeom prst="roundRect">
-            <a:avLst>
-              <a:gd name="adj" fmla="val 3239"/>
+              <a:gd name="adj" fmla="val 5195"/>
             </a:avLst>
           </a:prstGeom>
           <a:solidFill>
@@ -20221,14 +21690,14 @@
       </p:sp>
       <p:sp>
         <p:nvSpPr>
-          <p:cNvPr id="44" name="Shape 42"/>
-          <p:cNvSpPr/>
-          <p:nvPr/>
-        </p:nvSpPr>
-        <p:spPr>
-          <a:xfrm>
-            <a:off x="411480" y="3776472"/>
-            <a:ext cx="5583326" cy="59436"/>
+          <p:cNvPr id="29" name="Shape 26"/>
+          <p:cNvSpPr/>
+          <p:nvPr/>
+        </p:nvSpPr>
+        <p:spPr>
+          <a:xfrm>
+            <a:off x="6177686" y="4663440"/>
+            <a:ext cx="2718511" cy="50292"/>
           </a:xfrm>
           <a:prstGeom prst="rect">
             <a:avLst/>
@@ -20241,150 +21710,73 @@
       </p:sp>
       <p:sp>
         <p:nvSpPr>
-          <p:cNvPr id="45" name="Shape 43"/>
-          <p:cNvSpPr/>
-          <p:nvPr/>
-        </p:nvSpPr>
-        <p:spPr>
-          <a:xfrm>
-            <a:off x="557784" y="3904488"/>
-            <a:ext cx="365760" cy="256032"/>
-          </a:xfrm>
-          <a:prstGeom prst="roundRect">
-            <a:avLst>
-              <a:gd name="adj" fmla="val 21429"/>
-            </a:avLst>
-          </a:prstGeom>
-          <a:solidFill>
-            <a:srgbClr val="FEF7E0"/>
-          </a:solidFill>
-          <a:ln/>
-        </p:spPr>
-      </p:sp>
-      <p:sp>
-        <p:nvSpPr>
-          <p:cNvPr id="46" name="Text 44"/>
-          <p:cNvSpPr/>
-          <p:nvPr/>
-        </p:nvSpPr>
-        <p:spPr>
-          <a:xfrm>
-            <a:off x="557784" y="3904488"/>
-            <a:ext cx="365760" cy="256032"/>
-          </a:xfrm>
-          <a:prstGeom prst="rect">
-            <a:avLst/>
-          </a:prstGeom>
-          <a:noFill/>
-          <a:ln/>
-        </p:spPr>
-        <p:txBody>
-          <a:bodyPr wrap="square" rtlCol="0" anchor="ctr"/>
-          <a:lstStyle/>
-          <a:p>
-            <a:pPr algn="ctr" indent="0" marL="0">
-              <a:buNone/>
-            </a:pPr>
-            <a:r>
-              <a:rPr lang="en-US" sz="920" b="1" dirty="0">
-                <a:solidFill>
-                  <a:srgbClr val="B06000"/>
+          <p:cNvPr id="30" name="Text 27"/>
+          <p:cNvSpPr/>
+          <p:nvPr/>
+        </p:nvSpPr>
+        <p:spPr>
+          <a:xfrm>
+            <a:off x="6287414" y="4736592"/>
+            <a:ext cx="2499055" cy="256032"/>
+          </a:xfrm>
+          <a:prstGeom prst="rect">
+            <a:avLst/>
+          </a:prstGeom>
+          <a:noFill/>
+          <a:ln/>
+        </p:spPr>
+        <p:txBody>
+          <a:bodyPr wrap="square" rtlCol="0" anchor="ctr">
+            <a:normAutofit/>
+          </a:bodyPr>
+          <a:lstStyle/>
+          <a:p>
+            <a:pPr indent="0" marL="0">
+              <a:buNone/>
+            </a:pPr>
+            <a:r>
+              <a:rPr lang="en-US" sz="760" b="1" dirty="0">
+                <a:solidFill>
+                  <a:srgbClr val="3C4043"/>
                 </a:solidFill>
                 <a:latin typeface="Google Sans" pitchFamily="34" charset="0"/>
                 <a:ea typeface="Google Sans" pitchFamily="34" charset="-122"/>
                 <a:cs typeface="Google Sans" pitchFamily="34" charset="-120"/>
               </a:rPr>
-              <a:t>03</a:t>
-            </a:r>
-            <a:endParaRPr lang="en-US" sz="920" dirty="0"/>
-          </a:p>
-        </p:txBody>
-      </p:sp>
-      <p:sp>
-        <p:nvSpPr>
-          <p:cNvPr id="47" name="Text 45"/>
-          <p:cNvSpPr/>
-          <p:nvPr/>
-        </p:nvSpPr>
-        <p:spPr>
-          <a:xfrm>
-            <a:off x="996696" y="3886200"/>
-            <a:ext cx="4851806" cy="329184"/>
-          </a:xfrm>
-          <a:prstGeom prst="rect">
-            <a:avLst/>
-          </a:prstGeom>
-          <a:noFill/>
-          <a:ln/>
-        </p:spPr>
-        <p:txBody>
-          <a:bodyPr wrap="square" rtlCol="0" anchor="ctr"/>
+              <a:t>3. Option B2: Air-Gapped Gemma 3 (27B) on GKE</a:t>
+            </a:r>
+            <a:endParaRPr lang="en-US" sz="760" dirty="0"/>
+          </a:p>
+        </p:txBody>
+      </p:sp>
+      <p:sp>
+        <p:nvSpPr>
+          <p:cNvPr id="31" name="Text 28"/>
+          <p:cNvSpPr/>
+          <p:nvPr/>
+        </p:nvSpPr>
+        <p:spPr>
+          <a:xfrm>
+            <a:off x="6287414" y="4992624"/>
+            <a:ext cx="2499055" cy="1024128"/>
+          </a:xfrm>
+          <a:prstGeom prst="rect">
+            <a:avLst/>
+          </a:prstGeom>
+          <a:noFill/>
+          <a:ln/>
+        </p:spPr>
+        <p:txBody>
+          <a:bodyPr wrap="square" rtlCol="0" anchor="t">
+            <a:normAutofit/>
+          </a:bodyPr>
           <a:lstStyle/>
           <a:p>
             <a:pPr indent="0" marL="0">
               <a:buNone/>
             </a:pPr>
             <a:r>
-              <a:rPr lang="en-US" sz="1140" b="1" dirty="0">
-                <a:solidFill>
-                  <a:srgbClr val="3C4043"/>
-                </a:solidFill>
-                <a:latin typeface="Google Sans" pitchFamily="34" charset="0"/>
-                <a:ea typeface="Google Sans" pitchFamily="34" charset="-122"/>
-                <a:cs typeface="Google Sans" pitchFamily="34" charset="-120"/>
-              </a:rPr>
-              <a:t>Wall 3 — Ubiquitous Cloud KMS CMEK Binding</a:t>
-            </a:r>
-            <a:endParaRPr lang="en-US" sz="1140" dirty="0"/>
-          </a:p>
-        </p:txBody>
-      </p:sp>
-      <p:sp>
-        <p:nvSpPr>
-          <p:cNvPr id="48" name="Shape 46"/>
-          <p:cNvSpPr/>
-          <p:nvPr/>
-        </p:nvSpPr>
-        <p:spPr>
-          <a:xfrm>
-            <a:off x="557784" y="4270248"/>
-            <a:ext cx="5290718" cy="9144"/>
-          </a:xfrm>
-          <a:prstGeom prst="rect">
-            <a:avLst/>
-          </a:prstGeom>
-          <a:solidFill>
-            <a:srgbClr val="DADCE0"/>
-          </a:solidFill>
-          <a:ln/>
-        </p:spPr>
-      </p:sp>
-      <p:sp>
-        <p:nvSpPr>
-          <p:cNvPr id="49" name="Text 47"/>
-          <p:cNvSpPr/>
-          <p:nvPr/>
-        </p:nvSpPr>
-        <p:spPr>
-          <a:xfrm>
-            <a:off x="557784" y="4325112"/>
-            <a:ext cx="5290718" cy="850392"/>
-          </a:xfrm>
-          <a:prstGeom prst="rect">
-            <a:avLst/>
-          </a:prstGeom>
-          <a:noFill/>
-          <a:ln/>
-        </p:spPr>
-        <p:txBody>
-          <a:bodyPr wrap="square" rtlCol="0" anchor="t"/>
-          <a:lstStyle/>
-          <a:p>
-            <a:pPr indent="0" marL="0">
-              <a:buNone/>
-            </a:pPr>
-            <a:r>
-              <a:rPr lang="en-US" sz="980" dirty="0">
+              <a:rPr lang="en-US" sz="740" dirty="0">
                 <a:solidFill>
                   <a:srgbClr val="5F6368"/>
                 </a:solidFill>
@@ -20392,188 +21784,26 @@
                 <a:ea typeface="Roboto" pitchFamily="34" charset="-122"/>
                 <a:cs typeface="Roboto" pitchFamily="34" charset="-120"/>
               </a:rPr>
-              <a:t>A single tenant-managed Cloud KMS key encrypts AlloyDB tables, Vertex AI Memory Bank state, GKE persistent disks, and BigQuery audit datasets.</a:t>
-            </a:r>
-            <a:endParaRPr lang="en-US" sz="980" dirty="0"/>
-          </a:p>
-        </p:txBody>
-      </p:sp>
-      <p:sp>
-        <p:nvSpPr>
-          <p:cNvPr id="50" name="Shape 48"/>
-          <p:cNvSpPr/>
-          <p:nvPr/>
-        </p:nvSpPr>
-        <p:spPr>
-          <a:xfrm>
-            <a:off x="557784" y="5212080"/>
-            <a:ext cx="5290718" cy="493776"/>
+              <a:t>Executes 100% inside private GKE GPU subnets (0.0.0.0/0 egress blocked) with model weights mirrored in CMEK-encrypted Artifact Registry.</a:t>
+            </a:r>
+            <a:endParaRPr lang="en-US" sz="740" dirty="0"/>
+          </a:p>
+        </p:txBody>
+      </p:sp>
+      <p:sp>
+        <p:nvSpPr>
+          <p:cNvPr id="32" name="Shape 29"/>
+          <p:cNvSpPr/>
+          <p:nvPr/>
+        </p:nvSpPr>
+        <p:spPr>
+          <a:xfrm>
+            <a:off x="9060790" y="4663440"/>
+            <a:ext cx="2718511" cy="1408176"/>
           </a:xfrm>
           <a:prstGeom prst="roundRect">
             <a:avLst>
-              <a:gd name="adj" fmla="val 11111"/>
-            </a:avLst>
-          </a:prstGeom>
-          <a:solidFill>
-            <a:srgbClr val="FFFFFF"/>
-          </a:solidFill>
-          <a:ln w="9525">
-            <a:solidFill>
-              <a:srgbClr val="DADCE0"/>
-            </a:solidFill>
-            <a:prstDash val="solid"/>
-          </a:ln>
-        </p:spPr>
-      </p:sp>
-      <p:sp>
-        <p:nvSpPr>
-          <p:cNvPr id="51" name="Shape 49"/>
-          <p:cNvSpPr/>
-          <p:nvPr/>
-        </p:nvSpPr>
-        <p:spPr>
-          <a:xfrm>
-            <a:off x="557784" y="5212080"/>
-            <a:ext cx="54864" cy="493776"/>
-          </a:xfrm>
-          <a:prstGeom prst="rect">
-            <a:avLst/>
-          </a:prstGeom>
-          <a:solidFill>
-            <a:srgbClr val="FBBC04"/>
-          </a:solidFill>
-          <a:ln/>
-        </p:spPr>
-      </p:sp>
-      <p:sp>
-        <p:nvSpPr>
-          <p:cNvPr id="52" name="Text 50"/>
-          <p:cNvSpPr/>
-          <p:nvPr/>
-        </p:nvSpPr>
-        <p:spPr>
-          <a:xfrm>
-            <a:off x="649224" y="5239512"/>
-            <a:ext cx="5162702" cy="438912"/>
-          </a:xfrm>
-          <a:prstGeom prst="rect">
-            <a:avLst/>
-          </a:prstGeom>
-          <a:noFill/>
-          <a:ln/>
-        </p:spPr>
-        <p:txBody>
-          <a:bodyPr wrap="square" rtlCol="0" anchor="ctr"/>
-          <a:lstStyle/>
-          <a:p>
-            <a:pPr indent="0" marL="0">
-              <a:buNone/>
-            </a:pPr>
-            <a:r>
-              <a:rPr lang="en-US" sz="750" b="1" dirty="0">
-                <a:solidFill>
-                  <a:srgbClr val="3C4043"/>
-                </a:solidFill>
-                <a:latin typeface="Google Sans" pitchFamily="34" charset="0"/>
-                <a:ea typeface="Google Sans" pitchFamily="34" charset="-122"/>
-                <a:cs typeface="Google Sans" pitchFamily="34" charset="-120"/>
-              </a:rPr>
-              <a:t>Cloud Stack: Cloud KMS CryptoKey (90-Day Auto-Rotation + Live Pre-Execution Heartbeat)
-</a:t>
-            </a:r>
-            <a:pPr indent="0" marL="0">
-              <a:buNone/>
-            </a:pPr>
-            <a:r>
-              <a:rPr lang="en-US" sz="730" dirty="0">
-                <a:solidFill>
-                  <a:srgbClr val="5F6368"/>
-                </a:solidFill>
-                <a:latin typeface="Roboto" pitchFamily="34" charset="0"/>
-                <a:ea typeface="Roboto" pitchFamily="34" charset="-122"/>
-                <a:cs typeface="Roboto" pitchFamily="34" charset="-120"/>
-              </a:rPr>
-              <a:t>Target &amp; SLA: Single Cryptographic Lever Controlling Compute, Memory, Database &amp; Logs</a:t>
-            </a:r>
-            <a:endParaRPr lang="en-US" sz="750" dirty="0"/>
-          </a:p>
-        </p:txBody>
-      </p:sp>
-      <p:sp>
-        <p:nvSpPr>
-          <p:cNvPr id="53" name="Shape 51"/>
-          <p:cNvSpPr/>
-          <p:nvPr/>
-        </p:nvSpPr>
-        <p:spPr>
-          <a:xfrm>
-            <a:off x="557784" y="5760720"/>
-            <a:ext cx="5290718" cy="219456"/>
-          </a:xfrm>
-          <a:prstGeom prst="roundRect">
-            <a:avLst>
-              <a:gd name="adj" fmla="val 20833"/>
-            </a:avLst>
-          </a:prstGeom>
-          <a:solidFill>
-            <a:srgbClr val="FEF7E0"/>
-          </a:solidFill>
-          <a:ln/>
-        </p:spPr>
-      </p:sp>
-      <p:sp>
-        <p:nvSpPr>
-          <p:cNvPr id="54" name="Text 52"/>
-          <p:cNvSpPr/>
-          <p:nvPr/>
-        </p:nvSpPr>
-        <p:spPr>
-          <a:xfrm>
-            <a:off x="612648" y="5760720"/>
-            <a:ext cx="5180990" cy="219456"/>
-          </a:xfrm>
-          <a:prstGeom prst="rect">
-            <a:avLst/>
-          </a:prstGeom>
-          <a:noFill/>
-          <a:ln/>
-        </p:spPr>
-        <p:txBody>
-          <a:bodyPr wrap="square" rtlCol="0" anchor="ctr"/>
-          <a:lstStyle/>
-          <a:p>
-            <a:pPr indent="0" marL="0">
-              <a:buNone/>
-            </a:pPr>
-            <a:r>
-              <a:rPr lang="en-US" sz="750" b="1" dirty="0">
-                <a:solidFill>
-                  <a:srgbClr val="B06000"/>
-                </a:solidFill>
-                <a:latin typeface="Google Sans" pitchFamily="34" charset="0"/>
-                <a:ea typeface="Google Sans" pitchFamily="34" charset="-122"/>
-                <a:cs typeface="Google Sans" pitchFamily="34" charset="-120"/>
-              </a:rPr>
-              <a:t>Wall 3: Unified CMEK Control</a:t>
-            </a:r>
-            <a:endParaRPr lang="en-US" sz="750" dirty="0"/>
-          </a:p>
-        </p:txBody>
-      </p:sp>
-      <p:sp>
-        <p:nvSpPr>
-          <p:cNvPr id="55" name="Shape 53"/>
-          <p:cNvSpPr/>
-          <p:nvPr/>
-        </p:nvSpPr>
-        <p:spPr>
-          <a:xfrm>
-            <a:off x="6195974" y="3776472"/>
-            <a:ext cx="5583326" cy="2258568"/>
-          </a:xfrm>
-          <a:prstGeom prst="roundRect">
-            <a:avLst>
-              <a:gd name="adj" fmla="val 3239"/>
+              <a:gd name="adj" fmla="val 5195"/>
             </a:avLst>
           </a:prstGeom>
           <a:solidFill>
@@ -20589,14 +21819,14 @@
       </p:sp>
       <p:sp>
         <p:nvSpPr>
-          <p:cNvPr id="56" name="Shape 54"/>
-          <p:cNvSpPr/>
-          <p:nvPr/>
-        </p:nvSpPr>
-        <p:spPr>
-          <a:xfrm>
-            <a:off x="6195974" y="3776472"/>
-            <a:ext cx="5583326" cy="59436"/>
+          <p:cNvPr id="33" name="Shape 30"/>
+          <p:cNvSpPr/>
+          <p:nvPr/>
+        </p:nvSpPr>
+        <p:spPr>
+          <a:xfrm>
+            <a:off x="9060790" y="4663440"/>
+            <a:ext cx="2718511" cy="50292"/>
           </a:xfrm>
           <a:prstGeom prst="rect">
             <a:avLst/>
@@ -20609,150 +21839,73 @@
       </p:sp>
       <p:sp>
         <p:nvSpPr>
-          <p:cNvPr id="57" name="Shape 55"/>
-          <p:cNvSpPr/>
-          <p:nvPr/>
-        </p:nvSpPr>
-        <p:spPr>
-          <a:xfrm>
-            <a:off x="6342278" y="3904488"/>
-            <a:ext cx="365760" cy="256032"/>
-          </a:xfrm>
-          <a:prstGeom prst="roundRect">
-            <a:avLst>
-              <a:gd name="adj" fmla="val 21429"/>
-            </a:avLst>
-          </a:prstGeom>
-          <a:solidFill>
-            <a:srgbClr val="E6F4EA"/>
-          </a:solidFill>
-          <a:ln/>
-        </p:spPr>
-      </p:sp>
-      <p:sp>
-        <p:nvSpPr>
-          <p:cNvPr id="58" name="Text 56"/>
-          <p:cNvSpPr/>
-          <p:nvPr/>
-        </p:nvSpPr>
-        <p:spPr>
-          <a:xfrm>
-            <a:off x="6342278" y="3904488"/>
-            <a:ext cx="365760" cy="256032"/>
-          </a:xfrm>
-          <a:prstGeom prst="rect">
-            <a:avLst/>
-          </a:prstGeom>
-          <a:noFill/>
-          <a:ln/>
-        </p:spPr>
-        <p:txBody>
-          <a:bodyPr wrap="square" rtlCol="0" anchor="ctr"/>
-          <a:lstStyle/>
-          <a:p>
-            <a:pPr algn="ctr" indent="0" marL="0">
-              <a:buNone/>
-            </a:pPr>
-            <a:r>
-              <a:rPr lang="en-US" sz="920" b="1" dirty="0">
-                <a:solidFill>
-                  <a:srgbClr val="0D652D"/>
+          <p:cNvPr id="34" name="Text 31"/>
+          <p:cNvSpPr/>
+          <p:nvPr/>
+        </p:nvSpPr>
+        <p:spPr>
+          <a:xfrm>
+            <a:off x="9170518" y="4736592"/>
+            <a:ext cx="2499055" cy="256032"/>
+          </a:xfrm>
+          <a:prstGeom prst="rect">
+            <a:avLst/>
+          </a:prstGeom>
+          <a:noFill/>
+          <a:ln/>
+        </p:spPr>
+        <p:txBody>
+          <a:bodyPr wrap="square" rtlCol="0" anchor="ctr">
+            <a:normAutofit/>
+          </a:bodyPr>
+          <a:lstStyle/>
+          <a:p>
+            <a:pPr indent="0" marL="0">
+              <a:buNone/>
+            </a:pPr>
+            <a:r>
+              <a:rPr lang="en-US" sz="820" b="1" dirty="0">
+                <a:solidFill>
+                  <a:srgbClr val="3C4043"/>
                 </a:solidFill>
                 <a:latin typeface="Google Sans" pitchFamily="34" charset="0"/>
                 <a:ea typeface="Google Sans" pitchFamily="34" charset="-122"/>
                 <a:cs typeface="Google Sans" pitchFamily="34" charset="-120"/>
               </a:rPr>
-              <a:t>04</a:t>
-            </a:r>
-            <a:endParaRPr lang="en-US" sz="920" dirty="0"/>
-          </a:p>
-        </p:txBody>
-      </p:sp>
-      <p:sp>
-        <p:nvSpPr>
-          <p:cNvPr id="59" name="Text 57"/>
-          <p:cNvSpPr/>
-          <p:nvPr/>
-        </p:nvSpPr>
-        <p:spPr>
-          <a:xfrm>
-            <a:off x="6781190" y="3886200"/>
-            <a:ext cx="4851806" cy="329184"/>
-          </a:xfrm>
-          <a:prstGeom prst="rect">
-            <a:avLst/>
-          </a:prstGeom>
-          <a:noFill/>
-          <a:ln/>
-        </p:spPr>
-        <p:txBody>
-          <a:bodyPr wrap="square" rtlCol="0" anchor="ctr"/>
+              <a:t>4. Unchanged 80% Reusable 5-Hop Core</a:t>
+            </a:r>
+            <a:endParaRPr lang="en-US" sz="820" dirty="0"/>
+          </a:p>
+        </p:txBody>
+      </p:sp>
+      <p:sp>
+        <p:nvSpPr>
+          <p:cNvPr id="35" name="Text 32"/>
+          <p:cNvSpPr/>
+          <p:nvPr/>
+        </p:nvSpPr>
+        <p:spPr>
+          <a:xfrm>
+            <a:off x="9170518" y="4992624"/>
+            <a:ext cx="2499055" cy="1024128"/>
+          </a:xfrm>
+          <a:prstGeom prst="rect">
+            <a:avLst/>
+          </a:prstGeom>
+          <a:noFill/>
+          <a:ln/>
+        </p:spPr>
+        <p:txBody>
+          <a:bodyPr wrap="square" rtlCol="0" anchor="t">
+            <a:normAutofit/>
+          </a:bodyPr>
           <a:lstStyle/>
           <a:p>
             <a:pPr indent="0" marL="0">
               <a:buNone/>
             </a:pPr>
             <a:r>
-              <a:rPr lang="en-US" sz="1140" b="1" dirty="0">
-                <a:solidFill>
-                  <a:srgbClr val="3C4043"/>
-                </a:solidFill>
-                <a:latin typeface="Google Sans" pitchFamily="34" charset="0"/>
-                <a:ea typeface="Google Sans" pitchFamily="34" charset="-122"/>
-                <a:cs typeface="Google Sans" pitchFamily="34" charset="-120"/>
-              </a:rPr>
-              <a:t>Flexible Sovereign Model Hosting</a:t>
-            </a:r>
-            <a:endParaRPr lang="en-US" sz="1140" dirty="0"/>
-          </a:p>
-        </p:txBody>
-      </p:sp>
-      <p:sp>
-        <p:nvSpPr>
-          <p:cNvPr id="60" name="Shape 58"/>
-          <p:cNvSpPr/>
-          <p:nvPr/>
-        </p:nvSpPr>
-        <p:spPr>
-          <a:xfrm>
-            <a:off x="6342278" y="4270248"/>
-            <a:ext cx="5290718" cy="9144"/>
-          </a:xfrm>
-          <a:prstGeom prst="rect">
-            <a:avLst/>
-          </a:prstGeom>
-          <a:solidFill>
-            <a:srgbClr val="DADCE0"/>
-          </a:solidFill>
-          <a:ln/>
-        </p:spPr>
-      </p:sp>
-      <p:sp>
-        <p:nvSpPr>
-          <p:cNvPr id="61" name="Text 59"/>
-          <p:cNvSpPr/>
-          <p:nvPr/>
-        </p:nvSpPr>
-        <p:spPr>
-          <a:xfrm>
-            <a:off x="6342278" y="4325112"/>
-            <a:ext cx="5290718" cy="850392"/>
-          </a:xfrm>
-          <a:prstGeom prst="rect">
-            <a:avLst/>
-          </a:prstGeom>
-          <a:noFill/>
-          <a:ln/>
-        </p:spPr>
-        <p:txBody>
-          <a:bodyPr wrap="square" rtlCol="0" anchor="t"/>
-          <a:lstStyle/>
-          <a:p>
-            <a:pPr indent="0" marL="0">
-              <a:buNone/>
-            </a:pPr>
-            <a:r>
-              <a:rPr lang="en-US" sz="980" dirty="0">
+              <a:rPr lang="en-US" sz="740" dirty="0">
                 <a:solidFill>
                   <a:srgbClr val="5F6368"/>
                 </a:solidFill>
@@ -20760,177 +21913,15 @@
                 <a:ea typeface="Roboto" pitchFamily="34" charset="-122"/>
                 <a:cs typeface="Roboto" pitchFamily="34" charset="-120"/>
               </a:rPr>
-              <a:t>Tenants can run Gemini 2.5 Pro on Provisioned Throughput inside VPC-SC or deploy air-gapped Gemma 3 (27B) on a private GKE GPU node pool (172.16.0.2/28, zero public IPs).</a:t>
-            </a:r>
-            <a:endParaRPr lang="en-US" sz="980" dirty="0"/>
-          </a:p>
-        </p:txBody>
-      </p:sp>
-      <p:sp>
-        <p:nvSpPr>
-          <p:cNvPr id="62" name="Shape 60"/>
-          <p:cNvSpPr/>
-          <p:nvPr/>
-        </p:nvSpPr>
-        <p:spPr>
-          <a:xfrm>
-            <a:off x="6342278" y="5212080"/>
-            <a:ext cx="5290718" cy="493776"/>
-          </a:xfrm>
-          <a:prstGeom prst="roundRect">
-            <a:avLst>
-              <a:gd name="adj" fmla="val 11111"/>
-            </a:avLst>
-          </a:prstGeom>
-          <a:solidFill>
-            <a:srgbClr val="FFFFFF"/>
-          </a:solidFill>
-          <a:ln w="9525">
-            <a:solidFill>
-              <a:srgbClr val="DADCE0"/>
-            </a:solidFill>
-            <a:prstDash val="solid"/>
-          </a:ln>
-        </p:spPr>
-      </p:sp>
-      <p:sp>
-        <p:nvSpPr>
-          <p:cNvPr id="63" name="Shape 61"/>
-          <p:cNvSpPr/>
-          <p:nvPr/>
-        </p:nvSpPr>
-        <p:spPr>
-          <a:xfrm>
-            <a:off x="6342278" y="5212080"/>
-            <a:ext cx="54864" cy="493776"/>
-          </a:xfrm>
-          <a:prstGeom prst="rect">
-            <a:avLst/>
-          </a:prstGeom>
-          <a:solidFill>
-            <a:srgbClr val="34A853"/>
-          </a:solidFill>
-          <a:ln/>
-        </p:spPr>
-      </p:sp>
-      <p:sp>
-        <p:nvSpPr>
-          <p:cNvPr id="64" name="Text 62"/>
-          <p:cNvSpPr/>
-          <p:nvPr/>
-        </p:nvSpPr>
-        <p:spPr>
-          <a:xfrm>
-            <a:off x="6433718" y="5239512"/>
-            <a:ext cx="5162702" cy="438912"/>
-          </a:xfrm>
-          <a:prstGeom prst="rect">
-            <a:avLst/>
-          </a:prstGeom>
-          <a:noFill/>
-          <a:ln/>
-        </p:spPr>
-        <p:txBody>
-          <a:bodyPr wrap="square" rtlCol="0" anchor="ctr"/>
-          <a:lstStyle/>
-          <a:p>
-            <a:pPr indent="0" marL="0">
-              <a:buNone/>
-            </a:pPr>
-            <a:r>
-              <a:rPr lang="en-US" sz="750" b="1" dirty="0">
-                <a:solidFill>
-                  <a:srgbClr val="3C4043"/>
-                </a:solidFill>
-                <a:latin typeface="Google Sans" pitchFamily="34" charset="0"/>
-                <a:ea typeface="Google Sans" pitchFamily="34" charset="-122"/>
-                <a:cs typeface="Google Sans" pitchFamily="34" charset="-120"/>
-              </a:rPr>
-              <a:t>Cloud Stack: Private GKE Cluster (Gemma 3 27B IT on L4/A100 GPUs) + Vertex AI PT
-</a:t>
-            </a:r>
-            <a:pPr indent="0" marL="0">
-              <a:buNone/>
-            </a:pPr>
-            <a:r>
-              <a:rPr lang="en-US" sz="730" dirty="0">
-                <a:solidFill>
-                  <a:srgbClr val="5F6368"/>
-                </a:solidFill>
-                <a:latin typeface="Roboto" pitchFamily="34" charset="0"/>
-                <a:ea typeface="Roboto" pitchFamily="34" charset="-122"/>
-                <a:cs typeface="Roboto" pitchFamily="34" charset="-120"/>
-              </a:rPr>
-              <a:t>Target &amp; SLA: 100% Air-Gapped Model Weights &amp; Prompts Inside the Tenant’s Sovereign VPC</a:t>
-            </a:r>
-            <a:endParaRPr lang="en-US" sz="750" dirty="0"/>
-          </a:p>
-        </p:txBody>
-      </p:sp>
-      <p:sp>
-        <p:nvSpPr>
-          <p:cNvPr id="65" name="Shape 63"/>
-          <p:cNvSpPr/>
-          <p:nvPr/>
-        </p:nvSpPr>
-        <p:spPr>
-          <a:xfrm>
-            <a:off x="6342278" y="5760720"/>
-            <a:ext cx="5290718" cy="219456"/>
-          </a:xfrm>
-          <a:prstGeom prst="roundRect">
-            <a:avLst>
-              <a:gd name="adj" fmla="val 20833"/>
-            </a:avLst>
-          </a:prstGeom>
-          <a:solidFill>
-            <a:srgbClr val="E6F4EA"/>
-          </a:solidFill>
-          <a:ln/>
-        </p:spPr>
-      </p:sp>
-      <p:sp>
-        <p:nvSpPr>
-          <p:cNvPr id="66" name="Text 64"/>
-          <p:cNvSpPr/>
-          <p:nvPr/>
-        </p:nvSpPr>
-        <p:spPr>
-          <a:xfrm>
-            <a:off x="6397142" y="5760720"/>
-            <a:ext cx="5180990" cy="219456"/>
-          </a:xfrm>
-          <a:prstGeom prst="rect">
-            <a:avLst/>
-          </a:prstGeom>
-          <a:noFill/>
-          <a:ln/>
-        </p:spPr>
-        <p:txBody>
-          <a:bodyPr wrap="square" rtlCol="0" anchor="ctr"/>
-          <a:lstStyle/>
-          <a:p>
-            <a:pPr indent="0" marL="0">
-              <a:buNone/>
-            </a:pPr>
-            <a:r>
-              <a:rPr lang="en-US" sz="750" b="1" dirty="0">
-                <a:solidFill>
-                  <a:srgbClr val="0D652D"/>
-                </a:solidFill>
-                <a:latin typeface="Google Sans" pitchFamily="34" charset="0"/>
-                <a:ea typeface="Google Sans" pitchFamily="34" charset="-122"/>
-                <a:cs typeface="Google Sans" pitchFamily="34" charset="-120"/>
-              </a:rPr>
-              <a:t>Sovereign Model Inference</a:t>
-            </a:r>
-            <a:endParaRPr lang="en-US" sz="750" dirty="0"/>
-          </a:p>
-        </p:txBody>
-      </p:sp>
-      <p:sp>
-        <p:nvSpPr>
-          <p:cNvPr id="67" name="Shape 65"/>
+              <a:t>Both Pattern B options run the identical core-cymbal-agent/ Python governance pipeline wrapped by the Terraform 3.6 Sovereign Shell.</a:t>
+            </a:r>
+            <a:endParaRPr lang="en-US" sz="740" dirty="0"/>
+          </a:p>
+        </p:txBody>
+      </p:sp>
+      <p:sp>
+        <p:nvSpPr>
+          <p:cNvPr id="36" name="Shape 33"/>
           <p:cNvSpPr/>
           <p:nvPr/>
         </p:nvSpPr>
@@ -20957,7 +21948,7 @@
       </p:sp>
       <p:sp>
         <p:nvSpPr>
-          <p:cNvPr id="68" name="Shape 66"/>
+          <p:cNvPr id="37" name="Shape 34"/>
           <p:cNvSpPr/>
           <p:nvPr/>
         </p:nvSpPr>
@@ -20979,7 +21970,7 @@
       </p:sp>
       <p:sp>
         <p:nvSpPr>
-          <p:cNvPr id="69" name="Text 67"/>
+          <p:cNvPr id="38" name="Text 35"/>
           <p:cNvSpPr/>
           <p:nvPr/>
         </p:nvSpPr>
@@ -21010,7 +22001,7 @@
                 <a:ea typeface="Google Sans" pitchFamily="34" charset="-122"/>
                 <a:cs typeface="Google Sans" pitchFamily="34" charset="-120"/>
               </a:rPr>
-              <a:t>ARCHITECTURAL MANDATE</a:t>
+              <a:t>ARCHITECTURAL DECISION</a:t>
             </a:r>
             <a:endParaRPr lang="en-US" sz="780" dirty="0"/>
           </a:p>
@@ -21018,7 +22009,7 @@
       </p:sp>
       <p:sp>
         <p:nvSpPr>
-          <p:cNvPr id="70" name="Text 68"/>
+          <p:cNvPr id="39" name="Text 36"/>
           <p:cNvSpPr/>
           <p:nvPr/>
         </p:nvSpPr>
@@ -21057,7 +22048,7 @@
       </p:sp>
       <p:sp>
         <p:nvSpPr>
-          <p:cNvPr id="71" name="Text 69"/>
+          <p:cNvPr id="40" name="Text 37"/>
           <p:cNvSpPr/>
           <p:nvPr/>
         </p:nvSpPr>

--- a/slides/doc-mt-03-editable-slides.pptx
+++ b/slides/doc-mt-03-editable-slides.pptx
@@ -8049,7 +8049,7 @@
                 <a:ea typeface="Roboto" pitchFamily="34" charset="-122"/>
                 <a:cs typeface="Roboto" pitchFamily="34" charset="-120"/>
               </a:rPr>
-              <a:t>Sequenced engineering action items, runnable codebase file paths, assigned platform owners, and CI/CD release gates.</a:t>
+              <a:t>Terraform 3.6 silo blueprint, VPC-SC perimeter, Cloud KMS CMEK keys and run_silo_security_tests.py (6/6) before WS4 unifies both tiers.</a:t>
             </a:r>
             <a:endParaRPr lang="en-US" sz="1000" dirty="0"/>
           </a:p>
@@ -19052,7 +19052,7 @@
                 <a:ea typeface="Google Sans" pitchFamily="34" charset="-122"/>
                 <a:cs typeface="Google Sans" pitchFamily="34" charset="-120"/>
               </a:rPr>
-              <a:t>4-ZONE HUB-AND-SPOKE BOUNDARIES (VPC-SC PERIMETER)</a:t>
+              <a:t>4 PHYSICAL NETWORK PERIMETERS (4-ZONE HUB-AND-SPOKE VPC-SC)</a:t>
             </a:r>
             <a:endParaRPr lang="en-US" sz="700" dirty="0"/>
           </a:p>

--- a/slides/doc-mt-03-editable-slides.pptx
+++ b/slides/doc-mt-03-editable-slides.pptx
@@ -622,7 +622,7 @@
           <a:p>
             <a:r>
               <a:rPr lang="en-US" dirty="0"/>
-              <a:t>Here is the live Google Cloud Console proof from our sovereign sandbox environment. On the left, you can see the active Cloud KMS customer-managed keyring, CryptoKeyVersion state toggles, and Cloud Logging receipts; on the right, the telemetry cards confirm that all six sovereign perimeter and sub-sixty-second kill-switch tests pass with 100% compliance.</a:t>
+              <a:t>Here is the live Dual-Plane verification proof from our sovereign sandbox environment. On the left, you can see the active Cloud KMS customer-managed keyring, CryptoKeyVersion state toggles, and sovereign BigQuery CMEK datasets; on the right, the telemetry cards confirm that all 6/6 Intra-Cloud sovereign perimeter tests and all 10/10 Inter-Cloud Pattern B SaaS MCP and live EC2 CMEK kill-switch assertions pass with 100% compliance.</a:t>
             </a:r>
             <a:endParaRPr lang="en-US" dirty="0"/>
           </a:p>
@@ -4679,7 +4679,7 @@
                 <a:ea typeface="Roboto" pitchFamily="34" charset="-122"/>
                 <a:cs typeface="Roboto" pitchFamily="34" charset="-120"/>
               </a:rPr>
-              <a:t>• Project: cymbal-build-sandbox (#887605034827) • Region: us-west1</a:t>
+              <a:t>• Project: cymbal-build-sandbox (#887605034827)</a:t>
             </a:r>
             <a:endParaRPr lang="en-US" sz="780" dirty="0"/>
           </a:p>
@@ -4696,7 +4696,7 @@
                 <a:ea typeface="Roboto" pitchFamily="34" charset="-122"/>
                 <a:cs typeface="Roboto" pitchFamily="34" charset="-120"/>
               </a:rPr>
-              <a:t>• Dataset: cymbal_silo_finvault_usw1.pattern_b_silo_finvault_cmek_vault</a:t>
+              <a:t>• Dataset: cymbal_silo_finvault_usw1 (finvault_cmek_vault)</a:t>
             </a:r>
             <a:endParaRPr lang="en-US" sz="780" dirty="0"/>
           </a:p>
@@ -4713,7 +4713,7 @@
                 <a:ea typeface="Roboto" pitchFamily="34" charset="-122"/>
                 <a:cs typeface="Roboto" pitchFamily="34" charset="-120"/>
               </a:rPr>
-              <a:t>• CMEK: finvault-silo-cmek (keyring cymbal-multi-tenant-kr)</a:t>
+              <a:t>• CMEK: finvault-silo-cmek (cymbal-multi-tenant-kr)</a:t>
             </a:r>
             <a:endParaRPr lang="en-US" sz="780" dirty="0"/>
           </a:p>
@@ -4855,7 +4855,7 @@
                 <a:ea typeface="Google Sans" pitchFamily="34" charset="-122"/>
                 <a:cs typeface="Google Sans" pitchFamily="34" charset="-120"/>
               </a:rPr>
-              <a:t>LIVE GCP CONSOLE CAPTURE 02 • CLOUD KMS KEYRING &amp; P-256 SIGNING</a:t>
+              <a:t>LIVE GCP CONSOLE CAPTURE 02 • KMS KEYRING &amp; 10-SAAS SOVEREIGN MCP</a:t>
             </a:r>
             <a:endParaRPr lang="en-US" sz="820" dirty="0"/>
           </a:p>
@@ -4945,7 +4945,7 @@
                 <a:ea typeface="Google Sans" pitchFamily="34" charset="-122"/>
                 <a:cs typeface="Google Sans" pitchFamily="34" charset="-120"/>
               </a:rPr>
-              <a:t>Cloud KMS keyring verifying &lt;60s cryptographic kill-switch &amp; asymmetric ECDSA P-256 key</a:t>
+              <a:t>Cloud KMS keyring verifying &lt;60s cryptographic kill-switch, ECDSA P-256 key &amp; 10/10 Sovereign SaaS MCP flows</a:t>
             </a:r>
             <a:endParaRPr lang="en-US" sz="860" dirty="0"/>
           </a:p>
@@ -4984,7 +4984,7 @@
                 <a:ea typeface="Roboto" pitchFamily="34" charset="-122"/>
                 <a:cs typeface="Roboto" pitchFamily="34" charset="-120"/>
               </a:rPr>
-              <a:t>• Keys: finvault-silo-cmek • retailstream-silo-cmek • medcore-revoked-cmek</a:t>
+              <a:t>• Keys: finvault-silo-cmek • retailstream-silo-cmek</a:t>
             </a:r>
             <a:endParaRPr lang="en-US" sz="780" dirty="0"/>
           </a:p>
@@ -5001,7 +5001,7 @@
                 <a:ea typeface="Roboto" pitchFamily="34" charset="-122"/>
                 <a:cs typeface="Roboto" pitchFamily="34" charset="-120"/>
               </a:rPr>
-              <a:t>• Signing: adk-agent-signing-key (ECDSA P-256 asymmetric)</a:t>
+              <a:t>• Intra-Cloud: run_silo_security_tests.py (6/6 • HTTP 423)</a:t>
             </a:r>
             <a:endParaRPr lang="en-US" sz="780" dirty="0"/>
           </a:p>
@@ -5018,7 +5018,7 @@
                 <a:ea typeface="Roboto" pitchFamily="34" charset="-122"/>
                 <a:cs typeface="Roboto" pitchFamily="34" charset="-120"/>
               </a:rPr>
-              <a:t>• Suite: run_silo_security_tests.py — 6/6 PASS, HTTP 423 on revoke</a:t>
+              <a:t>• Inter-Cloud: 10/10 Silo SaaS MCP &amp; :3001..3010 PASS</a:t>
             </a:r>
             <a:endParaRPr lang="en-US" sz="780" dirty="0"/>
           </a:p>
@@ -5740,7 +5740,7 @@
                 <a:ea typeface="Google Sans" pitchFamily="34" charset="-122"/>
                 <a:cs typeface="Google Sans" pitchFamily="34" charset="-120"/>
               </a:rPr>
-              <a:t>PROOF 04 • PRIVATE GKE GEMMA 3 (27B)</a:t>
+              <a:t>PROOF 04 • GEMMA 3 27B &amp; 10-SAAS SILO MCP</a:t>
             </a:r>
             <a:endParaRPr lang="en-US" sz="740" dirty="0"/>
           </a:p>
@@ -5779,7 +5779,7 @@
                 <a:ea typeface="Google Sans" pitchFamily="34" charset="-122"/>
                 <a:cs typeface="Google Sans" pitchFamily="34" charset="-120"/>
               </a:rPr>
-              <a:t>Air-Gapped Open-Weights Inference Option</a:t>
+              <a:t>Air-Gapped Gemma 3 &amp; 10/10 Sovereign SaaS Flows</a:t>
             </a:r>
             <a:endParaRPr lang="en-US" sz="1050" dirty="0"/>
           </a:p>
@@ -5818,7 +5818,7 @@
                 <a:ea typeface="Roboto" pitchFamily="34" charset="-122"/>
                 <a:cs typeface="Roboto" pitchFamily="34" charset="-120"/>
               </a:rPr>
-              <a:t>Supports self-hosted Gemma 3 27B on Private GKE via Restricted VIP 199.36.153.4/30 with zero internet egress.</a:t>
+              <a:t>Pairs Private GKE Gemma 3 27B (199.36.153.4/30) with 10/10 Pattern B Inter-Cloud AWS AgentCore MCP &amp; :3001..3010 CMEK kill-switch assertions.</a:t>
             </a:r>
             <a:endParaRPr lang="en-US" sz="860" dirty="0"/>
           </a:p>
@@ -13181,7 +13181,7 @@
                           <a:ea typeface="Roboto" pitchFamily="34" charset="-122"/>
                           <a:cs typeface="Roboto" pitchFamily="34" charset="-120"/>
                         </a:rPr>
-                        <a:t>Single shared GCP project (ramp-portal-dev); logical software isolation</a:t>
+                        <a:t>Single shared GCP project (cymbal-control-plane); logical software isolation</a:t>
                       </a:r>
                       <a:endParaRPr lang="en-US" sz="850" dirty="0">
                         <a:latin typeface="Roboto" charset="0"/>
@@ -20409,7 +20409,7 @@
                 <a:ea typeface="Google Sans" pitchFamily="34" charset="-122"/>
                 <a:cs typeface="Google Sans" pitchFamily="34" charset="-120"/>
               </a:rPr>
-              <a:t>VERIFIED • 56 Editable Shapes • 23 Connectors • GCP: cymbal-build-sandbox (#887605034827)</a:t>
+              <a:t>VERIFIED • 56 Editable Shapes • 23 Connectors • GCP: cymbal-build-sandbox</a:t>
             </a:r>
             <a:endParaRPr lang="en-US" sz="700" dirty="0"/>
           </a:p>

--- a/slides/doc-mt-03-editable-slides.pptx
+++ b/slides/doc-mt-03-editable-slides.pptx
@@ -2746,7 +2746,7 @@
                 <a:ea typeface="Roboto" pitchFamily="34" charset="-122"/>
                 <a:cs typeface="Roboto" pitchFamily="34" charset="-120"/>
               </a:rPr>
-              <a:t>80% Reusable ADK Codebase, 20% Dedicated Cloud Perimeter: Pattern B deploys the exact same 5-hop Python ADK 2.0 runtime inside a dedicated per-tenant Google Cloud project (cymbal-finvault-silo-prod).</a:t>
+              <a:t>80% Reusable ADK Codebase, 20% Dedicated Cloud Perimeter: Pattern B deploys the exact same 5-hop Python ADK runtime inside a dedicated per-tenant Google Cloud project (cymbal-finvault-silo-prod).</a:t>
             </a:r>
             <a:endParaRPr lang="en-US" sz="720" dirty="0"/>
           </a:p>
@@ -4009,7 +4009,7 @@
                 <a:ea typeface="Roboto" pitchFamily="34" charset="-122"/>
                 <a:cs typeface="Roboto" pitchFamily="34" charset="-120"/>
               </a:rPr>
-              <a:t>Multi-Tenant Agentic AI on Google Cloud • Vertex AI Agent Engine, Gemini Enterprise &amp; ADK 2.0  •  </a:t>
+              <a:t>Multi-Tenant Agentic AI on Google Cloud • Vertex AI Agent Engine, Gemini Enterprise &amp; ADK  •  </a:t>
             </a:r>
             <a:pPr algn="l" indent="0" marL="0">
               <a:buNone/>
@@ -8709,7 +8709,7 @@
                 <a:ea typeface="Google Sans" pitchFamily="34" charset="-122"/>
                 <a:cs typeface="Google Sans" pitchFamily="34" charset="-120"/>
               </a:rPr>
-              <a:t>Cloud Stack: core-cymbal-agent/ (Shared Python ADK 2.0) + 3.6-terraform-silo-blueprint
+              <a:t>Cloud Stack: core-cymbal-agent/ (Shared Python ADK) + 3.6-terraform-silo-blueprint
 </a:t>
             </a:r>
             <a:pPr indent="0" marL="0">
@@ -10069,7 +10069,7 @@
                 <a:ea typeface="Roboto" pitchFamily="34" charset="-122"/>
                 <a:cs typeface="Roboto" pitchFamily="34" charset="-120"/>
               </a:rPr>
-              <a:t>Multi-Tenant Agentic AI on Google Cloud • Vertex AI Agent Engine, Gemini Enterprise &amp; ADK 2.0  •  </a:t>
+              <a:t>Multi-Tenant Agentic AI on Google Cloud • Vertex AI Agent Engine, Gemini Enterprise &amp; ADK  •  </a:t>
             </a:r>
             <a:pPr algn="l" indent="0" marL="0">
               <a:buNone/>
@@ -11912,7 +11912,7 @@
                 <a:ea typeface="Roboto" pitchFamily="34" charset="-122"/>
                 <a:cs typeface="Roboto" pitchFamily="34" charset="-120"/>
               </a:rPr>
-              <a:t>BeyondCorp mTLS, IAM PAB, VPC-SC, Cloud KMS CMEK (HTTP 423 Locked), Model Armor, Cloud DLP, AlloyDB, and BigQuery wrap the unchanged 80% reusable ADK 2.0 core.</a:t>
+              <a:t>BeyondCorp mTLS, IAM PAB, VPC-SC, Cloud KMS CMEK (HTTP 423 Locked), Model Armor, Cloud DLP, AlloyDB, and BigQuery wrap the unchanged 80% reusable ADK core.</a:t>
             </a:r>
             <a:endParaRPr lang="en-US" sz="980" dirty="0"/>
           </a:p>
@@ -12013,7 +12013,7 @@
                 <a:ea typeface="Roboto" pitchFamily="34" charset="-122"/>
                 <a:cs typeface="Roboto" pitchFamily="34" charset="-120"/>
               </a:rPr>
-              <a:t>Target &amp; SLA: 80% Shared ADK 2.0 Code + 20% Declarative Sovereign Shell • 6/6 Sovereign Security Tests PASS</a:t>
+              <a:t>Target &amp; SLA: 80% Shared ADK Code + 20% Declarative Sovereign Shell • 6/6 Sovereign Security Tests PASS</a:t>
             </a:r>
             <a:endParaRPr lang="en-US" sz="750" dirty="0"/>
           </a:p>
@@ -12254,7 +12254,7 @@
                 <a:ea typeface="Roboto" pitchFamily="34" charset="-122"/>
                 <a:cs typeface="Roboto" pitchFamily="34" charset="-120"/>
               </a:rPr>
-              <a:t>Multi-Tenant Agentic AI on Google Cloud • Vertex AI Agent Engine, Gemini Enterprise &amp; ADK 2.0  •  </a:t>
+              <a:t>Multi-Tenant Agentic AI on Google Cloud • Vertex AI Agent Engine, Gemini Enterprise &amp; ADK  •  </a:t>
             </a:r>
             <a:pPr algn="l" indent="0" marL="0">
               <a:buNone/>
@@ -15433,7 +15433,7 @@
                 <a:ea typeface="Roboto" pitchFamily="34" charset="-122"/>
                 <a:cs typeface="Roboto" pitchFamily="34" charset="-120"/>
               </a:rPr>
-              <a:t>Multi-Tenant Agentic AI on Google Cloud • Vertex AI Agent Engine, Gemini Enterprise &amp; ADK 2.0  •  </a:t>
+              <a:t>Multi-Tenant Agentic AI on Google Cloud • Vertex AI Agent Engine, Gemini Enterprise &amp; ADK  •  </a:t>
             </a:r>
             <a:pPr algn="l" indent="0" marL="0">
               <a:buNone/>
@@ -19013,7 +19013,7 @@
                 <a:ea typeface="Google Sans" pitchFamily="34" charset="-122"/>
                 <a:cs typeface="Google Sans" pitchFamily="34" charset="-120"/>
               </a:rPr>
-              <a:t>How do we satisfy strict banking (OCC/FDIC), healthcare (HIPAA), and public-sector regulators that prohibit shared compute, shared storage, or provider-owned keys—while reusing 80% of our core ADK 2.0 agent codebase?</a:t>
+              <a:t>How do we satisfy strict banking (OCC/FDIC), healthcare (HIPAA), and public-sector regulators that prohibit shared compute, shared storage, or provider-owned keys—while reusing 80% of our core ADK agent codebase?</a:t>
             </a:r>
             <a:endParaRPr lang="en-US" sz="810" dirty="0"/>
           </a:p>
@@ -20409,7 +20409,7 @@
                 <a:ea typeface="Google Sans" pitchFamily="34" charset="-122"/>
                 <a:cs typeface="Google Sans" pitchFamily="34" charset="-120"/>
               </a:rPr>
-              <a:t>VERIFIED • 56 Editable Shapes • 23 Connectors • GCP: cymbal-build-sandbox</a:t>
+              <a:t>VERIFIED • 56 Editable Shapes • 23 Connectors • GCP: cymbal-build-sandbox (#887605034827)</a:t>
             </a:r>
             <a:endParaRPr lang="en-US" sz="700" dirty="0"/>
           </a:p>
@@ -36016,7 +36016,7 @@
                 <a:ea typeface="Roboto" pitchFamily="34" charset="-122"/>
                 <a:cs typeface="Roboto" pitchFamily="34" charset="-120"/>
               </a:rPr>
-              <a:t>Multi-Tenant Agentic AI on Google Cloud • Vertex AI Agent Engine, Gemini Enterprise &amp; ADK 2.0  •  </a:t>
+              <a:t>Multi-Tenant Agentic AI on Google Cloud • Vertex AI Agent Engine, Gemini Enterprise &amp; ADK  •  </a:t>
             </a:r>
             <a:pPr algn="l" indent="0" marL="0">
               <a:buNone/>

--- a/slides/doc-mt-03-editable-slides.pptx
+++ b/slides/doc-mt-03-editable-slides.pptx
@@ -4398,7 +4398,7 @@
                 <a:ea typeface="Google Sans" pitchFamily="34" charset="-122"/>
                 <a:cs typeface="Google Sans" pitchFamily="34" charset="-120"/>
               </a:rPr>
-              <a:t>WS3 • ACT III FORENSIC VERIFICATION AUDIT: GROUNDED GCP CONSOLE PROOF &amp; 20/20 LOGS</a:t>
+              <a:t>WS3 • ACT III FORENSIC VERIFICATION AUDIT: GROUNDED GCP TELEMETRY &amp; 20/20 LOGS</a:t>
             </a:r>
             <a:endParaRPr lang="en-US" sz="1020" dirty="0"/>
           </a:p>
@@ -4550,46 +4550,22 @@
                 <a:ea typeface="Google Sans" pitchFamily="34" charset="-122"/>
                 <a:cs typeface="Google Sans" pitchFamily="34" charset="-120"/>
               </a:rPr>
-              <a:t>LIVE GCP CONSOLE CAPTURE 01 • PATTERN B SOVEREIGN CMEK VAULT</a:t>
+              <a:t>LIVE GCP VERIFICATION 01 • PATTERN B SOVEREIGN CMEK VAULT</a:t>
             </a:r>
             <a:endParaRPr lang="en-US" sz="820" dirty="0"/>
           </a:p>
         </p:txBody>
       </p:sp>
-      <p:pic>
-        <p:nvPicPr>
-          <p:cNvPr id="20" name="Image 0" descr="preencoded.png">    </p:cNvPr>
-          <p:cNvPicPr>
-            <a:picLocks noChangeAspect="1"/>
-          </p:cNvPicPr>
-          <p:nvPr/>
-        </p:nvPicPr>
-        <p:blipFill>
-          <a:blip r:embed="rId1"/>
-          <a:stretch>
-            <a:fillRect/>
-          </a:stretch>
-        </p:blipFill>
+      <p:sp>
+        <p:nvSpPr>
+          <p:cNvPr id="20" name="Shape 18"/>
+          <p:cNvSpPr/>
+          <p:nvPr/>
+        </p:nvSpPr>
         <p:spPr>
           <a:xfrm>
             <a:off x="493776" y="1097280"/>
-            <a:ext cx="3639312" cy="2048256"/>
-          </a:xfrm>
-          <a:prstGeom prst="rect">
-            <a:avLst/>
-          </a:prstGeom>
-        </p:spPr>
-      </p:pic>
-      <p:sp>
-        <p:nvSpPr>
-          <p:cNvPr id="21" name="Shape 18"/>
-          <p:cNvSpPr/>
-          <p:nvPr/>
-        </p:nvSpPr>
-        <p:spPr>
-          <a:xfrm>
-            <a:off x="4242816" y="1097280"/>
-            <a:ext cx="2798064" cy="2048256"/>
+            <a:ext cx="6565392" cy="2048256"/>
           </a:xfrm>
           <a:prstGeom prst="roundRect">
             <a:avLst>
@@ -4609,14 +4585,14 @@
       </p:sp>
       <p:sp>
         <p:nvSpPr>
-          <p:cNvPr id="22" name="Text 19"/>
-          <p:cNvSpPr/>
-          <p:nvPr/>
-        </p:nvSpPr>
-        <p:spPr>
-          <a:xfrm>
-            <a:off x="4334256" y="1170432"/>
-            <a:ext cx="2615184" cy="658368"/>
+          <p:cNvPr id="21" name="Text 19"/>
+          <p:cNvSpPr/>
+          <p:nvPr/>
+        </p:nvSpPr>
+        <p:spPr>
+          <a:xfrm>
+            <a:off x="621792" y="1170432"/>
+            <a:ext cx="6309360" cy="512064"/>
           </a:xfrm>
           <a:prstGeom prst="rect">
             <a:avLst/>
@@ -4632,7 +4608,7 @@
               <a:buNone/>
             </a:pPr>
             <a:r>
-              <a:rPr lang="en-US" sz="860" b="1" dirty="0">
+              <a:rPr lang="en-US" sz="920" b="1" dirty="0">
                 <a:solidFill>
                   <a:srgbClr val="3C4043"/>
                 </a:solidFill>
@@ -4642,20 +4618,20 @@
               </a:rPr>
               <a:t>Dedicated sovereign dataset encrypted with customer-managed key finvault-silo-cmek</a:t>
             </a:r>
-            <a:endParaRPr lang="en-US" sz="860" dirty="0"/>
-          </a:p>
-        </p:txBody>
-      </p:sp>
-      <p:sp>
-        <p:nvSpPr>
-          <p:cNvPr id="23" name="Text 20"/>
-          <p:cNvSpPr/>
-          <p:nvPr/>
-        </p:nvSpPr>
-        <p:spPr>
-          <a:xfrm>
-            <a:off x="4334256" y="1865376"/>
-            <a:ext cx="2615184" cy="950976"/>
+            <a:endParaRPr lang="en-US" sz="920" dirty="0"/>
+          </a:p>
+        </p:txBody>
+      </p:sp>
+      <p:sp>
+        <p:nvSpPr>
+          <p:cNvPr id="22" name="Text 20"/>
+          <p:cNvSpPr/>
+          <p:nvPr/>
+        </p:nvSpPr>
+        <p:spPr>
+          <a:xfrm>
+            <a:off x="621792" y="1719072"/>
+            <a:ext cx="6309360" cy="1060704"/>
           </a:xfrm>
           <a:prstGeom prst="rect">
             <a:avLst/>
@@ -4671,7 +4647,7 @@
               <a:buNone/>
             </a:pPr>
             <a:r>
-              <a:rPr lang="en-US" sz="780" dirty="0">
+              <a:rPr lang="en-US" sz="840" dirty="0">
                 <a:solidFill>
                   <a:srgbClr val="5F6368"/>
                 </a:solidFill>
@@ -4681,14 +4657,14 @@
               </a:rPr>
               <a:t>• Project: cymbal-build-sandbox (#887605034827)</a:t>
             </a:r>
-            <a:endParaRPr lang="en-US" sz="780" dirty="0"/>
+            <a:endParaRPr lang="en-US" sz="840" dirty="0"/>
           </a:p>
           <a:p>
             <a:pPr indent="0" marL="0">
               <a:buNone/>
             </a:pPr>
             <a:r>
-              <a:rPr lang="en-US" sz="780" dirty="0">
+              <a:rPr lang="en-US" sz="840" dirty="0">
                 <a:solidFill>
                   <a:srgbClr val="5F6368"/>
                 </a:solidFill>
@@ -4698,14 +4674,14 @@
               </a:rPr>
               <a:t>• Dataset: cymbal_silo_finvault_usw1 (finvault_cmek_vault)</a:t>
             </a:r>
-            <a:endParaRPr lang="en-US" sz="780" dirty="0"/>
+            <a:endParaRPr lang="en-US" sz="840" dirty="0"/>
           </a:p>
           <a:p>
             <a:pPr indent="0" marL="0">
               <a:buNone/>
             </a:pPr>
             <a:r>
-              <a:rPr lang="en-US" sz="780" dirty="0">
+              <a:rPr lang="en-US" sz="840" dirty="0">
                 <a:solidFill>
                   <a:srgbClr val="5F6368"/>
                 </a:solidFill>
@@ -4715,14 +4691,14 @@
               </a:rPr>
               <a:t>• CMEK: finvault-silo-cmek (cymbal-multi-tenant-kr)</a:t>
             </a:r>
-            <a:endParaRPr lang="en-US" sz="780" dirty="0"/>
+            <a:endParaRPr lang="en-US" sz="840" dirty="0"/>
           </a:p>
           <a:p>
             <a:pPr indent="0" marL="0">
               <a:buNone/>
             </a:pPr>
             <a:r>
-              <a:rPr lang="en-US" sz="780" dirty="0">
+              <a:rPr lang="en-US" sz="840" dirty="0">
                 <a:solidFill>
                   <a:srgbClr val="5F6368"/>
                 </a:solidFill>
@@ -4730,22 +4706,22 @@
                 <a:ea typeface="Roboto" pitchFamily="34" charset="-122"/>
                 <a:cs typeface="Roboto" pitchFamily="34" charset="-120"/>
               </a:rPr>
-              <a:t>• Aspect Ratio: Native 16:9 (1920×1080)</a:t>
-            </a:r>
-            <a:endParaRPr lang="en-US" sz="780" dirty="0"/>
-          </a:p>
-        </p:txBody>
-      </p:sp>
-      <p:sp>
-        <p:nvSpPr>
-          <p:cNvPr id="24" name="Text 21"/>
-          <p:cNvSpPr/>
-          <p:nvPr/>
-        </p:nvSpPr>
-        <p:spPr>
-          <a:xfrm>
-            <a:off x="4334256" y="2871216"/>
-            <a:ext cx="2615184" cy="201168"/>
+              <a:t>• Artifact: pattern_b_siloed_service.py</a:t>
+            </a:r>
+            <a:endParaRPr lang="en-US" sz="840" dirty="0"/>
+          </a:p>
+        </p:txBody>
+      </p:sp>
+      <p:sp>
+        <p:nvSpPr>
+          <p:cNvPr id="23" name="Text 21"/>
+          <p:cNvSpPr/>
+          <p:nvPr/>
+        </p:nvSpPr>
+        <p:spPr>
+          <a:xfrm>
+            <a:off x="621792" y="2852928"/>
+            <a:ext cx="6309360" cy="201168"/>
           </a:xfrm>
           <a:prstGeom prst="rect">
             <a:avLst/>
@@ -4761,7 +4737,7 @@
               <a:buNone/>
             </a:pPr>
             <a:r>
-              <a:rPr lang="en-US" sz="680" dirty="0">
+              <a:rPr lang="en-US" sz="720" dirty="0">
                 <a:solidFill>
                   <a:srgbClr val="5F6368"/>
                 </a:solidFill>
@@ -4769,15 +4745,15 @@
                 <a:ea typeface="Courier New" pitchFamily="34" charset="-122"/>
                 <a:cs typeface="Courier New" pitchFamily="34" charset="-120"/>
               </a:rPr>
-              <a:t>Source: screenshots/cloud-console/gcp_console_04_bigquery_studio_pattern_b_cmek.png</a:t>
-            </a:r>
-            <a:endParaRPr lang="en-US" sz="680" dirty="0"/>
-          </a:p>
-        </p:txBody>
-      </p:sp>
-      <p:sp>
-        <p:nvSpPr>
-          <p:cNvPr id="25" name="Shape 22"/>
+              <a:t>Source Module: workstream-3-pattern-b-siloed/3.3-solution-implementation/pattern_b_siloed_service.py</a:t>
+            </a:r>
+            <a:endParaRPr lang="en-US" sz="720" dirty="0"/>
+          </a:p>
+        </p:txBody>
+      </p:sp>
+      <p:sp>
+        <p:nvSpPr>
+          <p:cNvPr id="24" name="Shape 22"/>
           <p:cNvSpPr/>
           <p:nvPr/>
         </p:nvSpPr>
@@ -4804,7 +4780,7 @@
       </p:sp>
       <p:sp>
         <p:nvSpPr>
-          <p:cNvPr id="26" name="Shape 23"/>
+          <p:cNvPr id="25" name="Shape 23"/>
           <p:cNvSpPr/>
           <p:nvPr/>
         </p:nvSpPr>
@@ -4824,7 +4800,7 @@
       </p:sp>
       <p:sp>
         <p:nvSpPr>
-          <p:cNvPr id="27" name="Text 24"/>
+          <p:cNvPr id="26" name="Text 24"/>
           <p:cNvSpPr/>
           <p:nvPr/>
         </p:nvSpPr>
@@ -4855,46 +4831,22 @@
                 <a:ea typeface="Google Sans" pitchFamily="34" charset="-122"/>
                 <a:cs typeface="Google Sans" pitchFamily="34" charset="-120"/>
               </a:rPr>
-              <a:t>LIVE GCP CONSOLE CAPTURE 02 • KMS KEYRING &amp; 10-SAAS SOVEREIGN MCP</a:t>
+              <a:t>LIVE GCP VERIFICATION 02 • KMS KEYRING &amp; 10-SAAS SOVEREIGN MCP</a:t>
             </a:r>
             <a:endParaRPr lang="en-US" sz="820" dirty="0"/>
           </a:p>
         </p:txBody>
       </p:sp>
-      <p:pic>
-        <p:nvPicPr>
-          <p:cNvPr id="28" name="Image 1" descr="preencoded.png">    </p:cNvPr>
-          <p:cNvPicPr>
-            <a:picLocks noChangeAspect="1"/>
-          </p:cNvPicPr>
-          <p:nvPr/>
-        </p:nvPicPr>
-        <p:blipFill>
-          <a:blip r:embed="rId2"/>
-          <a:stretch>
-            <a:fillRect/>
-          </a:stretch>
-        </p:blipFill>
+      <p:sp>
+        <p:nvSpPr>
+          <p:cNvPr id="27" name="Shape 25"/>
+          <p:cNvSpPr/>
+          <p:nvPr/>
+        </p:nvSpPr>
         <p:spPr>
           <a:xfrm>
             <a:off x="493776" y="3858768"/>
-            <a:ext cx="3639312" cy="2048256"/>
-          </a:xfrm>
-          <a:prstGeom prst="rect">
-            <a:avLst/>
-          </a:prstGeom>
-        </p:spPr>
-      </p:pic>
-      <p:sp>
-        <p:nvSpPr>
-          <p:cNvPr id="29" name="Shape 25"/>
-          <p:cNvSpPr/>
-          <p:nvPr/>
-        </p:nvSpPr>
-        <p:spPr>
-          <a:xfrm>
-            <a:off x="4242816" y="3858768"/>
-            <a:ext cx="2798064" cy="2048256"/>
+            <a:ext cx="6565392" cy="2048256"/>
           </a:xfrm>
           <a:prstGeom prst="roundRect">
             <a:avLst>
@@ -4914,14 +4866,14 @@
       </p:sp>
       <p:sp>
         <p:nvSpPr>
-          <p:cNvPr id="30" name="Text 26"/>
-          <p:cNvSpPr/>
-          <p:nvPr/>
-        </p:nvSpPr>
-        <p:spPr>
-          <a:xfrm>
-            <a:off x="4334256" y="3931920"/>
-            <a:ext cx="2615184" cy="658368"/>
+          <p:cNvPr id="28" name="Text 26"/>
+          <p:cNvSpPr/>
+          <p:nvPr/>
+        </p:nvSpPr>
+        <p:spPr>
+          <a:xfrm>
+            <a:off x="621792" y="3931920"/>
+            <a:ext cx="6309360" cy="512064"/>
           </a:xfrm>
           <a:prstGeom prst="rect">
             <a:avLst/>
@@ -4937,7 +4889,7 @@
               <a:buNone/>
             </a:pPr>
             <a:r>
-              <a:rPr lang="en-US" sz="860" b="1" dirty="0">
+              <a:rPr lang="en-US" sz="920" b="1" dirty="0">
                 <a:solidFill>
                   <a:srgbClr val="3C4043"/>
                 </a:solidFill>
@@ -4947,20 +4899,20 @@
               </a:rPr>
               <a:t>Cloud KMS keyring verifying &lt;60s cryptographic kill-switch, ECDSA P-256 key &amp; 10/10 Sovereign SaaS MCP flows</a:t>
             </a:r>
-            <a:endParaRPr lang="en-US" sz="860" dirty="0"/>
-          </a:p>
-        </p:txBody>
-      </p:sp>
-      <p:sp>
-        <p:nvSpPr>
-          <p:cNvPr id="31" name="Text 27"/>
-          <p:cNvSpPr/>
-          <p:nvPr/>
-        </p:nvSpPr>
-        <p:spPr>
-          <a:xfrm>
-            <a:off x="4334256" y="4626864"/>
-            <a:ext cx="2615184" cy="950976"/>
+            <a:endParaRPr lang="en-US" sz="920" dirty="0"/>
+          </a:p>
+        </p:txBody>
+      </p:sp>
+      <p:sp>
+        <p:nvSpPr>
+          <p:cNvPr id="29" name="Text 27"/>
+          <p:cNvSpPr/>
+          <p:nvPr/>
+        </p:nvSpPr>
+        <p:spPr>
+          <a:xfrm>
+            <a:off x="621792" y="4480560"/>
+            <a:ext cx="6309360" cy="1060704"/>
           </a:xfrm>
           <a:prstGeom prst="rect">
             <a:avLst/>
@@ -4976,7 +4928,7 @@
               <a:buNone/>
             </a:pPr>
             <a:r>
-              <a:rPr lang="en-US" sz="780" dirty="0">
+              <a:rPr lang="en-US" sz="840" dirty="0">
                 <a:solidFill>
                   <a:srgbClr val="5F6368"/>
                 </a:solidFill>
@@ -4986,14 +4938,14 @@
               </a:rPr>
               <a:t>• Keys: finvault-silo-cmek • retailstream-silo-cmek</a:t>
             </a:r>
-            <a:endParaRPr lang="en-US" sz="780" dirty="0"/>
+            <a:endParaRPr lang="en-US" sz="840" dirty="0"/>
           </a:p>
           <a:p>
             <a:pPr indent="0" marL="0">
               <a:buNone/>
             </a:pPr>
             <a:r>
-              <a:rPr lang="en-US" sz="780" dirty="0">
+              <a:rPr lang="en-US" sz="840" dirty="0">
                 <a:solidFill>
                   <a:srgbClr val="5F6368"/>
                 </a:solidFill>
@@ -5003,14 +4955,14 @@
               </a:rPr>
               <a:t>• Intra-Cloud: run_silo_security_tests.py (6/6 • HTTP 423)</a:t>
             </a:r>
-            <a:endParaRPr lang="en-US" sz="780" dirty="0"/>
+            <a:endParaRPr lang="en-US" sz="840" dirty="0"/>
           </a:p>
           <a:p>
             <a:pPr indent="0" marL="0">
               <a:buNone/>
             </a:pPr>
             <a:r>
-              <a:rPr lang="en-US" sz="780" dirty="0">
+              <a:rPr lang="en-US" sz="840" dirty="0">
                 <a:solidFill>
                   <a:srgbClr val="5F6368"/>
                 </a:solidFill>
@@ -5018,16 +4970,16 @@
                 <a:ea typeface="Roboto" pitchFamily="34" charset="-122"/>
                 <a:cs typeface="Roboto" pitchFamily="34" charset="-120"/>
               </a:rPr>
-              <a:t>• Inter-Cloud: 10/10 Silo SaaS MCP &amp; :3001..3010 PASS</a:t>
-            </a:r>
-            <a:endParaRPr lang="en-US" sz="780" dirty="0"/>
+              <a:t>• Inter-Cloud: 10/10 Silo SaaS MCP Targets PASS</a:t>
+            </a:r>
+            <a:endParaRPr lang="en-US" sz="840" dirty="0"/>
           </a:p>
           <a:p>
             <a:pPr indent="0" marL="0">
               <a:buNone/>
             </a:pPr>
             <a:r>
-              <a:rPr lang="en-US" sz="780" dirty="0">
+              <a:rPr lang="en-US" sz="840" dirty="0">
                 <a:solidFill>
                   <a:srgbClr val="5F6368"/>
                 </a:solidFill>
@@ -5035,22 +4987,22 @@
                 <a:ea typeface="Roboto" pitchFamily="34" charset="-122"/>
                 <a:cs typeface="Roboto" pitchFamily="34" charset="-120"/>
               </a:rPr>
-              <a:t>• Aspect Ratio: Native 16:9 (1920×1080)</a:t>
-            </a:r>
-            <a:endParaRPr lang="en-US" sz="780" dirty="0"/>
-          </a:p>
-        </p:txBody>
-      </p:sp>
-      <p:sp>
-        <p:nvSpPr>
-          <p:cNvPr id="32" name="Text 28"/>
-          <p:cNvSpPr/>
-          <p:nvPr/>
-        </p:nvSpPr>
-        <p:spPr>
-          <a:xfrm>
-            <a:off x="4334256" y="5632704"/>
-            <a:ext cx="2615184" cy="201168"/>
+              <a:t>• Artifact: run_silo_security_tests.py</a:t>
+            </a:r>
+            <a:endParaRPr lang="en-US" sz="840" dirty="0"/>
+          </a:p>
+        </p:txBody>
+      </p:sp>
+      <p:sp>
+        <p:nvSpPr>
+          <p:cNvPr id="30" name="Text 28"/>
+          <p:cNvSpPr/>
+          <p:nvPr/>
+        </p:nvSpPr>
+        <p:spPr>
+          <a:xfrm>
+            <a:off x="621792" y="5614416"/>
+            <a:ext cx="6309360" cy="201168"/>
           </a:xfrm>
           <a:prstGeom prst="rect">
             <a:avLst/>
@@ -5066,7 +5018,7 @@
               <a:buNone/>
             </a:pPr>
             <a:r>
-              <a:rPr lang="en-US" sz="680" dirty="0">
+              <a:rPr lang="en-US" sz="720" dirty="0">
                 <a:solidFill>
                   <a:srgbClr val="5F6368"/>
                 </a:solidFill>
@@ -5074,15 +5026,15 @@
                 <a:ea typeface="Courier New" pitchFamily="34" charset="-122"/>
                 <a:cs typeface="Courier New" pitchFamily="34" charset="-120"/>
               </a:rPr>
-              <a:t>Source: screenshots/cloud-console/gcp_console_05_cloud_kms_keyring_live.png</a:t>
-            </a:r>
-            <a:endParaRPr lang="en-US" sz="680" dirty="0"/>
-          </a:p>
-        </p:txBody>
-      </p:sp>
-      <p:sp>
-        <p:nvSpPr>
-          <p:cNvPr id="33" name="Shape 29"/>
+              <a:t>Source Module: workstream-3-pattern-b-siloed/3.5-exfiltration-and-cmek-revocation-tests/run_silo_security_tests.py</a:t>
+            </a:r>
+            <a:endParaRPr lang="en-US" sz="720" dirty="0"/>
+          </a:p>
+        </p:txBody>
+      </p:sp>
+      <p:sp>
+        <p:nvSpPr>
+          <p:cNvPr id="31" name="Shape 29"/>
           <p:cNvSpPr/>
           <p:nvPr/>
         </p:nvSpPr>
@@ -5109,7 +5061,7 @@
       </p:sp>
       <p:sp>
         <p:nvSpPr>
-          <p:cNvPr id="34" name="Shape 30"/>
+          <p:cNvPr id="32" name="Shape 30"/>
           <p:cNvSpPr/>
           <p:nvPr/>
         </p:nvSpPr>
@@ -5129,7 +5081,7 @@
       </p:sp>
       <p:sp>
         <p:nvSpPr>
-          <p:cNvPr id="35" name="Shape 31"/>
+          <p:cNvPr id="33" name="Shape 31"/>
           <p:cNvSpPr/>
           <p:nvPr/>
         </p:nvSpPr>
@@ -5151,7 +5103,7 @@
       </p:sp>
       <p:sp>
         <p:nvSpPr>
-          <p:cNvPr id="36" name="Text 32"/>
+          <p:cNvPr id="34" name="Text 32"/>
           <p:cNvSpPr/>
           <p:nvPr/>
         </p:nvSpPr>
@@ -5190,7 +5142,7 @@
       </p:sp>
       <p:sp>
         <p:nvSpPr>
-          <p:cNvPr id="37" name="Text 33"/>
+          <p:cNvPr id="35" name="Text 33"/>
           <p:cNvSpPr/>
           <p:nvPr/>
         </p:nvSpPr>
@@ -5229,7 +5181,7 @@
       </p:sp>
       <p:sp>
         <p:nvSpPr>
-          <p:cNvPr id="38" name="Text 34"/>
+          <p:cNvPr id="36" name="Text 34"/>
           <p:cNvSpPr/>
           <p:nvPr/>
         </p:nvSpPr>
@@ -5268,7 +5220,7 @@
       </p:sp>
       <p:sp>
         <p:nvSpPr>
-          <p:cNvPr id="39" name="Shape 35"/>
+          <p:cNvPr id="37" name="Shape 35"/>
           <p:cNvSpPr/>
           <p:nvPr/>
         </p:nvSpPr>
@@ -5295,7 +5247,7 @@
       </p:sp>
       <p:sp>
         <p:nvSpPr>
-          <p:cNvPr id="40" name="Shape 36"/>
+          <p:cNvPr id="38" name="Shape 36"/>
           <p:cNvSpPr/>
           <p:nvPr/>
         </p:nvSpPr>
@@ -5315,7 +5267,7 @@
       </p:sp>
       <p:sp>
         <p:nvSpPr>
-          <p:cNvPr id="41" name="Shape 37"/>
+          <p:cNvPr id="39" name="Shape 37"/>
           <p:cNvSpPr/>
           <p:nvPr/>
         </p:nvSpPr>
@@ -5337,7 +5289,7 @@
       </p:sp>
       <p:sp>
         <p:nvSpPr>
-          <p:cNvPr id="42" name="Text 38"/>
+          <p:cNvPr id="40" name="Text 38"/>
           <p:cNvSpPr/>
           <p:nvPr/>
         </p:nvSpPr>
@@ -5376,7 +5328,7 @@
       </p:sp>
       <p:sp>
         <p:nvSpPr>
-          <p:cNvPr id="43" name="Text 39"/>
+          <p:cNvPr id="41" name="Text 39"/>
           <p:cNvSpPr/>
           <p:nvPr/>
         </p:nvSpPr>
@@ -5415,7 +5367,7 @@
       </p:sp>
       <p:sp>
         <p:nvSpPr>
-          <p:cNvPr id="44" name="Text 40"/>
+          <p:cNvPr id="42" name="Text 40"/>
           <p:cNvSpPr/>
           <p:nvPr/>
         </p:nvSpPr>
@@ -5454,7 +5406,7 @@
       </p:sp>
       <p:sp>
         <p:nvSpPr>
-          <p:cNvPr id="45" name="Shape 41"/>
+          <p:cNvPr id="43" name="Shape 41"/>
           <p:cNvSpPr/>
           <p:nvPr/>
         </p:nvSpPr>
@@ -5481,7 +5433,7 @@
       </p:sp>
       <p:sp>
         <p:nvSpPr>
-          <p:cNvPr id="46" name="Shape 42"/>
+          <p:cNvPr id="44" name="Shape 42"/>
           <p:cNvSpPr/>
           <p:nvPr/>
         </p:nvSpPr>
@@ -5501,7 +5453,7 @@
       </p:sp>
       <p:sp>
         <p:nvSpPr>
-          <p:cNvPr id="47" name="Shape 43"/>
+          <p:cNvPr id="45" name="Shape 43"/>
           <p:cNvSpPr/>
           <p:nvPr/>
         </p:nvSpPr>
@@ -5523,7 +5475,7 @@
       </p:sp>
       <p:sp>
         <p:nvSpPr>
-          <p:cNvPr id="48" name="Text 44"/>
+          <p:cNvPr id="46" name="Text 44"/>
           <p:cNvSpPr/>
           <p:nvPr/>
         </p:nvSpPr>
@@ -5562,7 +5514,7 @@
       </p:sp>
       <p:sp>
         <p:nvSpPr>
-          <p:cNvPr id="49" name="Text 45"/>
+          <p:cNvPr id="47" name="Text 45"/>
           <p:cNvSpPr/>
           <p:nvPr/>
         </p:nvSpPr>
@@ -5601,7 +5553,7 @@
       </p:sp>
       <p:sp>
         <p:nvSpPr>
-          <p:cNvPr id="50" name="Text 46"/>
+          <p:cNvPr id="48" name="Text 46"/>
           <p:cNvSpPr/>
           <p:nvPr/>
         </p:nvSpPr>
@@ -5640,7 +5592,7 @@
       </p:sp>
       <p:sp>
         <p:nvSpPr>
-          <p:cNvPr id="51" name="Shape 47"/>
+          <p:cNvPr id="49" name="Shape 47"/>
           <p:cNvSpPr/>
           <p:nvPr/>
         </p:nvSpPr>
@@ -5667,7 +5619,7 @@
       </p:sp>
       <p:sp>
         <p:nvSpPr>
-          <p:cNvPr id="52" name="Shape 48"/>
+          <p:cNvPr id="50" name="Shape 48"/>
           <p:cNvSpPr/>
           <p:nvPr/>
         </p:nvSpPr>
@@ -5687,7 +5639,7 @@
       </p:sp>
       <p:sp>
         <p:nvSpPr>
-          <p:cNvPr id="53" name="Shape 49"/>
+          <p:cNvPr id="51" name="Shape 49"/>
           <p:cNvSpPr/>
           <p:nvPr/>
         </p:nvSpPr>
@@ -5709,7 +5661,7 @@
       </p:sp>
       <p:sp>
         <p:nvSpPr>
-          <p:cNvPr id="54" name="Text 50"/>
+          <p:cNvPr id="52" name="Text 50"/>
           <p:cNvSpPr/>
           <p:nvPr/>
         </p:nvSpPr>
@@ -5748,7 +5700,7 @@
       </p:sp>
       <p:sp>
         <p:nvSpPr>
-          <p:cNvPr id="55" name="Text 51"/>
+          <p:cNvPr id="53" name="Text 51"/>
           <p:cNvSpPr/>
           <p:nvPr/>
         </p:nvSpPr>
@@ -5787,7 +5739,7 @@
       </p:sp>
       <p:sp>
         <p:nvSpPr>
-          <p:cNvPr id="56" name="Text 52"/>
+          <p:cNvPr id="54" name="Text 52"/>
           <p:cNvSpPr/>
           <p:nvPr/>
         </p:nvSpPr>
@@ -5818,7 +5770,7 @@
                 <a:ea typeface="Roboto" pitchFamily="34" charset="-122"/>
                 <a:cs typeface="Roboto" pitchFamily="34" charset="-120"/>
               </a:rPr>
-              <a:t>Pairs Private GKE Gemma 3 27B (199.36.153.4/30) with 10/10 Pattern B Inter-Cloud AWS AgentCore MCP &amp; :3001..3010 CMEK kill-switch assertions.</a:t>
+              <a:t>Pairs Private GKE Gemma 3 27B (199.36.153.4/30) with 10/10 Pattern B Inter-Cloud AWS AgentCore MCP CMEK kill-switch assertions.</a:t>
             </a:r>
             <a:endParaRPr lang="en-US" sz="860" dirty="0"/>
           </a:p>
@@ -5826,7 +5778,7 @@
       </p:sp>
       <p:sp>
         <p:nvSpPr>
-          <p:cNvPr id="57" name="Text 53"/>
+          <p:cNvPr id="55" name="Text 53"/>
           <p:cNvSpPr/>
           <p:nvPr/>
         </p:nvSpPr>
@@ -5871,7 +5823,7 @@
                 <a:ea typeface="Roboto" pitchFamily="34" charset="-122"/>
                 <a:cs typeface="Roboto" pitchFamily="34" charset="-120"/>
               </a:rPr>
-              <a:t>Workstream 3 • Pattern B — Zero-Trust Sovereign Silos  •  Act III Forensic Verification Audit: Grounded Google Cloud Console Screenshots + 100% Editable Callouts  •  </a:t>
+              <a:t>Workstream 3 • Pattern B — Zero-Trust Sovereign Silos  •  Act III Forensic Verification Audit: Grounded Google Cloud CLI &amp; Telemetry Receipts + 100% Editable Callouts  •  </a:t>
             </a:r>
             <a:pPr algn="l" indent="0" marL="0">
               <a:buNone/>

--- a/slides/doc-mt-03-editable-slides.pptx
+++ b/slides/doc-mt-03-editable-slides.pptx
@@ -622,7 +622,7 @@
           <a:p>
             <a:r>
               <a:rPr lang="en-US" dirty="0"/>
-              <a:t>Here is the live Dual-Plane verification proof from our sovereign sandbox environment. On the left, you can see the active Cloud KMS customer-managed keyring, CryptoKeyVersion state toggles, and sovereign BigQuery CMEK datasets; on the right, the telemetry cards confirm that all 6/6 Intra-Cloud sovereign perimeter tests and all 10/10 Inter-Cloud Pattern B SaaS MCP and live EC2 CMEK kill-switch assertions pass with 100% compliance.</a:t>
+              <a:t>Here is the live Dual-Plane verification proof from our sovereign sandbox environment. On the left, you can see the active Cloud KMS customer-managed keyring, CryptoKeyVersion state toggles, and sovereign BigQuery CMEK datasets; on the right, the telemetry cards confirm that all 6/6 Intra-Cloud sovereign perimeter tests and all 10/10 Inter-Cloud Pattern B 10-SaaS MCP CMEK kill-switch assertions pass with 100% compliance.</a:t>
             </a:r>
             <a:endParaRPr lang="en-US" dirty="0"/>
           </a:p>
@@ -20459,7 +20459,7 @@
                 <a:ea typeface="Arial" pitchFamily="34" charset="-122"/>
                 <a:cs typeface="Arial" pitchFamily="34" charset="-120"/>
               </a:rPr>
-              <a:t>Multi-Project Sovereign Topology (cymbal-build-sandbox</a:t>
+              <a:t>Multi-Project Sovereign Topology (cymbal-build-sandbox)</a:t>
             </a:r>
             <a:endParaRPr lang="en-US" sz="460" dirty="0"/>
           </a:p>

--- a/slides/doc-mt-03-editable-slides.pptx
+++ b/slides/doc-mt-03-editable-slides.pptx
@@ -507,14 +507,14 @@
           <a:p>
             <a:r>
               <a:rPr lang="en-US" dirty="0"/>
-              <a:t>Welcome everyone. In this six-slide executive and technical briefing, we are walking through Multi-Tenant AI Agents (Part 3): Noisy-Neighbor Circuit Breakers, CMEK Kill-Switches &amp; Valkey L1.</a:t>
+              <a:t>Welcome everyone. In this six-slide executive and technical briefing, we are walking through Building the High-Density Pool Tier (Part 3): An End-to-End Implementation Blueprint.</a:t>
             </a:r>
             <a:endParaRPr lang="en-US" dirty="0"/>
           </a:p>
           <a:p>
             <a:r>
               <a:rPr lang="en-US" dirty="0"/>
-              <a:t>In Part 3, we dive into Pattern B Sovereign Silo controls and stateful resilience—showing how regulated healthcare, financial, and public-sector workloads enforce hardware-backed cryptographic revocation, kernel sandboxing, and noisy-neighbor circuit breaking on Google Cloud.</a:t>
+              <a:t>In Part 3, we build Pattern 1—the High-Density Shared Pool tier—demonstrating how to host hundreds of commercial SaaS tenants inside one Google Cloud project with zero cross-tenant data or cache bleed and 84.7 percent input-token savings.</a:t>
             </a:r>
             <a:endParaRPr lang="en-US" dirty="0"/>
           </a:p>
@@ -616,7 +616,7 @@
           <a:p>
             <a:r>
               <a:rPr lang="en-US" dirty="0"/>
-              <a:t>Figure 1 presents our Sovereign Dedicated Silo blueprint. Regulated tenant traffic traverses VPC Service Controls perimeters into gVisor-sandboxed agent runtimes backed by customer-managed Cloud KMS keys, dedicated Valkey L1 state caches, and isolated AlloyDB instances.</a:t>
+              <a:t>Figure 1 presents our High-Density Pool physical blueprint. Every request traverses Cloud Armor, IAP OBO/DPoP minting, Valkey per-tenant RPM bulkheads, shared 32k ContextCacheConfig prefixes, and AlloyDB FORCE ROW LEVEL SECURITY.</a:t>
             </a:r>
             <a:endParaRPr lang="en-US" dirty="0"/>
           </a:p>
@@ -718,7 +718,7 @@
           <a:p>
             <a:r>
               <a:rPr lang="en-US" dirty="0"/>
-              <a:t>Walking through the six resilience stages on this slide shows exactly what happens during a tenant incident or key revocation: disabling a customer Cloud KMS key triggers deterministic HTTP 423 Locked responses within sixty seconds and executes non-blocking Valkey SCAN and UNLINK cache eviction in under five seconds.</a:t>
+              <a:t>Walking through the pooled execution stages on this slide shows how ephemeral gVisor sandboxes bind composite tenant-user-session keys while isolating third-party ServiceNow and Salesforce MCP calls per authenticated principal.</a:t>
             </a:r>
             <a:endParaRPr lang="en-US" dirty="0"/>
           </a:p>
@@ -820,7 +820,7 @@
           <a:p>
             <a:r>
               <a:rPr lang="en-US" dirty="0"/>
-              <a:t>For chief information security officers and enterprise buyers, this slide demonstrates provable cryptographic offboarding and sub-thirty-second cross-region failover with atomic SET NX PX 5000 cache-stampede protection during traffic spikes.</a:t>
+              <a:t>This slide details the Google Cloud services powering the pooled tier—pairing Vertex AI Agent Engine and Gemini 2.5 Pro prefix caching with Memorystore for Valkey token buckets and Cloud Sensitive Data Protection.</a:t>
             </a:r>
             <a:endParaRPr lang="en-US" dirty="0"/>
           </a:p>
@@ -922,7 +922,7 @@
           <a:p>
             <a:r>
               <a:rPr lang="en-US" dirty="0"/>
-              <a:t>This trade-off table compares hardware-enforced Pattern B Sovereign Silos with gVisor and CMEK kill-switches against software-only logical isolation across blast-radius containment, regulatory auditability, and recovery-time objectives.</a:t>
+              <a:t>This trade-off matrix compares our five-hop governed shared pool against naive single-schema SaaS and premature project-per-tenant sprawl across gross margin, noisy-neighbor containment, and onboarding velocity.</a:t>
             </a:r>
             <a:endParaRPr lang="en-US" dirty="0"/>
           </a:p>
@@ -1024,7 +1024,7 @@
           <a:p>
             <a:r>
               <a:rPr lang="en-US" dirty="0"/>
-              <a:t>Finally, here is the Terraform 3.6 sovereign silo deployment runbook and our six-for-six security and CMEK kill-switch test suite.</a:t>
+              <a:t>To deploy the pooled tier today, here is the parameterized AlloyDB FORCE ROW LEVEL SECURITY transaction wrapper and Well-Architected operational checklist.</a:t>
             </a:r>
             <a:endParaRPr lang="en-US" dirty="0"/>
           </a:p>
@@ -9687,7 +9687,7 @@
                 <a:ea typeface="Arial" pitchFamily="34" charset="-122"/>
                 <a:cs typeface="Arial" pitchFamily="34" charset="-120"/>
               </a:rPr>
-              <a:t>Core Google Cloud service used in DOC-MT-03 to enforce production security, scalability, and observability.
+              <a:t>Globally distributed relational and property-graph database uniting GQL multi-hop traversal with vector search.
 </a:t>
             </a:r>
             <a:pPr indent="0" marL="0">
@@ -9792,7 +9792,7 @@
                 <a:ea typeface="Arial" pitchFamily="34" charset="-122"/>
                 <a:cs typeface="Arial" pitchFamily="34" charset="-120"/>
               </a:rPr>
-              <a:t>Core Google Cloud service used in DOC-MT-03 to enforce production security, scalability, and observability.</a:t>
+              <a:t>Sub-millisecond in-memory state store enforcing per-tenant token-bucket RPM bulkheads, JTI revocation deny-lists, and L1 session caches.</a:t>
             </a:r>
             <a:endParaRPr lang="en-US" sz="810" dirty="0"/>
           </a:p>
@@ -12399,269 +12399,267 @@
           <a:ln/>
         </p:spPr>
         <p:txBody>
-          <a:bodyPr wrap="square" rtlCol="0" anchor="t">
-            <a:normAutofit/>
-          </a:bodyPr>
-          <a:lstStyle/>
-          <a:p>
-            <a:pPr indent="0" marL="0">
-              <a:lnSpc>
-                <a:spcPct val="106000"/>
-              </a:lnSpc>
-              <a:buNone/>
-            </a:pPr>
-            <a:r>
-              <a:rPr lang="en-US" sz="690" dirty="0">
-                <a:solidFill>
-                  <a:srgbClr val="202124"/>
-                </a:solidFill>
-                <a:latin typeface="Courier New" pitchFamily="34" charset="0"/>
-                <a:ea typeface="Courier New" pitchFamily="34" charset="-122"/>
-                <a:cs typeface="Courier New" pitchFamily="34" charset="-120"/>
+          <a:bodyPr wrap="square" lIns="0" tIns="0" rIns="0" bIns="0" rtlCol="0" anchor="t"/>
+          <a:lstStyle/>
+          <a:p>
+            <a:pPr indent="0" marL="0">
+              <a:lnSpc>
+                <a:spcPct val="108000"/>
+              </a:lnSpc>
+              <a:buNone/>
+            </a:pPr>
+            <a:r>
+              <a:rPr lang="en-US" sz="680" dirty="0">
+                <a:solidFill>
+                  <a:srgbClr val="188038"/>
+                </a:solidFill>
+                <a:latin typeface="Roboto Mono" pitchFamily="34" charset="0"/>
+                <a:ea typeface="Roboto Mono" pitchFamily="34" charset="-122"/>
+                <a:cs typeface="Roboto Mono" pitchFamily="34" charset="-120"/>
               </a:rPr>
               <a:t>-- Control Plane billing &amp; tokenomics schema (BigQuery)</a:t>
             </a:r>
-            <a:endParaRPr lang="en-US" sz="690" dirty="0"/>
-          </a:p>
-          <a:p>
-            <a:pPr indent="0" marL="0">
-              <a:lnSpc>
-                <a:spcPct val="106000"/>
-              </a:lnSpc>
-              <a:buNone/>
-            </a:pPr>
-            <a:r>
-              <a:rPr lang="en-US" sz="690" dirty="0">
-                <a:solidFill>
-                  <a:srgbClr val="202124"/>
-                </a:solidFill>
-                <a:latin typeface="Courier New" pitchFamily="34" charset="0"/>
-                <a:ea typeface="Courier New" pitchFamily="34" charset="-122"/>
-                <a:cs typeface="Courier New" pitchFamily="34" charset="-120"/>
+            <a:endParaRPr lang="en-US" sz="680" dirty="0"/>
+          </a:p>
+          <a:p>
+            <a:pPr indent="0" marL="0">
+              <a:lnSpc>
+                <a:spcPct val="108000"/>
+              </a:lnSpc>
+              <a:buNone/>
+            </a:pPr>
+            <a:r>
+              <a:rPr lang="en-US" sz="680" dirty="0">
+                <a:solidFill>
+                  <a:srgbClr val="188038"/>
+                </a:solidFill>
+                <a:latin typeface="Roboto Mono" pitchFamily="34" charset="0"/>
+                <a:ea typeface="Roboto Mono" pitchFamily="34" charset="-122"/>
+                <a:cs typeface="Roboto Mono" pitchFamily="34" charset="-120"/>
               </a:rPr>
               <a:t>CREATE TABLE agent_usage.tokenomics (</a:t>
             </a:r>
-            <a:endParaRPr lang="en-US" sz="690" dirty="0"/>
-          </a:p>
-          <a:p>
-            <a:pPr indent="0" marL="0">
-              <a:lnSpc>
-                <a:spcPct val="106000"/>
-              </a:lnSpc>
-              <a:buNone/>
-            </a:pPr>
-            <a:r>
-              <a:rPr lang="en-US" sz="690" dirty="0">
-                <a:solidFill>
-                  <a:srgbClr val="202124"/>
-                </a:solidFill>
-                <a:latin typeface="Courier New" pitchFamily="34" charset="0"/>
-                <a:ea typeface="Courier New" pitchFamily="34" charset="-122"/>
-                <a:cs typeface="Courier New" pitchFamily="34" charset="-120"/>
-              </a:rPr>
-              <a:t>  tenant_id STRING NOT NULL,</a:t>
-            </a:r>
-            <a:endParaRPr lang="en-US" sz="690" dirty="0"/>
-          </a:p>
-          <a:p>
-            <a:pPr indent="0" marL="0">
-              <a:lnSpc>
-                <a:spcPct val="106000"/>
-              </a:lnSpc>
-              <a:buNone/>
-            </a:pPr>
-            <a:r>
-              <a:rPr lang="en-US" sz="690" dirty="0">
-                <a:solidFill>
-                  <a:srgbClr val="202124"/>
-                </a:solidFill>
-                <a:latin typeface="Courier New" pitchFamily="34" charset="0"/>
-                <a:ea typeface="Courier New" pitchFamily="34" charset="-122"/>
-                <a:cs typeface="Courier New" pitchFamily="34" charset="-120"/>
-              </a:rPr>
-              <a:t>  tier STRING NOT NULL,</a:t>
-            </a:r>
-            <a:endParaRPr lang="en-US" sz="690" dirty="0"/>
-          </a:p>
-          <a:p>
-            <a:pPr indent="0" marL="0">
-              <a:lnSpc>
-                <a:spcPct val="106000"/>
-              </a:lnSpc>
-              <a:buNone/>
-            </a:pPr>
-            <a:r>
-              <a:rPr lang="en-US" sz="690" dirty="0">
-                <a:solidFill>
-                  <a:srgbClr val="202124"/>
-                </a:solidFill>
-                <a:latin typeface="Courier New" pitchFamily="34" charset="0"/>
-                <a:ea typeface="Courier New" pitchFamily="34" charset="-122"/>
-                <a:cs typeface="Courier New" pitchFamily="34" charset="-120"/>
-              </a:rPr>
-              <a:t>  model_id STRING NOT NULL,</a:t>
-            </a:r>
-            <a:endParaRPr lang="en-US" sz="690" dirty="0"/>
-          </a:p>
-          <a:p>
-            <a:pPr indent="0" marL="0">
-              <a:lnSpc>
-                <a:spcPct val="106000"/>
-              </a:lnSpc>
-              <a:buNone/>
-            </a:pPr>
-            <a:r>
-              <a:rPr lang="en-US" sz="690" dirty="0">
-                <a:solidFill>
-                  <a:srgbClr val="202124"/>
-                </a:solidFill>
-                <a:latin typeface="Courier New" pitchFamily="34" charset="0"/>
-                <a:ea typeface="Courier New" pitchFamily="34" charset="-122"/>
-                <a:cs typeface="Courier New" pitchFamily="34" charset="-120"/>
-              </a:rPr>
-              <a:t>  input_tokens INT64 NOT NULL,</a:t>
-            </a:r>
-            <a:endParaRPr lang="en-US" sz="690" dirty="0"/>
-          </a:p>
-          <a:p>
-            <a:pPr indent="0" marL="0">
-              <a:lnSpc>
-                <a:spcPct val="106000"/>
-              </a:lnSpc>
-              <a:buNone/>
-            </a:pPr>
-            <a:r>
-              <a:rPr lang="en-US" sz="690" dirty="0">
-                <a:solidFill>
-                  <a:srgbClr val="202124"/>
-                </a:solidFill>
-                <a:latin typeface="Courier New" pitchFamily="34" charset="0"/>
-                <a:ea typeface="Courier New" pitchFamily="34" charset="-122"/>
-                <a:cs typeface="Courier New" pitchFamily="34" charset="-120"/>
-              </a:rPr>
-              <a:t>  output_tokens INT64 NOT NULL,</a:t>
-            </a:r>
-            <a:endParaRPr lang="en-US" sz="690" dirty="0"/>
-          </a:p>
-          <a:p>
-            <a:pPr indent="0" marL="0">
-              <a:lnSpc>
-                <a:spcPct val="106000"/>
-              </a:lnSpc>
-              <a:buNone/>
-            </a:pPr>
-            <a:r>
-              <a:rPr lang="en-US" sz="690" dirty="0">
-                <a:solidFill>
-                  <a:srgbClr val="202124"/>
-                </a:solidFill>
-                <a:latin typeface="Courier New" pitchFamily="34" charset="0"/>
-                <a:ea typeface="Courier New" pitchFamily="34" charset="-122"/>
-                <a:cs typeface="Courier New" pitchFamily="34" charset="-120"/>
-              </a:rPr>
-              <a:t>  cached_prefix_tokens INT64 DEFAULT 0,</a:t>
-            </a:r>
-            <a:endParaRPr lang="en-US" sz="690" dirty="0"/>
-          </a:p>
-          <a:p>
-            <a:pPr indent="0" marL="0">
-              <a:lnSpc>
-                <a:spcPct val="106000"/>
-              </a:lnSpc>
-              <a:buNone/>
-            </a:pPr>
-            <a:r>
-              <a:rPr lang="en-US" sz="690" dirty="0">
-                <a:solidFill>
-                  <a:srgbClr val="202124"/>
-                </a:solidFill>
-                <a:latin typeface="Courier New" pitchFamily="34" charset="0"/>
-                <a:ea typeface="Courier New" pitchFamily="34" charset="-122"/>
-                <a:cs typeface="Courier New" pitchFamily="34" charset="-120"/>
-              </a:rPr>
-              <a:t>  session_id STRING NOT NULL,</a:t>
-            </a:r>
-            <a:endParaRPr lang="en-US" sz="690" dirty="0"/>
-          </a:p>
-          <a:p>
-            <a:pPr indent="0" marL="0">
-              <a:lnSpc>
-                <a:spcPct val="106000"/>
-              </a:lnSpc>
-              <a:buNone/>
-            </a:pPr>
-            <a:r>
-              <a:rPr lang="en-US" sz="690" dirty="0">
-                <a:solidFill>
-                  <a:srgbClr val="202124"/>
-                </a:solidFill>
-                <a:latin typeface="Courier New" pitchFamily="34" charset="0"/>
-                <a:ea typeface="Courier New" pitchFamily="34" charset="-122"/>
-                <a:cs typeface="Courier New" pitchFamily="34" charset="-120"/>
-              </a:rPr>
-              <a:t>  timestamp TIMESTAMP NOT NULL</a:t>
-            </a:r>
-            <a:endParaRPr lang="en-US" sz="690" dirty="0"/>
-          </a:p>
-          <a:p>
-            <a:pPr indent="0" marL="0">
-              <a:lnSpc>
-                <a:spcPct val="106000"/>
-              </a:lnSpc>
-              <a:buNone/>
-            </a:pPr>
-            <a:r>
-              <a:rPr lang="en-US" sz="690" dirty="0">
-                <a:solidFill>
-                  <a:srgbClr val="202124"/>
-                </a:solidFill>
-                <a:latin typeface="Courier New" pitchFamily="34" charset="0"/>
-                <a:ea typeface="Courier New" pitchFamily="34" charset="-122"/>
-                <a:cs typeface="Courier New" pitchFamily="34" charset="-120"/>
+            <a:endParaRPr lang="en-US" sz="680" dirty="0"/>
+          </a:p>
+          <a:p>
+            <a:pPr indent="0" marL="0">
+              <a:lnSpc>
+                <a:spcPct val="108000"/>
+              </a:lnSpc>
+              <a:buNone/>
+            </a:pPr>
+            <a:r>
+              <a:rPr lang="en-US" sz="680" dirty="0">
+                <a:solidFill>
+                  <a:srgbClr val="188038"/>
+                </a:solidFill>
+                <a:latin typeface="Roboto Mono" pitchFamily="34" charset="0"/>
+                <a:ea typeface="Roboto Mono" pitchFamily="34" charset="-122"/>
+                <a:cs typeface="Roboto Mono" pitchFamily="34" charset="-120"/>
+              </a:rPr>
+              <a:t>  tenant_id STRING NOT NULL,</a:t>
+            </a:r>
+            <a:endParaRPr lang="en-US" sz="680" dirty="0"/>
+          </a:p>
+          <a:p>
+            <a:pPr indent="0" marL="0">
+              <a:lnSpc>
+                <a:spcPct val="108000"/>
+              </a:lnSpc>
+              <a:buNone/>
+            </a:pPr>
+            <a:r>
+              <a:rPr lang="en-US" sz="680" dirty="0">
+                <a:solidFill>
+                  <a:srgbClr val="188038"/>
+                </a:solidFill>
+                <a:latin typeface="Roboto Mono" pitchFamily="34" charset="0"/>
+                <a:ea typeface="Roboto Mono" pitchFamily="34" charset="-122"/>
+                <a:cs typeface="Roboto Mono" pitchFamily="34" charset="-120"/>
+              </a:rPr>
+              <a:t>  tier STRING NOT NULL,</a:t>
+            </a:r>
+            <a:endParaRPr lang="en-US" sz="680" dirty="0"/>
+          </a:p>
+          <a:p>
+            <a:pPr indent="0" marL="0">
+              <a:lnSpc>
+                <a:spcPct val="108000"/>
+              </a:lnSpc>
+              <a:buNone/>
+            </a:pPr>
+            <a:r>
+              <a:rPr lang="en-US" sz="680" dirty="0">
+                <a:solidFill>
+                  <a:srgbClr val="188038"/>
+                </a:solidFill>
+                <a:latin typeface="Roboto Mono" pitchFamily="34" charset="0"/>
+                <a:ea typeface="Roboto Mono" pitchFamily="34" charset="-122"/>
+                <a:cs typeface="Roboto Mono" pitchFamily="34" charset="-120"/>
+              </a:rPr>
+              <a:t>  model_id STRING NOT NULL,</a:t>
+            </a:r>
+            <a:endParaRPr lang="en-US" sz="680" dirty="0"/>
+          </a:p>
+          <a:p>
+            <a:pPr indent="0" marL="0">
+              <a:lnSpc>
+                <a:spcPct val="108000"/>
+              </a:lnSpc>
+              <a:buNone/>
+            </a:pPr>
+            <a:r>
+              <a:rPr lang="en-US" sz="680" dirty="0">
+                <a:solidFill>
+                  <a:srgbClr val="188038"/>
+                </a:solidFill>
+                <a:latin typeface="Roboto Mono" pitchFamily="34" charset="0"/>
+                <a:ea typeface="Roboto Mono" pitchFamily="34" charset="-122"/>
+                <a:cs typeface="Roboto Mono" pitchFamily="34" charset="-120"/>
+              </a:rPr>
+              <a:t>  input_tokens INT64 NOT NULL,</a:t>
+            </a:r>
+            <a:endParaRPr lang="en-US" sz="680" dirty="0"/>
+          </a:p>
+          <a:p>
+            <a:pPr indent="0" marL="0">
+              <a:lnSpc>
+                <a:spcPct val="108000"/>
+              </a:lnSpc>
+              <a:buNone/>
+            </a:pPr>
+            <a:r>
+              <a:rPr lang="en-US" sz="680" dirty="0">
+                <a:solidFill>
+                  <a:srgbClr val="188038"/>
+                </a:solidFill>
+                <a:latin typeface="Roboto Mono" pitchFamily="34" charset="0"/>
+                <a:ea typeface="Roboto Mono" pitchFamily="34" charset="-122"/>
+                <a:cs typeface="Roboto Mono" pitchFamily="34" charset="-120"/>
+              </a:rPr>
+              <a:t>  output_tokens INT64 NOT NULL,</a:t>
+            </a:r>
+            <a:endParaRPr lang="en-US" sz="680" dirty="0"/>
+          </a:p>
+          <a:p>
+            <a:pPr indent="0" marL="0">
+              <a:lnSpc>
+                <a:spcPct val="108000"/>
+              </a:lnSpc>
+              <a:buNone/>
+            </a:pPr>
+            <a:r>
+              <a:rPr lang="en-US" sz="680" dirty="0">
+                <a:solidFill>
+                  <a:srgbClr val="188038"/>
+                </a:solidFill>
+                <a:latin typeface="Roboto Mono" pitchFamily="34" charset="0"/>
+                <a:ea typeface="Roboto Mono" pitchFamily="34" charset="-122"/>
+                <a:cs typeface="Roboto Mono" pitchFamily="34" charset="-120"/>
+              </a:rPr>
+              <a:t>  cached_prefix_tokens INT64 DEFAULT 0,</a:t>
+            </a:r>
+            <a:endParaRPr lang="en-US" sz="680" dirty="0"/>
+          </a:p>
+          <a:p>
+            <a:pPr indent="0" marL="0">
+              <a:lnSpc>
+                <a:spcPct val="108000"/>
+              </a:lnSpc>
+              <a:buNone/>
+            </a:pPr>
+            <a:r>
+              <a:rPr lang="en-US" sz="680" dirty="0">
+                <a:solidFill>
+                  <a:srgbClr val="188038"/>
+                </a:solidFill>
+                <a:latin typeface="Roboto Mono" pitchFamily="34" charset="0"/>
+                <a:ea typeface="Roboto Mono" pitchFamily="34" charset="-122"/>
+                <a:cs typeface="Roboto Mono" pitchFamily="34" charset="-120"/>
+              </a:rPr>
+              <a:t>  session_id STRING NOT NULL,</a:t>
+            </a:r>
+            <a:endParaRPr lang="en-US" sz="680" dirty="0"/>
+          </a:p>
+          <a:p>
+            <a:pPr indent="0" marL="0">
+              <a:lnSpc>
+                <a:spcPct val="108000"/>
+              </a:lnSpc>
+              <a:buNone/>
+            </a:pPr>
+            <a:r>
+              <a:rPr lang="en-US" sz="680" dirty="0">
+                <a:solidFill>
+                  <a:srgbClr val="188038"/>
+                </a:solidFill>
+                <a:latin typeface="Roboto Mono" pitchFamily="34" charset="0"/>
+                <a:ea typeface="Roboto Mono" pitchFamily="34" charset="-122"/>
+                <a:cs typeface="Roboto Mono" pitchFamily="34" charset="-120"/>
+              </a:rPr>
+              <a:t>  timestamp TIMESTAMP NOT NULL</a:t>
+            </a:r>
+            <a:endParaRPr lang="en-US" sz="680" dirty="0"/>
+          </a:p>
+          <a:p>
+            <a:pPr indent="0" marL="0">
+              <a:lnSpc>
+                <a:spcPct val="108000"/>
+              </a:lnSpc>
+              <a:buNone/>
+            </a:pPr>
+            <a:r>
+              <a:rPr lang="en-US" sz="680" dirty="0">
+                <a:solidFill>
+                  <a:srgbClr val="188038"/>
+                </a:solidFill>
+                <a:latin typeface="Roboto Mono" pitchFamily="34" charset="0"/>
+                <a:ea typeface="Roboto Mono" pitchFamily="34" charset="-122"/>
+                <a:cs typeface="Roboto Mono" pitchFamily="34" charset="-120"/>
               </a:rPr>
               <a:t>)</a:t>
             </a:r>
-            <a:endParaRPr lang="en-US" sz="690" dirty="0"/>
-          </a:p>
-          <a:p>
-            <a:pPr indent="0" marL="0">
-              <a:lnSpc>
-                <a:spcPct val="106000"/>
-              </a:lnSpc>
-              <a:buNone/>
-            </a:pPr>
-            <a:r>
-              <a:rPr lang="en-US" sz="690" dirty="0">
-                <a:solidFill>
-                  <a:srgbClr val="202124"/>
-                </a:solidFill>
-                <a:latin typeface="Courier New" pitchFamily="34" charset="0"/>
-                <a:ea typeface="Courier New" pitchFamily="34" charset="-122"/>
-                <a:cs typeface="Courier New" pitchFamily="34" charset="-120"/>
+            <a:endParaRPr lang="en-US" sz="680" dirty="0"/>
+          </a:p>
+          <a:p>
+            <a:pPr indent="0" marL="0">
+              <a:lnSpc>
+                <a:spcPct val="108000"/>
+              </a:lnSpc>
+              <a:buNone/>
+            </a:pPr>
+            <a:r>
+              <a:rPr lang="en-US" sz="680" dirty="0">
+                <a:solidFill>
+                  <a:srgbClr val="188038"/>
+                </a:solidFill>
+                <a:latin typeface="Roboto Mono" pitchFamily="34" charset="0"/>
+                <a:ea typeface="Roboto Mono" pitchFamily="34" charset="-122"/>
+                <a:cs typeface="Roboto Mono" pitchFamily="34" charset="-120"/>
               </a:rPr>
               <a:t>PARTITION BY DATE(timestamp)</a:t>
             </a:r>
-            <a:endParaRPr lang="en-US" sz="690" dirty="0"/>
-          </a:p>
-          <a:p>
-            <a:pPr indent="0" marL="0">
-              <a:lnSpc>
-                <a:spcPct val="106000"/>
-              </a:lnSpc>
-              <a:buNone/>
-            </a:pPr>
-            <a:r>
-              <a:rPr lang="en-US" sz="690" dirty="0">
-                <a:solidFill>
-                  <a:srgbClr val="202124"/>
-                </a:solidFill>
-                <a:latin typeface="Courier New" pitchFamily="34" charset="0"/>
-                <a:ea typeface="Courier New" pitchFamily="34" charset="-122"/>
-                <a:cs typeface="Courier New" pitchFamily="34" charset="-120"/>
+            <a:endParaRPr lang="en-US" sz="680" dirty="0"/>
+          </a:p>
+          <a:p>
+            <a:pPr indent="0" marL="0">
+              <a:lnSpc>
+                <a:spcPct val="108000"/>
+              </a:lnSpc>
+              <a:buNone/>
+            </a:pPr>
+            <a:r>
+              <a:rPr lang="en-US" sz="680" dirty="0">
+                <a:solidFill>
+                  <a:srgbClr val="188038"/>
+                </a:solidFill>
+                <a:latin typeface="Roboto Mono" pitchFamily="34" charset="0"/>
+                <a:ea typeface="Roboto Mono" pitchFamily="34" charset="-122"/>
+                <a:cs typeface="Roboto Mono" pitchFamily="34" charset="-120"/>
               </a:rPr>
               <a:t>CLUSTER BY tenant_id, tier;</a:t>
             </a:r>
-            <a:endParaRPr lang="en-US" sz="690" dirty="0"/>
+            <a:endParaRPr lang="en-US" sz="680" dirty="0"/>
           </a:p>
         </p:txBody>
       </p:sp>
@@ -12745,17 +12743,17 @@
           <a:ln/>
         </p:spPr>
         <p:txBody>
-          <a:bodyPr wrap="square" rtlCol="0" anchor="t"/>
-          <a:lstStyle/>
-          <a:p>
-            <a:pPr indent="0" marL="0">
-              <a:lnSpc>
-                <a:spcPct val="118000"/>
-              </a:lnSpc>
-              <a:buNone/>
-            </a:pPr>
-            <a:r>
-              <a:rPr lang="en-US" sz="800" b="1" dirty="0">
+          <a:bodyPr wrap="square" lIns="0" tIns="0" rIns="0" bIns="0" rtlCol="0" anchor="t"/>
+          <a:lstStyle/>
+          <a:p>
+            <a:pPr indent="0" marL="0">
+              <a:lnSpc>
+                <a:spcPct val="120000"/>
+              </a:lnSpc>
+              <a:buNone/>
+            </a:pPr>
+            <a:r>
+              <a:rPr lang="en-US" sz="790" b="1" dirty="0">
                 <a:solidFill>
                   <a:srgbClr val="1A73E8"/>
                 </a:solidFill>
@@ -12767,12 +12765,12 @@
             </a:r>
             <a:pPr indent="0" marL="0">
               <a:lnSpc>
-                <a:spcPct val="118000"/>
-              </a:lnSpc>
-              <a:buNone/>
-            </a:pPr>
-            <a:r>
-              <a:rPr lang="en-US" sz="780" dirty="0">
+                <a:spcPct val="120000"/>
+              </a:lnSpc>
+              <a:buNone/>
+            </a:pPr>
+            <a:r>
+              <a:rPr lang="en-US" sz="770" dirty="0">
                 <a:solidFill>
                   <a:srgbClr val="3C4043"/>
                 </a:solidFill>
@@ -12780,17 +12778,19 @@
                 <a:ea typeface="Arial" pitchFamily="34" charset="-122"/>
                 <a:cs typeface="Arial" pitchFamily="34" charset="-120"/>
               </a:rPr>
-              <a:t>Read the canonical Google Cloud Architecture Center reference architecture.
-</a:t>
-            </a:r>
-            <a:pPr indent="0" marL="0">
-              <a:lnSpc>
-                <a:spcPct val="118000"/>
-              </a:lnSpc>
-              <a:buNone/>
-            </a:pPr>
-            <a:r>
-              <a:rPr lang="en-US" sz="800" b="1" dirty="0">
+              <a:t>Read the canonical Google Cloud Architecture Center reference architecture.</a:t>
+            </a:r>
+            <a:endParaRPr lang="en-US" sz="790" dirty="0"/>
+          </a:p>
+          <a:p>
+            <a:pPr indent="0" marL="0">
+              <a:lnSpc>
+                <a:spcPct val="120000"/>
+              </a:lnSpc>
+              <a:buNone/>
+            </a:pPr>
+            <a:r>
+              <a:rPr lang="en-US" sz="790" b="1" dirty="0">
                 <a:solidFill>
                   <a:srgbClr val="1A73E8"/>
                 </a:solidFill>
@@ -12802,12 +12802,12 @@
             </a:r>
             <a:pPr indent="0" marL="0">
               <a:lnSpc>
-                <a:spcPct val="118000"/>
-              </a:lnSpc>
-              <a:buNone/>
-            </a:pPr>
-            <a:r>
-              <a:rPr lang="en-US" sz="780" dirty="0">
+                <a:spcPct val="120000"/>
+              </a:lnSpc>
+              <a:buNone/>
+            </a:pPr>
+            <a:r>
+              <a:rPr lang="en-US" sz="770" dirty="0">
                 <a:solidFill>
                   <a:srgbClr val="3C4043"/>
                 </a:solidFill>
@@ -12815,17 +12815,19 @@
                 <a:ea typeface="Arial" pitchFamily="34" charset="-122"/>
                 <a:cs typeface="Arial" pitchFamily="34" charset="-120"/>
               </a:rPr>
-              <a:t>Build hierarchical multi-agent systems, deterministic callbacks, and MCP toolsets.
-</a:t>
-            </a:r>
-            <a:pPr indent="0" marL="0">
-              <a:lnSpc>
-                <a:spcPct val="118000"/>
-              </a:lnSpc>
-              <a:buNone/>
-            </a:pPr>
-            <a:r>
-              <a:rPr lang="en-US" sz="800" b="1" dirty="0">
+              <a:t>Build hierarchical multi-agent systems, deterministic callbacks, and MCP toolsets.</a:t>
+            </a:r>
+            <a:endParaRPr lang="en-US" sz="790" dirty="0"/>
+          </a:p>
+          <a:p>
+            <a:pPr indent="0" marL="0">
+              <a:lnSpc>
+                <a:spcPct val="120000"/>
+              </a:lnSpc>
+              <a:buNone/>
+            </a:pPr>
+            <a:r>
+              <a:rPr lang="en-US" sz="790" b="1" dirty="0">
                 <a:solidFill>
                   <a:srgbClr val="1A73E8"/>
                 </a:solidFill>
@@ -12837,12 +12839,12 @@
             </a:r>
             <a:pPr indent="0" marL="0">
               <a:lnSpc>
-                <a:spcPct val="118000"/>
-              </a:lnSpc>
-              <a:buNone/>
-            </a:pPr>
-            <a:r>
-              <a:rPr lang="en-US" sz="780" dirty="0">
+                <a:spcPct val="120000"/>
+              </a:lnSpc>
+              <a:buNone/>
+            </a:pPr>
+            <a:r>
+              <a:rPr lang="en-US" sz="770" dirty="0">
                 <a:solidFill>
                   <a:srgbClr val="3C4043"/>
                 </a:solidFill>
@@ -12850,17 +12852,19 @@
                 <a:ea typeface="Arial" pitchFamily="34" charset="-122"/>
                 <a:cs typeface="Arial" pitchFamily="34" charset="-120"/>
               </a:rPr>
-              <a:t>Explore managed runtime deployment, Sessions, Memory Bank, and Context Caching.
-</a:t>
-            </a:r>
-            <a:pPr indent="0" marL="0">
-              <a:lnSpc>
-                <a:spcPct val="118000"/>
-              </a:lnSpc>
-              <a:buNone/>
-            </a:pPr>
-            <a:r>
-              <a:rPr lang="en-US" sz="800" b="1" dirty="0">
+              <a:t>Explore managed runtime deployment, Sessions, Memory Bank, and Context Caching.</a:t>
+            </a:r>
+            <a:endParaRPr lang="en-US" sz="790" dirty="0"/>
+          </a:p>
+          <a:p>
+            <a:pPr indent="0" marL="0">
+              <a:lnSpc>
+                <a:spcPct val="120000"/>
+              </a:lnSpc>
+              <a:buNone/>
+            </a:pPr>
+            <a:r>
+              <a:rPr lang="en-US" sz="790" b="1" dirty="0">
                 <a:solidFill>
                   <a:srgbClr val="1A73E8"/>
                 </a:solidFill>
@@ -12872,12 +12876,12 @@
             </a:r>
             <a:pPr indent="0" marL="0">
               <a:lnSpc>
-                <a:spcPct val="118000"/>
-              </a:lnSpc>
-              <a:buNone/>
-            </a:pPr>
-            <a:r>
-              <a:rPr lang="en-US" sz="780" dirty="0">
+                <a:spcPct val="120000"/>
+              </a:lnSpc>
+              <a:buNone/>
+            </a:pPr>
+            <a:r>
+              <a:rPr lang="en-US" sz="770" dirty="0">
                 <a:solidFill>
                   <a:srgbClr val="3C4043"/>
                 </a:solidFill>
@@ -12887,7 +12891,7 @@
               </a:rPr>
               <a:t>Review best practices for security, reliability, operational efficiency, and cost optimization.</a:t>
             </a:r>
-            <a:endParaRPr lang="en-US" sz="800" dirty="0"/>
+            <a:endParaRPr lang="en-US" sz="790" dirty="0"/>
           </a:p>
         </p:txBody>
       </p:sp>
@@ -12971,12 +12975,12 @@
           <a:ln/>
         </p:spPr>
         <p:txBody>
-          <a:bodyPr wrap="square" rtlCol="0" anchor="t"/>
-          <a:lstStyle/>
-          <a:p>
-            <a:pPr indent="0" marL="0">
-              <a:lnSpc>
-                <a:spcPct val="122000"/>
+          <a:bodyPr wrap="square" lIns="0" tIns="0" rIns="0" bIns="0" rtlCol="0" anchor="t"/>
+          <a:lstStyle/>
+          <a:p>
+            <a:pPr indent="0" marL="0">
+              <a:lnSpc>
+                <a:spcPct val="124000"/>
               </a:lnSpc>
               <a:buNone/>
             </a:pPr>
@@ -12989,17 +12993,19 @@
                 <a:ea typeface="Arial" pitchFamily="34" charset="-122"/>
                 <a:cs typeface="Arial" pitchFamily="34" charset="-120"/>
               </a:rPr>
-              <a:t>Except as otherwise noted, the content of this page is licensed under the Creative Commons Attribution 4.0 License, and code samples are licensed under the Apache 2.0 License.
-</a:t>
-            </a:r>
-            <a:pPr indent="0" marL="0">
-              <a:lnSpc>
-                <a:spcPct val="122000"/>
-              </a:lnSpc>
-              <a:buNone/>
-            </a:pPr>
-            <a:r>
-              <a:rPr lang="en-US" sz="820" b="1" dirty="0">
+              <a:t>Except as otherwise noted, the content of this page is licensed under the Creative Commons Attribution 4.0 License, and code samples are licensed under the Apache 2.0 License.</a:t>
+            </a:r>
+            <a:endParaRPr lang="en-US" sz="780" dirty="0"/>
+          </a:p>
+          <a:p>
+            <a:pPr indent="0" marL="0">
+              <a:lnSpc>
+                <a:spcPct val="124000"/>
+              </a:lnSpc>
+              <a:buNone/>
+            </a:pPr>
+            <a:r>
+              <a:rPr lang="en-US" sz="810" b="1" dirty="0">
                 <a:solidFill>
                   <a:srgbClr val="202124"/>
                 </a:solidFill>
@@ -13011,12 +13017,12 @@
             </a:r>
             <a:pPr indent="0" marL="0">
               <a:lnSpc>
-                <a:spcPct val="122000"/>
-              </a:lnSpc>
-              <a:buNone/>
-            </a:pPr>
-            <a:r>
-              <a:rPr lang="en-US" sz="820" dirty="0">
+                <a:spcPct val="124000"/>
+              </a:lnSpc>
+              <a:buNone/>
+            </a:pPr>
+            <a:r>
+              <a:rPr lang="en-US" sz="810" dirty="0">
                 <a:solidFill>
                   <a:srgbClr val="3C4043"/>
                 </a:solidFill>
@@ -13024,17 +13030,19 @@
                 <a:ea typeface="Arial" pitchFamily="34" charset="-122"/>
                 <a:cs typeface="Arial" pitchFamily="34" charset="-120"/>
               </a:rPr>
-              <a:t>Principal AI Architect • Cloud Solutions Architecture • Enterprise AI Field Engineering
-</a:t>
-            </a:r>
-            <a:pPr indent="0" marL="0">
-              <a:lnSpc>
-                <a:spcPct val="122000"/>
-              </a:lnSpc>
-              <a:buNone/>
-            </a:pPr>
-            <a:r>
-              <a:rPr lang="en-US" sz="820" b="1" dirty="0">
+              <a:t>Principal AI Architect • Cloud Solutions Architecture • Enterprise AI Field Engineering</a:t>
+            </a:r>
+            <a:endParaRPr lang="en-US" sz="780" dirty="0"/>
+          </a:p>
+          <a:p>
+            <a:pPr indent="0" marL="0">
+              <a:lnSpc>
+                <a:spcPct val="124000"/>
+              </a:lnSpc>
+              <a:buNone/>
+            </a:pPr>
+            <a:r>
+              <a:rPr lang="en-US" sz="810" b="1" dirty="0">
                 <a:solidFill>
                   <a:srgbClr val="202124"/>
                 </a:solidFill>
@@ -13046,12 +13054,12 @@
             </a:r>
             <a:pPr indent="0" marL="0">
               <a:lnSpc>
-                <a:spcPct val="122000"/>
-              </a:lnSpc>
-              <a:buNone/>
-            </a:pPr>
-            <a:r>
-              <a:rPr lang="en-US" sz="820" dirty="0">
+                <a:spcPct val="124000"/>
+              </a:lnSpc>
+              <a:buNone/>
+            </a:pPr>
+            <a:r>
+              <a:rPr lang="en-US" sz="810" dirty="0">
                 <a:solidFill>
                   <a:srgbClr val="3C4043"/>
                 </a:solidFill>
@@ -13059,12 +13067,14 @@
                 <a:ea typeface="Arial" pitchFamily="34" charset="-122"/>
                 <a:cs typeface="Arial" pitchFamily="34" charset="-120"/>
               </a:rPr>
-              <a:t>Principal AI Architect &amp; Field Deployment Engineering • Google Cloud Architecture Center Engineering Team
-</a:t>
-            </a:r>
-            <a:pPr indent="0" marL="0">
-              <a:lnSpc>
-                <a:spcPct val="122000"/>
+              <a:t>Principal AI Architect &amp; Field Deployment Engineering • Google Cloud Architecture Center Engineering Team</a:t>
+            </a:r>
+            <a:endParaRPr lang="en-US" sz="780" dirty="0"/>
+          </a:p>
+          <a:p>
+            <a:pPr indent="0" marL="0">
+              <a:lnSpc>
+                <a:spcPct val="124000"/>
               </a:lnSpc>
               <a:buNone/>
             </a:pPr>
